--- a/산출물/통합반/이론/08회차/통합반_08일차.pptx
+++ b/산출물/통합반/이론/08회차/통합반_08일차.pptx
@@ -3852,7 +3852,7 @@
           <a:lstStyle/>
           <a:p>
             <a:r>
-              <a:t>그 겹겹의 장치가 실제로 어떻게 맞물리는지, 복습하면서 확인해 보겠습니다. 이번 회차에 배운 흐름을 「거절하면 설비 명령이 없다」는 금지 조건 한 줄에 대어 볼 거예요. 표의 다섯 줄은 이 한 줄이 놓이는 자리와, 그 자리에서 어떤 모양이 되는지를 보여 줍니다. 먼저 위에서부터 같은 한 줄이 줄마다 어떤 모양이 됐는지 대어 보고, 넷째 줄 회귀와 다섯째 줄 실행 중 장치가 각각 언제 작동하는지 가려 보세요. 위의 세 줄부터 볼게요. 명세에서는 금지 조건과 수용 기준의 문장입니다. 구현하기 전에 정하죠. 시나리오로 오면 Then이 됩니다. 설비 명령 0건, 업무 처리 0건, 거절로 닫힌다. 실행 결과로 가릴 수 있는 사실로 바뀌었죠. 시험에서는 단언이 돼요. 명령 번호가 없고 업무 처리 목록이 비어 있는지를, 시험을 돌릴 때마다 확인합니다. 넷째 줄 회귀는 바꿀 때마다 작동합니다. 긴급 조건을 더한 뒤에 거절 시나리오를 다시 돌려서, 변경 때문에 거절의 행동이 달라지지 않았는지 찾죠. 다섯째 줄은 실행 중이에요. 가드레일 검사, 그리고 담당자의 승인과 거절은 추천안이 나올 때마다 작동합니다. 지금 이 한 건이 잘못 실행되는 걸 막는 거예요. 고른 답이 이렇게 갈렸다면 맞게 가린 겁니다. 같은 한 줄을 서로 다른 때에 지키는 두 장치인 거죠.</a:t>
+              <a:t>그 겹겹의 장치가 실제로 어떻게 맞물리는지, 복습하면서 확인해 보겠습니다. 이번 회차에 배운 흐름을 「거절하면 설비 명령이 없다」는 금지 조건 한 줄에 대어 볼 거예요. 위의 네 칸을 왼쪽부터 읽으면 이 한 줄이 명세에서 시나리오, 시험과 회귀로 이어집니다. 아래 띠는 추천안이 나올 때마다 작동하는 실행 중 장치입니다. 회귀와 실행 중 장치가 각각 언제 작동하는지 가려 보세요. 위의 첫 세 칸부터 볼게요. 명세에서는 금지 조건과 수용 기준의 문장입니다. 구현하기 전에 정하죠. 시나리오로 오면 Then이 됩니다. 설비 명령 0건, 업무 처리 0건, 거절로 닫힌다. 실행 결과로 가릴 수 있는 사실로 바뀌었죠. 시험에서는 단언이 돼요. 명령 번호가 없고 업무 처리 목록이 비어 있는지를, 시험을 돌릴 때마다 확인합니다. 오른쪽 끝의 회귀는 바꿀 때마다 작동합니다. 긴급 조건을 더한 뒤에 거절 시나리오를 다시 돌려서, 변경 때문에 거절의 행동이 달라지지 않았는지 찾죠. 아래 띠는 실행 중 장치예요. 가드레일 검사, 그리고 담당자의 승인과 거절은 추천안이 나올 때마다 작동합니다. 지금 이 한 건이 잘못 실행되는 걸 막는 거예요. 고른 답이 이렇게 갈렸다면 맞게 가린 겁니다. 같은 한 줄을 서로 다른 때에 지키는 두 장치인 거죠.</a:t>
             </a:r>
           </a:p>
         </p:txBody>
@@ -47713,7 +47713,7 @@
                 <a:ea typeface="맑은 고딕"/>
                 <a:cs typeface="맑은 고딕"/>
               </a:rPr>
-              <a:t>거절의 금지 조건 한 줄은 명세에서 회귀까지 모양을 바꿔 확인되고, 실행 중에는 승인 단계가 지킨다.</a:t>
+              <a:t>거절의 금지 조건은 변경 검증의 네 단계를 잇고, 실행 중에는 승인 단계가 지킨다.</a:t>
             </a:r>
           </a:p>
         </p:txBody>
@@ -47794,16 +47794,182 @@
         </p:nvSpPr>
         <p:spPr>
           <a:xfrm>
-            <a:off x="548640" y="1627632"/>
-            <a:ext cx="11094415" cy="347472"/>
+            <a:off x="594360" y="1874519"/>
+            <a:ext cx="2514600" cy="2788920"/>
           </a:xfrm>
           <a:prstGeom prst="roundRect">
             <a:avLst>
-              <a:gd name="adj" fmla="val 12000"/>
+              <a:gd name="adj" fmla="val 6000"/>
             </a:avLst>
           </a:prstGeom>
           <a:solidFill>
-            <a:srgbClr val="13294B"/>
+            <a:srgbClr val="FFFFFF"/>
+          </a:solidFill>
+          <a:ln w="15875">
+            <a:solidFill>
+              <a:srgbClr val="D3D9E1"/>
+            </a:solidFill>
+          </a:ln>
+        </p:spPr>
+        <p:txBody>
+          <a:bodyPr rtlCol="0" anchor="ctr"/>
+          <a:lstStyle/>
+          <a:p>
+            <a:pPr algn="ctr"/>
+          </a:p>
+        </p:txBody>
+      </p:sp>
+      <p:sp>
+        <p:nvSpPr>
+          <p:cNvPr id="7" name="TextBox 6"/>
+          <p:cNvSpPr txBox="1"/>
+          <p:nvPr/>
+        </p:nvSpPr>
+        <p:spPr>
+          <a:xfrm>
+            <a:off x="758952" y="2075688"/>
+            <a:ext cx="2185416" cy="411480"/>
+          </a:xfrm>
+          <a:prstGeom prst="rect">
+            <a:avLst/>
+          </a:prstGeom>
+          <a:noFill/>
+        </p:spPr>
+        <p:txBody>
+          <a:bodyPr wrap="square" anchor="t"/>
+          <a:lstStyle/>
+          <a:p>
+            <a:pPr algn="l" eaLnBrk="0">
+              <a:lnSpc>
+                <a:spcPct val="110000"/>
+              </a:lnSpc>
+            </a:pPr>
+            <a:r>
+              <a:rPr sz="2100" b="1">
+                <a:solidFill>
+                  <a:srgbClr val="13294B"/>
+                </a:solidFill>
+                <a:latin typeface="맑은 고딕"/>
+                <a:ea typeface="맑은 고딕"/>
+                <a:cs typeface="맑은 고딕"/>
+              </a:rPr>
+              <a:t>명세</a:t>
+            </a:r>
+          </a:p>
+        </p:txBody>
+      </p:sp>
+      <p:sp>
+        <p:nvSpPr>
+          <p:cNvPr id="8" name="TextBox 7"/>
+          <p:cNvSpPr txBox="1"/>
+          <p:nvPr/>
+        </p:nvSpPr>
+        <p:spPr>
+          <a:xfrm>
+            <a:off x="758952" y="2743200"/>
+            <a:ext cx="2185416" cy="1234440"/>
+          </a:xfrm>
+          <a:prstGeom prst="rect">
+            <a:avLst/>
+          </a:prstGeom>
+          <a:noFill/>
+        </p:spPr>
+        <p:txBody>
+          <a:bodyPr wrap="square" anchor="t"/>
+          <a:lstStyle/>
+          <a:p>
+            <a:pPr algn="l" eaLnBrk="0">
+              <a:lnSpc>
+                <a:spcPct val="110000"/>
+              </a:lnSpc>
+            </a:pPr>
+            <a:r>
+              <a:rPr sz="1500" b="0">
+                <a:solidFill>
+                  <a:srgbClr val="13294B"/>
+                </a:solidFill>
+                <a:latin typeface="맑은 고딕"/>
+                <a:ea typeface="맑은 고딕"/>
+                <a:cs typeface="맑은 고딕"/>
+              </a:rPr>
+              <a:t>거절하면 설비 명령과</a:t>
+            </a:r>
+          </a:p>
+          <a:p>
+            <a:pPr algn="l" eaLnBrk="0">
+              <a:lnSpc>
+                <a:spcPct val="110000"/>
+              </a:lnSpc>
+            </a:pPr>
+            <a:r>
+              <a:rPr sz="1500" b="0">
+                <a:solidFill>
+                  <a:srgbClr val="13294B"/>
+                </a:solidFill>
+                <a:latin typeface="맑은 고딕"/>
+                <a:ea typeface="맑은 고딕"/>
+                <a:cs typeface="맑은 고딕"/>
+              </a:rPr>
+              <a:t>업무 처리가 없다</a:t>
+            </a:r>
+          </a:p>
+        </p:txBody>
+      </p:sp>
+      <p:sp>
+        <p:nvSpPr>
+          <p:cNvPr id="9" name="TextBox 8"/>
+          <p:cNvSpPr txBox="1"/>
+          <p:nvPr/>
+        </p:nvSpPr>
+        <p:spPr>
+          <a:xfrm>
+            <a:off x="758952" y="4133087"/>
+            <a:ext cx="2185416" cy="329184"/>
+          </a:xfrm>
+          <a:prstGeom prst="rect">
+            <a:avLst/>
+          </a:prstGeom>
+          <a:noFill/>
+        </p:spPr>
+        <p:txBody>
+          <a:bodyPr wrap="square" anchor="t"/>
+          <a:lstStyle/>
+          <a:p>
+            <a:pPr algn="l" eaLnBrk="0">
+              <a:lnSpc>
+                <a:spcPct val="110000"/>
+              </a:lnSpc>
+            </a:pPr>
+            <a:r>
+              <a:rPr sz="1400" b="1">
+                <a:solidFill>
+                  <a:srgbClr val="1A6FC4"/>
+                </a:solidFill>
+                <a:latin typeface="맑은 고딕"/>
+                <a:ea typeface="맑은 고딕"/>
+                <a:cs typeface="맑은 고딕"/>
+              </a:rPr>
+              <a:t>구현 전에 정한다</a:t>
+            </a:r>
+          </a:p>
+        </p:txBody>
+      </p:sp>
+      <p:sp>
+        <p:nvSpPr>
+          <p:cNvPr id="10" name="Right Arrow 9"/>
+          <p:cNvSpPr/>
+          <p:nvPr/>
+        </p:nvSpPr>
+        <p:spPr>
+          <a:xfrm>
+            <a:off x="3172968" y="3154680"/>
+            <a:ext cx="201168" cy="164592"/>
+          </a:xfrm>
+          <a:prstGeom prst="rightArrow">
+            <a:avLst/>
+          </a:prstGeom>
+          <a:solidFill>
+            <a:srgbClr val="1A6FC4"/>
           </a:solidFill>
           <a:ln>
             <a:noFill/>
@@ -47819,139 +47985,206 @@
       </p:sp>
       <p:sp>
         <p:nvSpPr>
-          <p:cNvPr id="7" name="TextBox 6"/>
-          <p:cNvSpPr txBox="1"/>
-          <p:nvPr/>
-        </p:nvSpPr>
-        <p:spPr>
-          <a:xfrm>
-            <a:off x="685800" y="1627632"/>
-            <a:ext cx="2514600" cy="347472"/>
-          </a:xfrm>
-          <a:prstGeom prst="rect">
-            <a:avLst/>
-          </a:prstGeom>
-          <a:noFill/>
-        </p:spPr>
-        <p:txBody>
-          <a:bodyPr wrap="square" anchor="ctr"/>
-          <a:lstStyle/>
-          <a:p>
-            <a:pPr algn="l" eaLnBrk="0">
-              <a:lnSpc>
-                <a:spcPct val="110000"/>
-              </a:lnSpc>
-            </a:pPr>
-            <a:r>
-              <a:rPr sz="1300" b="1">
-                <a:solidFill>
-                  <a:srgbClr val="FFFFFF"/>
-                </a:solidFill>
-                <a:latin typeface="맑은 고딕"/>
-                <a:ea typeface="맑은 고딕"/>
-                <a:cs typeface="맑은 고딕"/>
-              </a:rPr>
-              <a:t>자리</a:t>
-            </a:r>
-          </a:p>
-        </p:txBody>
-      </p:sp>
-      <p:sp>
-        <p:nvSpPr>
-          <p:cNvPr id="8" name="TextBox 7"/>
-          <p:cNvSpPr txBox="1"/>
-          <p:nvPr/>
-        </p:nvSpPr>
-        <p:spPr>
-          <a:xfrm>
-            <a:off x="3200400" y="1627632"/>
-            <a:ext cx="6248095" cy="347472"/>
-          </a:xfrm>
-          <a:prstGeom prst="rect">
-            <a:avLst/>
-          </a:prstGeom>
-          <a:noFill/>
-        </p:spPr>
-        <p:txBody>
-          <a:bodyPr wrap="square" anchor="ctr"/>
-          <a:lstStyle/>
-          <a:p>
-            <a:pPr algn="l" eaLnBrk="0">
-              <a:lnSpc>
-                <a:spcPct val="110000"/>
-              </a:lnSpc>
-            </a:pPr>
-            <a:r>
-              <a:rPr sz="1300" b="1">
-                <a:solidFill>
-                  <a:srgbClr val="FFFFFF"/>
-                </a:solidFill>
-                <a:latin typeface="맑은 고딕"/>
-                <a:ea typeface="맑은 고딕"/>
-                <a:cs typeface="맑은 고딕"/>
-              </a:rPr>
-              <a:t>그 한 줄의 모양</a:t>
-            </a:r>
-          </a:p>
-        </p:txBody>
-      </p:sp>
-      <p:sp>
-        <p:nvSpPr>
-          <p:cNvPr id="9" name="TextBox 8"/>
-          <p:cNvSpPr txBox="1"/>
-          <p:nvPr/>
-        </p:nvSpPr>
-        <p:spPr>
-          <a:xfrm>
-            <a:off x="9448495" y="1627632"/>
-            <a:ext cx="2194560" cy="347472"/>
-          </a:xfrm>
-          <a:prstGeom prst="rect">
-            <a:avLst/>
-          </a:prstGeom>
-          <a:noFill/>
-        </p:spPr>
-        <p:txBody>
-          <a:bodyPr wrap="square" anchor="ctr"/>
-          <a:lstStyle/>
-          <a:p>
-            <a:pPr algn="l" eaLnBrk="0">
-              <a:lnSpc>
-                <a:spcPct val="110000"/>
-              </a:lnSpc>
-            </a:pPr>
-            <a:r>
-              <a:rPr sz="1300" b="1">
-                <a:solidFill>
-                  <a:srgbClr val="FFFFFF"/>
-                </a:solidFill>
-                <a:latin typeface="맑은 고딕"/>
-                <a:ea typeface="맑은 고딕"/>
-                <a:cs typeface="맑은 고딕"/>
-              </a:rPr>
-              <a:t>확인하는 때</a:t>
-            </a:r>
-          </a:p>
-        </p:txBody>
-      </p:sp>
-      <p:sp>
-        <p:nvSpPr>
-          <p:cNvPr id="10" name="Rounded Rectangle 9"/>
+          <p:cNvPr id="11" name="Rounded Rectangle 10"/>
           <p:cNvSpPr/>
           <p:nvPr/>
         </p:nvSpPr>
         <p:spPr>
           <a:xfrm>
-            <a:off x="548640" y="2061972"/>
-            <a:ext cx="11094415" cy="801014"/>
+            <a:off x="3429000" y="1874519"/>
+            <a:ext cx="2514600" cy="2788920"/>
           </a:xfrm>
           <a:prstGeom prst="roundRect">
             <a:avLst>
-              <a:gd name="adj" fmla="val 8000"/>
+              <a:gd name="adj" fmla="val 6000"/>
             </a:avLst>
           </a:prstGeom>
           <a:solidFill>
-            <a:srgbClr val="F3F6F9"/>
+            <a:srgbClr val="FFFFFF"/>
+          </a:solidFill>
+          <a:ln w="15875">
+            <a:solidFill>
+              <a:srgbClr val="D3D9E1"/>
+            </a:solidFill>
+          </a:ln>
+        </p:spPr>
+        <p:txBody>
+          <a:bodyPr rtlCol="0" anchor="ctr"/>
+          <a:lstStyle/>
+          <a:p>
+            <a:pPr algn="ctr"/>
+          </a:p>
+        </p:txBody>
+      </p:sp>
+      <p:sp>
+        <p:nvSpPr>
+          <p:cNvPr id="12" name="TextBox 11"/>
+          <p:cNvSpPr txBox="1"/>
+          <p:nvPr/>
+        </p:nvSpPr>
+        <p:spPr>
+          <a:xfrm>
+            <a:off x="3593592" y="2075688"/>
+            <a:ext cx="2185416" cy="411480"/>
+          </a:xfrm>
+          <a:prstGeom prst="rect">
+            <a:avLst/>
+          </a:prstGeom>
+          <a:noFill/>
+        </p:spPr>
+        <p:txBody>
+          <a:bodyPr wrap="square" anchor="t"/>
+          <a:lstStyle/>
+          <a:p>
+            <a:pPr algn="l" eaLnBrk="0">
+              <a:lnSpc>
+                <a:spcPct val="110000"/>
+              </a:lnSpc>
+            </a:pPr>
+            <a:r>
+              <a:rPr sz="2100" b="1">
+                <a:solidFill>
+                  <a:srgbClr val="13294B"/>
+                </a:solidFill>
+                <a:latin typeface="맑은 고딕"/>
+                <a:ea typeface="맑은 고딕"/>
+                <a:cs typeface="맑은 고딕"/>
+              </a:rPr>
+              <a:t>시나리오</a:t>
+            </a:r>
+          </a:p>
+        </p:txBody>
+      </p:sp>
+      <p:sp>
+        <p:nvSpPr>
+          <p:cNvPr id="13" name="TextBox 12"/>
+          <p:cNvSpPr txBox="1"/>
+          <p:nvPr/>
+        </p:nvSpPr>
+        <p:spPr>
+          <a:xfrm>
+            <a:off x="3593592" y="2743200"/>
+            <a:ext cx="2185416" cy="1234440"/>
+          </a:xfrm>
+          <a:prstGeom prst="rect">
+            <a:avLst/>
+          </a:prstGeom>
+          <a:noFill/>
+        </p:spPr>
+        <p:txBody>
+          <a:bodyPr wrap="square" anchor="t"/>
+          <a:lstStyle/>
+          <a:p>
+            <a:pPr algn="l" eaLnBrk="0">
+              <a:lnSpc>
+                <a:spcPct val="110000"/>
+              </a:lnSpc>
+            </a:pPr>
+            <a:r>
+              <a:rPr sz="1500" b="0">
+                <a:solidFill>
+                  <a:srgbClr val="13294B"/>
+                </a:solidFill>
+                <a:latin typeface="맑은 고딕"/>
+                <a:ea typeface="맑은 고딕"/>
+                <a:cs typeface="맑은 고딕"/>
+              </a:rPr>
+              <a:t>Then: 명령·업무 처리</a:t>
+            </a:r>
+          </a:p>
+          <a:p>
+            <a:pPr algn="l" eaLnBrk="0">
+              <a:lnSpc>
+                <a:spcPct val="110000"/>
+              </a:lnSpc>
+            </a:pPr>
+            <a:r>
+              <a:rPr sz="1500" b="0">
+                <a:solidFill>
+                  <a:srgbClr val="13294B"/>
+                </a:solidFill>
+                <a:latin typeface="맑은 고딕"/>
+                <a:ea typeface="맑은 고딕"/>
+                <a:cs typeface="맑은 고딕"/>
+              </a:rPr>
+              <a:t>0건</a:t>
+            </a:r>
+          </a:p>
+          <a:p>
+            <a:pPr algn="l" eaLnBrk="0">
+              <a:lnSpc>
+                <a:spcPct val="110000"/>
+              </a:lnSpc>
+            </a:pPr>
+            <a:r>
+              <a:rPr sz="1500" b="0">
+                <a:solidFill>
+                  <a:srgbClr val="13294B"/>
+                </a:solidFill>
+                <a:latin typeface="맑은 고딕"/>
+                <a:ea typeface="맑은 고딕"/>
+                <a:cs typeface="맑은 고딕"/>
+              </a:rPr>
+              <a:t>거절로 닫힌다</a:t>
+            </a:r>
+          </a:p>
+        </p:txBody>
+      </p:sp>
+      <p:sp>
+        <p:nvSpPr>
+          <p:cNvPr id="14" name="TextBox 13"/>
+          <p:cNvSpPr txBox="1"/>
+          <p:nvPr/>
+        </p:nvSpPr>
+        <p:spPr>
+          <a:xfrm>
+            <a:off x="3593592" y="4133087"/>
+            <a:ext cx="2185416" cy="329184"/>
+          </a:xfrm>
+          <a:prstGeom prst="rect">
+            <a:avLst/>
+          </a:prstGeom>
+          <a:noFill/>
+        </p:spPr>
+        <p:txBody>
+          <a:bodyPr wrap="square" anchor="t"/>
+          <a:lstStyle/>
+          <a:p>
+            <a:pPr algn="l" eaLnBrk="0">
+              <a:lnSpc>
+                <a:spcPct val="110000"/>
+              </a:lnSpc>
+            </a:pPr>
+            <a:r>
+              <a:rPr sz="1400" b="1">
+                <a:solidFill>
+                  <a:srgbClr val="1A6FC4"/>
+                </a:solidFill>
+                <a:latin typeface="맑은 고딕"/>
+                <a:ea typeface="맑은 고딕"/>
+                <a:cs typeface="맑은 고딕"/>
+              </a:rPr>
+              <a:t>실행 결과로 가린다</a:t>
+            </a:r>
+          </a:p>
+        </p:txBody>
+      </p:sp>
+      <p:sp>
+        <p:nvSpPr>
+          <p:cNvPr id="15" name="Right Arrow 14"/>
+          <p:cNvSpPr/>
+          <p:nvPr/>
+        </p:nvSpPr>
+        <p:spPr>
+          <a:xfrm>
+            <a:off x="6007608" y="3154680"/>
+            <a:ext cx="201168" cy="164592"/>
+          </a:xfrm>
+          <a:prstGeom prst="rightArrow">
+            <a:avLst/>
+          </a:prstGeom>
+          <a:solidFill>
+            <a:srgbClr val="1A6FC4"/>
           </a:solidFill>
           <a:ln>
             <a:noFill/>
@@ -47967,157 +48200,206 @@
       </p:sp>
       <p:sp>
         <p:nvSpPr>
-          <p:cNvPr id="11" name="TextBox 10"/>
-          <p:cNvSpPr txBox="1"/>
-          <p:nvPr/>
-        </p:nvSpPr>
-        <p:spPr>
-          <a:xfrm>
-            <a:off x="685800" y="2029968"/>
-            <a:ext cx="2514600" cy="865022"/>
-          </a:xfrm>
-          <a:prstGeom prst="rect">
-            <a:avLst/>
-          </a:prstGeom>
-          <a:noFill/>
-        </p:spPr>
-        <p:txBody>
-          <a:bodyPr wrap="square" anchor="ctr"/>
-          <a:lstStyle/>
-          <a:p>
-            <a:pPr algn="l" eaLnBrk="0">
-              <a:lnSpc>
-                <a:spcPct val="110000"/>
-              </a:lnSpc>
-            </a:pPr>
-            <a:r>
-              <a:rPr sz="1600" b="1">
-                <a:solidFill>
-                  <a:srgbClr val="13294B"/>
-                </a:solidFill>
-                <a:latin typeface="맑은 고딕"/>
-                <a:ea typeface="맑은 고딕"/>
-                <a:cs typeface="맑은 고딕"/>
-              </a:rPr>
-              <a:t>명세</a:t>
-            </a:r>
-          </a:p>
-        </p:txBody>
-      </p:sp>
-      <p:sp>
-        <p:nvSpPr>
-          <p:cNvPr id="12" name="TextBox 11"/>
-          <p:cNvSpPr txBox="1"/>
-          <p:nvPr/>
-        </p:nvSpPr>
-        <p:spPr>
-          <a:xfrm>
-            <a:off x="3200400" y="2029968"/>
-            <a:ext cx="6156655" cy="865022"/>
-          </a:xfrm>
-          <a:prstGeom prst="rect">
-            <a:avLst/>
-          </a:prstGeom>
-          <a:noFill/>
-        </p:spPr>
-        <p:txBody>
-          <a:bodyPr wrap="square" anchor="ctr"/>
-          <a:lstStyle/>
-          <a:p>
-            <a:pPr algn="l" eaLnBrk="0">
-              <a:lnSpc>
-                <a:spcPct val="110000"/>
-              </a:lnSpc>
-            </a:pPr>
-            <a:r>
-              <a:rPr sz="1400" b="0">
-                <a:solidFill>
-                  <a:srgbClr val="1F2A3A"/>
-                </a:solidFill>
-                <a:latin typeface="맑은 고딕"/>
-                <a:ea typeface="맑은 고딕"/>
-                <a:cs typeface="맑은 고딕"/>
-              </a:rPr>
-              <a:t>금지 조건 · 수용 기준: 거절하면 설비 명령과 업무 처리가 없다</a:t>
-            </a:r>
-          </a:p>
-        </p:txBody>
-      </p:sp>
-      <p:sp>
-        <p:nvSpPr>
-          <p:cNvPr id="13" name="TextBox 12"/>
-          <p:cNvSpPr txBox="1"/>
-          <p:nvPr/>
-        </p:nvSpPr>
-        <p:spPr>
-          <a:xfrm>
-            <a:off x="9448495" y="2029968"/>
-            <a:ext cx="2103120" cy="865022"/>
-          </a:xfrm>
-          <a:prstGeom prst="rect">
-            <a:avLst/>
-          </a:prstGeom>
-          <a:noFill/>
-        </p:spPr>
-        <p:txBody>
-          <a:bodyPr wrap="square" anchor="ctr"/>
-          <a:lstStyle/>
-          <a:p>
-            <a:pPr algn="l" eaLnBrk="0">
-              <a:lnSpc>
-                <a:spcPct val="110000"/>
-              </a:lnSpc>
-            </a:pPr>
-            <a:r>
-              <a:rPr sz="1250" b="1">
-                <a:solidFill>
-                  <a:srgbClr val="556175"/>
-                </a:solidFill>
-                <a:latin typeface="맑은 고딕"/>
-                <a:ea typeface="맑은 고딕"/>
-                <a:cs typeface="맑은 고딕"/>
-              </a:rPr>
-              <a:t>구현하기 전에</a:t>
-            </a:r>
-          </a:p>
-          <a:p>
-            <a:pPr algn="l" eaLnBrk="0">
-              <a:lnSpc>
-                <a:spcPct val="110000"/>
-              </a:lnSpc>
-            </a:pPr>
-            <a:r>
-              <a:rPr sz="1250" b="1">
-                <a:solidFill>
-                  <a:srgbClr val="556175"/>
-                </a:solidFill>
-                <a:latin typeface="맑은 고딕"/>
-                <a:ea typeface="맑은 고딕"/>
-                <a:cs typeface="맑은 고딕"/>
-              </a:rPr>
-              <a:t>정한다</a:t>
-            </a:r>
-          </a:p>
-        </p:txBody>
-      </p:sp>
-      <p:sp>
-        <p:nvSpPr>
-          <p:cNvPr id="14" name="Rounded Rectangle 13"/>
+          <p:cNvPr id="16" name="Rounded Rectangle 15"/>
           <p:cNvSpPr/>
           <p:nvPr/>
         </p:nvSpPr>
         <p:spPr>
           <a:xfrm>
-            <a:off x="548640" y="2926994"/>
-            <a:ext cx="11094415" cy="801014"/>
+            <a:off x="6263640" y="1874519"/>
+            <a:ext cx="2514600" cy="2788920"/>
           </a:xfrm>
           <a:prstGeom prst="roundRect">
             <a:avLst>
-              <a:gd name="adj" fmla="val 8000"/>
+              <a:gd name="adj" fmla="val 6000"/>
             </a:avLst>
           </a:prstGeom>
           <a:solidFill>
-            <a:srgbClr val="F3F6F9"/>
+            <a:srgbClr val="FFFFFF"/>
+          </a:solidFill>
+          <a:ln w="15875">
+            <a:solidFill>
+              <a:srgbClr val="D3D9E1"/>
+            </a:solidFill>
+          </a:ln>
+        </p:spPr>
+        <p:txBody>
+          <a:bodyPr rtlCol="0" anchor="ctr"/>
+          <a:lstStyle/>
+          <a:p>
+            <a:pPr algn="ctr"/>
+          </a:p>
+        </p:txBody>
+      </p:sp>
+      <p:sp>
+        <p:nvSpPr>
+          <p:cNvPr id="17" name="TextBox 16"/>
+          <p:cNvSpPr txBox="1"/>
+          <p:nvPr/>
+        </p:nvSpPr>
+        <p:spPr>
+          <a:xfrm>
+            <a:off x="6428232" y="2075688"/>
+            <a:ext cx="2185416" cy="411480"/>
+          </a:xfrm>
+          <a:prstGeom prst="rect">
+            <a:avLst/>
+          </a:prstGeom>
+          <a:noFill/>
+        </p:spPr>
+        <p:txBody>
+          <a:bodyPr wrap="square" anchor="t"/>
+          <a:lstStyle/>
+          <a:p>
+            <a:pPr algn="l" eaLnBrk="0">
+              <a:lnSpc>
+                <a:spcPct val="110000"/>
+              </a:lnSpc>
+            </a:pPr>
+            <a:r>
+              <a:rPr sz="2100" b="1">
+                <a:solidFill>
+                  <a:srgbClr val="13294B"/>
+                </a:solidFill>
+                <a:latin typeface="맑은 고딕"/>
+                <a:ea typeface="맑은 고딕"/>
+                <a:cs typeface="맑은 고딕"/>
+              </a:rPr>
+              <a:t>시험</a:t>
+            </a:r>
+          </a:p>
+        </p:txBody>
+      </p:sp>
+      <p:sp>
+        <p:nvSpPr>
+          <p:cNvPr id="18" name="TextBox 17"/>
+          <p:cNvSpPr txBox="1"/>
+          <p:nvPr/>
+        </p:nvSpPr>
+        <p:spPr>
+          <a:xfrm>
+            <a:off x="6428232" y="2743200"/>
+            <a:ext cx="2185416" cy="1234440"/>
+          </a:xfrm>
+          <a:prstGeom prst="rect">
+            <a:avLst/>
+          </a:prstGeom>
+          <a:noFill/>
+        </p:spPr>
+        <p:txBody>
+          <a:bodyPr wrap="square" anchor="t"/>
+          <a:lstStyle/>
+          <a:p>
+            <a:pPr algn="l" eaLnBrk="0">
+              <a:lnSpc>
+                <a:spcPct val="110000"/>
+              </a:lnSpc>
+            </a:pPr>
+            <a:r>
+              <a:rPr sz="1500" b="0">
+                <a:solidFill>
+                  <a:srgbClr val="13294B"/>
+                </a:solidFill>
+                <a:latin typeface="맑은 고딕"/>
+                <a:ea typeface="맑은 고딕"/>
+                <a:cs typeface="맑은 고딕"/>
+              </a:rPr>
+              <a:t>단언: 명령 번호 없음</a:t>
+            </a:r>
+          </a:p>
+          <a:p>
+            <a:pPr algn="l" eaLnBrk="0">
+              <a:lnSpc>
+                <a:spcPct val="110000"/>
+              </a:lnSpc>
+            </a:pPr>
+            <a:r>
+              <a:rPr sz="1500" b="0">
+                <a:solidFill>
+                  <a:srgbClr val="13294B"/>
+                </a:solidFill>
+                <a:latin typeface="맑은 고딕"/>
+                <a:ea typeface="맑은 고딕"/>
+                <a:cs typeface="맑은 고딕"/>
+              </a:rPr>
+              <a:t>업무 처리 목록이</a:t>
+            </a:r>
+          </a:p>
+          <a:p>
+            <a:pPr algn="l" eaLnBrk="0">
+              <a:lnSpc>
+                <a:spcPct val="110000"/>
+              </a:lnSpc>
+            </a:pPr>
+            <a:r>
+              <a:rPr sz="1500" b="0">
+                <a:solidFill>
+                  <a:srgbClr val="13294B"/>
+                </a:solidFill>
+                <a:latin typeface="맑은 고딕"/>
+                <a:ea typeface="맑은 고딕"/>
+                <a:cs typeface="맑은 고딕"/>
+              </a:rPr>
+              <a:t>비어 있음</a:t>
+            </a:r>
+          </a:p>
+        </p:txBody>
+      </p:sp>
+      <p:sp>
+        <p:nvSpPr>
+          <p:cNvPr id="19" name="TextBox 18"/>
+          <p:cNvSpPr txBox="1"/>
+          <p:nvPr/>
+        </p:nvSpPr>
+        <p:spPr>
+          <a:xfrm>
+            <a:off x="6428232" y="4133087"/>
+            <a:ext cx="2185416" cy="329184"/>
+          </a:xfrm>
+          <a:prstGeom prst="rect">
+            <a:avLst/>
+          </a:prstGeom>
+          <a:noFill/>
+        </p:spPr>
+        <p:txBody>
+          <a:bodyPr wrap="square" anchor="t"/>
+          <a:lstStyle/>
+          <a:p>
+            <a:pPr algn="l" eaLnBrk="0">
+              <a:lnSpc>
+                <a:spcPct val="110000"/>
+              </a:lnSpc>
+            </a:pPr>
+            <a:r>
+              <a:rPr sz="1400" b="1">
+                <a:solidFill>
+                  <a:srgbClr val="1A6FC4"/>
+                </a:solidFill>
+                <a:latin typeface="맑은 고딕"/>
+                <a:ea typeface="맑은 고딕"/>
+                <a:cs typeface="맑은 고딕"/>
+              </a:rPr>
+              <a:t>시험할 때마다</a:t>
+            </a:r>
+          </a:p>
+        </p:txBody>
+      </p:sp>
+      <p:sp>
+        <p:nvSpPr>
+          <p:cNvPr id="20" name="Right Arrow 19"/>
+          <p:cNvSpPr/>
+          <p:nvPr/>
+        </p:nvSpPr>
+        <p:spPr>
+          <a:xfrm>
+            <a:off x="8842248" y="3154680"/>
+            <a:ext cx="201168" cy="164592"/>
+          </a:xfrm>
+          <a:prstGeom prst="rightArrow">
+            <a:avLst/>
+          </a:prstGeom>
+          <a:solidFill>
+            <a:srgbClr val="1A6FC4"/>
           </a:solidFill>
           <a:ln>
             <a:noFill/>
@@ -48133,160 +48415,27 @@
       </p:sp>
       <p:sp>
         <p:nvSpPr>
-          <p:cNvPr id="15" name="TextBox 14"/>
-          <p:cNvSpPr txBox="1"/>
-          <p:nvPr/>
-        </p:nvSpPr>
-        <p:spPr>
-          <a:xfrm>
-            <a:off x="685800" y="2894990"/>
-            <a:ext cx="2514600" cy="865022"/>
-          </a:xfrm>
-          <a:prstGeom prst="rect">
-            <a:avLst/>
-          </a:prstGeom>
-          <a:noFill/>
-        </p:spPr>
-        <p:txBody>
-          <a:bodyPr wrap="square" anchor="ctr"/>
-          <a:lstStyle/>
-          <a:p>
-            <a:pPr algn="l" eaLnBrk="0">
-              <a:lnSpc>
-                <a:spcPct val="110000"/>
-              </a:lnSpc>
-            </a:pPr>
-            <a:r>
-              <a:rPr sz="1600" b="1">
-                <a:solidFill>
-                  <a:srgbClr val="13294B"/>
-                </a:solidFill>
-                <a:latin typeface="맑은 고딕"/>
-                <a:ea typeface="맑은 고딕"/>
-                <a:cs typeface="맑은 고딕"/>
-              </a:rPr>
-              <a:t>시나리오</a:t>
-            </a:r>
-          </a:p>
-        </p:txBody>
-      </p:sp>
-      <p:sp>
-        <p:nvSpPr>
-          <p:cNvPr id="16" name="TextBox 15"/>
-          <p:cNvSpPr txBox="1"/>
-          <p:nvPr/>
-        </p:nvSpPr>
-        <p:spPr>
-          <a:xfrm>
-            <a:off x="3200400" y="2894990"/>
-            <a:ext cx="6156655" cy="865022"/>
-          </a:xfrm>
-          <a:prstGeom prst="rect">
-            <a:avLst/>
-          </a:prstGeom>
-          <a:noFill/>
-        </p:spPr>
-        <p:txBody>
-          <a:bodyPr wrap="square" anchor="ctr"/>
-          <a:lstStyle/>
-          <a:p>
-            <a:pPr algn="l" eaLnBrk="0">
-              <a:lnSpc>
-                <a:spcPct val="110000"/>
-              </a:lnSpc>
-            </a:pPr>
-            <a:r>
-              <a:rPr sz="1400" b="0">
-                <a:solidFill>
-                  <a:srgbClr val="1F2A3A"/>
-                </a:solidFill>
-                <a:latin typeface="맑은 고딕"/>
-                <a:ea typeface="맑은 고딕"/>
-                <a:cs typeface="맑은 고딕"/>
-              </a:rPr>
-              <a:t>Then: 설비 명령 0건, 업무 처리 0건, 거절로 닫힌다</a:t>
-            </a:r>
-          </a:p>
-        </p:txBody>
-      </p:sp>
-      <p:sp>
-        <p:nvSpPr>
-          <p:cNvPr id="17" name="TextBox 16"/>
-          <p:cNvSpPr txBox="1"/>
-          <p:nvPr/>
-        </p:nvSpPr>
-        <p:spPr>
-          <a:xfrm>
-            <a:off x="9448495" y="2894990"/>
-            <a:ext cx="2103120" cy="865022"/>
-          </a:xfrm>
-          <a:prstGeom prst="rect">
-            <a:avLst/>
-          </a:prstGeom>
-          <a:noFill/>
-        </p:spPr>
-        <p:txBody>
-          <a:bodyPr wrap="square" anchor="ctr"/>
-          <a:lstStyle/>
-          <a:p>
-            <a:pPr algn="l" eaLnBrk="0">
-              <a:lnSpc>
-                <a:spcPct val="110000"/>
-              </a:lnSpc>
-            </a:pPr>
-            <a:r>
-              <a:rPr sz="1250" b="1">
-                <a:solidFill>
-                  <a:srgbClr val="556175"/>
-                </a:solidFill>
-                <a:latin typeface="맑은 고딕"/>
-                <a:ea typeface="맑은 고딕"/>
-                <a:cs typeface="맑은 고딕"/>
-              </a:rPr>
-              <a:t>실행 결과로</a:t>
-            </a:r>
-          </a:p>
-          <a:p>
-            <a:pPr algn="l" eaLnBrk="0">
-              <a:lnSpc>
-                <a:spcPct val="110000"/>
-              </a:lnSpc>
-            </a:pPr>
-            <a:r>
-              <a:rPr sz="1250" b="1">
-                <a:solidFill>
-                  <a:srgbClr val="556175"/>
-                </a:solidFill>
-                <a:latin typeface="맑은 고딕"/>
-                <a:ea typeface="맑은 고딕"/>
-                <a:cs typeface="맑은 고딕"/>
-              </a:rPr>
-              <a:t>가린다</a:t>
-            </a:r>
-          </a:p>
-        </p:txBody>
-      </p:sp>
-      <p:sp>
-        <p:nvSpPr>
-          <p:cNvPr id="18" name="Rounded Rectangle 17"/>
+          <p:cNvPr id="21" name="Rounded Rectangle 20"/>
           <p:cNvSpPr/>
           <p:nvPr/>
         </p:nvSpPr>
         <p:spPr>
           <a:xfrm>
-            <a:off x="548640" y="3792016"/>
-            <a:ext cx="11094415" cy="801014"/>
+            <a:off x="9098280" y="1874519"/>
+            <a:ext cx="2514600" cy="2788920"/>
           </a:xfrm>
           <a:prstGeom prst="roundRect">
             <a:avLst>
-              <a:gd name="adj" fmla="val 8000"/>
+              <a:gd name="adj" fmla="val 6000"/>
             </a:avLst>
           </a:prstGeom>
           <a:solidFill>
-            <a:srgbClr val="F3F6F9"/>
+            <a:srgbClr val="FFFFFF"/>
           </a:solidFill>
-          <a:ln>
-            <a:noFill/>
+          <a:ln w="15875">
+            <a:solidFill>
+              <a:srgbClr val="D3D9E1"/>
+            </a:solidFill>
           </a:ln>
         </p:spPr>
         <p:txBody>
@@ -48299,22 +48448,22 @@
       </p:sp>
       <p:sp>
         <p:nvSpPr>
-          <p:cNvPr id="19" name="TextBox 18"/>
-          <p:cNvSpPr txBox="1"/>
-          <p:nvPr/>
-        </p:nvSpPr>
-        <p:spPr>
-          <a:xfrm>
-            <a:off x="685800" y="3760012"/>
-            <a:ext cx="2514600" cy="865022"/>
-          </a:xfrm>
-          <a:prstGeom prst="rect">
-            <a:avLst/>
-          </a:prstGeom>
-          <a:noFill/>
-        </p:spPr>
-        <p:txBody>
-          <a:bodyPr wrap="square" anchor="ctr"/>
+          <p:cNvPr id="22" name="TextBox 21"/>
+          <p:cNvSpPr txBox="1"/>
+          <p:nvPr/>
+        </p:nvSpPr>
+        <p:spPr>
+          <a:xfrm>
+            <a:off x="9262872" y="2075688"/>
+            <a:ext cx="2185416" cy="411480"/>
+          </a:xfrm>
+          <a:prstGeom prst="rect">
+            <a:avLst/>
+          </a:prstGeom>
+          <a:noFill/>
+        </p:spPr>
+        <p:txBody>
+          <a:bodyPr wrap="square" anchor="t"/>
           <a:lstStyle/>
           <a:p>
             <a:pPr algn="l" eaLnBrk="0">
@@ -48323,7 +48472,7 @@
               </a:lnSpc>
             </a:pPr>
             <a:r>
-              <a:rPr sz="1600" b="1">
+              <a:rPr sz="2100" b="1">
                 <a:solidFill>
                   <a:srgbClr val="13294B"/>
                 </a:solidFill>
@@ -48331,29 +48480,29 @@
                 <a:ea typeface="맑은 고딕"/>
                 <a:cs typeface="맑은 고딕"/>
               </a:rPr>
-              <a:t>시험</a:t>
-            </a:r>
-          </a:p>
-        </p:txBody>
-      </p:sp>
-      <p:sp>
-        <p:nvSpPr>
-          <p:cNvPr id="20" name="TextBox 19"/>
-          <p:cNvSpPr txBox="1"/>
-          <p:nvPr/>
-        </p:nvSpPr>
-        <p:spPr>
-          <a:xfrm>
-            <a:off x="3200400" y="3760012"/>
-            <a:ext cx="6156655" cy="865022"/>
-          </a:xfrm>
-          <a:prstGeom prst="rect">
-            <a:avLst/>
-          </a:prstGeom>
-          <a:noFill/>
-        </p:spPr>
-        <p:txBody>
-          <a:bodyPr wrap="square" anchor="ctr"/>
+              <a:t>회귀</a:t>
+            </a:r>
+          </a:p>
+        </p:txBody>
+      </p:sp>
+      <p:sp>
+        <p:nvSpPr>
+          <p:cNvPr id="23" name="TextBox 22"/>
+          <p:cNvSpPr txBox="1"/>
+          <p:nvPr/>
+        </p:nvSpPr>
+        <p:spPr>
+          <a:xfrm>
+            <a:off x="9262872" y="2743200"/>
+            <a:ext cx="2185416" cy="1234440"/>
+          </a:xfrm>
+          <a:prstGeom prst="rect">
+            <a:avLst/>
+          </a:prstGeom>
+          <a:noFill/>
+        </p:spPr>
+        <p:txBody>
+          <a:bodyPr wrap="square" anchor="t"/>
           <a:lstStyle/>
           <a:p>
             <a:pPr algn="l" eaLnBrk="0">
@@ -48362,38 +48511,17 @@
               </a:lnSpc>
             </a:pPr>
             <a:r>
-              <a:rPr sz="1400" b="0">
-                <a:solidFill>
-                  <a:srgbClr val="1F2A3A"/>
-                </a:solidFill>
-                <a:latin typeface="맑은 고딕"/>
-                <a:ea typeface="맑은 고딕"/>
-                <a:cs typeface="맑은 고딕"/>
-              </a:rPr>
-              <a:t>단언: 명령 번호가 없고 업무 처리 목록이 비어 있다</a:t>
-            </a:r>
-          </a:p>
-        </p:txBody>
-      </p:sp>
-      <p:sp>
-        <p:nvSpPr>
-          <p:cNvPr id="21" name="TextBox 20"/>
-          <p:cNvSpPr txBox="1"/>
-          <p:nvPr/>
-        </p:nvSpPr>
-        <p:spPr>
-          <a:xfrm>
-            <a:off x="9448495" y="3760012"/>
-            <a:ext cx="2103120" cy="865022"/>
-          </a:xfrm>
-          <a:prstGeom prst="rect">
-            <a:avLst/>
-          </a:prstGeom>
-          <a:noFill/>
-        </p:spPr>
-        <p:txBody>
-          <a:bodyPr wrap="square" anchor="ctr"/>
-          <a:lstStyle/>
+              <a:rPr sz="1500" b="0">
+                <a:solidFill>
+                  <a:srgbClr val="13294B"/>
+                </a:solidFill>
+                <a:latin typeface="맑은 고딕"/>
+                <a:ea typeface="맑은 고딕"/>
+                <a:cs typeface="맑은 고딕"/>
+              </a:rPr>
+              <a:t>긴급 조건을 더한</a:t>
+            </a:r>
+          </a:p>
           <a:p>
             <a:pPr algn="l" eaLnBrk="0">
               <a:lnSpc>
@@ -48401,15 +48529,15 @@
               </a:lnSpc>
             </a:pPr>
             <a:r>
-              <a:rPr sz="1250" b="1">
-                <a:solidFill>
-                  <a:srgbClr val="556175"/>
-                </a:solidFill>
-                <a:latin typeface="맑은 고딕"/>
-                <a:ea typeface="맑은 고딕"/>
-                <a:cs typeface="맑은 고딕"/>
-              </a:rPr>
-              <a:t>시험을</a:t>
+              <a:rPr sz="1500" b="0">
+                <a:solidFill>
+                  <a:srgbClr val="13294B"/>
+                </a:solidFill>
+                <a:latin typeface="맑은 고딕"/>
+                <a:ea typeface="맑은 고딕"/>
+                <a:cs typeface="맑은 고딕"/>
+              </a:rPr>
+              <a:t>뒤에도</a:t>
             </a:r>
           </a:p>
           <a:p>
@@ -48419,188 +48547,99 @@
               </a:lnSpc>
             </a:pPr>
             <a:r>
-              <a:rPr sz="1250" b="1">
-                <a:solidFill>
-                  <a:srgbClr val="556175"/>
-                </a:solidFill>
-                <a:latin typeface="맑은 고딕"/>
-                <a:ea typeface="맑은 고딕"/>
-                <a:cs typeface="맑은 고딕"/>
-              </a:rPr>
-              <a:t>돌릴 때마다</a:t>
-            </a:r>
-          </a:p>
-        </p:txBody>
-      </p:sp>
-      <p:sp>
-        <p:nvSpPr>
-          <p:cNvPr id="22" name="Rounded Rectangle 21"/>
+              <a:rPr sz="1500" b="0">
+                <a:solidFill>
+                  <a:srgbClr val="13294B"/>
+                </a:solidFill>
+                <a:latin typeface="맑은 고딕"/>
+                <a:ea typeface="맑은 고딕"/>
+                <a:cs typeface="맑은 고딕"/>
+              </a:rPr>
+              <a:t>기존 거절 시나리오</a:t>
+            </a:r>
+          </a:p>
+          <a:p>
+            <a:pPr algn="l" eaLnBrk="0">
+              <a:lnSpc>
+                <a:spcPct val="110000"/>
+              </a:lnSpc>
+            </a:pPr>
+            <a:r>
+              <a:rPr sz="1500" b="0">
+                <a:solidFill>
+                  <a:srgbClr val="13294B"/>
+                </a:solidFill>
+                <a:latin typeface="맑은 고딕"/>
+                <a:ea typeface="맑은 고딕"/>
+                <a:cs typeface="맑은 고딕"/>
+              </a:rPr>
+              <a:t>재실행</a:t>
+            </a:r>
+          </a:p>
+        </p:txBody>
+      </p:sp>
+      <p:sp>
+        <p:nvSpPr>
+          <p:cNvPr id="24" name="TextBox 23"/>
+          <p:cNvSpPr txBox="1"/>
+          <p:nvPr/>
+        </p:nvSpPr>
+        <p:spPr>
+          <a:xfrm>
+            <a:off x="9262872" y="4133087"/>
+            <a:ext cx="2185416" cy="329184"/>
+          </a:xfrm>
+          <a:prstGeom prst="rect">
+            <a:avLst/>
+          </a:prstGeom>
+          <a:noFill/>
+        </p:spPr>
+        <p:txBody>
+          <a:bodyPr wrap="square" anchor="t"/>
+          <a:lstStyle/>
+          <a:p>
+            <a:pPr algn="l" eaLnBrk="0">
+              <a:lnSpc>
+                <a:spcPct val="110000"/>
+              </a:lnSpc>
+            </a:pPr>
+            <a:r>
+              <a:rPr sz="1400" b="1">
+                <a:solidFill>
+                  <a:srgbClr val="1A6FC4"/>
+                </a:solidFill>
+                <a:latin typeface="맑은 고딕"/>
+                <a:ea typeface="맑은 고딕"/>
+                <a:cs typeface="맑은 고딕"/>
+              </a:rPr>
+              <a:t>바꿀 때마다</a:t>
+            </a:r>
+          </a:p>
+        </p:txBody>
+      </p:sp>
+      <p:sp>
+        <p:nvSpPr>
+          <p:cNvPr id="25" name="Rounded Rectangle 24"/>
           <p:cNvSpPr/>
           <p:nvPr/>
         </p:nvSpPr>
         <p:spPr>
           <a:xfrm>
-            <a:off x="548640" y="4657039"/>
-            <a:ext cx="11094415" cy="801014"/>
+            <a:off x="594360" y="5166360"/>
+            <a:ext cx="11018520" cy="960120"/>
           </a:xfrm>
           <a:prstGeom prst="roundRect">
             <a:avLst>
-              <a:gd name="adj" fmla="val 8000"/>
-            </a:avLst>
-          </a:prstGeom>
-          <a:solidFill>
-            <a:srgbClr val="F3F6F9"/>
-          </a:solidFill>
-          <a:ln>
-            <a:noFill/>
-          </a:ln>
-        </p:spPr>
-        <p:txBody>
-          <a:bodyPr rtlCol="0" anchor="ctr"/>
-          <a:lstStyle/>
-          <a:p>
-            <a:pPr algn="ctr"/>
-          </a:p>
-        </p:txBody>
-      </p:sp>
-      <p:sp>
-        <p:nvSpPr>
-          <p:cNvPr id="23" name="TextBox 22"/>
-          <p:cNvSpPr txBox="1"/>
-          <p:nvPr/>
-        </p:nvSpPr>
-        <p:spPr>
-          <a:xfrm>
-            <a:off x="685800" y="4625035"/>
-            <a:ext cx="2514600" cy="865022"/>
-          </a:xfrm>
-          <a:prstGeom prst="rect">
-            <a:avLst/>
-          </a:prstGeom>
-          <a:noFill/>
-        </p:spPr>
-        <p:txBody>
-          <a:bodyPr wrap="square" anchor="ctr"/>
-          <a:lstStyle/>
-          <a:p>
-            <a:pPr algn="l" eaLnBrk="0">
-              <a:lnSpc>
-                <a:spcPct val="110000"/>
-              </a:lnSpc>
-            </a:pPr>
-            <a:r>
-              <a:rPr sz="1600" b="1">
-                <a:solidFill>
-                  <a:srgbClr val="13294B"/>
-                </a:solidFill>
-                <a:latin typeface="맑은 고딕"/>
-                <a:ea typeface="맑은 고딕"/>
-                <a:cs typeface="맑은 고딕"/>
-              </a:rPr>
-              <a:t>회귀</a:t>
-            </a:r>
-          </a:p>
-        </p:txBody>
-      </p:sp>
-      <p:sp>
-        <p:nvSpPr>
-          <p:cNvPr id="24" name="TextBox 23"/>
-          <p:cNvSpPr txBox="1"/>
-          <p:nvPr/>
-        </p:nvSpPr>
-        <p:spPr>
-          <a:xfrm>
-            <a:off x="3200400" y="4625035"/>
-            <a:ext cx="6156655" cy="865022"/>
-          </a:xfrm>
-          <a:prstGeom prst="rect">
-            <a:avLst/>
-          </a:prstGeom>
-          <a:noFill/>
-        </p:spPr>
-        <p:txBody>
-          <a:bodyPr wrap="square" anchor="ctr"/>
-          <a:lstStyle/>
-          <a:p>
-            <a:pPr algn="l" eaLnBrk="0">
-              <a:lnSpc>
-                <a:spcPct val="110000"/>
-              </a:lnSpc>
-            </a:pPr>
-            <a:r>
-              <a:rPr sz="1400" b="0">
-                <a:solidFill>
-                  <a:srgbClr val="1F2A3A"/>
-                </a:solidFill>
-                <a:latin typeface="맑은 고딕"/>
-                <a:ea typeface="맑은 고딕"/>
-                <a:cs typeface="맑은 고딕"/>
-              </a:rPr>
-              <a:t>긴급 조건을 더한 뒤 거절 시나리오를 다시 실행한다</a:t>
-            </a:r>
-          </a:p>
-        </p:txBody>
-      </p:sp>
-      <p:sp>
-        <p:nvSpPr>
-          <p:cNvPr id="25" name="TextBox 24"/>
-          <p:cNvSpPr txBox="1"/>
-          <p:nvPr/>
-        </p:nvSpPr>
-        <p:spPr>
-          <a:xfrm>
-            <a:off x="9448495" y="4625035"/>
-            <a:ext cx="2103120" cy="865022"/>
-          </a:xfrm>
-          <a:prstGeom prst="rect">
-            <a:avLst/>
-          </a:prstGeom>
-          <a:noFill/>
-        </p:spPr>
-        <p:txBody>
-          <a:bodyPr wrap="square" anchor="ctr"/>
-          <a:lstStyle/>
-          <a:p>
-            <a:pPr algn="l" eaLnBrk="0">
-              <a:lnSpc>
-                <a:spcPct val="110000"/>
-              </a:lnSpc>
-            </a:pPr>
-            <a:r>
-              <a:rPr sz="1250" b="1">
-                <a:solidFill>
-                  <a:srgbClr val="556175"/>
-                </a:solidFill>
-                <a:latin typeface="맑은 고딕"/>
-                <a:ea typeface="맑은 고딕"/>
-                <a:cs typeface="맑은 고딕"/>
-              </a:rPr>
-              <a:t>바꿀 때마다</a:t>
-            </a:r>
-          </a:p>
-        </p:txBody>
-      </p:sp>
-      <p:sp>
-        <p:nvSpPr>
-          <p:cNvPr id="26" name="Rounded Rectangle 25"/>
-          <p:cNvSpPr/>
-          <p:nvPr/>
-        </p:nvSpPr>
-        <p:spPr>
-          <a:xfrm>
-            <a:off x="548640" y="5522061"/>
-            <a:ext cx="11094415" cy="801014"/>
-          </a:xfrm>
-          <a:prstGeom prst="roundRect">
-            <a:avLst>
-              <a:gd name="adj" fmla="val 8000"/>
+              <a:gd name="adj" fmla="val 6000"/>
             </a:avLst>
           </a:prstGeom>
           <a:solidFill>
             <a:srgbClr val="E7F3FD"/>
           </a:solidFill>
-          <a:ln>
-            <a:noFill/>
+          <a:ln w="12700">
+            <a:solidFill>
+              <a:srgbClr val="D3D9E1"/>
+            </a:solidFill>
           </a:ln>
         </p:spPr>
         <p:txBody>
@@ -48613,22 +48652,61 @@
       </p:sp>
       <p:sp>
         <p:nvSpPr>
+          <p:cNvPr id="26" name="TextBox 25"/>
+          <p:cNvSpPr txBox="1"/>
+          <p:nvPr/>
+        </p:nvSpPr>
+        <p:spPr>
+          <a:xfrm>
+            <a:off x="822960" y="5349240"/>
+            <a:ext cx="2011680" cy="365760"/>
+          </a:xfrm>
+          <a:prstGeom prst="rect">
+            <a:avLst/>
+          </a:prstGeom>
+          <a:noFill/>
+        </p:spPr>
+        <p:txBody>
+          <a:bodyPr wrap="square" anchor="t"/>
+          <a:lstStyle/>
+          <a:p>
+            <a:pPr algn="l" eaLnBrk="0">
+              <a:lnSpc>
+                <a:spcPct val="110000"/>
+              </a:lnSpc>
+            </a:pPr>
+            <a:r>
+              <a:rPr sz="2000" b="1">
+                <a:solidFill>
+                  <a:srgbClr val="13294B"/>
+                </a:solidFill>
+                <a:latin typeface="맑은 고딕"/>
+                <a:ea typeface="맑은 고딕"/>
+                <a:cs typeface="맑은 고딕"/>
+              </a:rPr>
+              <a:t>실행 중</a:t>
+            </a:r>
+          </a:p>
+        </p:txBody>
+      </p:sp>
+      <p:sp>
+        <p:nvSpPr>
           <p:cNvPr id="27" name="TextBox 26"/>
           <p:cNvSpPr txBox="1"/>
           <p:nvPr/>
         </p:nvSpPr>
         <p:spPr>
           <a:xfrm>
-            <a:off x="685800" y="5490057"/>
-            <a:ext cx="2514600" cy="865022"/>
-          </a:xfrm>
-          <a:prstGeom prst="rect">
-            <a:avLst/>
-          </a:prstGeom>
-          <a:noFill/>
-        </p:spPr>
-        <p:txBody>
-          <a:bodyPr wrap="square" anchor="ctr"/>
+            <a:off x="2880360" y="5321808"/>
+            <a:ext cx="6400800" cy="594360"/>
+          </a:xfrm>
+          <a:prstGeom prst="rect">
+            <a:avLst/>
+          </a:prstGeom>
+          <a:noFill/>
+        </p:spPr>
+        <p:txBody>
+          <a:bodyPr wrap="square" anchor="t"/>
           <a:lstStyle/>
           <a:p>
             <a:pPr algn="l" eaLnBrk="0">
@@ -48637,7 +48715,7 @@
               </a:lnSpc>
             </a:pPr>
             <a:r>
-              <a:rPr sz="1600" b="1">
+              <a:rPr sz="1700" b="0">
                 <a:solidFill>
                   <a:srgbClr val="13294B"/>
                 </a:solidFill>
@@ -48645,7 +48723,7 @@
                 <a:ea typeface="맑은 고딕"/>
                 <a:cs typeface="맑은 고딕"/>
               </a:rPr>
-              <a:t>실행 중</a:t>
+              <a:t>가드레일 검사와 담당자의 승인·거절</a:t>
             </a:r>
           </a:p>
         </p:txBody>
@@ -48658,16 +48736,16 @@
         </p:nvSpPr>
         <p:spPr>
           <a:xfrm>
-            <a:off x="3200400" y="5490057"/>
-            <a:ext cx="6156655" cy="865022"/>
-          </a:xfrm>
-          <a:prstGeom prst="rect">
-            <a:avLst/>
-          </a:prstGeom>
-          <a:noFill/>
-        </p:spPr>
-        <p:txBody>
-          <a:bodyPr wrap="square" anchor="ctr"/>
+            <a:off x="9326880" y="5404104"/>
+            <a:ext cx="2011680" cy="365760"/>
+          </a:xfrm>
+          <a:prstGeom prst="rect">
+            <a:avLst/>
+          </a:prstGeom>
+          <a:noFill/>
+        </p:spPr>
+        <p:txBody>
+          <a:bodyPr wrap="square" anchor="t"/>
           <a:lstStyle/>
           <a:p>
             <a:pPr algn="l" eaLnBrk="0">
@@ -48676,46 +48754,7 @@
               </a:lnSpc>
             </a:pPr>
             <a:r>
-              <a:rPr sz="1400" b="0">
-                <a:solidFill>
-                  <a:srgbClr val="1F2A3A"/>
-                </a:solidFill>
-                <a:latin typeface="맑은 고딕"/>
-                <a:ea typeface="맑은 고딕"/>
-                <a:cs typeface="맑은 고딕"/>
-              </a:rPr>
-              <a:t>가드레일 검사와 담당자의 승인 · 거절</a:t>
-            </a:r>
-          </a:p>
-        </p:txBody>
-      </p:sp>
-      <p:sp>
-        <p:nvSpPr>
-          <p:cNvPr id="29" name="TextBox 28"/>
-          <p:cNvSpPr txBox="1"/>
-          <p:nvPr/>
-        </p:nvSpPr>
-        <p:spPr>
-          <a:xfrm>
-            <a:off x="9448495" y="5490057"/>
-            <a:ext cx="2103120" cy="865022"/>
-          </a:xfrm>
-          <a:prstGeom prst="rect">
-            <a:avLst/>
-          </a:prstGeom>
-          <a:noFill/>
-        </p:spPr>
-        <p:txBody>
-          <a:bodyPr wrap="square" anchor="ctr"/>
-          <a:lstStyle/>
-          <a:p>
-            <a:pPr algn="l" eaLnBrk="0">
-              <a:lnSpc>
-                <a:spcPct val="110000"/>
-              </a:lnSpc>
-            </a:pPr>
-            <a:r>
-              <a:rPr sz="1250" b="1">
+              <a:rPr sz="1400" b="1">
                 <a:solidFill>
                   <a:srgbClr val="1A6FC4"/>
                 </a:solidFill>
@@ -48723,25 +48762,7 @@
                 <a:ea typeface="맑은 고딕"/>
                 <a:cs typeface="맑은 고딕"/>
               </a:rPr>
-              <a:t>추천안이</a:t>
-            </a:r>
-          </a:p>
-          <a:p>
-            <a:pPr algn="l" eaLnBrk="0">
-              <a:lnSpc>
-                <a:spcPct val="110000"/>
-              </a:lnSpc>
-            </a:pPr>
-            <a:r>
-              <a:rPr sz="1250" b="1">
-                <a:solidFill>
-                  <a:srgbClr val="1A6FC4"/>
-                </a:solidFill>
-                <a:latin typeface="맑은 고딕"/>
-                <a:ea typeface="맑은 고딕"/>
-                <a:cs typeface="맑은 고딕"/>
-              </a:rPr>
-              <a:t>나올 때마다</a:t>
+              <a:t>추천안마다</a:t>
             </a:r>
           </a:p>
         </p:txBody>

--- a/산출물/통합반/이론/08회차/통합반_08일차.pptx
+++ b/산출물/통합반/이론/08회차/통합반_08일차.pptx
@@ -2312,7 +2312,7 @@
           <a:lstStyle/>
           <a:p>
             <a:r>
-              <a:t>두 번째 실습에서는 첫 실습에서 작성할 다섯 경우의 시나리오로, 에이전트의 동작을 반복 검증하는 실습을 준비합니다. 적어 둔 시나리오는 아직 글이라, 에이전트가 정말 그렇게 움직이는지는 돌려 봐야 알죠. 화면 첫 번째 카드의 입력이 그 다섯 경우의 시나리오 문서예요. 이걸 준비된 자동 시험이나 반복 실행 스크립트에 잇고, 같은 입력으로 여러 번 실행합니다. 실행 결과는 로그와 결과 파일로 남아요. 실제 출력과 기대값을 견줘서, 어느 조건에서 규칙을 어겼는지 찾아 위반 목록에 적겠습니다. 이 실습의 성공 기준은 어긋남마다 판정이 붙어 있는 겁니다. 설명 문장이 달라진 표현 차이인지, 항목이 빠지거나 금지된 일이 일어난 계약 위반인지를 가르면 돼요. 실습이 끝나면 실행 결과 로그와, 판정이 붙은 위반 목록이 남습니다. 조회 자료와 설정도 함께 기록해 차이가 생긴 조건을 구별하겠습니다. 허용할 과정의 차이인지, 실제 조건을 어긴 것인지 근거를 붙이는 것이 핵심입니다.</a:t>
+              <a:t>두 번째 실습에서는 첫 실습에서 작성할 다섯 경우의 시나리오로, 에이전트의 동작을 반복 검증하겠습니다. 적어 둔 시나리오는 아직 글이라, 에이전트가 정말 그렇게 움직이는지는 돌려 봐야 알죠. 화면 왼쪽의 입력이 그 다섯 경우의 시나리오 문서예요. 이걸 준비된 자동 시험이나 반복 실행 스크립트에 잇고, 같은 입력으로 여러 번 실행합니다. 실행 결과는 로그와 결과 파일로 남아요. 실제 출력과 기대값을 견줘서, 어느 조건에서 규칙을 어겼는지 찾아 위반 목록에 적겠습니다. 이 실습의 성공 기준은 어긋남마다 판정이 붙어 있는 겁니다. 설명 문장이 달라진 표현 차이인지, 항목이 빠지거나 금지된 일이 일어난 계약 위반인지를 가르면 돼요. 실습이 끝나면 실행 결과 로그와, 판정이 붙은 위반 목록이 남습니다. 조회 자료와 설정도 함께 기록해 차이가 생긴 조건을 구별하겠습니다. 허용할 과정의 차이인지, 실제 조건을 어긴 것인지 근거를 붙이는 것이 핵심입니다.</a:t>
             </a:r>
           </a:p>
         </p:txBody>
@@ -2382,7 +2382,7 @@
           <a:lstStyle/>
           <a:p>
             <a:r>
-              <a:t>세 번째 실습에서는 반복 검증에서 남길 위반 목록을 출발점으로, 오류를 고치고 기존 기능이 그대로인지 확인하는 실습을 준비합니다. 위반 목록에서 실제로 실패한 시나리오만 골라 원인을 따라갑니다. 실패의 증상을 보고, 고칠 곳이 프롬프트 같은 지침인지, 지식 그래프의 기준값인지, 명세인지, 코드인지부터 가려 보겠습니다. 이론에서 본 고칠 곳의 표 그대로예요. 가린 곳을 고친 다음 그 시나리오를 다시 돌리고요. 이때 기대값을 낮춰서 통과시키지는 않습니다. 마지막에는 전체 회귀를 돌립니다. 긴급 조건이 동작하면서, 기존의 일반 요청, 필수 정보가 빠진 요청을 확정하지 않는 보류, 그리고 거절 조건이 그대로 통과하면 성공이에요. 무엇을 왜 고쳤는지 적은 수정 기록과 전체 회귀 결과가 남습니다. 실패가 없다면 억지로 오류를 만들거나 고칠 필요는 없습니다. 확인한 범위와 남은 경우를 기록하겠습니다. 실패가 있다면 수정한 시험뿐 아니라 준비한 전체 시나리오를 다시 확인합니다.</a:t>
+              <a:t>세 번째 실습에서는 반복 검증에서 남길 위반 목록을 출발점으로, 오류를 고치고 기존 기능이 그대로인지 확인하겠습니다. 위반 목록에서 실제로 실패한 시나리오만 골라 원인을 따라갑니다. 실패의 증상을 보고, 고칠 곳이 프롬프트 같은 지침인지, 지식 그래프의 기준값인지, 명세인지, 코드인지부터 가려 보겠습니다. 이론에서 본 고칠 곳의 표 그대로예요. 가린 곳을 고친 다음 그 시나리오를 다시 돌리고요. 이때 기대값을 낮춰서 통과시키지는 않습니다. 마지막에는 전체 회귀를 돌립니다. 긴급 조건이 동작하면서, 기존의 일반 요청, 필수 정보가 빠진 요청을 확정하지 않는 보류, 그리고 거절 조건이 그대로 통과하면 성공이에요. 무엇을 왜 고쳤는지 적은 수정 기록과 전체 회귀 결과가 남습니다. 실패가 없다면 억지로 오류를 만들거나 고칠 필요는 없습니다. 확인한 범위와 남은 경우를 기록하겠습니다. 실패가 있다면 수정한 시험뿐 아니라 준비한 전체 시나리오를 다시 확인합니다.</a:t>
             </a:r>
           </a:p>
         </p:txBody>
@@ -2452,7 +2452,7 @@
           <a:lstStyle/>
           <a:p>
             <a:r>
-              <a:t>네 번째 실습은 여러 출처를 연결해 교대 인수인계서를 만드는 활동입니다. 앞의 세 실습이 기대를 적고 실행해서 고치는 과정이라면, 여기서는 결과의 바탕이 되는 업무 자료를 어떻게 함께 읽을지 확인합니다. 다음 담당자가 알아야 할 완료 작업과 남은 요청, 주의 사항을 세 출처에서 정리할 거예요. 입력은 설비 이벤트, 정비 이력, 부품 자료의 조회 결과입니다. 실습 환경에 따라 실제 조회 결과 또는 같은 스키마로 준비한 자료를 사용합니다. 단순히 세 문서를 이어 붙이는 것이 아니라, 같은 설비나 요청을 가리키는지와 각 기록의 시점을 맞춰 봐야 합니다. 두 번째 카드의 데이터 패브릭은 여러 곳의 데이터를 연결하고 관리해 활용하는 더 넓은 접근입니다. 데이터를 옮기지 않는 방식만을 뜻하지는 않아요. 이번 실습에서는 그중 원천의 자료를 연결해 읽고 출처를 추적하는 관점을 다룹니다. 새 데이터 플랫폼을 구축하는 활동은 아닙니다. 인수인계 항목마다 어느 자료를 근거로 썼는지와 그 자료의 시각을 붙이겠습니다. 방금 조회한 과거 기록일 수도 있으므로, 조회 시각과 사건이 일어난 시각을 구별해야 합니다. 한 출처를 읽지 못했다면 관련 작업이 없다고 단정하지 말고 확인하지 못한 범위를 적습니다. 출처끼리 상태가 다르면 어느 시점의 기록인지 확인하고, 해결되지 않은 차이도 남겨야 해요. 성공 기준은 다음 담당자가 각 항목의 근거와 미확인 부분을 찾아갈 수 있는 것입니다. 네 실습의 목표를 모두 살펴봤습니다. 이제 시나리오 작성부터 반복 검증과 수정, 교대 인수인계 순서로 직접 진행하겠습니다.</a:t>
+              <a:t>네 번째 실습은 여러 출처를 연결해 교대 인수인계서를 만드는 활동입니다. 앞의 세 실습이 기대를 적고 실행해서 고치는 과정이라면, 여기서는 결과의 바탕이 되는 업무 자료를 어떻게 함께 읽을지 확인합니다. 다음 담당자가 알아야 할 완료 작업과 남은 요청, 주의 사항을 세 출처에서 정리할 거예요. 입력은 설비 이벤트, 정비 이력, 부품 자료의 조회 결과입니다. 실습 환경에 따라 실제 조회 결과 또는 같은 스키마로 준비한 자료를 사용합니다. 단순히 세 문서를 이어 붙이는 것이 아니라, 같은 설비나 요청을 가리키는지와 각 기록의 시점을 맞춰 봐야 합니다. 가운데 연결 영역의 데이터 패브릭은 여러 곳의 데이터를 연결하고 관리해 활용하는 더 넓은 접근입니다. 데이터를 옮기지 않는 방식만을 뜻하지는 않아요. 이번 실습에서는 그중 원천의 자료를 연결해 읽고 출처를 추적하는 관점을 다룹니다. 새 데이터 플랫폼을 구축하는 활동은 아닙니다. 인수인계 항목마다 어느 자료를 근거로 썼는지와 그 자료의 시각을 붙이겠습니다. 방금 조회한 과거 기록일 수도 있으므로, 조회 시각과 사건이 일어난 시각을 구별해야 합니다. 한 출처를 읽지 못했다면 관련 작업이 없다고 단정하지 말고 확인하지 못한 범위를 적습니다. 출처끼리 상태가 다르면 어느 시점의 기록인지 확인하고, 해결되지 않은 차이도 남겨야 해요. 성공 기준은 다음 담당자가 각 항목의 근거와 미확인 부분을 찾아갈 수 있는 것입니다. 네 실습의 목표를 모두 살펴봤습니다. 이제 시나리오 작성부터 반복 검증과 수정, 교대 인수인계 순서로 직접 진행하겠습니다.</a:t>
             </a:r>
           </a:p>
         </p:txBody>
@@ -16407,7 +16407,7 @@
           <p:nvPr/>
         </p:nvPicPr>
         <p:blipFill>
-          <a:blip r:embed="rId3"/>
+          <a:blip r:embed="rIdTheory2_rId3"/>
           <a:stretch>
             <a:fillRect/>
           </a:stretch>
@@ -16459,7 +16459,7 @@
                 <a:ea typeface="맑은 고딕"/>
                 <a:cs typeface="맑은 고딕"/>
               </a:rPr>
-              <a:t>기대 행동의 시나리오</a:t>
+              <a:t>행동 시나리오</a:t>
             </a:r>
           </a:p>
           <a:p>
@@ -16647,7 +16647,7 @@
           <p:nvPr/>
         </p:nvPicPr>
         <p:blipFill>
-          <a:blip r:embed="rId4"/>
+          <a:blip r:embed="rIdTheory2_rId4"/>
           <a:stretch>
             <a:fillRect/>
           </a:stretch>
@@ -16887,7 +16887,7 @@
           <p:nvPr/>
         </p:nvPicPr>
         <p:blipFill>
-          <a:blip r:embed="rId5"/>
+          <a:blip r:embed="rIdTheory2_rId5"/>
           <a:stretch>
             <a:fillRect/>
           </a:stretch>
@@ -17127,7 +17127,7 @@
           <p:nvPr/>
         </p:nvPicPr>
         <p:blipFill>
-          <a:blip r:embed="rId6"/>
+          <a:blip r:embed="rIdTheory2_rId6"/>
           <a:stretch>
             <a:fillRect/>
           </a:stretch>
@@ -29327,12 +29327,12 @@
         </p:nvSpPr>
         <p:spPr>
           <a:xfrm>
-            <a:off x="548640" y="2146680"/>
-            <a:ext cx="2567863" cy="3689350"/>
+            <a:off x="594360" y="1874519"/>
+            <a:ext cx="3429000" cy="2971800"/>
           </a:xfrm>
           <a:prstGeom prst="roundRect">
             <a:avLst>
-              <a:gd name="adj" fmla="val 4000"/>
+              <a:gd name="adj" fmla="val 6000"/>
             </a:avLst>
           </a:prstGeom>
           <a:solidFill>
@@ -29354,20 +29354,155 @@
       </p:sp>
       <p:sp>
         <p:nvSpPr>
-          <p:cNvPr id="7" name="Oval 6"/>
+          <p:cNvPr id="7" name="TextBox 6"/>
+          <p:cNvSpPr txBox="1"/>
+          <p:nvPr/>
+        </p:nvSpPr>
+        <p:spPr>
+          <a:xfrm>
+            <a:off x="758952" y="2057400"/>
+            <a:ext cx="3099816" cy="731520"/>
+          </a:xfrm>
+          <a:prstGeom prst="rect">
+            <a:avLst/>
+          </a:prstGeom>
+          <a:noFill/>
+        </p:spPr>
+        <p:txBody>
+          <a:bodyPr wrap="square" anchor="t"/>
+          <a:lstStyle/>
+          <a:p>
+            <a:pPr algn="l" eaLnBrk="0">
+              <a:lnSpc>
+                <a:spcPct val="110000"/>
+              </a:lnSpc>
+            </a:pPr>
+            <a:r>
+              <a:rPr sz="1800" b="1">
+                <a:solidFill>
+                  <a:srgbClr val="13294B"/>
+                </a:solidFill>
+                <a:latin typeface="맑은 고딕"/>
+                <a:ea typeface="맑은 고딕"/>
+                <a:cs typeface="맑은 고딕"/>
+              </a:rPr>
+              <a:t>입력</a:t>
+            </a:r>
+          </a:p>
+        </p:txBody>
+      </p:sp>
+      <p:sp>
+        <p:nvSpPr>
+          <p:cNvPr id="8" name="TextBox 7"/>
+          <p:cNvSpPr txBox="1"/>
+          <p:nvPr/>
+        </p:nvSpPr>
+        <p:spPr>
+          <a:xfrm>
+            <a:off x="758952" y="2926080"/>
+            <a:ext cx="3099816" cy="1371600"/>
+          </a:xfrm>
+          <a:prstGeom prst="rect">
+            <a:avLst/>
+          </a:prstGeom>
+          <a:noFill/>
+        </p:spPr>
+        <p:txBody>
+          <a:bodyPr wrap="square" anchor="t"/>
+          <a:lstStyle/>
+          <a:p>
+            <a:pPr algn="l" eaLnBrk="0">
+              <a:lnSpc>
+                <a:spcPct val="110000"/>
+              </a:lnSpc>
+            </a:pPr>
+            <a:r>
+              <a:rPr sz="1600" b="0">
+                <a:solidFill>
+                  <a:srgbClr val="13294B"/>
+                </a:solidFill>
+                <a:latin typeface="맑은 고딕"/>
+                <a:ea typeface="맑은 고딕"/>
+                <a:cs typeface="맑은 고딕"/>
+              </a:rPr>
+              <a:t>다섯 경우의 시나리오 문서</a:t>
+            </a:r>
+          </a:p>
+          <a:p>
+            <a:pPr algn="l" eaLnBrk="0">
+              <a:lnSpc>
+                <a:spcPct val="110000"/>
+              </a:lnSpc>
+            </a:pPr>
+            <a:r>
+              <a:rPr sz="1600" b="0">
+                <a:solidFill>
+                  <a:srgbClr val="13294B"/>
+                </a:solidFill>
+                <a:latin typeface="맑은 고딕"/>
+                <a:ea typeface="맑은 고딕"/>
+                <a:cs typeface="맑은 고딕"/>
+              </a:rPr>
+              <a:t>준비된 자동 시험 또는 반복 실행 스크립트</a:t>
+            </a:r>
+          </a:p>
+        </p:txBody>
+      </p:sp>
+      <p:sp>
+        <p:nvSpPr>
+          <p:cNvPr id="9" name="TextBox 8"/>
+          <p:cNvSpPr txBox="1"/>
+          <p:nvPr/>
+        </p:nvSpPr>
+        <p:spPr>
+          <a:xfrm>
+            <a:off x="758952" y="4462272"/>
+            <a:ext cx="3099816" cy="274320"/>
+          </a:xfrm>
+          <a:prstGeom prst="rect">
+            <a:avLst/>
+          </a:prstGeom>
+          <a:noFill/>
+        </p:spPr>
+        <p:txBody>
+          <a:bodyPr wrap="square" anchor="t"/>
+          <a:lstStyle/>
+          <a:p>
+            <a:pPr algn="l" eaLnBrk="0">
+              <a:lnSpc>
+                <a:spcPct val="110000"/>
+              </a:lnSpc>
+            </a:pPr>
+            <a:r>
+              <a:rPr sz="1400" b="1">
+                <a:solidFill>
+                  <a:srgbClr val="1A6FC4"/>
+                </a:solidFill>
+                <a:latin typeface="맑은 고딕"/>
+                <a:ea typeface="맑은 고딕"/>
+                <a:cs typeface="맑은 고딕"/>
+              </a:rPr>
+              <a:t>출발점</a:t>
+            </a:r>
+          </a:p>
+        </p:txBody>
+      </p:sp>
+      <p:sp>
+        <p:nvSpPr>
+          <p:cNvPr id="10" name="Right Arrow 9"/>
           <p:cNvSpPr/>
           <p:nvPr/>
         </p:nvSpPr>
         <p:spPr>
           <a:xfrm>
-            <a:off x="777240" y="2347849"/>
-            <a:ext cx="731520" cy="731520"/>
-          </a:xfrm>
-          <a:prstGeom prst="ellipse">
+            <a:off x="4114800" y="3246120"/>
+            <a:ext cx="201168" cy="164592"/>
+          </a:xfrm>
+          <a:prstGeom prst="rightArrow">
             <a:avLst/>
           </a:prstGeom>
           <a:solidFill>
-            <a:srgbClr val="E7F3FD"/>
+            <a:srgbClr val="1A6FC4"/>
           </a:solidFill>
           <a:ln>
             <a:noFill/>
@@ -29381,198 +29516,20 @@
           </a:p>
         </p:txBody>
       </p:sp>
-      <p:pic>
-        <p:nvPicPr>
-          <p:cNvPr id="8" name="아이콘:plug-connected" descr="plug-connected_13294B_1.6.png"/>
-          <p:cNvPicPr>
-            <a:picLocks noChangeAspect="1"/>
-          </p:cNvPicPr>
-          <p:nvPr/>
-        </p:nvPicPr>
-        <p:blipFill>
-          <a:blip r:embed="rId2"/>
-          <a:stretch>
-            <a:fillRect/>
-          </a:stretch>
-        </p:blipFill>
-        <p:spPr>
-          <a:xfrm>
-            <a:off x="930859" y="2501468"/>
-            <a:ext cx="424281" cy="424281"/>
-          </a:xfrm>
-          <a:prstGeom prst="rect">
-            <a:avLst/>
-          </a:prstGeom>
-        </p:spPr>
-      </p:pic>
-      <p:sp>
-        <p:nvSpPr>
-          <p:cNvPr id="9" name="TextBox 8"/>
-          <p:cNvSpPr txBox="1"/>
-          <p:nvPr/>
-        </p:nvSpPr>
-        <p:spPr>
-          <a:xfrm>
-            <a:off x="713232" y="3170809"/>
-            <a:ext cx="2238679" cy="2162302"/>
-          </a:xfrm>
-          <a:prstGeom prst="rect">
-            <a:avLst/>
-          </a:prstGeom>
-          <a:noFill/>
-        </p:spPr>
-        <p:txBody>
-          <a:bodyPr wrap="square" anchor="t"/>
-          <a:lstStyle/>
-          <a:p>
-            <a:pPr algn="l" eaLnBrk="0">
-              <a:lnSpc>
-                <a:spcPct val="110000"/>
-              </a:lnSpc>
-              <a:spcAft>
-                <a:spcPts val="400"/>
-              </a:spcAft>
-            </a:pPr>
-            <a:r>
-              <a:rPr sz="2150" b="1">
-                <a:solidFill>
-                  <a:srgbClr val="13294B"/>
-                </a:solidFill>
-                <a:latin typeface="맑은 고딕"/>
-                <a:ea typeface="맑은 고딕"/>
-                <a:cs typeface="맑은 고딕"/>
-              </a:rPr>
-              <a:t>입력</a:t>
-            </a:r>
-          </a:p>
-          <a:p>
-            <a:pPr algn="l" eaLnBrk="0" marL="200025" indent="-200025">
-              <a:lnSpc>
-                <a:spcPct val="110000"/>
-              </a:lnSpc>
-              <a:spcAft>
-                <a:spcPts val="400"/>
-              </a:spcAft>
-            </a:pPr>
-            <a:r>
-              <a:rPr sz="1750" b="0">
-                <a:solidFill>
-                  <a:srgbClr val="1F2A3A"/>
-                </a:solidFill>
-                <a:latin typeface="맑은 고딕"/>
-                <a:ea typeface="맑은 고딕"/>
-                <a:cs typeface="맑은 고딕"/>
-              </a:rPr>
-              <a:t>• 다섯 경우의 시나리오 문서</a:t>
-            </a:r>
-          </a:p>
-          <a:p>
-            <a:pPr algn="l" eaLnBrk="0" marL="200025" indent="-200025">
-              <a:lnSpc>
-                <a:spcPct val="110000"/>
-              </a:lnSpc>
-              <a:spcAft>
-                <a:spcPts val="400"/>
-              </a:spcAft>
-            </a:pPr>
-            <a:r>
-              <a:rPr sz="1750" b="0">
-                <a:solidFill>
-                  <a:srgbClr val="1F2A3A"/>
-                </a:solidFill>
-                <a:latin typeface="맑은 고딕"/>
-                <a:ea typeface="맑은 고딕"/>
-                <a:cs typeface="맑은 고딕"/>
-              </a:rPr>
-              <a:t>• 준비된 자동 시험 또는 반복 실행 스크립트</a:t>
-            </a:r>
-          </a:p>
-        </p:txBody>
-      </p:sp>
-      <p:sp>
-        <p:nvSpPr>
-          <p:cNvPr id="10" name="Rounded Rectangle 9"/>
+      <p:sp>
+        <p:nvSpPr>
+          <p:cNvPr id="11" name="Rounded Rectangle 10"/>
           <p:cNvSpPr/>
           <p:nvPr/>
         </p:nvSpPr>
         <p:spPr>
           <a:xfrm>
-            <a:off x="777240" y="5406263"/>
-            <a:ext cx="822960" cy="292608"/>
+            <a:off x="4389120" y="1874519"/>
+            <a:ext cx="3429000" cy="2971800"/>
           </a:xfrm>
           <a:prstGeom prst="roundRect">
             <a:avLst>
-              <a:gd name="adj" fmla="val 50000"/>
-            </a:avLst>
-          </a:prstGeom>
-          <a:solidFill>
-            <a:srgbClr val="D3D9E1"/>
-          </a:solidFill>
-          <a:ln>
-            <a:noFill/>
-          </a:ln>
-        </p:spPr>
-        <p:txBody>
-          <a:bodyPr rtlCol="0" anchor="ctr"/>
-          <a:lstStyle/>
-          <a:p>
-            <a:pPr algn="ctr"/>
-          </a:p>
-        </p:txBody>
-      </p:sp>
-      <p:sp>
-        <p:nvSpPr>
-          <p:cNvPr id="11" name="TextBox 10"/>
-          <p:cNvSpPr txBox="1"/>
-          <p:nvPr/>
-        </p:nvSpPr>
-        <p:spPr>
-          <a:xfrm>
-            <a:off x="777240" y="5406263"/>
-            <a:ext cx="822960" cy="292608"/>
-          </a:xfrm>
-          <a:prstGeom prst="rect">
-            <a:avLst/>
-          </a:prstGeom>
-          <a:noFill/>
-        </p:spPr>
-        <p:txBody>
-          <a:bodyPr wrap="square" anchor="ctr"/>
-          <a:lstStyle/>
-          <a:p>
-            <a:pPr algn="ctr" eaLnBrk="0">
-              <a:lnSpc>
-                <a:spcPct val="110000"/>
-              </a:lnSpc>
-            </a:pPr>
-            <a:r>
-              <a:rPr sz="1200" b="1">
-                <a:solidFill>
-                  <a:srgbClr val="13294B"/>
-                </a:solidFill>
-                <a:latin typeface="맑은 고딕"/>
-                <a:ea typeface="맑은 고딕"/>
-                <a:cs typeface="맑은 고딕"/>
-              </a:rPr>
-              <a:t>출발점</a:t>
-            </a:r>
-          </a:p>
-        </p:txBody>
-      </p:sp>
-      <p:sp>
-        <p:nvSpPr>
-          <p:cNvPr id="12" name="Rounded Rectangle 11"/>
-          <p:cNvSpPr/>
-          <p:nvPr/>
-        </p:nvSpPr>
-        <p:spPr>
-          <a:xfrm>
-            <a:off x="3390823" y="2146680"/>
-            <a:ext cx="2567863" cy="3689350"/>
-          </a:xfrm>
-          <a:prstGeom prst="roundRect">
-            <a:avLst>
-              <a:gd name="adj" fmla="val 4000"/>
+              <a:gd name="adj" fmla="val 6000"/>
             </a:avLst>
           </a:prstGeom>
           <a:solidFill>
@@ -29594,20 +29551,155 @@
       </p:sp>
       <p:sp>
         <p:nvSpPr>
-          <p:cNvPr id="13" name="Oval 12"/>
+          <p:cNvPr id="12" name="TextBox 11"/>
+          <p:cNvSpPr txBox="1"/>
+          <p:nvPr/>
+        </p:nvSpPr>
+        <p:spPr>
+          <a:xfrm>
+            <a:off x="4553712" y="2057400"/>
+            <a:ext cx="3099816" cy="731520"/>
+          </a:xfrm>
+          <a:prstGeom prst="rect">
+            <a:avLst/>
+          </a:prstGeom>
+          <a:noFill/>
+        </p:spPr>
+        <p:txBody>
+          <a:bodyPr wrap="square" anchor="t"/>
+          <a:lstStyle/>
+          <a:p>
+            <a:pPr algn="l" eaLnBrk="0">
+              <a:lnSpc>
+                <a:spcPct val="110000"/>
+              </a:lnSpc>
+            </a:pPr>
+            <a:r>
+              <a:rPr sz="1800" b="1">
+                <a:solidFill>
+                  <a:srgbClr val="13294B"/>
+                </a:solidFill>
+                <a:latin typeface="맑은 고딕"/>
+                <a:ea typeface="맑은 고딕"/>
+                <a:cs typeface="맑은 고딕"/>
+              </a:rPr>
+              <a:t>연결과 반복</a:t>
+            </a:r>
+          </a:p>
+        </p:txBody>
+      </p:sp>
+      <p:sp>
+        <p:nvSpPr>
+          <p:cNvPr id="13" name="TextBox 12"/>
+          <p:cNvSpPr txBox="1"/>
+          <p:nvPr/>
+        </p:nvSpPr>
+        <p:spPr>
+          <a:xfrm>
+            <a:off x="4553712" y="2926080"/>
+            <a:ext cx="3099816" cy="1371600"/>
+          </a:xfrm>
+          <a:prstGeom prst="rect">
+            <a:avLst/>
+          </a:prstGeom>
+          <a:noFill/>
+        </p:spPr>
+        <p:txBody>
+          <a:bodyPr wrap="square" anchor="t"/>
+          <a:lstStyle/>
+          <a:p>
+            <a:pPr algn="l" eaLnBrk="0">
+              <a:lnSpc>
+                <a:spcPct val="110000"/>
+              </a:lnSpc>
+            </a:pPr>
+            <a:r>
+              <a:rPr sz="1600" b="0">
+                <a:solidFill>
+                  <a:srgbClr val="13294B"/>
+                </a:solidFill>
+                <a:latin typeface="맑은 고딕"/>
+                <a:ea typeface="맑은 고딕"/>
+                <a:cs typeface="맑은 고딕"/>
+              </a:rPr>
+              <a:t>시나리오를 시험에 잇는다</a:t>
+            </a:r>
+          </a:p>
+          <a:p>
+            <a:pPr algn="l" eaLnBrk="0">
+              <a:lnSpc>
+                <a:spcPct val="110000"/>
+              </a:lnSpc>
+            </a:pPr>
+            <a:r>
+              <a:rPr sz="1600" b="0">
+                <a:solidFill>
+                  <a:srgbClr val="13294B"/>
+                </a:solidFill>
+                <a:latin typeface="맑은 고딕"/>
+                <a:ea typeface="맑은 고딕"/>
+                <a:cs typeface="맑은 고딕"/>
+              </a:rPr>
+              <a:t>입력 · 조회 자료 · 설정을 기록해 반복한다</a:t>
+            </a:r>
+          </a:p>
+        </p:txBody>
+      </p:sp>
+      <p:sp>
+        <p:nvSpPr>
+          <p:cNvPr id="14" name="TextBox 13"/>
+          <p:cNvSpPr txBox="1"/>
+          <p:nvPr/>
+        </p:nvSpPr>
+        <p:spPr>
+          <a:xfrm>
+            <a:off x="4553712" y="4462272"/>
+            <a:ext cx="3099816" cy="274320"/>
+          </a:xfrm>
+          <a:prstGeom prst="rect">
+            <a:avLst/>
+          </a:prstGeom>
+          <a:noFill/>
+        </p:spPr>
+        <p:txBody>
+          <a:bodyPr wrap="square" anchor="t"/>
+          <a:lstStyle/>
+          <a:p>
+            <a:pPr algn="l" eaLnBrk="0">
+              <a:lnSpc>
+                <a:spcPct val="110000"/>
+              </a:lnSpc>
+            </a:pPr>
+            <a:r>
+              <a:rPr sz="1400" b="1">
+                <a:solidFill>
+                  <a:srgbClr val="1A6FC4"/>
+                </a:solidFill>
+                <a:latin typeface="맑은 고딕"/>
+                <a:ea typeface="맑은 고딕"/>
+                <a:cs typeface="맑은 고딕"/>
+              </a:rPr>
+              <a:t>범위</a:t>
+            </a:r>
+          </a:p>
+        </p:txBody>
+      </p:sp>
+      <p:sp>
+        <p:nvSpPr>
+          <p:cNvPr id="15" name="Right Arrow 14"/>
           <p:cNvSpPr/>
           <p:nvPr/>
         </p:nvSpPr>
         <p:spPr>
           <a:xfrm>
-            <a:off x="3619423" y="2347849"/>
-            <a:ext cx="731520" cy="731520"/>
-          </a:xfrm>
-          <a:prstGeom prst="ellipse">
+            <a:off x="7909560" y="3246120"/>
+            <a:ext cx="201168" cy="164592"/>
+          </a:xfrm>
+          <a:prstGeom prst="rightArrow">
             <a:avLst/>
           </a:prstGeom>
           <a:solidFill>
-            <a:srgbClr val="E7F3FD"/>
+            <a:srgbClr val="1A6FC4"/>
           </a:solidFill>
           <a:ln>
             <a:noFill/>
@@ -29621,114 +29713,6 @@
           </a:p>
         </p:txBody>
       </p:sp>
-      <p:pic>
-        <p:nvPicPr>
-          <p:cNvPr id="14" name="아이콘:repeat" descr="repeat_13294B_1.6.png"/>
-          <p:cNvPicPr>
-            <a:picLocks noChangeAspect="1"/>
-          </p:cNvPicPr>
-          <p:nvPr/>
-        </p:nvPicPr>
-        <p:blipFill>
-          <a:blip r:embed="rId3"/>
-          <a:stretch>
-            <a:fillRect/>
-          </a:stretch>
-        </p:blipFill>
-        <p:spPr>
-          <a:xfrm>
-            <a:off x="3773043" y="2501468"/>
-            <a:ext cx="424281" cy="424281"/>
-          </a:xfrm>
-          <a:prstGeom prst="rect">
-            <a:avLst/>
-          </a:prstGeom>
-        </p:spPr>
-      </p:pic>
-      <p:sp>
-        <p:nvSpPr>
-          <p:cNvPr id="15" name="TextBox 14"/>
-          <p:cNvSpPr txBox="1"/>
-          <p:nvPr/>
-        </p:nvSpPr>
-        <p:spPr>
-          <a:xfrm>
-            <a:off x="3555415" y="3170809"/>
-            <a:ext cx="2238679" cy="2162302"/>
-          </a:xfrm>
-          <a:prstGeom prst="rect">
-            <a:avLst/>
-          </a:prstGeom>
-          <a:noFill/>
-        </p:spPr>
-        <p:txBody>
-          <a:bodyPr wrap="square" anchor="t"/>
-          <a:lstStyle/>
-          <a:p>
-            <a:pPr algn="l" eaLnBrk="0">
-              <a:lnSpc>
-                <a:spcPct val="110000"/>
-              </a:lnSpc>
-              <a:spcAft>
-                <a:spcPts val="400"/>
-              </a:spcAft>
-            </a:pPr>
-            <a:r>
-              <a:rPr sz="2150" b="1">
-                <a:solidFill>
-                  <a:srgbClr val="13294B"/>
-                </a:solidFill>
-                <a:latin typeface="맑은 고딕"/>
-                <a:ea typeface="맑은 고딕"/>
-                <a:cs typeface="맑은 고딕"/>
-              </a:rPr>
-              <a:t>연결과 반복</a:t>
-            </a:r>
-          </a:p>
-          <a:p>
-            <a:pPr algn="l" eaLnBrk="0" marL="200025" indent="-200025">
-              <a:lnSpc>
-                <a:spcPct val="110000"/>
-              </a:lnSpc>
-              <a:spcAft>
-                <a:spcPts val="400"/>
-              </a:spcAft>
-            </a:pPr>
-            <a:r>
-              <a:rPr sz="1750" b="0">
-                <a:solidFill>
-                  <a:srgbClr val="1F2A3A"/>
-                </a:solidFill>
-                <a:latin typeface="맑은 고딕"/>
-                <a:ea typeface="맑은 고딕"/>
-                <a:cs typeface="맑은 고딕"/>
-              </a:rPr>
-              <a:t>• 시나리오를 시험에 잇는다</a:t>
-            </a:r>
-          </a:p>
-          <a:p>
-            <a:pPr algn="l" eaLnBrk="0" marL="200025" indent="-200025">
-              <a:lnSpc>
-                <a:spcPct val="110000"/>
-              </a:lnSpc>
-              <a:spcAft>
-                <a:spcPts val="400"/>
-              </a:spcAft>
-            </a:pPr>
-            <a:r>
-              <a:rPr sz="1750" b="0">
-                <a:solidFill>
-                  <a:srgbClr val="1F2A3A"/>
-                </a:solidFill>
-                <a:latin typeface="맑은 고딕"/>
-                <a:ea typeface="맑은 고딕"/>
-                <a:cs typeface="맑은 고딕"/>
-              </a:rPr>
-              <a:t>• 입력 · 조회 자료 · 설정을 기록해 반복한다</a:t>
-            </a:r>
-          </a:p>
-        </p:txBody>
-      </p:sp>
       <p:sp>
         <p:nvSpPr>
           <p:cNvPr id="16" name="Rounded Rectangle 15"/>
@@ -29737,82 +29721,12 @@
         </p:nvSpPr>
         <p:spPr>
           <a:xfrm>
-            <a:off x="3619423" y="5406263"/>
-            <a:ext cx="822960" cy="292608"/>
+            <a:off x="8183880" y="1874519"/>
+            <a:ext cx="3429000" cy="2971800"/>
           </a:xfrm>
           <a:prstGeom prst="roundRect">
             <a:avLst>
-              <a:gd name="adj" fmla="val 50000"/>
-            </a:avLst>
-          </a:prstGeom>
-          <a:solidFill>
-            <a:srgbClr val="D3D9E1"/>
-          </a:solidFill>
-          <a:ln>
-            <a:noFill/>
-          </a:ln>
-        </p:spPr>
-        <p:txBody>
-          <a:bodyPr rtlCol="0" anchor="ctr"/>
-          <a:lstStyle/>
-          <a:p>
-            <a:pPr algn="ctr"/>
-          </a:p>
-        </p:txBody>
-      </p:sp>
-      <p:sp>
-        <p:nvSpPr>
-          <p:cNvPr id="17" name="TextBox 16"/>
-          <p:cNvSpPr txBox="1"/>
-          <p:nvPr/>
-        </p:nvSpPr>
-        <p:spPr>
-          <a:xfrm>
-            <a:off x="3619423" y="5406263"/>
-            <a:ext cx="822960" cy="292608"/>
-          </a:xfrm>
-          <a:prstGeom prst="rect">
-            <a:avLst/>
-          </a:prstGeom>
-          <a:noFill/>
-        </p:spPr>
-        <p:txBody>
-          <a:bodyPr wrap="square" anchor="ctr"/>
-          <a:lstStyle/>
-          <a:p>
-            <a:pPr algn="ctr" eaLnBrk="0">
-              <a:lnSpc>
-                <a:spcPct val="110000"/>
-              </a:lnSpc>
-            </a:pPr>
-            <a:r>
-              <a:rPr sz="1200" b="1">
-                <a:solidFill>
-                  <a:srgbClr val="13294B"/>
-                </a:solidFill>
-                <a:latin typeface="맑은 고딕"/>
-                <a:ea typeface="맑은 고딕"/>
-                <a:cs typeface="맑은 고딕"/>
-              </a:rPr>
-              <a:t>범위</a:t>
-            </a:r>
-          </a:p>
-        </p:txBody>
-      </p:sp>
-      <p:sp>
-        <p:nvSpPr>
-          <p:cNvPr id="18" name="Rounded Rectangle 17"/>
-          <p:cNvSpPr/>
-          <p:nvPr/>
-        </p:nvSpPr>
-        <p:spPr>
-          <a:xfrm>
-            <a:off x="6233007" y="2146680"/>
-            <a:ext cx="2567863" cy="3689350"/>
-          </a:xfrm>
-          <a:prstGeom prst="roundRect">
-            <a:avLst>
-              <a:gd name="adj" fmla="val 4000"/>
+              <a:gd name="adj" fmla="val 6000"/>
             </a:avLst>
           </a:prstGeom>
           <a:solidFill>
@@ -29834,233 +29748,161 @@
       </p:sp>
       <p:sp>
         <p:nvSpPr>
-          <p:cNvPr id="19" name="Oval 18"/>
+          <p:cNvPr id="17" name="TextBox 16"/>
+          <p:cNvSpPr txBox="1"/>
+          <p:nvPr/>
+        </p:nvSpPr>
+        <p:spPr>
+          <a:xfrm>
+            <a:off x="8348472" y="2057400"/>
+            <a:ext cx="3099816" cy="731520"/>
+          </a:xfrm>
+          <a:prstGeom prst="rect">
+            <a:avLst/>
+          </a:prstGeom>
+          <a:noFill/>
+        </p:spPr>
+        <p:txBody>
+          <a:bodyPr wrap="square" anchor="t"/>
+          <a:lstStyle/>
+          <a:p>
+            <a:pPr algn="l" eaLnBrk="0">
+              <a:lnSpc>
+                <a:spcPct val="110000"/>
+              </a:lnSpc>
+            </a:pPr>
+            <a:r>
+              <a:rPr sz="1800" b="1">
+                <a:solidFill>
+                  <a:srgbClr val="13294B"/>
+                </a:solidFill>
+                <a:latin typeface="맑은 고딕"/>
+                <a:ea typeface="맑은 고딕"/>
+                <a:cs typeface="맑은 고딕"/>
+              </a:rPr>
+              <a:t>로그와 위반 목록</a:t>
+            </a:r>
+          </a:p>
+        </p:txBody>
+      </p:sp>
+      <p:sp>
+        <p:nvSpPr>
+          <p:cNvPr id="18" name="TextBox 17"/>
+          <p:cNvSpPr txBox="1"/>
+          <p:nvPr/>
+        </p:nvSpPr>
+        <p:spPr>
+          <a:xfrm>
+            <a:off x="8348472" y="2926080"/>
+            <a:ext cx="3099816" cy="1371600"/>
+          </a:xfrm>
+          <a:prstGeom prst="rect">
+            <a:avLst/>
+          </a:prstGeom>
+          <a:noFill/>
+        </p:spPr>
+        <p:txBody>
+          <a:bodyPr wrap="square" anchor="t"/>
+          <a:lstStyle/>
+          <a:p>
+            <a:pPr algn="l" eaLnBrk="0">
+              <a:lnSpc>
+                <a:spcPct val="110000"/>
+              </a:lnSpc>
+            </a:pPr>
+            <a:r>
+              <a:rPr sz="1550" b="0">
+                <a:solidFill>
+                  <a:srgbClr val="13294B"/>
+                </a:solidFill>
+                <a:latin typeface="맑은 고딕"/>
+                <a:ea typeface="맑은 고딕"/>
+                <a:cs typeface="맑은 고딕"/>
+              </a:rPr>
+              <a:t>실제 출력과 기대값의 대조</a:t>
+            </a:r>
+          </a:p>
+          <a:p>
+            <a:pPr algn="l" eaLnBrk="0">
+              <a:lnSpc>
+                <a:spcPct val="110000"/>
+              </a:lnSpc>
+            </a:pPr>
+            <a:r>
+              <a:rPr sz="1550" b="0">
+                <a:solidFill>
+                  <a:srgbClr val="13294B"/>
+                </a:solidFill>
+                <a:latin typeface="맑은 고딕"/>
+                <a:ea typeface="맑은 고딕"/>
+                <a:cs typeface="맑은 고딕"/>
+              </a:rPr>
+              <a:t>어긋난 조건 · 실행 · 근거 파일</a:t>
+            </a:r>
+          </a:p>
+        </p:txBody>
+      </p:sp>
+      <p:sp>
+        <p:nvSpPr>
+          <p:cNvPr id="19" name="TextBox 18"/>
+          <p:cNvSpPr txBox="1"/>
+          <p:nvPr/>
+        </p:nvSpPr>
+        <p:spPr>
+          <a:xfrm>
+            <a:off x="8348472" y="4462272"/>
+            <a:ext cx="3099816" cy="274320"/>
+          </a:xfrm>
+          <a:prstGeom prst="rect">
+            <a:avLst/>
+          </a:prstGeom>
+          <a:noFill/>
+        </p:spPr>
+        <p:txBody>
+          <a:bodyPr wrap="square" anchor="t"/>
+          <a:lstStyle/>
+          <a:p>
+            <a:pPr algn="l" eaLnBrk="0">
+              <a:lnSpc>
+                <a:spcPct val="110000"/>
+              </a:lnSpc>
+            </a:pPr>
+            <a:r>
+              <a:rPr sz="1400" b="1">
+                <a:solidFill>
+                  <a:srgbClr val="1A6FC4"/>
+                </a:solidFill>
+                <a:latin typeface="맑은 고딕"/>
+                <a:ea typeface="맑은 고딕"/>
+                <a:cs typeface="맑은 고딕"/>
+              </a:rPr>
+              <a:t>산출물</a:t>
+            </a:r>
+          </a:p>
+        </p:txBody>
+      </p:sp>
+      <p:sp>
+        <p:nvSpPr>
+          <p:cNvPr id="20" name="Rounded Rectangle 19"/>
           <p:cNvSpPr/>
           <p:nvPr/>
         </p:nvSpPr>
         <p:spPr>
           <a:xfrm>
-            <a:off x="6461607" y="2347849"/>
-            <a:ext cx="731520" cy="731520"/>
-          </a:xfrm>
-          <a:prstGeom prst="ellipse">
-            <a:avLst/>
+            <a:off x="594360" y="5166360"/>
+            <a:ext cx="11018520" cy="960120"/>
+          </a:xfrm>
+          <a:prstGeom prst="roundRect">
+            <a:avLst>
+              <a:gd name="adj" fmla="val 6000"/>
+            </a:avLst>
           </a:prstGeom>
           <a:solidFill>
             <a:srgbClr val="E7F3FD"/>
           </a:solidFill>
-          <a:ln>
-            <a:noFill/>
-          </a:ln>
-        </p:spPr>
-        <p:txBody>
-          <a:bodyPr rtlCol="0" anchor="ctr"/>
-          <a:lstStyle/>
-          <a:p>
-            <a:pPr algn="ctr"/>
-          </a:p>
-        </p:txBody>
-      </p:sp>
-      <p:pic>
-        <p:nvPicPr>
-          <p:cNvPr id="20" name="아이콘:file-search" descr="file-search_13294B_1.6.png"/>
-          <p:cNvPicPr>
-            <a:picLocks noChangeAspect="1"/>
-          </p:cNvPicPr>
-          <p:nvPr/>
-        </p:nvPicPr>
-        <p:blipFill>
-          <a:blip r:embed="rId4"/>
-          <a:stretch>
-            <a:fillRect/>
-          </a:stretch>
-        </p:blipFill>
-        <p:spPr>
-          <a:xfrm>
-            <a:off x="6615226" y="2501468"/>
-            <a:ext cx="424281" cy="424281"/>
-          </a:xfrm>
-          <a:prstGeom prst="rect">
-            <a:avLst/>
-          </a:prstGeom>
-        </p:spPr>
-      </p:pic>
-      <p:sp>
-        <p:nvSpPr>
-          <p:cNvPr id="21" name="TextBox 20"/>
-          <p:cNvSpPr txBox="1"/>
-          <p:nvPr/>
-        </p:nvSpPr>
-        <p:spPr>
-          <a:xfrm>
-            <a:off x="6397599" y="3170809"/>
-            <a:ext cx="2238679" cy="2162302"/>
-          </a:xfrm>
-          <a:prstGeom prst="rect">
-            <a:avLst/>
-          </a:prstGeom>
-          <a:noFill/>
-        </p:spPr>
-        <p:txBody>
-          <a:bodyPr wrap="square" anchor="t"/>
-          <a:lstStyle/>
-          <a:p>
-            <a:pPr algn="l" eaLnBrk="0">
-              <a:lnSpc>
-                <a:spcPct val="110000"/>
-              </a:lnSpc>
-              <a:spcAft>
-                <a:spcPts val="400"/>
-              </a:spcAft>
-            </a:pPr>
-            <a:r>
-              <a:rPr sz="2150" b="1">
-                <a:solidFill>
-                  <a:srgbClr val="13294B"/>
-                </a:solidFill>
-                <a:latin typeface="맑은 고딕"/>
-                <a:ea typeface="맑은 고딕"/>
-                <a:cs typeface="맑은 고딕"/>
-              </a:rPr>
-              <a:t>로그와 위반 목록</a:t>
-            </a:r>
-          </a:p>
-          <a:p>
-            <a:pPr algn="l" eaLnBrk="0" marL="200025" indent="-200025">
-              <a:lnSpc>
-                <a:spcPct val="110000"/>
-              </a:lnSpc>
-              <a:spcAft>
-                <a:spcPts val="400"/>
-              </a:spcAft>
-            </a:pPr>
-            <a:r>
-              <a:rPr sz="1750" b="0">
-                <a:solidFill>
-                  <a:srgbClr val="1F2A3A"/>
-                </a:solidFill>
-                <a:latin typeface="맑은 고딕"/>
-                <a:ea typeface="맑은 고딕"/>
-                <a:cs typeface="맑은 고딕"/>
-              </a:rPr>
-              <a:t>• 실제 출력과 기대값의 대조</a:t>
-            </a:r>
-          </a:p>
-          <a:p>
-            <a:pPr algn="l" eaLnBrk="0" marL="200025" indent="-200025">
-              <a:lnSpc>
-                <a:spcPct val="110000"/>
-              </a:lnSpc>
-              <a:spcAft>
-                <a:spcPts val="400"/>
-              </a:spcAft>
-            </a:pPr>
-            <a:r>
-              <a:rPr sz="1750" b="0">
-                <a:solidFill>
-                  <a:srgbClr val="1F2A3A"/>
-                </a:solidFill>
-                <a:latin typeface="맑은 고딕"/>
-                <a:ea typeface="맑은 고딕"/>
-                <a:cs typeface="맑은 고딕"/>
-              </a:rPr>
-              <a:t>• 어긋난 조건 · 실행 · 근거 파일</a:t>
-            </a:r>
-          </a:p>
-        </p:txBody>
-      </p:sp>
-      <p:sp>
-        <p:nvSpPr>
-          <p:cNvPr id="22" name="Rounded Rectangle 21"/>
-          <p:cNvSpPr/>
-          <p:nvPr/>
-        </p:nvSpPr>
-        <p:spPr>
-          <a:xfrm>
-            <a:off x="6461607" y="5406263"/>
-            <a:ext cx="822960" cy="292608"/>
-          </a:xfrm>
-          <a:prstGeom prst="roundRect">
-            <a:avLst>
-              <a:gd name="adj" fmla="val 50000"/>
-            </a:avLst>
-          </a:prstGeom>
-          <a:solidFill>
-            <a:srgbClr val="D3D9E1"/>
-          </a:solidFill>
-          <a:ln>
-            <a:noFill/>
-          </a:ln>
-        </p:spPr>
-        <p:txBody>
-          <a:bodyPr rtlCol="0" anchor="ctr"/>
-          <a:lstStyle/>
-          <a:p>
-            <a:pPr algn="ctr"/>
-          </a:p>
-        </p:txBody>
-      </p:sp>
-      <p:sp>
-        <p:nvSpPr>
-          <p:cNvPr id="23" name="TextBox 22"/>
-          <p:cNvSpPr txBox="1"/>
-          <p:nvPr/>
-        </p:nvSpPr>
-        <p:spPr>
-          <a:xfrm>
-            <a:off x="6461607" y="5406263"/>
-            <a:ext cx="822960" cy="292608"/>
-          </a:xfrm>
-          <a:prstGeom prst="rect">
-            <a:avLst/>
-          </a:prstGeom>
-          <a:noFill/>
-        </p:spPr>
-        <p:txBody>
-          <a:bodyPr wrap="square" anchor="ctr"/>
-          <a:lstStyle/>
-          <a:p>
-            <a:pPr algn="ctr" eaLnBrk="0">
-              <a:lnSpc>
-                <a:spcPct val="110000"/>
-              </a:lnSpc>
-            </a:pPr>
-            <a:r>
-              <a:rPr sz="1200" b="1">
-                <a:solidFill>
-                  <a:srgbClr val="13294B"/>
-                </a:solidFill>
-                <a:latin typeface="맑은 고딕"/>
-                <a:ea typeface="맑은 고딕"/>
-                <a:cs typeface="맑은 고딕"/>
-              </a:rPr>
-              <a:t>산출물</a:t>
-            </a:r>
-          </a:p>
-        </p:txBody>
-      </p:sp>
-      <p:sp>
-        <p:nvSpPr>
-          <p:cNvPr id="24" name="Rounded Rectangle 23"/>
-          <p:cNvSpPr/>
-          <p:nvPr/>
-        </p:nvSpPr>
-        <p:spPr>
-          <a:xfrm>
-            <a:off x="9075191" y="2146680"/>
-            <a:ext cx="2567863" cy="3689350"/>
-          </a:xfrm>
-          <a:prstGeom prst="roundRect">
-            <a:avLst>
-              <a:gd name="adj" fmla="val 4000"/>
-            </a:avLst>
-          </a:prstGeom>
-          <a:solidFill>
-            <a:srgbClr val="FFFFFF"/>
-          </a:solidFill>
-          <a:ln w="28575">
+          <a:ln w="12700">
             <a:solidFill>
-              <a:srgbClr val="5CB8F2"/>
+              <a:srgbClr val="D3D9E1"/>
             </a:solidFill>
           </a:ln>
         </p:spPr>
@@ -30074,67 +29916,14 @@
       </p:sp>
       <p:sp>
         <p:nvSpPr>
-          <p:cNvPr id="25" name="Oval 24"/>
-          <p:cNvSpPr/>
-          <p:nvPr/>
-        </p:nvSpPr>
-        <p:spPr>
-          <a:xfrm>
-            <a:off x="9303791" y="2347849"/>
-            <a:ext cx="731520" cy="731520"/>
-          </a:xfrm>
-          <a:prstGeom prst="ellipse">
-            <a:avLst/>
-          </a:prstGeom>
-          <a:solidFill>
-            <a:srgbClr val="5CB8F2"/>
-          </a:solidFill>
-          <a:ln>
-            <a:noFill/>
-          </a:ln>
-        </p:spPr>
-        <p:txBody>
-          <a:bodyPr rtlCol="0" anchor="ctr"/>
-          <a:lstStyle/>
-          <a:p>
-            <a:pPr algn="ctr"/>
-          </a:p>
-        </p:txBody>
-      </p:sp>
-      <p:pic>
-        <p:nvPicPr>
-          <p:cNvPr id="26" name="아이콘:scale" descr="scale_13294B_1.6.png"/>
-          <p:cNvPicPr>
-            <a:picLocks noChangeAspect="1"/>
-          </p:cNvPicPr>
-          <p:nvPr/>
-        </p:nvPicPr>
-        <p:blipFill>
-          <a:blip r:embed="rId5"/>
-          <a:stretch>
-            <a:fillRect/>
-          </a:stretch>
-        </p:blipFill>
-        <p:spPr>
-          <a:xfrm>
-            <a:off x="9457410" y="2501468"/>
-            <a:ext cx="424281" cy="424281"/>
-          </a:xfrm>
-          <a:prstGeom prst="rect">
-            <a:avLst/>
-          </a:prstGeom>
-        </p:spPr>
-      </p:pic>
-      <p:sp>
-        <p:nvSpPr>
-          <p:cNvPr id="27" name="TextBox 26"/>
-          <p:cNvSpPr txBox="1"/>
-          <p:nvPr/>
-        </p:nvSpPr>
-        <p:spPr>
-          <a:xfrm>
-            <a:off x="9239783" y="3170809"/>
-            <a:ext cx="2238679" cy="2162302"/>
+          <p:cNvPr id="21" name="TextBox 20"/>
+          <p:cNvSpPr txBox="1"/>
+          <p:nvPr/>
+        </p:nvSpPr>
+        <p:spPr>
+          <a:xfrm>
+            <a:off x="822960" y="5349240"/>
+            <a:ext cx="1828800" cy="365760"/>
           </a:xfrm>
           <a:prstGeom prst="rect">
             <a:avLst/>
@@ -30149,12 +29938,9 @@
               <a:lnSpc>
                 <a:spcPct val="110000"/>
               </a:lnSpc>
-              <a:spcAft>
-                <a:spcPts val="400"/>
-              </a:spcAft>
-            </a:pPr>
-            <a:r>
-              <a:rPr sz="2150" b="1">
+            </a:pPr>
+            <a:r>
+              <a:rPr sz="1900" b="1">
                 <a:solidFill>
                   <a:srgbClr val="13294B"/>
                 </a:solidFill>
@@ -30165,108 +29951,35 @@
               <a:t>성공 기준</a:t>
             </a:r>
           </a:p>
-          <a:p>
-            <a:pPr algn="l" eaLnBrk="0" marL="200025" indent="-200025">
-              <a:lnSpc>
-                <a:spcPct val="110000"/>
-              </a:lnSpc>
-              <a:spcAft>
-                <a:spcPts val="400"/>
-              </a:spcAft>
-            </a:pPr>
-            <a:r>
-              <a:rPr sz="1750" b="0">
-                <a:solidFill>
-                  <a:srgbClr val="1F2A3A"/>
-                </a:solidFill>
-                <a:latin typeface="맑은 고딕"/>
-                <a:ea typeface="맑은 고딕"/>
-                <a:cs typeface="맑은 고딕"/>
-              </a:rPr>
-              <a:t>• 어긋남마다 표현 차이인지</a:t>
-            </a:r>
-          </a:p>
-          <a:p>
-            <a:pPr algn="l" eaLnBrk="0" marL="200025" indent="-200025">
-              <a:lnSpc>
-                <a:spcPct val="110000"/>
-              </a:lnSpc>
-              <a:spcAft>
-                <a:spcPts val="400"/>
-              </a:spcAft>
-            </a:pPr>
-            <a:r>
-              <a:rPr sz="1750" b="0">
-                <a:solidFill>
-                  <a:srgbClr val="1F2A3A"/>
-                </a:solidFill>
-                <a:latin typeface="맑은 고딕"/>
-                <a:ea typeface="맑은 고딕"/>
-                <a:cs typeface="맑은 고딕"/>
-              </a:rPr>
-              <a:t>• 계약 위반인지가 갈려 있다</a:t>
-            </a:r>
-          </a:p>
-        </p:txBody>
-      </p:sp>
-      <p:sp>
-        <p:nvSpPr>
-          <p:cNvPr id="28" name="Rounded Rectangle 27"/>
-          <p:cNvSpPr/>
-          <p:nvPr/>
-        </p:nvSpPr>
-        <p:spPr>
-          <a:xfrm>
-            <a:off x="9303791" y="5406263"/>
-            <a:ext cx="822960" cy="292608"/>
-          </a:xfrm>
-          <a:prstGeom prst="roundRect">
-            <a:avLst>
-              <a:gd name="adj" fmla="val 50000"/>
-            </a:avLst>
-          </a:prstGeom>
-          <a:solidFill>
-            <a:srgbClr val="5CB8F2"/>
-          </a:solidFill>
-          <a:ln>
-            <a:noFill/>
-          </a:ln>
-        </p:spPr>
-        <p:txBody>
-          <a:bodyPr rtlCol="0" anchor="ctr"/>
-          <a:lstStyle/>
-          <a:p>
-            <a:pPr algn="ctr"/>
-          </a:p>
-        </p:txBody>
-      </p:sp>
-      <p:sp>
-        <p:nvSpPr>
-          <p:cNvPr id="29" name="TextBox 28"/>
-          <p:cNvSpPr txBox="1"/>
-          <p:nvPr/>
-        </p:nvSpPr>
-        <p:spPr>
-          <a:xfrm>
-            <a:off x="9303791" y="5406263"/>
-            <a:ext cx="822960" cy="292608"/>
-          </a:xfrm>
-          <a:prstGeom prst="rect">
-            <a:avLst/>
-          </a:prstGeom>
-          <a:noFill/>
-        </p:spPr>
-        <p:txBody>
-          <a:bodyPr wrap="square" anchor="ctr"/>
-          <a:lstStyle/>
-          <a:p>
-            <a:pPr algn="ctr" eaLnBrk="0">
-              <a:lnSpc>
-                <a:spcPct val="110000"/>
-              </a:lnSpc>
-            </a:pPr>
-            <a:r>
-              <a:rPr sz="1200" b="1">
+        </p:txBody>
+      </p:sp>
+      <p:sp>
+        <p:nvSpPr>
+          <p:cNvPr id="22" name="TextBox 21"/>
+          <p:cNvSpPr txBox="1"/>
+          <p:nvPr/>
+        </p:nvSpPr>
+        <p:spPr>
+          <a:xfrm>
+            <a:off x="2880360" y="5303520"/>
+            <a:ext cx="8412480" cy="731520"/>
+          </a:xfrm>
+          <a:prstGeom prst="rect">
+            <a:avLst/>
+          </a:prstGeom>
+          <a:noFill/>
+        </p:spPr>
+        <p:txBody>
+          <a:bodyPr wrap="square" anchor="t"/>
+          <a:lstStyle/>
+          <a:p>
+            <a:pPr algn="l" eaLnBrk="0">
+              <a:lnSpc>
+                <a:spcPct val="110000"/>
+              </a:lnSpc>
+            </a:pPr>
+            <a:r>
+              <a:rPr sz="1700" b="0">
                 <a:solidFill>
                   <a:srgbClr val="13294B"/>
                 </a:solidFill>
@@ -30274,7 +29987,25 @@
                 <a:ea typeface="맑은 고딕"/>
                 <a:cs typeface="맑은 고딕"/>
               </a:rPr>
-              <a:t>판정</a:t>
+              <a:t>어긋남마다 표현 차이인지</a:t>
+            </a:r>
+          </a:p>
+          <a:p>
+            <a:pPr algn="l" eaLnBrk="0">
+              <a:lnSpc>
+                <a:spcPct val="110000"/>
+              </a:lnSpc>
+            </a:pPr>
+            <a:r>
+              <a:rPr sz="1700" b="0">
+                <a:solidFill>
+                  <a:srgbClr val="13294B"/>
+                </a:solidFill>
+                <a:latin typeface="맑은 고딕"/>
+                <a:ea typeface="맑은 고딕"/>
+                <a:cs typeface="맑은 고딕"/>
+              </a:rPr>
+              <a:t>계약 위반인지가 갈려 있다</a:t>
             </a:r>
           </a:p>
         </p:txBody>
@@ -30701,12 +30432,12 @@
         </p:nvSpPr>
         <p:spPr>
           <a:xfrm>
-            <a:off x="548640" y="2123439"/>
-            <a:ext cx="2567863" cy="3735832"/>
+            <a:off x="594360" y="1874519"/>
+            <a:ext cx="3429000" cy="2971800"/>
           </a:xfrm>
           <a:prstGeom prst="roundRect">
             <a:avLst>
-              <a:gd name="adj" fmla="val 4000"/>
+              <a:gd name="adj" fmla="val 6000"/>
             </a:avLst>
           </a:prstGeom>
           <a:solidFill>
@@ -30728,20 +30459,137 @@
       </p:sp>
       <p:sp>
         <p:nvSpPr>
-          <p:cNvPr id="7" name="Oval 6"/>
+          <p:cNvPr id="7" name="TextBox 6"/>
+          <p:cNvSpPr txBox="1"/>
+          <p:nvPr/>
+        </p:nvSpPr>
+        <p:spPr>
+          <a:xfrm>
+            <a:off x="758952" y="2057400"/>
+            <a:ext cx="3099816" cy="731520"/>
+          </a:xfrm>
+          <a:prstGeom prst="rect">
+            <a:avLst/>
+          </a:prstGeom>
+          <a:noFill/>
+        </p:spPr>
+        <p:txBody>
+          <a:bodyPr wrap="square" anchor="t"/>
+          <a:lstStyle/>
+          <a:p>
+            <a:pPr algn="l" eaLnBrk="0">
+              <a:lnSpc>
+                <a:spcPct val="110000"/>
+              </a:lnSpc>
+            </a:pPr>
+            <a:r>
+              <a:rPr sz="1800" b="1">
+                <a:solidFill>
+                  <a:srgbClr val="13294B"/>
+                </a:solidFill>
+                <a:latin typeface="맑은 고딕"/>
+                <a:ea typeface="맑은 고딕"/>
+                <a:cs typeface="맑은 고딕"/>
+              </a:rPr>
+              <a:t>입력</a:t>
+            </a:r>
+          </a:p>
+        </p:txBody>
+      </p:sp>
+      <p:sp>
+        <p:nvSpPr>
+          <p:cNvPr id="8" name="TextBox 7"/>
+          <p:cNvSpPr txBox="1"/>
+          <p:nvPr/>
+        </p:nvSpPr>
+        <p:spPr>
+          <a:xfrm>
+            <a:off x="758952" y="2926080"/>
+            <a:ext cx="3099816" cy="1371600"/>
+          </a:xfrm>
+          <a:prstGeom prst="rect">
+            <a:avLst/>
+          </a:prstGeom>
+          <a:noFill/>
+        </p:spPr>
+        <p:txBody>
+          <a:bodyPr wrap="square" anchor="t"/>
+          <a:lstStyle/>
+          <a:p>
+            <a:pPr algn="l" eaLnBrk="0">
+              <a:lnSpc>
+                <a:spcPct val="110000"/>
+              </a:lnSpc>
+            </a:pPr>
+            <a:r>
+              <a:rPr sz="1600" b="0">
+                <a:solidFill>
+                  <a:srgbClr val="13294B"/>
+                </a:solidFill>
+                <a:latin typeface="맑은 고딕"/>
+                <a:ea typeface="맑은 고딕"/>
+                <a:cs typeface="맑은 고딕"/>
+              </a:rPr>
+              <a:t>위반 목록에서 실제로 실패한 시나리오</a:t>
+            </a:r>
+          </a:p>
+        </p:txBody>
+      </p:sp>
+      <p:sp>
+        <p:nvSpPr>
+          <p:cNvPr id="9" name="TextBox 8"/>
+          <p:cNvSpPr txBox="1"/>
+          <p:nvPr/>
+        </p:nvSpPr>
+        <p:spPr>
+          <a:xfrm>
+            <a:off x="758952" y="4462272"/>
+            <a:ext cx="3099816" cy="274320"/>
+          </a:xfrm>
+          <a:prstGeom prst="rect">
+            <a:avLst/>
+          </a:prstGeom>
+          <a:noFill/>
+        </p:spPr>
+        <p:txBody>
+          <a:bodyPr wrap="square" anchor="t"/>
+          <a:lstStyle/>
+          <a:p>
+            <a:pPr algn="l" eaLnBrk="0">
+              <a:lnSpc>
+                <a:spcPct val="110000"/>
+              </a:lnSpc>
+            </a:pPr>
+            <a:r>
+              <a:rPr sz="1400" b="1">
+                <a:solidFill>
+                  <a:srgbClr val="1A6FC4"/>
+                </a:solidFill>
+                <a:latin typeface="맑은 고딕"/>
+                <a:ea typeface="맑은 고딕"/>
+                <a:cs typeface="맑은 고딕"/>
+              </a:rPr>
+              <a:t>출발점</a:t>
+            </a:r>
+          </a:p>
+        </p:txBody>
+      </p:sp>
+      <p:sp>
+        <p:nvSpPr>
+          <p:cNvPr id="10" name="Right Arrow 9"/>
           <p:cNvSpPr/>
           <p:nvPr/>
         </p:nvSpPr>
         <p:spPr>
           <a:xfrm>
-            <a:off x="777240" y="2324608"/>
-            <a:ext cx="731520" cy="731520"/>
-          </a:xfrm>
-          <a:prstGeom prst="ellipse">
+            <a:off x="4114800" y="3246120"/>
+            <a:ext cx="201168" cy="164592"/>
+          </a:xfrm>
+          <a:prstGeom prst="rightArrow">
             <a:avLst/>
           </a:prstGeom>
           <a:solidFill>
-            <a:srgbClr val="E7F3FD"/>
+            <a:srgbClr val="1A6FC4"/>
           </a:solidFill>
           <a:ln>
             <a:noFill/>
@@ -30755,177 +30603,20 @@
           </a:p>
         </p:txBody>
       </p:sp>
-      <p:pic>
-        <p:nvPicPr>
-          <p:cNvPr id="8" name="아이콘:bug" descr="bug_13294B_1.6.png"/>
-          <p:cNvPicPr>
-            <a:picLocks noChangeAspect="1"/>
-          </p:cNvPicPr>
-          <p:nvPr/>
-        </p:nvPicPr>
-        <p:blipFill>
-          <a:blip r:embed="rId2"/>
-          <a:stretch>
-            <a:fillRect/>
-          </a:stretch>
-        </p:blipFill>
-        <p:spPr>
-          <a:xfrm>
-            <a:off x="930859" y="2478227"/>
-            <a:ext cx="424281" cy="424281"/>
-          </a:xfrm>
-          <a:prstGeom prst="rect">
-            <a:avLst/>
-          </a:prstGeom>
-        </p:spPr>
-      </p:pic>
-      <p:sp>
-        <p:nvSpPr>
-          <p:cNvPr id="9" name="TextBox 8"/>
-          <p:cNvSpPr txBox="1"/>
-          <p:nvPr/>
-        </p:nvSpPr>
-        <p:spPr>
-          <a:xfrm>
-            <a:off x="713232" y="3147568"/>
-            <a:ext cx="2238679" cy="2208784"/>
-          </a:xfrm>
-          <a:prstGeom prst="rect">
-            <a:avLst/>
-          </a:prstGeom>
-          <a:noFill/>
-        </p:spPr>
-        <p:txBody>
-          <a:bodyPr wrap="square" anchor="t"/>
-          <a:lstStyle/>
-          <a:p>
-            <a:pPr algn="l" eaLnBrk="0">
-              <a:lnSpc>
-                <a:spcPct val="110000"/>
-              </a:lnSpc>
-              <a:spcAft>
-                <a:spcPts val="400"/>
-              </a:spcAft>
-            </a:pPr>
-            <a:r>
-              <a:rPr sz="1800" b="1">
-                <a:solidFill>
-                  <a:srgbClr val="13294B"/>
-                </a:solidFill>
-                <a:latin typeface="맑은 고딕"/>
-                <a:ea typeface="맑은 고딕"/>
-                <a:cs typeface="맑은 고딕"/>
-              </a:rPr>
-              <a:t>입력</a:t>
-            </a:r>
-          </a:p>
-          <a:p>
-            <a:pPr algn="l" eaLnBrk="0">
-              <a:lnSpc>
-                <a:spcPct val="110000"/>
-              </a:lnSpc>
-              <a:spcAft>
-                <a:spcPts val="400"/>
-              </a:spcAft>
-            </a:pPr>
-            <a:r>
-              <a:rPr sz="1400" b="0">
-                <a:solidFill>
-                  <a:srgbClr val="1F2A3A"/>
-                </a:solidFill>
-                <a:latin typeface="맑은 고딕"/>
-                <a:ea typeface="맑은 고딕"/>
-                <a:cs typeface="맑은 고딕"/>
-              </a:rPr>
-              <a:t>위반 목록에서 실제로 실패한 시나리오</a:t>
-            </a:r>
-          </a:p>
-        </p:txBody>
-      </p:sp>
-      <p:sp>
-        <p:nvSpPr>
-          <p:cNvPr id="10" name="Rounded Rectangle 9"/>
+      <p:sp>
+        <p:nvSpPr>
+          <p:cNvPr id="11" name="Rounded Rectangle 10"/>
           <p:cNvSpPr/>
           <p:nvPr/>
         </p:nvSpPr>
         <p:spPr>
           <a:xfrm>
-            <a:off x="777240" y="5429504"/>
-            <a:ext cx="822960" cy="292608"/>
+            <a:off x="4389120" y="1874519"/>
+            <a:ext cx="3429000" cy="2971800"/>
           </a:xfrm>
           <a:prstGeom prst="roundRect">
             <a:avLst>
-              <a:gd name="adj" fmla="val 50000"/>
-            </a:avLst>
-          </a:prstGeom>
-          <a:solidFill>
-            <a:srgbClr val="D3D9E1"/>
-          </a:solidFill>
-          <a:ln>
-            <a:noFill/>
-          </a:ln>
-        </p:spPr>
-        <p:txBody>
-          <a:bodyPr rtlCol="0" anchor="ctr"/>
-          <a:lstStyle/>
-          <a:p>
-            <a:pPr algn="ctr"/>
-          </a:p>
-        </p:txBody>
-      </p:sp>
-      <p:sp>
-        <p:nvSpPr>
-          <p:cNvPr id="11" name="TextBox 10"/>
-          <p:cNvSpPr txBox="1"/>
-          <p:nvPr/>
-        </p:nvSpPr>
-        <p:spPr>
-          <a:xfrm>
-            <a:off x="777240" y="5429504"/>
-            <a:ext cx="822960" cy="292608"/>
-          </a:xfrm>
-          <a:prstGeom prst="rect">
-            <a:avLst/>
-          </a:prstGeom>
-          <a:noFill/>
-        </p:spPr>
-        <p:txBody>
-          <a:bodyPr wrap="square" anchor="ctr"/>
-          <a:lstStyle/>
-          <a:p>
-            <a:pPr algn="ctr" eaLnBrk="0">
-              <a:lnSpc>
-                <a:spcPct val="110000"/>
-              </a:lnSpc>
-            </a:pPr>
-            <a:r>
-              <a:rPr sz="1200" b="1">
-                <a:solidFill>
-                  <a:srgbClr val="13294B"/>
-                </a:solidFill>
-                <a:latin typeface="맑은 고딕"/>
-                <a:ea typeface="맑은 고딕"/>
-                <a:cs typeface="맑은 고딕"/>
-              </a:rPr>
-              <a:t>출발점</a:t>
-            </a:r>
-          </a:p>
-        </p:txBody>
-      </p:sp>
-      <p:sp>
-        <p:nvSpPr>
-          <p:cNvPr id="12" name="Rounded Rectangle 11"/>
-          <p:cNvSpPr/>
-          <p:nvPr/>
-        </p:nvSpPr>
-        <p:spPr>
-          <a:xfrm>
-            <a:off x="3390823" y="2123439"/>
-            <a:ext cx="2567863" cy="3735832"/>
-          </a:xfrm>
-          <a:prstGeom prst="roundRect">
-            <a:avLst>
-              <a:gd name="adj" fmla="val 4000"/>
+              <a:gd name="adj" fmla="val 6000"/>
             </a:avLst>
           </a:prstGeom>
           <a:solidFill>
@@ -30947,20 +30638,173 @@
       </p:sp>
       <p:sp>
         <p:nvSpPr>
-          <p:cNvPr id="13" name="Oval 12"/>
+          <p:cNvPr id="12" name="TextBox 11"/>
+          <p:cNvSpPr txBox="1"/>
+          <p:nvPr/>
+        </p:nvSpPr>
+        <p:spPr>
+          <a:xfrm>
+            <a:off x="4553712" y="2057400"/>
+            <a:ext cx="3099816" cy="731520"/>
+          </a:xfrm>
+          <a:prstGeom prst="rect">
+            <a:avLst/>
+          </a:prstGeom>
+          <a:noFill/>
+        </p:spPr>
+        <p:txBody>
+          <a:bodyPr wrap="square" anchor="t"/>
+          <a:lstStyle/>
+          <a:p>
+            <a:pPr algn="l" eaLnBrk="0">
+              <a:lnSpc>
+                <a:spcPct val="110000"/>
+              </a:lnSpc>
+            </a:pPr>
+            <a:r>
+              <a:rPr sz="1800" b="1">
+                <a:solidFill>
+                  <a:srgbClr val="13294B"/>
+                </a:solidFill>
+                <a:latin typeface="맑은 고딕"/>
+                <a:ea typeface="맑은 고딕"/>
+                <a:cs typeface="맑은 고딕"/>
+              </a:rPr>
+              <a:t>원인과 수정</a:t>
+            </a:r>
+          </a:p>
+        </p:txBody>
+      </p:sp>
+      <p:sp>
+        <p:nvSpPr>
+          <p:cNvPr id="13" name="TextBox 12"/>
+          <p:cNvSpPr txBox="1"/>
+          <p:nvPr/>
+        </p:nvSpPr>
+        <p:spPr>
+          <a:xfrm>
+            <a:off x="4553712" y="2926080"/>
+            <a:ext cx="3099816" cy="1371600"/>
+          </a:xfrm>
+          <a:prstGeom prst="rect">
+            <a:avLst/>
+          </a:prstGeom>
+          <a:noFill/>
+        </p:spPr>
+        <p:txBody>
+          <a:bodyPr wrap="square" anchor="t"/>
+          <a:lstStyle/>
+          <a:p>
+            <a:pPr algn="l" eaLnBrk="0">
+              <a:lnSpc>
+                <a:spcPct val="110000"/>
+              </a:lnSpc>
+            </a:pPr>
+            <a:r>
+              <a:rPr sz="1600" b="0">
+                <a:solidFill>
+                  <a:srgbClr val="13294B"/>
+                </a:solidFill>
+                <a:latin typeface="맑은 고딕"/>
+                <a:ea typeface="맑은 고딕"/>
+                <a:cs typeface="맑은 고딕"/>
+              </a:rPr>
+              <a:t>지침(프롬프트) · 지식 · 명세 · 코드 가운데</a:t>
+            </a:r>
+          </a:p>
+          <a:p>
+            <a:pPr algn="l" eaLnBrk="0">
+              <a:lnSpc>
+                <a:spcPct val="110000"/>
+              </a:lnSpc>
+            </a:pPr>
+            <a:r>
+              <a:rPr sz="1600" b="0">
+                <a:solidFill>
+                  <a:srgbClr val="13294B"/>
+                </a:solidFill>
+                <a:latin typeface="맑은 고딕"/>
+                <a:ea typeface="맑은 고딕"/>
+                <a:cs typeface="맑은 고딕"/>
+              </a:rPr>
+              <a:t>고칠 곳을 가려 바이브 코딩으로 고친다</a:t>
+            </a:r>
+          </a:p>
+          <a:p>
+            <a:pPr algn="l" eaLnBrk="0">
+              <a:lnSpc>
+                <a:spcPct val="110000"/>
+              </a:lnSpc>
+            </a:pPr>
+            <a:r>
+              <a:rPr sz="1600" b="0">
+                <a:solidFill>
+                  <a:srgbClr val="13294B"/>
+                </a:solidFill>
+                <a:latin typeface="맑은 고딕"/>
+                <a:ea typeface="맑은 고딕"/>
+                <a:cs typeface="맑은 고딕"/>
+              </a:rPr>
+              <a:t>기대값은 낮추지 않는다</a:t>
+            </a:r>
+          </a:p>
+        </p:txBody>
+      </p:sp>
+      <p:sp>
+        <p:nvSpPr>
+          <p:cNvPr id="14" name="TextBox 13"/>
+          <p:cNvSpPr txBox="1"/>
+          <p:nvPr/>
+        </p:nvSpPr>
+        <p:spPr>
+          <a:xfrm>
+            <a:off x="4553712" y="4462272"/>
+            <a:ext cx="3099816" cy="274320"/>
+          </a:xfrm>
+          <a:prstGeom prst="rect">
+            <a:avLst/>
+          </a:prstGeom>
+          <a:noFill/>
+        </p:spPr>
+        <p:txBody>
+          <a:bodyPr wrap="square" anchor="t"/>
+          <a:lstStyle/>
+          <a:p>
+            <a:pPr algn="l" eaLnBrk="0">
+              <a:lnSpc>
+                <a:spcPct val="110000"/>
+              </a:lnSpc>
+            </a:pPr>
+            <a:r>
+              <a:rPr sz="1400" b="1">
+                <a:solidFill>
+                  <a:srgbClr val="1A6FC4"/>
+                </a:solidFill>
+                <a:latin typeface="맑은 고딕"/>
+                <a:ea typeface="맑은 고딕"/>
+                <a:cs typeface="맑은 고딕"/>
+              </a:rPr>
+              <a:t>범위</a:t>
+            </a:r>
+          </a:p>
+        </p:txBody>
+      </p:sp>
+      <p:sp>
+        <p:nvSpPr>
+          <p:cNvPr id="15" name="Right Arrow 14"/>
           <p:cNvSpPr/>
           <p:nvPr/>
         </p:nvSpPr>
         <p:spPr>
           <a:xfrm>
-            <a:off x="3619423" y="2324608"/>
-            <a:ext cx="731520" cy="731520"/>
-          </a:xfrm>
-          <a:prstGeom prst="ellipse">
+            <a:off x="7909560" y="3246120"/>
+            <a:ext cx="201168" cy="164592"/>
+          </a:xfrm>
+          <a:prstGeom prst="rightArrow">
             <a:avLst/>
           </a:prstGeom>
           <a:solidFill>
-            <a:srgbClr val="E7F3FD"/>
+            <a:srgbClr val="1A6FC4"/>
           </a:solidFill>
           <a:ln>
             <a:noFill/>
@@ -30974,135 +30818,6 @@
           </a:p>
         </p:txBody>
       </p:sp>
-      <p:pic>
-        <p:nvPicPr>
-          <p:cNvPr id="14" name="아이콘:tool" descr="tool_13294B_1.6.png"/>
-          <p:cNvPicPr>
-            <a:picLocks noChangeAspect="1"/>
-          </p:cNvPicPr>
-          <p:nvPr/>
-        </p:nvPicPr>
-        <p:blipFill>
-          <a:blip r:embed="rId3"/>
-          <a:stretch>
-            <a:fillRect/>
-          </a:stretch>
-        </p:blipFill>
-        <p:spPr>
-          <a:xfrm>
-            <a:off x="3773043" y="2478227"/>
-            <a:ext cx="424281" cy="424281"/>
-          </a:xfrm>
-          <a:prstGeom prst="rect">
-            <a:avLst/>
-          </a:prstGeom>
-        </p:spPr>
-      </p:pic>
-      <p:sp>
-        <p:nvSpPr>
-          <p:cNvPr id="15" name="TextBox 14"/>
-          <p:cNvSpPr txBox="1"/>
-          <p:nvPr/>
-        </p:nvSpPr>
-        <p:spPr>
-          <a:xfrm>
-            <a:off x="3555415" y="3147568"/>
-            <a:ext cx="2238679" cy="2208784"/>
-          </a:xfrm>
-          <a:prstGeom prst="rect">
-            <a:avLst/>
-          </a:prstGeom>
-          <a:noFill/>
-        </p:spPr>
-        <p:txBody>
-          <a:bodyPr wrap="square" anchor="t"/>
-          <a:lstStyle/>
-          <a:p>
-            <a:pPr algn="l" eaLnBrk="0">
-              <a:lnSpc>
-                <a:spcPct val="110000"/>
-              </a:lnSpc>
-              <a:spcAft>
-                <a:spcPts val="400"/>
-              </a:spcAft>
-            </a:pPr>
-            <a:r>
-              <a:rPr sz="1800" b="1">
-                <a:solidFill>
-                  <a:srgbClr val="13294B"/>
-                </a:solidFill>
-                <a:latin typeface="맑은 고딕"/>
-                <a:ea typeface="맑은 고딕"/>
-                <a:cs typeface="맑은 고딕"/>
-              </a:rPr>
-              <a:t>원인과 수정</a:t>
-            </a:r>
-          </a:p>
-          <a:p>
-            <a:pPr algn="l" eaLnBrk="0" marL="160020" indent="-160020">
-              <a:lnSpc>
-                <a:spcPct val="110000"/>
-              </a:lnSpc>
-              <a:spcAft>
-                <a:spcPts val="400"/>
-              </a:spcAft>
-            </a:pPr>
-            <a:r>
-              <a:rPr sz="1400" b="0">
-                <a:solidFill>
-                  <a:srgbClr val="1F2A3A"/>
-                </a:solidFill>
-                <a:latin typeface="맑은 고딕"/>
-                <a:ea typeface="맑은 고딕"/>
-                <a:cs typeface="맑은 고딕"/>
-              </a:rPr>
-              <a:t>• 지침(프롬프트) · 지식 · 명세 · 코드 가운데</a:t>
-            </a:r>
-          </a:p>
-          <a:p>
-            <a:pPr algn="l" eaLnBrk="0" marL="160020" indent="-160020">
-              <a:lnSpc>
-                <a:spcPct val="110000"/>
-              </a:lnSpc>
-              <a:spcAft>
-                <a:spcPts val="400"/>
-              </a:spcAft>
-            </a:pPr>
-            <a:r>
-              <a:rPr sz="1400" b="0">
-                <a:solidFill>
-                  <a:srgbClr val="1F2A3A"/>
-                </a:solidFill>
-                <a:latin typeface="맑은 고딕"/>
-                <a:ea typeface="맑은 고딕"/>
-                <a:cs typeface="맑은 고딕"/>
-              </a:rPr>
-              <a:t>• 고칠 곳을 가려 바이브 코딩으로 고친다</a:t>
-            </a:r>
-          </a:p>
-          <a:p>
-            <a:pPr algn="l" eaLnBrk="0" marL="160020" indent="-160020">
-              <a:lnSpc>
-                <a:spcPct val="110000"/>
-              </a:lnSpc>
-              <a:spcAft>
-                <a:spcPts val="400"/>
-              </a:spcAft>
-            </a:pPr>
-            <a:r>
-              <a:rPr sz="1400" b="0">
-                <a:solidFill>
-                  <a:srgbClr val="1F2A3A"/>
-                </a:solidFill>
-                <a:latin typeface="맑은 고딕"/>
-                <a:ea typeface="맑은 고딕"/>
-                <a:cs typeface="맑은 고딕"/>
-              </a:rPr>
-              <a:t>• 기대값은 낮추지 않는다</a:t>
-            </a:r>
-          </a:p>
-        </p:txBody>
-      </p:sp>
       <p:sp>
         <p:nvSpPr>
           <p:cNvPr id="16" name="Rounded Rectangle 15"/>
@@ -31111,82 +30826,12 @@
         </p:nvSpPr>
         <p:spPr>
           <a:xfrm>
-            <a:off x="3619423" y="5429504"/>
-            <a:ext cx="822960" cy="292608"/>
+            <a:off x="8183880" y="1874519"/>
+            <a:ext cx="3429000" cy="2971800"/>
           </a:xfrm>
           <a:prstGeom prst="roundRect">
             <a:avLst>
-              <a:gd name="adj" fmla="val 50000"/>
-            </a:avLst>
-          </a:prstGeom>
-          <a:solidFill>
-            <a:srgbClr val="D3D9E1"/>
-          </a:solidFill>
-          <a:ln>
-            <a:noFill/>
-          </a:ln>
-        </p:spPr>
-        <p:txBody>
-          <a:bodyPr rtlCol="0" anchor="ctr"/>
-          <a:lstStyle/>
-          <a:p>
-            <a:pPr algn="ctr"/>
-          </a:p>
-        </p:txBody>
-      </p:sp>
-      <p:sp>
-        <p:nvSpPr>
-          <p:cNvPr id="17" name="TextBox 16"/>
-          <p:cNvSpPr txBox="1"/>
-          <p:nvPr/>
-        </p:nvSpPr>
-        <p:spPr>
-          <a:xfrm>
-            <a:off x="3619423" y="5429504"/>
-            <a:ext cx="822960" cy="292608"/>
-          </a:xfrm>
-          <a:prstGeom prst="rect">
-            <a:avLst/>
-          </a:prstGeom>
-          <a:noFill/>
-        </p:spPr>
-        <p:txBody>
-          <a:bodyPr wrap="square" anchor="ctr"/>
-          <a:lstStyle/>
-          <a:p>
-            <a:pPr algn="ctr" eaLnBrk="0">
-              <a:lnSpc>
-                <a:spcPct val="110000"/>
-              </a:lnSpc>
-            </a:pPr>
-            <a:r>
-              <a:rPr sz="1200" b="1">
-                <a:solidFill>
-                  <a:srgbClr val="13294B"/>
-                </a:solidFill>
-                <a:latin typeface="맑은 고딕"/>
-                <a:ea typeface="맑은 고딕"/>
-                <a:cs typeface="맑은 고딕"/>
-              </a:rPr>
-              <a:t>범위</a:t>
-            </a:r>
-          </a:p>
-        </p:txBody>
-      </p:sp>
-      <p:sp>
-        <p:nvSpPr>
-          <p:cNvPr id="18" name="Rounded Rectangle 17"/>
-          <p:cNvSpPr/>
-          <p:nvPr/>
-        </p:nvSpPr>
-        <p:spPr>
-          <a:xfrm>
-            <a:off x="6233007" y="2123439"/>
-            <a:ext cx="2567863" cy="3735832"/>
-          </a:xfrm>
-          <a:prstGeom prst="roundRect">
-            <a:avLst>
-              <a:gd name="adj" fmla="val 4000"/>
+              <a:gd name="adj" fmla="val 6000"/>
             </a:avLst>
           </a:prstGeom>
           <a:solidFill>
@@ -31208,233 +30853,179 @@
       </p:sp>
       <p:sp>
         <p:nvSpPr>
-          <p:cNvPr id="19" name="Oval 18"/>
+          <p:cNvPr id="17" name="TextBox 16"/>
+          <p:cNvSpPr txBox="1"/>
+          <p:nvPr/>
+        </p:nvSpPr>
+        <p:spPr>
+          <a:xfrm>
+            <a:off x="8348472" y="2057400"/>
+            <a:ext cx="3099816" cy="731520"/>
+          </a:xfrm>
+          <a:prstGeom prst="rect">
+            <a:avLst/>
+          </a:prstGeom>
+          <a:noFill/>
+        </p:spPr>
+        <p:txBody>
+          <a:bodyPr wrap="square" anchor="t"/>
+          <a:lstStyle/>
+          <a:p>
+            <a:pPr algn="l" eaLnBrk="0">
+              <a:lnSpc>
+                <a:spcPct val="110000"/>
+              </a:lnSpc>
+            </a:pPr>
+            <a:r>
+              <a:rPr sz="1800" b="1">
+                <a:solidFill>
+                  <a:srgbClr val="13294B"/>
+                </a:solidFill>
+                <a:latin typeface="맑은 고딕"/>
+                <a:ea typeface="맑은 고딕"/>
+                <a:cs typeface="맑은 고딕"/>
+              </a:rPr>
+              <a:t>수정·회귀 기록</a:t>
+            </a:r>
+          </a:p>
+        </p:txBody>
+      </p:sp>
+      <p:sp>
+        <p:nvSpPr>
+          <p:cNvPr id="18" name="TextBox 17"/>
+          <p:cNvSpPr txBox="1"/>
+          <p:nvPr/>
+        </p:nvSpPr>
+        <p:spPr>
+          <a:xfrm>
+            <a:off x="8348472" y="2926080"/>
+            <a:ext cx="3099816" cy="1371600"/>
+          </a:xfrm>
+          <a:prstGeom prst="rect">
+            <a:avLst/>
+          </a:prstGeom>
+          <a:noFill/>
+        </p:spPr>
+        <p:txBody>
+          <a:bodyPr wrap="square" anchor="t"/>
+          <a:lstStyle/>
+          <a:p>
+            <a:pPr algn="l" eaLnBrk="0">
+              <a:lnSpc>
+                <a:spcPct val="110000"/>
+              </a:lnSpc>
+            </a:pPr>
+            <a:r>
+              <a:rPr sz="1600" b="0">
+                <a:solidFill>
+                  <a:srgbClr val="13294B"/>
+                </a:solidFill>
+                <a:latin typeface="맑은 고딕"/>
+                <a:ea typeface="맑은 고딕"/>
+                <a:cs typeface="맑은 고딕"/>
+              </a:rPr>
+              <a:t>무엇을 왜 고쳤는지</a:t>
+            </a:r>
+          </a:p>
+          <a:p>
+            <a:pPr algn="l" eaLnBrk="0">
+              <a:lnSpc>
+                <a:spcPct val="110000"/>
+              </a:lnSpc>
+            </a:pPr>
+            <a:r>
+              <a:rPr sz="1600" b="0">
+                <a:solidFill>
+                  <a:srgbClr val="13294B"/>
+                </a:solidFill>
+                <a:latin typeface="맑은 고딕"/>
+                <a:ea typeface="맑은 고딕"/>
+                <a:cs typeface="맑은 고딕"/>
+              </a:rPr>
+              <a:t>다시 실행한</a:t>
+            </a:r>
+          </a:p>
+          <a:p>
+            <a:pPr algn="l" eaLnBrk="0">
+              <a:lnSpc>
+                <a:spcPct val="110000"/>
+              </a:lnSpc>
+            </a:pPr>
+            <a:r>
+              <a:rPr sz="1600" b="0">
+                <a:solidFill>
+                  <a:srgbClr val="13294B"/>
+                </a:solidFill>
+                <a:latin typeface="맑은 고딕"/>
+                <a:ea typeface="맑은 고딕"/>
+                <a:cs typeface="맑은 고딕"/>
+              </a:rPr>
+              <a:t>시나리오 전체의 결과</a:t>
+            </a:r>
+          </a:p>
+        </p:txBody>
+      </p:sp>
+      <p:sp>
+        <p:nvSpPr>
+          <p:cNvPr id="19" name="TextBox 18"/>
+          <p:cNvSpPr txBox="1"/>
+          <p:nvPr/>
+        </p:nvSpPr>
+        <p:spPr>
+          <a:xfrm>
+            <a:off x="8348472" y="4462272"/>
+            <a:ext cx="3099816" cy="274320"/>
+          </a:xfrm>
+          <a:prstGeom prst="rect">
+            <a:avLst/>
+          </a:prstGeom>
+          <a:noFill/>
+        </p:spPr>
+        <p:txBody>
+          <a:bodyPr wrap="square" anchor="t"/>
+          <a:lstStyle/>
+          <a:p>
+            <a:pPr algn="l" eaLnBrk="0">
+              <a:lnSpc>
+                <a:spcPct val="110000"/>
+              </a:lnSpc>
+            </a:pPr>
+            <a:r>
+              <a:rPr sz="1400" b="1">
+                <a:solidFill>
+                  <a:srgbClr val="1A6FC4"/>
+                </a:solidFill>
+                <a:latin typeface="맑은 고딕"/>
+                <a:ea typeface="맑은 고딕"/>
+                <a:cs typeface="맑은 고딕"/>
+              </a:rPr>
+              <a:t>산출물</a:t>
+            </a:r>
+          </a:p>
+        </p:txBody>
+      </p:sp>
+      <p:sp>
+        <p:nvSpPr>
+          <p:cNvPr id="20" name="Rounded Rectangle 19"/>
           <p:cNvSpPr/>
           <p:nvPr/>
         </p:nvSpPr>
         <p:spPr>
           <a:xfrm>
-            <a:off x="6461607" y="2324608"/>
-            <a:ext cx="731520" cy="731520"/>
-          </a:xfrm>
-          <a:prstGeom prst="ellipse">
-            <a:avLst/>
+            <a:off x="594360" y="5166360"/>
+            <a:ext cx="11018520" cy="960120"/>
+          </a:xfrm>
+          <a:prstGeom prst="roundRect">
+            <a:avLst>
+              <a:gd name="adj" fmla="val 6000"/>
+            </a:avLst>
           </a:prstGeom>
           <a:solidFill>
             <a:srgbClr val="E7F3FD"/>
           </a:solidFill>
-          <a:ln>
-            <a:noFill/>
-          </a:ln>
-        </p:spPr>
-        <p:txBody>
-          <a:bodyPr rtlCol="0" anchor="ctr"/>
-          <a:lstStyle/>
-          <a:p>
-            <a:pPr algn="ctr"/>
-          </a:p>
-        </p:txBody>
-      </p:sp>
-      <p:pic>
-        <p:nvPicPr>
-          <p:cNvPr id="20" name="아이콘:repeat" descr="repeat_13294B_1.6.png"/>
-          <p:cNvPicPr>
-            <a:picLocks noChangeAspect="1"/>
-          </p:cNvPicPr>
-          <p:nvPr/>
-        </p:nvPicPr>
-        <p:blipFill>
-          <a:blip r:embed="rId4"/>
-          <a:stretch>
-            <a:fillRect/>
-          </a:stretch>
-        </p:blipFill>
-        <p:spPr>
-          <a:xfrm>
-            <a:off x="6615226" y="2478227"/>
-            <a:ext cx="424281" cy="424281"/>
-          </a:xfrm>
-          <a:prstGeom prst="rect">
-            <a:avLst/>
-          </a:prstGeom>
-        </p:spPr>
-      </p:pic>
-      <p:sp>
-        <p:nvSpPr>
-          <p:cNvPr id="21" name="TextBox 20"/>
-          <p:cNvSpPr txBox="1"/>
-          <p:nvPr/>
-        </p:nvSpPr>
-        <p:spPr>
-          <a:xfrm>
-            <a:off x="6397599" y="3147568"/>
-            <a:ext cx="2238679" cy="2208784"/>
-          </a:xfrm>
-          <a:prstGeom prst="rect">
-            <a:avLst/>
-          </a:prstGeom>
-          <a:noFill/>
-        </p:spPr>
-        <p:txBody>
-          <a:bodyPr wrap="square" anchor="t"/>
-          <a:lstStyle/>
-          <a:p>
-            <a:pPr algn="l" eaLnBrk="0">
-              <a:lnSpc>
-                <a:spcPct val="110000"/>
-              </a:lnSpc>
-              <a:spcAft>
-                <a:spcPts val="400"/>
-              </a:spcAft>
-            </a:pPr>
-            <a:r>
-              <a:rPr sz="1800" b="1">
-                <a:solidFill>
-                  <a:srgbClr val="13294B"/>
-                </a:solidFill>
-                <a:latin typeface="맑은 고딕"/>
-                <a:ea typeface="맑은 고딕"/>
-                <a:cs typeface="맑은 고딕"/>
-              </a:rPr>
-              <a:t>수정 기록 · 회귀 결과</a:t>
-            </a:r>
-          </a:p>
-          <a:p>
-            <a:pPr algn="l" eaLnBrk="0" marL="160020" indent="-160020">
-              <a:lnSpc>
-                <a:spcPct val="110000"/>
-              </a:lnSpc>
-              <a:spcAft>
-                <a:spcPts val="400"/>
-              </a:spcAft>
-            </a:pPr>
-            <a:r>
-              <a:rPr sz="1400" b="0">
-                <a:solidFill>
-                  <a:srgbClr val="1F2A3A"/>
-                </a:solidFill>
-                <a:latin typeface="맑은 고딕"/>
-                <a:ea typeface="맑은 고딕"/>
-                <a:cs typeface="맑은 고딕"/>
-              </a:rPr>
-              <a:t>• 무엇을 왜 고쳤는지</a:t>
-            </a:r>
-          </a:p>
-          <a:p>
-            <a:pPr algn="l" eaLnBrk="0" marL="160020" indent="-160020">
-              <a:lnSpc>
-                <a:spcPct val="110000"/>
-              </a:lnSpc>
-              <a:spcAft>
-                <a:spcPts val="400"/>
-              </a:spcAft>
-            </a:pPr>
-            <a:r>
-              <a:rPr sz="1400" b="0">
-                <a:solidFill>
-                  <a:srgbClr val="1F2A3A"/>
-                </a:solidFill>
-                <a:latin typeface="맑은 고딕"/>
-                <a:ea typeface="맑은 고딕"/>
-                <a:cs typeface="맑은 고딕"/>
-              </a:rPr>
-              <a:t>• 다시 실행한 시나리오 전체의 결과</a:t>
-            </a:r>
-          </a:p>
-        </p:txBody>
-      </p:sp>
-      <p:sp>
-        <p:nvSpPr>
-          <p:cNvPr id="22" name="Rounded Rectangle 21"/>
-          <p:cNvSpPr/>
-          <p:nvPr/>
-        </p:nvSpPr>
-        <p:spPr>
-          <a:xfrm>
-            <a:off x="6461607" y="5429504"/>
-            <a:ext cx="822960" cy="292608"/>
-          </a:xfrm>
-          <a:prstGeom prst="roundRect">
-            <a:avLst>
-              <a:gd name="adj" fmla="val 50000"/>
-            </a:avLst>
-          </a:prstGeom>
-          <a:solidFill>
-            <a:srgbClr val="D3D9E1"/>
-          </a:solidFill>
-          <a:ln>
-            <a:noFill/>
-          </a:ln>
-        </p:spPr>
-        <p:txBody>
-          <a:bodyPr rtlCol="0" anchor="ctr"/>
-          <a:lstStyle/>
-          <a:p>
-            <a:pPr algn="ctr"/>
-          </a:p>
-        </p:txBody>
-      </p:sp>
-      <p:sp>
-        <p:nvSpPr>
-          <p:cNvPr id="23" name="TextBox 22"/>
-          <p:cNvSpPr txBox="1"/>
-          <p:nvPr/>
-        </p:nvSpPr>
-        <p:spPr>
-          <a:xfrm>
-            <a:off x="6461607" y="5429504"/>
-            <a:ext cx="822960" cy="292608"/>
-          </a:xfrm>
-          <a:prstGeom prst="rect">
-            <a:avLst/>
-          </a:prstGeom>
-          <a:noFill/>
-        </p:spPr>
-        <p:txBody>
-          <a:bodyPr wrap="square" anchor="ctr"/>
-          <a:lstStyle/>
-          <a:p>
-            <a:pPr algn="ctr" eaLnBrk="0">
-              <a:lnSpc>
-                <a:spcPct val="110000"/>
-              </a:lnSpc>
-            </a:pPr>
-            <a:r>
-              <a:rPr sz="1200" b="1">
-                <a:solidFill>
-                  <a:srgbClr val="13294B"/>
-                </a:solidFill>
-                <a:latin typeface="맑은 고딕"/>
-                <a:ea typeface="맑은 고딕"/>
-                <a:cs typeface="맑은 고딕"/>
-              </a:rPr>
-              <a:t>산출물</a:t>
-            </a:r>
-          </a:p>
-        </p:txBody>
-      </p:sp>
-      <p:sp>
-        <p:nvSpPr>
-          <p:cNvPr id="24" name="Rounded Rectangle 23"/>
-          <p:cNvSpPr/>
-          <p:nvPr/>
-        </p:nvSpPr>
-        <p:spPr>
-          <a:xfrm>
-            <a:off x="9075191" y="2123439"/>
-            <a:ext cx="2567863" cy="3735832"/>
-          </a:xfrm>
-          <a:prstGeom prst="roundRect">
-            <a:avLst>
-              <a:gd name="adj" fmla="val 4000"/>
-            </a:avLst>
-          </a:prstGeom>
-          <a:solidFill>
-            <a:srgbClr val="FFFFFF"/>
-          </a:solidFill>
-          <a:ln w="28575">
+          <a:ln w="12700">
             <a:solidFill>
-              <a:srgbClr val="5CB8F2"/>
+              <a:srgbClr val="D3D9E1"/>
             </a:solidFill>
           </a:ln>
         </p:spPr>
@@ -31448,67 +31039,14 @@
       </p:sp>
       <p:sp>
         <p:nvSpPr>
-          <p:cNvPr id="25" name="Oval 24"/>
-          <p:cNvSpPr/>
-          <p:nvPr/>
-        </p:nvSpPr>
-        <p:spPr>
-          <a:xfrm>
-            <a:off x="9303791" y="2324608"/>
-            <a:ext cx="731520" cy="731520"/>
-          </a:xfrm>
-          <a:prstGeom prst="ellipse">
-            <a:avLst/>
-          </a:prstGeom>
-          <a:solidFill>
-            <a:srgbClr val="5CB8F2"/>
-          </a:solidFill>
-          <a:ln>
-            <a:noFill/>
-          </a:ln>
-        </p:spPr>
-        <p:txBody>
-          <a:bodyPr rtlCol="0" anchor="ctr"/>
-          <a:lstStyle/>
-          <a:p>
-            <a:pPr algn="ctr"/>
-          </a:p>
-        </p:txBody>
-      </p:sp>
-      <p:pic>
-        <p:nvPicPr>
-          <p:cNvPr id="26" name="아이콘:checks" descr="checks_13294B_1.6.png"/>
-          <p:cNvPicPr>
-            <a:picLocks noChangeAspect="1"/>
-          </p:cNvPicPr>
-          <p:nvPr/>
-        </p:nvPicPr>
-        <p:blipFill>
-          <a:blip r:embed="rId5"/>
-          <a:stretch>
-            <a:fillRect/>
-          </a:stretch>
-        </p:blipFill>
-        <p:spPr>
-          <a:xfrm>
-            <a:off x="9457410" y="2478227"/>
-            <a:ext cx="424281" cy="424281"/>
-          </a:xfrm>
-          <a:prstGeom prst="rect">
-            <a:avLst/>
-          </a:prstGeom>
-        </p:spPr>
-      </p:pic>
-      <p:sp>
-        <p:nvSpPr>
-          <p:cNvPr id="27" name="TextBox 26"/>
-          <p:cNvSpPr txBox="1"/>
-          <p:nvPr/>
-        </p:nvSpPr>
-        <p:spPr>
-          <a:xfrm>
-            <a:off x="9239783" y="3147568"/>
-            <a:ext cx="2238679" cy="2208784"/>
+          <p:cNvPr id="21" name="TextBox 20"/>
+          <p:cNvSpPr txBox="1"/>
+          <p:nvPr/>
+        </p:nvSpPr>
+        <p:spPr>
+          <a:xfrm>
+            <a:off x="822960" y="5349240"/>
+            <a:ext cx="1828800" cy="365760"/>
           </a:xfrm>
           <a:prstGeom prst="rect">
             <a:avLst/>
@@ -31523,12 +31061,9 @@
               <a:lnSpc>
                 <a:spcPct val="110000"/>
               </a:lnSpc>
-              <a:spcAft>
-                <a:spcPts val="400"/>
-              </a:spcAft>
-            </a:pPr>
-            <a:r>
-              <a:rPr sz="1800" b="1">
+            </a:pPr>
+            <a:r>
+              <a:rPr sz="1900" b="1">
                 <a:solidFill>
                   <a:srgbClr val="13294B"/>
                 </a:solidFill>
@@ -31539,108 +31074,35 @@
               <a:t>성공 기준</a:t>
             </a:r>
           </a:p>
-          <a:p>
-            <a:pPr algn="l" eaLnBrk="0" marL="160020" indent="-160020">
-              <a:lnSpc>
-                <a:spcPct val="110000"/>
-              </a:lnSpc>
-              <a:spcAft>
-                <a:spcPts val="400"/>
-              </a:spcAft>
-            </a:pPr>
-            <a:r>
-              <a:rPr sz="1400" b="0">
-                <a:solidFill>
-                  <a:srgbClr val="1F2A3A"/>
-                </a:solidFill>
-                <a:latin typeface="맑은 고딕"/>
-                <a:ea typeface="맑은 고딕"/>
-                <a:cs typeface="맑은 고딕"/>
-              </a:rPr>
-              <a:t>• 긴급 조건이 동작한다</a:t>
-            </a:r>
-          </a:p>
-          <a:p>
-            <a:pPr algn="l" eaLnBrk="0" marL="160020" indent="-160020">
-              <a:lnSpc>
-                <a:spcPct val="110000"/>
-              </a:lnSpc>
-              <a:spcAft>
-                <a:spcPts val="400"/>
-              </a:spcAft>
-            </a:pPr>
-            <a:r>
-              <a:rPr sz="1400" b="0">
-                <a:solidFill>
-                  <a:srgbClr val="1F2A3A"/>
-                </a:solidFill>
-                <a:latin typeface="맑은 고딕"/>
-                <a:ea typeface="맑은 고딕"/>
-                <a:cs typeface="맑은 고딕"/>
-              </a:rPr>
-              <a:t>• 일반 요청 · 보류(필수 정보 누락) · 거절 조건이 그대로 통과한다</a:t>
-            </a:r>
-          </a:p>
-        </p:txBody>
-      </p:sp>
-      <p:sp>
-        <p:nvSpPr>
-          <p:cNvPr id="28" name="Rounded Rectangle 27"/>
-          <p:cNvSpPr/>
-          <p:nvPr/>
-        </p:nvSpPr>
-        <p:spPr>
-          <a:xfrm>
-            <a:off x="9303791" y="5429504"/>
-            <a:ext cx="822960" cy="292608"/>
-          </a:xfrm>
-          <a:prstGeom prst="roundRect">
-            <a:avLst>
-              <a:gd name="adj" fmla="val 50000"/>
-            </a:avLst>
-          </a:prstGeom>
-          <a:solidFill>
-            <a:srgbClr val="5CB8F2"/>
-          </a:solidFill>
-          <a:ln>
-            <a:noFill/>
-          </a:ln>
-        </p:spPr>
-        <p:txBody>
-          <a:bodyPr rtlCol="0" anchor="ctr"/>
-          <a:lstStyle/>
-          <a:p>
-            <a:pPr algn="ctr"/>
-          </a:p>
-        </p:txBody>
-      </p:sp>
-      <p:sp>
-        <p:nvSpPr>
-          <p:cNvPr id="29" name="TextBox 28"/>
-          <p:cNvSpPr txBox="1"/>
-          <p:nvPr/>
-        </p:nvSpPr>
-        <p:spPr>
-          <a:xfrm>
-            <a:off x="9303791" y="5429504"/>
-            <a:ext cx="822960" cy="292608"/>
-          </a:xfrm>
-          <a:prstGeom prst="rect">
-            <a:avLst/>
-          </a:prstGeom>
-          <a:noFill/>
-        </p:spPr>
-        <p:txBody>
-          <a:bodyPr wrap="square" anchor="ctr"/>
-          <a:lstStyle/>
-          <a:p>
-            <a:pPr algn="ctr" eaLnBrk="0">
-              <a:lnSpc>
-                <a:spcPct val="110000"/>
-              </a:lnSpc>
-            </a:pPr>
-            <a:r>
-              <a:rPr sz="1200" b="1">
+        </p:txBody>
+      </p:sp>
+      <p:sp>
+        <p:nvSpPr>
+          <p:cNvPr id="22" name="TextBox 21"/>
+          <p:cNvSpPr txBox="1"/>
+          <p:nvPr/>
+        </p:nvSpPr>
+        <p:spPr>
+          <a:xfrm>
+            <a:off x="2880360" y="5303520"/>
+            <a:ext cx="8412480" cy="731520"/>
+          </a:xfrm>
+          <a:prstGeom prst="rect">
+            <a:avLst/>
+          </a:prstGeom>
+          <a:noFill/>
+        </p:spPr>
+        <p:txBody>
+          <a:bodyPr wrap="square" anchor="t"/>
+          <a:lstStyle/>
+          <a:p>
+            <a:pPr algn="l" eaLnBrk="0">
+              <a:lnSpc>
+                <a:spcPct val="110000"/>
+              </a:lnSpc>
+            </a:pPr>
+            <a:r>
+              <a:rPr sz="1700" b="0">
                 <a:solidFill>
                   <a:srgbClr val="13294B"/>
                 </a:solidFill>
@@ -31648,7 +31110,25 @@
                 <a:ea typeface="맑은 고딕"/>
                 <a:cs typeface="맑은 고딕"/>
               </a:rPr>
-              <a:t>판정</a:t>
+              <a:t>긴급 조건이 동작한다</a:t>
+            </a:r>
+          </a:p>
+          <a:p>
+            <a:pPr algn="l" eaLnBrk="0">
+              <a:lnSpc>
+                <a:spcPct val="110000"/>
+              </a:lnSpc>
+            </a:pPr>
+            <a:r>
+              <a:rPr sz="1700" b="0">
+                <a:solidFill>
+                  <a:srgbClr val="13294B"/>
+                </a:solidFill>
+                <a:latin typeface="맑은 고딕"/>
+                <a:ea typeface="맑은 고딕"/>
+                <a:cs typeface="맑은 고딕"/>
+              </a:rPr>
+              <a:t>일반 요청 · 보류(필수 정보 누락) · 거절 조건이 그대로 통과한다</a:t>
             </a:r>
           </a:p>
         </p:txBody>
@@ -32093,12 +31573,12 @@
         </p:nvSpPr>
         <p:spPr>
           <a:xfrm>
-            <a:off x="548640" y="2228024"/>
-            <a:ext cx="2567863" cy="3526663"/>
+            <a:off x="594360" y="1874519"/>
+            <a:ext cx="3429000" cy="2971800"/>
           </a:xfrm>
           <a:prstGeom prst="roundRect">
             <a:avLst>
-              <a:gd name="adj" fmla="val 4000"/>
+              <a:gd name="adj" fmla="val 6000"/>
             </a:avLst>
           </a:prstGeom>
           <a:solidFill>
@@ -32120,20 +31600,155 @@
       </p:sp>
       <p:sp>
         <p:nvSpPr>
-          <p:cNvPr id="7" name="Oval 6"/>
+          <p:cNvPr id="7" name="TextBox 6"/>
+          <p:cNvSpPr txBox="1"/>
+          <p:nvPr/>
+        </p:nvSpPr>
+        <p:spPr>
+          <a:xfrm>
+            <a:off x="758952" y="2057400"/>
+            <a:ext cx="3099816" cy="731520"/>
+          </a:xfrm>
+          <a:prstGeom prst="rect">
+            <a:avLst/>
+          </a:prstGeom>
+          <a:noFill/>
+        </p:spPr>
+        <p:txBody>
+          <a:bodyPr wrap="square" anchor="t"/>
+          <a:lstStyle/>
+          <a:p>
+            <a:pPr algn="l" eaLnBrk="0">
+              <a:lnSpc>
+                <a:spcPct val="110000"/>
+              </a:lnSpc>
+            </a:pPr>
+            <a:r>
+              <a:rPr sz="1800" b="1">
+                <a:solidFill>
+                  <a:srgbClr val="13294B"/>
+                </a:solidFill>
+                <a:latin typeface="맑은 고딕"/>
+                <a:ea typeface="맑은 고딕"/>
+                <a:cs typeface="맑은 고딕"/>
+              </a:rPr>
+              <a:t>세 출처</a:t>
+            </a:r>
+          </a:p>
+        </p:txBody>
+      </p:sp>
+      <p:sp>
+        <p:nvSpPr>
+          <p:cNvPr id="8" name="TextBox 7"/>
+          <p:cNvSpPr txBox="1"/>
+          <p:nvPr/>
+        </p:nvSpPr>
+        <p:spPr>
+          <a:xfrm>
+            <a:off x="758952" y="2926080"/>
+            <a:ext cx="3099816" cy="1371600"/>
+          </a:xfrm>
+          <a:prstGeom prst="rect">
+            <a:avLst/>
+          </a:prstGeom>
+          <a:noFill/>
+        </p:spPr>
+        <p:txBody>
+          <a:bodyPr wrap="square" anchor="t"/>
+          <a:lstStyle/>
+          <a:p>
+            <a:pPr algn="l" eaLnBrk="0">
+              <a:lnSpc>
+                <a:spcPct val="110000"/>
+              </a:lnSpc>
+            </a:pPr>
+            <a:r>
+              <a:rPr sz="1600" b="0">
+                <a:solidFill>
+                  <a:srgbClr val="13294B"/>
+                </a:solidFill>
+                <a:latin typeface="맑은 고딕"/>
+                <a:ea typeface="맑은 고딕"/>
+                <a:cs typeface="맑은 고딕"/>
+              </a:rPr>
+              <a:t>설비 이벤트 · 정비 이력 · 부품 DB의 조회 결과</a:t>
+            </a:r>
+          </a:p>
+          <a:p>
+            <a:pPr algn="l" eaLnBrk="0">
+              <a:lnSpc>
+                <a:spcPct val="110000"/>
+              </a:lnSpc>
+            </a:pPr>
+            <a:r>
+              <a:rPr sz="1600" b="0">
+                <a:solidFill>
+                  <a:srgbClr val="13294B"/>
+                </a:solidFill>
+                <a:latin typeface="맑은 고딕"/>
+                <a:ea typeface="맑은 고딕"/>
+                <a:cs typeface="맑은 고딕"/>
+              </a:rPr>
+              <a:t>또는 같은 스키마의 준비 자료</a:t>
+            </a:r>
+          </a:p>
+        </p:txBody>
+      </p:sp>
+      <p:sp>
+        <p:nvSpPr>
+          <p:cNvPr id="9" name="TextBox 8"/>
+          <p:cNvSpPr txBox="1"/>
+          <p:nvPr/>
+        </p:nvSpPr>
+        <p:spPr>
+          <a:xfrm>
+            <a:off x="758952" y="4462272"/>
+            <a:ext cx="3099816" cy="274320"/>
+          </a:xfrm>
+          <a:prstGeom prst="rect">
+            <a:avLst/>
+          </a:prstGeom>
+          <a:noFill/>
+        </p:spPr>
+        <p:txBody>
+          <a:bodyPr wrap="square" anchor="t"/>
+          <a:lstStyle/>
+          <a:p>
+            <a:pPr algn="l" eaLnBrk="0">
+              <a:lnSpc>
+                <a:spcPct val="110000"/>
+              </a:lnSpc>
+            </a:pPr>
+            <a:r>
+              <a:rPr sz="1400" b="1">
+                <a:solidFill>
+                  <a:srgbClr val="1A6FC4"/>
+                </a:solidFill>
+                <a:latin typeface="맑은 고딕"/>
+                <a:ea typeface="맑은 고딕"/>
+                <a:cs typeface="맑은 고딕"/>
+              </a:rPr>
+              <a:t>입력</a:t>
+            </a:r>
+          </a:p>
+        </p:txBody>
+      </p:sp>
+      <p:sp>
+        <p:nvSpPr>
+          <p:cNvPr id="10" name="Right Arrow 9"/>
           <p:cNvSpPr/>
           <p:nvPr/>
         </p:nvSpPr>
         <p:spPr>
           <a:xfrm>
-            <a:off x="777240" y="2429192"/>
-            <a:ext cx="731520" cy="731520"/>
-          </a:xfrm>
-          <a:prstGeom prst="ellipse">
+            <a:off x="4114800" y="3246120"/>
+            <a:ext cx="201168" cy="164592"/>
+          </a:xfrm>
+          <a:prstGeom prst="rightArrow">
             <a:avLst/>
           </a:prstGeom>
           <a:solidFill>
-            <a:srgbClr val="E7F3FD"/>
+            <a:srgbClr val="1A6FC4"/>
           </a:solidFill>
           <a:ln>
             <a:noFill/>
@@ -32147,132 +31762,208 @@
           </a:p>
         </p:txBody>
       </p:sp>
-      <p:pic>
-        <p:nvPicPr>
-          <p:cNvPr id="8" name="아이콘:database" descr="database_13294B_1.6.png"/>
-          <p:cNvPicPr>
-            <a:picLocks noChangeAspect="1"/>
-          </p:cNvPicPr>
-          <p:nvPr/>
-        </p:nvPicPr>
-        <p:blipFill>
-          <a:blip r:embed="rId3"/>
-          <a:stretch>
-            <a:fillRect/>
-          </a:stretch>
-        </p:blipFill>
-        <p:spPr>
-          <a:xfrm>
-            <a:off x="930859" y="2582811"/>
-            <a:ext cx="424281" cy="424281"/>
-          </a:xfrm>
-          <a:prstGeom prst="rect">
-            <a:avLst/>
-          </a:prstGeom>
-        </p:spPr>
-      </p:pic>
-      <p:sp>
-        <p:nvSpPr>
-          <p:cNvPr id="9" name="TextBox 8"/>
-          <p:cNvSpPr txBox="1"/>
-          <p:nvPr/>
-        </p:nvSpPr>
-        <p:spPr>
-          <a:xfrm>
-            <a:off x="713232" y="3252152"/>
-            <a:ext cx="2238679" cy="1999615"/>
-          </a:xfrm>
-          <a:prstGeom prst="rect">
-            <a:avLst/>
-          </a:prstGeom>
-          <a:noFill/>
-        </p:spPr>
-        <p:txBody>
-          <a:bodyPr wrap="square" anchor="t"/>
-          <a:lstStyle/>
-          <a:p>
-            <a:pPr algn="l" eaLnBrk="0">
-              <a:lnSpc>
-                <a:spcPct val="110000"/>
-              </a:lnSpc>
-              <a:spcAft>
-                <a:spcPts val="400"/>
-              </a:spcAft>
-            </a:pPr>
-            <a:r>
-              <a:rPr sz="1750" b="1">
-                <a:solidFill>
-                  <a:srgbClr val="13294B"/>
-                </a:solidFill>
-                <a:latin typeface="맑은 고딕"/>
-                <a:ea typeface="맑은 고딕"/>
-                <a:cs typeface="맑은 고딕"/>
-              </a:rPr>
-              <a:t>세 출처</a:t>
-            </a:r>
-          </a:p>
-          <a:p>
-            <a:pPr algn="l" eaLnBrk="0" marL="154305" indent="-154305">
-              <a:lnSpc>
-                <a:spcPct val="110000"/>
-              </a:lnSpc>
-              <a:spcAft>
-                <a:spcPts val="400"/>
-              </a:spcAft>
-            </a:pPr>
-            <a:r>
-              <a:rPr sz="1350" b="0">
-                <a:solidFill>
-                  <a:srgbClr val="1F2A3A"/>
-                </a:solidFill>
-                <a:latin typeface="맑은 고딕"/>
-                <a:ea typeface="맑은 고딕"/>
-                <a:cs typeface="맑은 고딕"/>
-              </a:rPr>
-              <a:t>• 설비 이벤트 · 정비 이력 · 부품 DB의 조회 결과</a:t>
-            </a:r>
-          </a:p>
-          <a:p>
-            <a:pPr algn="l" eaLnBrk="0" marL="154305" indent="-154305">
-              <a:lnSpc>
-                <a:spcPct val="110000"/>
-              </a:lnSpc>
-              <a:spcAft>
-                <a:spcPts val="400"/>
-              </a:spcAft>
-            </a:pPr>
-            <a:r>
-              <a:rPr sz="1350" b="0">
-                <a:solidFill>
-                  <a:srgbClr val="1F2A3A"/>
-                </a:solidFill>
-                <a:latin typeface="맑은 고딕"/>
-                <a:ea typeface="맑은 고딕"/>
-                <a:cs typeface="맑은 고딕"/>
-              </a:rPr>
-              <a:t>• 또는 같은 스키마의 준비 자료</a:t>
-            </a:r>
-          </a:p>
-        </p:txBody>
-      </p:sp>
-      <p:sp>
-        <p:nvSpPr>
-          <p:cNvPr id="10" name="Rounded Rectangle 9"/>
+      <p:sp>
+        <p:nvSpPr>
+          <p:cNvPr id="11" name="Rounded Rectangle 10"/>
           <p:cNvSpPr/>
           <p:nvPr/>
         </p:nvSpPr>
         <p:spPr>
           <a:xfrm>
-            <a:off x="777240" y="5324919"/>
-            <a:ext cx="822960" cy="292608"/>
+            <a:off x="4389120" y="1874519"/>
+            <a:ext cx="3429000" cy="2971800"/>
           </a:xfrm>
           <a:prstGeom prst="roundRect">
             <a:avLst>
-              <a:gd name="adj" fmla="val 50000"/>
+              <a:gd name="adj" fmla="val 6000"/>
             </a:avLst>
           </a:prstGeom>
           <a:solidFill>
-            <a:srgbClr val="D3D9E1"/>
+            <a:srgbClr val="E7F3FD"/>
+          </a:solidFill>
+          <a:ln w="15875">
+            <a:solidFill>
+              <a:srgbClr val="D3D9E1"/>
+            </a:solidFill>
+          </a:ln>
+        </p:spPr>
+        <p:txBody>
+          <a:bodyPr rtlCol="0" anchor="ctr"/>
+          <a:lstStyle/>
+          <a:p>
+            <a:pPr algn="ctr"/>
+          </a:p>
+        </p:txBody>
+      </p:sp>
+      <p:sp>
+        <p:nvSpPr>
+          <p:cNvPr id="12" name="TextBox 11"/>
+          <p:cNvSpPr txBox="1"/>
+          <p:nvPr/>
+        </p:nvSpPr>
+        <p:spPr>
+          <a:xfrm>
+            <a:off x="4553712" y="2057400"/>
+            <a:ext cx="3099816" cy="731520"/>
+          </a:xfrm>
+          <a:prstGeom prst="rect">
+            <a:avLst/>
+          </a:prstGeom>
+          <a:noFill/>
+        </p:spPr>
+        <p:txBody>
+          <a:bodyPr wrap="square" anchor="t"/>
+          <a:lstStyle/>
+          <a:p>
+            <a:pPr algn="l" eaLnBrk="0">
+              <a:lnSpc>
+                <a:spcPct val="110000"/>
+              </a:lnSpc>
+            </a:pPr>
+            <a:r>
+              <a:rPr sz="1800" b="1">
+                <a:solidFill>
+                  <a:srgbClr val="13294B"/>
+                </a:solidFill>
+                <a:latin typeface="맑은 고딕"/>
+                <a:ea typeface="맑은 고딕"/>
+                <a:cs typeface="맑은 고딕"/>
+              </a:rPr>
+              <a:t>데이터 패브릭(Data Fabric)</a:t>
+            </a:r>
+          </a:p>
+        </p:txBody>
+      </p:sp>
+      <p:sp>
+        <p:nvSpPr>
+          <p:cNvPr id="13" name="TextBox 12"/>
+          <p:cNvSpPr txBox="1"/>
+          <p:nvPr/>
+        </p:nvSpPr>
+        <p:spPr>
+          <a:xfrm>
+            <a:off x="4553712" y="2926080"/>
+            <a:ext cx="3099816" cy="1371600"/>
+          </a:xfrm>
+          <a:prstGeom prst="rect">
+            <a:avLst/>
+          </a:prstGeom>
+          <a:noFill/>
+        </p:spPr>
+        <p:txBody>
+          <a:bodyPr wrap="square" anchor="t"/>
+          <a:lstStyle/>
+          <a:p>
+            <a:pPr algn="l" eaLnBrk="0">
+              <a:lnSpc>
+                <a:spcPct val="110000"/>
+              </a:lnSpc>
+            </a:pPr>
+            <a:r>
+              <a:rPr sz="1600" b="0">
+                <a:solidFill>
+                  <a:srgbClr val="13294B"/>
+                </a:solidFill>
+                <a:latin typeface="맑은 고딕"/>
+                <a:ea typeface="맑은 고딕"/>
+                <a:cs typeface="맑은 고딕"/>
+              </a:rPr>
+              <a:t>여러 출처의 데이터를 연결 · 관리하는 접근</a:t>
+            </a:r>
+          </a:p>
+          <a:p>
+            <a:pPr algn="l" eaLnBrk="0">
+              <a:lnSpc>
+                <a:spcPct val="110000"/>
+              </a:lnSpc>
+            </a:pPr>
+            <a:r>
+              <a:rPr sz="1600" b="0">
+                <a:solidFill>
+                  <a:srgbClr val="13294B"/>
+                </a:solidFill>
+                <a:latin typeface="맑은 고딕"/>
+                <a:ea typeface="맑은 고딕"/>
+                <a:cs typeface="맑은 고딕"/>
+              </a:rPr>
+              <a:t>이번 실습: 원천 자료를 연결해 읽고 출처를 추적</a:t>
+            </a:r>
+          </a:p>
+          <a:p>
+            <a:pPr algn="l" eaLnBrk="0">
+              <a:lnSpc>
+                <a:spcPct val="110000"/>
+              </a:lnSpc>
+            </a:pPr>
+            <a:r>
+              <a:rPr sz="1600" b="0">
+                <a:solidFill>
+                  <a:srgbClr val="13294B"/>
+                </a:solidFill>
+                <a:latin typeface="맑은 고딕"/>
+                <a:ea typeface="맑은 고딕"/>
+                <a:cs typeface="맑은 고딕"/>
+              </a:rPr>
+              <a:t>새 플랫폼 구축은 제외</a:t>
+            </a:r>
+          </a:p>
+        </p:txBody>
+      </p:sp>
+      <p:sp>
+        <p:nvSpPr>
+          <p:cNvPr id="14" name="TextBox 13"/>
+          <p:cNvSpPr txBox="1"/>
+          <p:nvPr/>
+        </p:nvSpPr>
+        <p:spPr>
+          <a:xfrm>
+            <a:off x="4553712" y="4462272"/>
+            <a:ext cx="3099816" cy="274320"/>
+          </a:xfrm>
+          <a:prstGeom prst="rect">
+            <a:avLst/>
+          </a:prstGeom>
+          <a:noFill/>
+        </p:spPr>
+        <p:txBody>
+          <a:bodyPr wrap="square" anchor="t"/>
+          <a:lstStyle/>
+          <a:p>
+            <a:pPr algn="l" eaLnBrk="0">
+              <a:lnSpc>
+                <a:spcPct val="110000"/>
+              </a:lnSpc>
+            </a:pPr>
+            <a:r>
+              <a:rPr sz="1400" b="1">
+                <a:solidFill>
+                  <a:srgbClr val="1A6FC4"/>
+                </a:solidFill>
+                <a:latin typeface="맑은 고딕"/>
+                <a:ea typeface="맑은 고딕"/>
+                <a:cs typeface="맑은 고딕"/>
+              </a:rPr>
+              <a:t>범위</a:t>
+            </a:r>
+          </a:p>
+        </p:txBody>
+      </p:sp>
+      <p:sp>
+        <p:nvSpPr>
+          <p:cNvPr id="15" name="Right Arrow 14"/>
+          <p:cNvSpPr/>
+          <p:nvPr/>
+        </p:nvSpPr>
+        <p:spPr>
+          <a:xfrm>
+            <a:off x="7909560" y="3246120"/>
+            <a:ext cx="201168" cy="164592"/>
+          </a:xfrm>
+          <a:prstGeom prst="rightArrow">
+            <a:avLst/>
+          </a:prstGeom>
+          <a:solidFill>
+            <a:srgbClr val="1A6FC4"/>
           </a:solidFill>
           <a:ln>
             <a:noFill/>
@@ -32288,318 +31979,18 @@
       </p:sp>
       <p:sp>
         <p:nvSpPr>
-          <p:cNvPr id="11" name="TextBox 10"/>
-          <p:cNvSpPr txBox="1"/>
-          <p:nvPr/>
-        </p:nvSpPr>
-        <p:spPr>
-          <a:xfrm>
-            <a:off x="777240" y="5324919"/>
-            <a:ext cx="822960" cy="292608"/>
-          </a:xfrm>
-          <a:prstGeom prst="rect">
-            <a:avLst/>
-          </a:prstGeom>
-          <a:noFill/>
-        </p:spPr>
-        <p:txBody>
-          <a:bodyPr wrap="square" anchor="ctr"/>
-          <a:lstStyle/>
-          <a:p>
-            <a:pPr algn="ctr" eaLnBrk="0">
-              <a:lnSpc>
-                <a:spcPct val="110000"/>
-              </a:lnSpc>
-            </a:pPr>
-            <a:r>
-              <a:rPr sz="1200" b="1">
-                <a:solidFill>
-                  <a:srgbClr val="13294B"/>
-                </a:solidFill>
-                <a:latin typeface="맑은 고딕"/>
-                <a:ea typeface="맑은 고딕"/>
-                <a:cs typeface="맑은 고딕"/>
-              </a:rPr>
-              <a:t>입력</a:t>
-            </a:r>
-          </a:p>
-        </p:txBody>
-      </p:sp>
-      <p:sp>
-        <p:nvSpPr>
-          <p:cNvPr id="12" name="Rounded Rectangle 11"/>
+          <p:cNvPr id="16" name="Rounded Rectangle 15"/>
           <p:cNvSpPr/>
           <p:nvPr/>
         </p:nvSpPr>
         <p:spPr>
           <a:xfrm>
-            <a:off x="3390823" y="2228024"/>
-            <a:ext cx="2567863" cy="3526663"/>
+            <a:off x="8183880" y="1874519"/>
+            <a:ext cx="3429000" cy="2971800"/>
           </a:xfrm>
           <a:prstGeom prst="roundRect">
             <a:avLst>
-              <a:gd name="adj" fmla="val 4000"/>
-            </a:avLst>
-          </a:prstGeom>
-          <a:solidFill>
-            <a:srgbClr val="FFFFFF"/>
-          </a:solidFill>
-          <a:ln w="28575">
-            <a:solidFill>
-              <a:srgbClr val="5CB8F2"/>
-            </a:solidFill>
-          </a:ln>
-        </p:spPr>
-        <p:txBody>
-          <a:bodyPr rtlCol="0" anchor="ctr"/>
-          <a:lstStyle/>
-          <a:p>
-            <a:pPr algn="ctr"/>
-          </a:p>
-        </p:txBody>
-      </p:sp>
-      <p:sp>
-        <p:nvSpPr>
-          <p:cNvPr id="13" name="Oval 12"/>
-          <p:cNvSpPr/>
-          <p:nvPr/>
-        </p:nvSpPr>
-        <p:spPr>
-          <a:xfrm>
-            <a:off x="3619423" y="2429192"/>
-            <a:ext cx="731520" cy="731520"/>
-          </a:xfrm>
-          <a:prstGeom prst="ellipse">
-            <a:avLst/>
-          </a:prstGeom>
-          <a:solidFill>
-            <a:srgbClr val="5CB8F2"/>
-          </a:solidFill>
-          <a:ln>
-            <a:noFill/>
-          </a:ln>
-        </p:spPr>
-        <p:txBody>
-          <a:bodyPr rtlCol="0" anchor="ctr"/>
-          <a:lstStyle/>
-          <a:p>
-            <a:pPr algn="ctr"/>
-          </a:p>
-        </p:txBody>
-      </p:sp>
-      <p:pic>
-        <p:nvPicPr>
-          <p:cNvPr id="14" name="아이콘:plug-connected" descr="plug-connected_13294B_1.6.png"/>
-          <p:cNvPicPr>
-            <a:picLocks noChangeAspect="1"/>
-          </p:cNvPicPr>
-          <p:nvPr/>
-        </p:nvPicPr>
-        <p:blipFill>
-          <a:blip r:embed="rId4"/>
-          <a:stretch>
-            <a:fillRect/>
-          </a:stretch>
-        </p:blipFill>
-        <p:spPr>
-          <a:xfrm>
-            <a:off x="3773043" y="2582811"/>
-            <a:ext cx="424281" cy="424281"/>
-          </a:xfrm>
-          <a:prstGeom prst="rect">
-            <a:avLst/>
-          </a:prstGeom>
-        </p:spPr>
-      </p:pic>
-      <p:sp>
-        <p:nvSpPr>
-          <p:cNvPr id="15" name="TextBox 14"/>
-          <p:cNvSpPr txBox="1"/>
-          <p:nvPr/>
-        </p:nvSpPr>
-        <p:spPr>
-          <a:xfrm>
-            <a:off x="3555415" y="3252152"/>
-            <a:ext cx="2238679" cy="1999615"/>
-          </a:xfrm>
-          <a:prstGeom prst="rect">
-            <a:avLst/>
-          </a:prstGeom>
-          <a:noFill/>
-        </p:spPr>
-        <p:txBody>
-          <a:bodyPr wrap="square" anchor="t"/>
-          <a:lstStyle/>
-          <a:p>
-            <a:pPr algn="l" eaLnBrk="0">
-              <a:lnSpc>
-                <a:spcPct val="110000"/>
-              </a:lnSpc>
-              <a:spcAft>
-                <a:spcPts val="400"/>
-              </a:spcAft>
-            </a:pPr>
-            <a:r>
-              <a:rPr sz="1750" b="1">
-                <a:solidFill>
-                  <a:srgbClr val="13294B"/>
-                </a:solidFill>
-                <a:latin typeface="맑은 고딕"/>
-                <a:ea typeface="맑은 고딕"/>
-                <a:cs typeface="맑은 고딕"/>
-              </a:rPr>
-              <a:t>데이터 패브릭(Data Fabric)</a:t>
-            </a:r>
-          </a:p>
-          <a:p>
-            <a:pPr algn="l" eaLnBrk="0" marL="154305" indent="-154305">
-              <a:lnSpc>
-                <a:spcPct val="110000"/>
-              </a:lnSpc>
-              <a:spcAft>
-                <a:spcPts val="400"/>
-              </a:spcAft>
-            </a:pPr>
-            <a:r>
-              <a:rPr sz="1350" b="0">
-                <a:solidFill>
-                  <a:srgbClr val="1F2A3A"/>
-                </a:solidFill>
-                <a:latin typeface="맑은 고딕"/>
-                <a:ea typeface="맑은 고딕"/>
-                <a:cs typeface="맑은 고딕"/>
-              </a:rPr>
-              <a:t>• 여러 출처의 데이터를 연결 · 관리하는 접근</a:t>
-            </a:r>
-          </a:p>
-          <a:p>
-            <a:pPr algn="l" eaLnBrk="0" marL="154305" indent="-154305">
-              <a:lnSpc>
-                <a:spcPct val="110000"/>
-              </a:lnSpc>
-              <a:spcAft>
-                <a:spcPts val="400"/>
-              </a:spcAft>
-            </a:pPr>
-            <a:r>
-              <a:rPr sz="1350" b="0">
-                <a:solidFill>
-                  <a:srgbClr val="1F2A3A"/>
-                </a:solidFill>
-                <a:latin typeface="맑은 고딕"/>
-                <a:ea typeface="맑은 고딕"/>
-                <a:cs typeface="맑은 고딕"/>
-              </a:rPr>
-              <a:t>• 이번 실습: 원천 자료를 연결해 읽고 출처를 추적</a:t>
-            </a:r>
-          </a:p>
-          <a:p>
-            <a:pPr algn="l" eaLnBrk="0" marL="154305" indent="-154305">
-              <a:lnSpc>
-                <a:spcPct val="110000"/>
-              </a:lnSpc>
-              <a:spcAft>
-                <a:spcPts val="400"/>
-              </a:spcAft>
-            </a:pPr>
-            <a:r>
-              <a:rPr sz="1350" b="0">
-                <a:solidFill>
-                  <a:srgbClr val="1F2A3A"/>
-                </a:solidFill>
-                <a:latin typeface="맑은 고딕"/>
-                <a:ea typeface="맑은 고딕"/>
-                <a:cs typeface="맑은 고딕"/>
-              </a:rPr>
-              <a:t>• 새 플랫폼 구축은 제외</a:t>
-            </a:r>
-          </a:p>
-        </p:txBody>
-      </p:sp>
-      <p:sp>
-        <p:nvSpPr>
-          <p:cNvPr id="16" name="Rounded Rectangle 15"/>
-          <p:cNvSpPr/>
-          <p:nvPr/>
-        </p:nvSpPr>
-        <p:spPr>
-          <a:xfrm>
-            <a:off x="3619423" y="5324919"/>
-            <a:ext cx="822960" cy="292608"/>
-          </a:xfrm>
-          <a:prstGeom prst="roundRect">
-            <a:avLst>
-              <a:gd name="adj" fmla="val 50000"/>
-            </a:avLst>
-          </a:prstGeom>
-          <a:solidFill>
-            <a:srgbClr val="5CB8F2"/>
-          </a:solidFill>
-          <a:ln>
-            <a:noFill/>
-          </a:ln>
-        </p:spPr>
-        <p:txBody>
-          <a:bodyPr rtlCol="0" anchor="ctr"/>
-          <a:lstStyle/>
-          <a:p>
-            <a:pPr algn="ctr"/>
-          </a:p>
-        </p:txBody>
-      </p:sp>
-      <p:sp>
-        <p:nvSpPr>
-          <p:cNvPr id="17" name="TextBox 16"/>
-          <p:cNvSpPr txBox="1"/>
-          <p:nvPr/>
-        </p:nvSpPr>
-        <p:spPr>
-          <a:xfrm>
-            <a:off x="3619423" y="5324919"/>
-            <a:ext cx="822960" cy="292608"/>
-          </a:xfrm>
-          <a:prstGeom prst="rect">
-            <a:avLst/>
-          </a:prstGeom>
-          <a:noFill/>
-        </p:spPr>
-        <p:txBody>
-          <a:bodyPr wrap="square" anchor="ctr"/>
-          <a:lstStyle/>
-          <a:p>
-            <a:pPr algn="ctr" eaLnBrk="0">
-              <a:lnSpc>
-                <a:spcPct val="110000"/>
-              </a:lnSpc>
-            </a:pPr>
-            <a:r>
-              <a:rPr sz="1200" b="1">
-                <a:solidFill>
-                  <a:srgbClr val="13294B"/>
-                </a:solidFill>
-                <a:latin typeface="맑은 고딕"/>
-                <a:ea typeface="맑은 고딕"/>
-                <a:cs typeface="맑은 고딕"/>
-              </a:rPr>
-              <a:t>범위</a:t>
-            </a:r>
-          </a:p>
-        </p:txBody>
-      </p:sp>
-      <p:sp>
-        <p:nvSpPr>
-          <p:cNvPr id="18" name="Rounded Rectangle 17"/>
-          <p:cNvSpPr/>
-          <p:nvPr/>
-        </p:nvSpPr>
-        <p:spPr>
-          <a:xfrm>
-            <a:off x="6233007" y="2228024"/>
-            <a:ext cx="2567863" cy="3526663"/>
-          </a:xfrm>
-          <a:prstGeom prst="roundRect">
-            <a:avLst>
-              <a:gd name="adj" fmla="val 4000"/>
+              <a:gd name="adj" fmla="val 6000"/>
             </a:avLst>
           </a:prstGeom>
           <a:solidFill>
@@ -32621,231 +32012,159 @@
       </p:sp>
       <p:sp>
         <p:nvSpPr>
-          <p:cNvPr id="19" name="Oval 18"/>
+          <p:cNvPr id="17" name="TextBox 16"/>
+          <p:cNvSpPr txBox="1"/>
+          <p:nvPr/>
+        </p:nvSpPr>
+        <p:spPr>
+          <a:xfrm>
+            <a:off x="8348472" y="2057400"/>
+            <a:ext cx="3099816" cy="731520"/>
+          </a:xfrm>
+          <a:prstGeom prst="rect">
+            <a:avLst/>
+          </a:prstGeom>
+          <a:noFill/>
+        </p:spPr>
+        <p:txBody>
+          <a:bodyPr wrap="square" anchor="t"/>
+          <a:lstStyle/>
+          <a:p>
+            <a:pPr algn="l" eaLnBrk="0">
+              <a:lnSpc>
+                <a:spcPct val="110000"/>
+              </a:lnSpc>
+            </a:pPr>
+            <a:r>
+              <a:rPr sz="1800" b="1">
+                <a:solidFill>
+                  <a:srgbClr val="13294B"/>
+                </a:solidFill>
+                <a:latin typeface="맑은 고딕"/>
+                <a:ea typeface="맑은 고딕"/>
+                <a:cs typeface="맑은 고딕"/>
+              </a:rPr>
+              <a:t>인수인계서</a:t>
+            </a:r>
+          </a:p>
+        </p:txBody>
+      </p:sp>
+      <p:sp>
+        <p:nvSpPr>
+          <p:cNvPr id="18" name="TextBox 17"/>
+          <p:cNvSpPr txBox="1"/>
+          <p:nvPr/>
+        </p:nvSpPr>
+        <p:spPr>
+          <a:xfrm>
+            <a:off x="8348472" y="2926080"/>
+            <a:ext cx="3099816" cy="1371600"/>
+          </a:xfrm>
+          <a:prstGeom prst="rect">
+            <a:avLst/>
+          </a:prstGeom>
+          <a:noFill/>
+        </p:spPr>
+        <p:txBody>
+          <a:bodyPr wrap="square" anchor="t"/>
+          <a:lstStyle/>
+          <a:p>
+            <a:pPr algn="l" eaLnBrk="0">
+              <a:lnSpc>
+                <a:spcPct val="110000"/>
+              </a:lnSpc>
+            </a:pPr>
+            <a:r>
+              <a:rPr sz="1600" b="0">
+                <a:solidFill>
+                  <a:srgbClr val="13294B"/>
+                </a:solidFill>
+                <a:latin typeface="맑은 고딕"/>
+                <a:ea typeface="맑은 고딕"/>
+                <a:cs typeface="맑은 고딕"/>
+              </a:rPr>
+              <a:t>완료 작업 · 미완료 요청 · 주의 사항</a:t>
+            </a:r>
+          </a:p>
+          <a:p>
+            <a:pPr algn="l" eaLnBrk="0">
+              <a:lnSpc>
+                <a:spcPct val="110000"/>
+              </a:lnSpc>
+            </a:pPr>
+            <a:r>
+              <a:rPr sz="1600" b="0">
+                <a:solidFill>
+                  <a:srgbClr val="13294B"/>
+                </a:solidFill>
+                <a:latin typeface="맑은 고딕"/>
+                <a:ea typeface="맑은 고딕"/>
+                <a:cs typeface="맑은 고딕"/>
+              </a:rPr>
+              <a:t>항목마다 출처와 근거 시각</a:t>
+            </a:r>
+          </a:p>
+        </p:txBody>
+      </p:sp>
+      <p:sp>
+        <p:nvSpPr>
+          <p:cNvPr id="19" name="TextBox 18"/>
+          <p:cNvSpPr txBox="1"/>
+          <p:nvPr/>
+        </p:nvSpPr>
+        <p:spPr>
+          <a:xfrm>
+            <a:off x="8348472" y="4462272"/>
+            <a:ext cx="3099816" cy="274320"/>
+          </a:xfrm>
+          <a:prstGeom prst="rect">
+            <a:avLst/>
+          </a:prstGeom>
+          <a:noFill/>
+        </p:spPr>
+        <p:txBody>
+          <a:bodyPr wrap="square" anchor="t"/>
+          <a:lstStyle/>
+          <a:p>
+            <a:pPr algn="l" eaLnBrk="0">
+              <a:lnSpc>
+                <a:spcPct val="110000"/>
+              </a:lnSpc>
+            </a:pPr>
+            <a:r>
+              <a:rPr sz="1400" b="1">
+                <a:solidFill>
+                  <a:srgbClr val="1A6FC4"/>
+                </a:solidFill>
+                <a:latin typeface="맑은 고딕"/>
+                <a:ea typeface="맑은 고딕"/>
+                <a:cs typeface="맑은 고딕"/>
+              </a:rPr>
+              <a:t>산출물</a:t>
+            </a:r>
+          </a:p>
+        </p:txBody>
+      </p:sp>
+      <p:sp>
+        <p:nvSpPr>
+          <p:cNvPr id="20" name="Rounded Rectangle 19"/>
           <p:cNvSpPr/>
           <p:nvPr/>
         </p:nvSpPr>
         <p:spPr>
           <a:xfrm>
-            <a:off x="6461607" y="2429192"/>
-            <a:ext cx="731520" cy="731520"/>
-          </a:xfrm>
-          <a:prstGeom prst="ellipse">
-            <a:avLst/>
+            <a:off x="594360" y="5166360"/>
+            <a:ext cx="11018520" cy="960120"/>
+          </a:xfrm>
+          <a:prstGeom prst="roundRect">
+            <a:avLst>
+              <a:gd name="adj" fmla="val 6000"/>
+            </a:avLst>
           </a:prstGeom>
           <a:solidFill>
             <a:srgbClr val="E7F3FD"/>
           </a:solidFill>
-          <a:ln>
-            <a:noFill/>
-          </a:ln>
-        </p:spPr>
-        <p:txBody>
-          <a:bodyPr rtlCol="0" anchor="ctr"/>
-          <a:lstStyle/>
-          <a:p>
-            <a:pPr algn="ctr"/>
-          </a:p>
-        </p:txBody>
-      </p:sp>
-      <p:pic>
-        <p:nvPicPr>
-          <p:cNvPr id="20" name="아이콘:file-description" descr="file-description_13294B_1.6.png"/>
-          <p:cNvPicPr>
-            <a:picLocks noChangeAspect="1"/>
-          </p:cNvPicPr>
-          <p:nvPr/>
-        </p:nvPicPr>
-        <p:blipFill>
-          <a:blip r:embed="rId5"/>
-          <a:stretch>
-            <a:fillRect/>
-          </a:stretch>
-        </p:blipFill>
-        <p:spPr>
-          <a:xfrm>
-            <a:off x="6615226" y="2582811"/>
-            <a:ext cx="424281" cy="424281"/>
-          </a:xfrm>
-          <a:prstGeom prst="rect">
-            <a:avLst/>
-          </a:prstGeom>
-        </p:spPr>
-      </p:pic>
-      <p:sp>
-        <p:nvSpPr>
-          <p:cNvPr id="21" name="TextBox 20"/>
-          <p:cNvSpPr txBox="1"/>
-          <p:nvPr/>
-        </p:nvSpPr>
-        <p:spPr>
-          <a:xfrm>
-            <a:off x="6397599" y="3252152"/>
-            <a:ext cx="2238679" cy="1999615"/>
-          </a:xfrm>
-          <a:prstGeom prst="rect">
-            <a:avLst/>
-          </a:prstGeom>
-          <a:noFill/>
-        </p:spPr>
-        <p:txBody>
-          <a:bodyPr wrap="square" anchor="t"/>
-          <a:lstStyle/>
-          <a:p>
-            <a:pPr algn="l" eaLnBrk="0">
-              <a:lnSpc>
-                <a:spcPct val="110000"/>
-              </a:lnSpc>
-              <a:spcAft>
-                <a:spcPts val="400"/>
-              </a:spcAft>
-            </a:pPr>
-            <a:r>
-              <a:rPr sz="1750" b="1">
-                <a:solidFill>
-                  <a:srgbClr val="13294B"/>
-                </a:solidFill>
-                <a:latin typeface="맑은 고딕"/>
-                <a:ea typeface="맑은 고딕"/>
-                <a:cs typeface="맑은 고딕"/>
-              </a:rPr>
-              <a:t>인수인계서</a:t>
-            </a:r>
-          </a:p>
-          <a:p>
-            <a:pPr algn="l" eaLnBrk="0" marL="154305" indent="-154305">
-              <a:lnSpc>
-                <a:spcPct val="110000"/>
-              </a:lnSpc>
-              <a:spcAft>
-                <a:spcPts val="400"/>
-              </a:spcAft>
-            </a:pPr>
-            <a:r>
-              <a:rPr sz="1350" b="0">
-                <a:solidFill>
-                  <a:srgbClr val="1F2A3A"/>
-                </a:solidFill>
-                <a:latin typeface="맑은 고딕"/>
-                <a:ea typeface="맑은 고딕"/>
-                <a:cs typeface="맑은 고딕"/>
-              </a:rPr>
-              <a:t>• 완료 작업 · 미완료 요청 · 주의 사항</a:t>
-            </a:r>
-          </a:p>
-          <a:p>
-            <a:pPr algn="l" eaLnBrk="0" marL="154305" indent="-154305">
-              <a:lnSpc>
-                <a:spcPct val="110000"/>
-              </a:lnSpc>
-              <a:spcAft>
-                <a:spcPts val="400"/>
-              </a:spcAft>
-            </a:pPr>
-            <a:r>
-              <a:rPr sz="1350" b="0">
-                <a:solidFill>
-                  <a:srgbClr val="1F2A3A"/>
-                </a:solidFill>
-                <a:latin typeface="맑은 고딕"/>
-                <a:ea typeface="맑은 고딕"/>
-                <a:cs typeface="맑은 고딕"/>
-              </a:rPr>
-              <a:t>• 항목마다 출처와 근거 시각</a:t>
-            </a:r>
-          </a:p>
-        </p:txBody>
-      </p:sp>
-      <p:sp>
-        <p:nvSpPr>
-          <p:cNvPr id="22" name="Rounded Rectangle 21"/>
-          <p:cNvSpPr/>
-          <p:nvPr/>
-        </p:nvSpPr>
-        <p:spPr>
-          <a:xfrm>
-            <a:off x="6461607" y="5324919"/>
-            <a:ext cx="822960" cy="292608"/>
-          </a:xfrm>
-          <a:prstGeom prst="roundRect">
-            <a:avLst>
-              <a:gd name="adj" fmla="val 50000"/>
-            </a:avLst>
-          </a:prstGeom>
-          <a:solidFill>
-            <a:srgbClr val="D3D9E1"/>
-          </a:solidFill>
-          <a:ln>
-            <a:noFill/>
-          </a:ln>
-        </p:spPr>
-        <p:txBody>
-          <a:bodyPr rtlCol="0" anchor="ctr"/>
-          <a:lstStyle/>
-          <a:p>
-            <a:pPr algn="ctr"/>
-          </a:p>
-        </p:txBody>
-      </p:sp>
-      <p:sp>
-        <p:nvSpPr>
-          <p:cNvPr id="23" name="TextBox 22"/>
-          <p:cNvSpPr txBox="1"/>
-          <p:nvPr/>
-        </p:nvSpPr>
-        <p:spPr>
-          <a:xfrm>
-            <a:off x="6461607" y="5324919"/>
-            <a:ext cx="822960" cy="292608"/>
-          </a:xfrm>
-          <a:prstGeom prst="rect">
-            <a:avLst/>
-          </a:prstGeom>
-          <a:noFill/>
-        </p:spPr>
-        <p:txBody>
-          <a:bodyPr wrap="square" anchor="ctr"/>
-          <a:lstStyle/>
-          <a:p>
-            <a:pPr algn="ctr" eaLnBrk="0">
-              <a:lnSpc>
-                <a:spcPct val="110000"/>
-              </a:lnSpc>
-            </a:pPr>
-            <a:r>
-              <a:rPr sz="1200" b="1">
-                <a:solidFill>
-                  <a:srgbClr val="13294B"/>
-                </a:solidFill>
-                <a:latin typeface="맑은 고딕"/>
-                <a:ea typeface="맑은 고딕"/>
-                <a:cs typeface="맑은 고딕"/>
-              </a:rPr>
-              <a:t>산출물</a:t>
-            </a:r>
-          </a:p>
-        </p:txBody>
-      </p:sp>
-      <p:sp>
-        <p:nvSpPr>
-          <p:cNvPr id="24" name="Rounded Rectangle 23"/>
-          <p:cNvSpPr/>
-          <p:nvPr/>
-        </p:nvSpPr>
-        <p:spPr>
-          <a:xfrm>
-            <a:off x="9075191" y="2228024"/>
-            <a:ext cx="2567863" cy="3526663"/>
-          </a:xfrm>
-          <a:prstGeom prst="roundRect">
-            <a:avLst>
-              <a:gd name="adj" fmla="val 4000"/>
-            </a:avLst>
-          </a:prstGeom>
-          <a:solidFill>
-            <a:srgbClr val="FFFFFF"/>
-          </a:solidFill>
-          <a:ln w="15875">
+          <a:ln w="12700">
             <a:solidFill>
               <a:srgbClr val="D3D9E1"/>
             </a:solidFill>
@@ -32861,67 +32180,14 @@
       </p:sp>
       <p:sp>
         <p:nvSpPr>
-          <p:cNvPr id="25" name="Oval 24"/>
-          <p:cNvSpPr/>
-          <p:nvPr/>
-        </p:nvSpPr>
-        <p:spPr>
-          <a:xfrm>
-            <a:off x="9303791" y="2429192"/>
-            <a:ext cx="731520" cy="731520"/>
-          </a:xfrm>
-          <a:prstGeom prst="ellipse">
-            <a:avLst/>
-          </a:prstGeom>
-          <a:solidFill>
-            <a:srgbClr val="E7F3FD"/>
-          </a:solidFill>
-          <a:ln>
-            <a:noFill/>
-          </a:ln>
-        </p:spPr>
-        <p:txBody>
-          <a:bodyPr rtlCol="0" anchor="ctr"/>
-          <a:lstStyle/>
-          <a:p>
-            <a:pPr algn="ctr"/>
-          </a:p>
-        </p:txBody>
-      </p:sp>
-      <p:pic>
-        <p:nvPicPr>
-          <p:cNvPr id="26" name="아이콘:list-check" descr="list-check_13294B_1.6.png"/>
-          <p:cNvPicPr>
-            <a:picLocks noChangeAspect="1"/>
-          </p:cNvPicPr>
-          <p:nvPr/>
-        </p:nvPicPr>
-        <p:blipFill>
-          <a:blip r:embed="rId6"/>
-          <a:stretch>
-            <a:fillRect/>
-          </a:stretch>
-        </p:blipFill>
-        <p:spPr>
-          <a:xfrm>
-            <a:off x="9457410" y="2582811"/>
-            <a:ext cx="424281" cy="424281"/>
-          </a:xfrm>
-          <a:prstGeom prst="rect">
-            <a:avLst/>
-          </a:prstGeom>
-        </p:spPr>
-      </p:pic>
-      <p:sp>
-        <p:nvSpPr>
-          <p:cNvPr id="27" name="TextBox 26"/>
-          <p:cNvSpPr txBox="1"/>
-          <p:nvPr/>
-        </p:nvSpPr>
-        <p:spPr>
-          <a:xfrm>
-            <a:off x="9239783" y="3252152"/>
-            <a:ext cx="2238679" cy="1999615"/>
+          <p:cNvPr id="21" name="TextBox 20"/>
+          <p:cNvSpPr txBox="1"/>
+          <p:nvPr/>
+        </p:nvSpPr>
+        <p:spPr>
+          <a:xfrm>
+            <a:off x="822960" y="5349240"/>
+            <a:ext cx="1828800" cy="365760"/>
           </a:xfrm>
           <a:prstGeom prst="rect">
             <a:avLst/>
@@ -32936,12 +32202,9 @@
               <a:lnSpc>
                 <a:spcPct val="110000"/>
               </a:lnSpc>
-              <a:spcAft>
-                <a:spcPts val="400"/>
-              </a:spcAft>
-            </a:pPr>
-            <a:r>
-              <a:rPr sz="1750" b="1">
+            </a:pPr>
+            <a:r>
+              <a:rPr sz="1900" b="1">
                 <a:solidFill>
                   <a:srgbClr val="13294B"/>
                 </a:solidFill>
@@ -32952,108 +32215,35 @@
               <a:t>성공 기준</a:t>
             </a:r>
           </a:p>
-          <a:p>
-            <a:pPr algn="l" eaLnBrk="0" marL="154305" indent="-154305">
-              <a:lnSpc>
-                <a:spcPct val="110000"/>
-              </a:lnSpc>
-              <a:spcAft>
-                <a:spcPts val="400"/>
-              </a:spcAft>
-            </a:pPr>
-            <a:r>
-              <a:rPr sz="1350" b="0">
-                <a:solidFill>
-                  <a:srgbClr val="1F2A3A"/>
-                </a:solidFill>
-                <a:latin typeface="맑은 고딕"/>
-                <a:ea typeface="맑은 고딕"/>
-                <a:cs typeface="맑은 고딕"/>
-              </a:rPr>
-              <a:t>• 항목마다 어느 출처의 언제 값인지 찾아진다</a:t>
-            </a:r>
-          </a:p>
-          <a:p>
-            <a:pPr algn="l" eaLnBrk="0" marL="154305" indent="-154305">
-              <a:lnSpc>
-                <a:spcPct val="110000"/>
-              </a:lnSpc>
-              <a:spcAft>
-                <a:spcPts val="400"/>
-              </a:spcAft>
-            </a:pPr>
-            <a:r>
-              <a:rPr sz="1350" b="0">
-                <a:solidFill>
-                  <a:srgbClr val="1F2A3A"/>
-                </a:solidFill>
-                <a:latin typeface="맑은 고딕"/>
-                <a:ea typeface="맑은 고딕"/>
-                <a:cs typeface="맑은 고딕"/>
-              </a:rPr>
-              <a:t>• 읽지 못한 출처는 그 사실을 적는다</a:t>
-            </a:r>
-          </a:p>
-        </p:txBody>
-      </p:sp>
-      <p:sp>
-        <p:nvSpPr>
-          <p:cNvPr id="28" name="Rounded Rectangle 27"/>
-          <p:cNvSpPr/>
-          <p:nvPr/>
-        </p:nvSpPr>
-        <p:spPr>
-          <a:xfrm>
-            <a:off x="9303791" y="5324919"/>
-            <a:ext cx="822960" cy="292608"/>
-          </a:xfrm>
-          <a:prstGeom prst="roundRect">
-            <a:avLst>
-              <a:gd name="adj" fmla="val 50000"/>
-            </a:avLst>
-          </a:prstGeom>
-          <a:solidFill>
-            <a:srgbClr val="D3D9E1"/>
-          </a:solidFill>
-          <a:ln>
-            <a:noFill/>
-          </a:ln>
-        </p:spPr>
-        <p:txBody>
-          <a:bodyPr rtlCol="0" anchor="ctr"/>
-          <a:lstStyle/>
-          <a:p>
-            <a:pPr algn="ctr"/>
-          </a:p>
-        </p:txBody>
-      </p:sp>
-      <p:sp>
-        <p:nvSpPr>
-          <p:cNvPr id="29" name="TextBox 28"/>
-          <p:cNvSpPr txBox="1"/>
-          <p:nvPr/>
-        </p:nvSpPr>
-        <p:spPr>
-          <a:xfrm>
-            <a:off x="9303791" y="5324919"/>
-            <a:ext cx="822960" cy="292608"/>
-          </a:xfrm>
-          <a:prstGeom prst="rect">
-            <a:avLst/>
-          </a:prstGeom>
-          <a:noFill/>
-        </p:spPr>
-        <p:txBody>
-          <a:bodyPr wrap="square" anchor="ctr"/>
-          <a:lstStyle/>
-          <a:p>
-            <a:pPr algn="ctr" eaLnBrk="0">
-              <a:lnSpc>
-                <a:spcPct val="110000"/>
-              </a:lnSpc>
-            </a:pPr>
-            <a:r>
-              <a:rPr sz="1200" b="1">
+        </p:txBody>
+      </p:sp>
+      <p:sp>
+        <p:nvSpPr>
+          <p:cNvPr id="22" name="TextBox 21"/>
+          <p:cNvSpPr txBox="1"/>
+          <p:nvPr/>
+        </p:nvSpPr>
+        <p:spPr>
+          <a:xfrm>
+            <a:off x="2880360" y="5303520"/>
+            <a:ext cx="8412480" cy="731520"/>
+          </a:xfrm>
+          <a:prstGeom prst="rect">
+            <a:avLst/>
+          </a:prstGeom>
+          <a:noFill/>
+        </p:spPr>
+        <p:txBody>
+          <a:bodyPr wrap="square" anchor="t"/>
+          <a:lstStyle/>
+          <a:p>
+            <a:pPr algn="l" eaLnBrk="0">
+              <a:lnSpc>
+                <a:spcPct val="110000"/>
+              </a:lnSpc>
+            </a:pPr>
+            <a:r>
+              <a:rPr sz="1700" b="0">
                 <a:solidFill>
                   <a:srgbClr val="13294B"/>
                 </a:solidFill>
@@ -33061,7 +32251,25 @@
                 <a:ea typeface="맑은 고딕"/>
                 <a:cs typeface="맑은 고딕"/>
               </a:rPr>
-              <a:t>판정</a:t>
+              <a:t>항목마다 어느 출처의 언제 값인지 찾아진다</a:t>
+            </a:r>
+          </a:p>
+          <a:p>
+            <a:pPr algn="l" eaLnBrk="0">
+              <a:lnSpc>
+                <a:spcPct val="110000"/>
+              </a:lnSpc>
+            </a:pPr>
+            <a:r>
+              <a:rPr sz="1700" b="0">
+                <a:solidFill>
+                  <a:srgbClr val="13294B"/>
+                </a:solidFill>
+                <a:latin typeface="맑은 고딕"/>
+                <a:ea typeface="맑은 고딕"/>
+                <a:cs typeface="맑은 고딕"/>
+              </a:rPr>
+              <a:t>읽지 못한 출처는 그 사실을 적는다</a:t>
             </a:r>
           </a:p>
         </p:txBody>

--- a/산출물/통합반/이론/08회차/통합반_08일차.pptx
+++ b/산출물/통합반/이론/08회차/통합반_08일차.pptx
@@ -564,7 +564,37 @@
           <a:lstStyle/>
           <a:p>
             <a:r>
-              <a:t>안녕하세요. 이번 회차에서는 에이전트가 정해 둔 대로 행동하는지, 그걸 어떻게 확인하는지를 다룹니다. 에이전트가 지킬 것은 명세에 적어 두었죠. 그런데 적어 둔 것하고 실제로 일어나는 건 다를 수 있습니다. 요구가 하나 더 붙으면 어떨까요? 그전까지 잘 되던 동작이 그대로인지도 알아야 하고요. 그러면 에이전트가 정말 명세대로 움직이는지, 무엇을 보고 어떻게 확인할 수 있을까요? 답은 기대하는 행동을 시나리오로 적고, 실행으로 되풀이해서 확인하는 데 있습니다. 그 방법을 배우고, 에이전트를 만들고 믿고 맡기기까지 하나씩 더해 온 장치들도 한 번에 정리해 보겠습니다.</a:t>
+              <a:t>[짚을 곳] 제목 → 과정 줄 → 부제(기대 행동을 시나리오로 · 실행으로 확인 · 과정을 하나로)</a:t>
+            </a:r>
+          </a:p>
+          <a:p>
+            <a:r>
+              <a:t>· 이 회차: 에이전트가 정해 둔 대로 행동하는지, 그걸 어떻게 확인하는지</a:t>
+            </a:r>
+          </a:p>
+          <a:p>
+            <a:r>
+              <a:t>· 지킬 것은 명세에 적어 두었지만, 적어 둔 것과 실제로 일어나는 건 다를 수 있다</a:t>
+            </a:r>
+          </a:p>
+          <a:p>
+            <a:r>
+              <a:t>· 요구가 하나 더 붙으면 그전까지 잘 되던 동작이 그대로인지도 알아야 한다</a:t>
+            </a:r>
+          </a:p>
+          <a:p>
+            <a:r>
+              <a:t>· 물음: 에이전트가 정말 명세대로 움직이는지 무엇을 보고 어떻게 확인하나</a:t>
+            </a:r>
+          </a:p>
+          <a:p>
+            <a:r>
+              <a:t>· 답의 방향: 기대 행동을 시나리오로 적고 실행으로 되풀이해 확인. 끝에서 에이전트를 만들고 믿고 맡기기까지 더해 온 장치를 한 번에 정리</a:t>
+            </a:r>
+          </a:p>
+          <a:p>
+            <a:r>
+              <a:t>[다음] 학습목표 네 가지</a:t>
             </a:r>
           </a:p>
         </p:txBody>
@@ -634,7 +664,37 @@
           <a:lstStyle/>
           <a:p>
             <a:r>
-              <a:t>Then을 어떻게 적느냐에 따라 시나리오가 쓸모 있느냐 없느냐가 갈립니다. 화면 왼쪽과 오른쪽을 비교해 보세요. 왼쪽은 거절을 적절히 처리한다, 설비에 영향을 주지 않는다, 담당자에게 잘 알린다. 틀린 말은 아니죠. 그런데 실행 결과를 보고 이게 통과인지 실패인지 정할 수 있을까요? 적절하다는 기준이 읽는 사람마다 다르잖아요. 오른쪽은 어떤가요. 설비 명령이 0건이다, 업무 처리가 0건이다, 처리 건이 거절로 닫히고 사유가 남아 있다. 건수를 세거나 상태와 값을 읽으면 바로 가려집니다. 명세의 수용 기준을 적을 때도 판정할 수 있는 문장으로 적었었죠. Then도 똑같습니다. 「영향을 주지 않는다」라고 쓰고 싶다면, 그 영향이 무엇으로 나타나는지를 찾아서 「설비 명령이 0건이다」로 바꿔 적는 거예요. 명령 0건은 우리가 검사한 명령 생성 경로에 관한 결과입니다. 설비의 모든 물리적 영향이 없었다는 뜻으로 넓혀 읽지는 마세요. 이 시나리오에서 확인할 업무 처리와 발송, 상태 기록의 범위를 함께 정해야 합니다.</a:t>
+              <a:t>[짚을 곳] 왼쪽 가릴 수 없는 Then(읽는 사람마다 다르다) → 오른쪽 강조한 가릴 수 있는 Then(실행 결과로 가려진다)</a:t>
+            </a:r>
+          </a:p>
+          <a:p>
+            <a:r>
+              <a:t>· Then을 어떻게 적느냐에 시나리오의 쓸모가 갈린다</a:t>
+            </a:r>
+          </a:p>
+          <a:p>
+            <a:r>
+              <a:t>· 왼쪽: 적절히 처리한다, 설비에 영향을 주지 않는다, 잘 알린다 — 틀린 말은 아니지만 통과 · 실패를 정할 수 없다(「적절」의 기준이 사람마다 다름)</a:t>
+            </a:r>
+          </a:p>
+          <a:p>
+            <a:r>
+              <a:t>· 오른쪽: 설비 명령 0건, 업무 처리 0건, 거절로 닫히고 사유가 남아 있다 — 건수를 세거나 상태 · 값을 읽으면 바로 가려진다</a:t>
+            </a:r>
+          </a:p>
+          <a:p>
+            <a:r>
+              <a:t>· 수용 기준을 판정할 수 있는 문장으로 적은 것과 같다. 「영향을 주지 않는다」를 쓰고 싶으면 그 영향이 무엇으로 나타나는지 찾아 「명령 0건」으로 바꿔 적는다</a:t>
+            </a:r>
+          </a:p>
+          <a:p>
+            <a:r>
+              <a:t>· 주의: 명령 0건은 검사한 명령 생성 경로에 관한 결과. 설비의 모든 물리적 영향이 없었다는 뜻으로 넓혀 읽지 않는다. 확인할 업무 처리 · 발송 · 상태 기록의 범위를 함께 정한다</a:t>
+            </a:r>
+          </a:p>
+          <a:p>
+            <a:r>
+              <a:t>[다음] SDD와 BDD</a:t>
             </a:r>
           </a:p>
         </p:txBody>
@@ -704,7 +764,37 @@
           <a:lstStyle/>
           <a:p>
             <a:r>
-              <a:t>명세를 다룬 SDD와 방금 본 BDD를 나란히 놓겠습니다. 왼쪽 SDD는 무엇을 만들고 무엇을 지킬지 명세를 중심으로 정하고, 구현과 검증에도 그 기준을 이어 가는 접근입니다. 오른쪽 BDD는 구체적인 행동 사례를 함께 논의해서 기대를 맞추고, 그 사례를 실행 가능한 검증에 연결하는 접근이에요. 두 방식을 구현 전과 구현 후로 나누면 정확하지 않습니다. 거절하면 명령이 없어야 한다는 시나리오는 구현하기 전에도 쓸 수 있죠. 오히려 그때 사유가 없으면 거절을 받을 것인지 물어 보면, 명세에서 빠뜨린 조건을 찾을 수 있습니다. 구현한 뒤에는 같은 시나리오로 실제 행동을 확인하고요. 이 수업에서는 앞 회차에 명세를 정리했고, 이번 회차에 시나리오와 검증을 다룹니다. 이것은 학습 순서입니다. 실제 작업에서는 명세와 사례를 오가며 기대를 구체화할 수 있어요. 앞 실습에서 저장한 입력과 조회 자료, 기대 결과가 그 출발점입니다. 지키겠다는 문장이 있으면 확인할 사례를 고를 수 있고, 사례가 구체적이면 문장의 모호함을 발견할 수 있습니다. 이렇게 서로 보완하면서 변경의 기준을 남기는 겁니다.</a:t>
+              <a:t>[짚을 곳] 왼쪽 SDD(요구와 기준) → 오른쪽 강조한 BDD(사례와 확인)</a:t>
+            </a:r>
+          </a:p>
+          <a:p>
+            <a:r>
+              <a:t>· SDD: 무엇을 만들고 지킬지 명세 중심으로 정하고, 구현과 검증에도 그 기준을 이어 간다. 명세는 변경에 맞춰 관리</a:t>
+            </a:r>
+          </a:p>
+          <a:p>
+            <a:r>
+              <a:t>· BDD: 구체적 행동 사례를 함께 논의해 기대를 맞추고 그 사례를 실행 가능한 검증에 연결</a:t>
+            </a:r>
+          </a:p>
+          <a:p>
+            <a:r>
+              <a:t>· 「구현 전 = SDD, 구현 후 = BDD」로 나누면 틀린다. 거절 시나리오는 구현 전에도 쓸 수 있고, 그때 「사유가 없으면 거절을 받나?」를 물으면 명세에서 빠진 조건을 찾는다. 구현 뒤엔 같은 시나리오로 실제 행동 확인</a:t>
+            </a:r>
+          </a:p>
+          <a:p>
+            <a:r>
+              <a:t>· 수업에서 명세 → 시나리오 순서는 학습 순서일 뿐. 실제로는 명세와 사례를 오가며 기대를 구체화. 앞 실습에서 저장한 입력 · 조회 자료 · 기대 결과가 출발점</a:t>
+            </a:r>
+          </a:p>
+          <a:p>
+            <a:r>
+              <a:t>· 지키겠다는 문장이 있으면 확인할 사례를 고를 수 있고, 사례가 구체적이면 문장의 모호함이 드러난다 → 서로 보완하며 변경의 기준을 남긴다</a:t>
+            </a:r>
+          </a:p>
+          <a:p>
+            <a:r>
+              <a:t>[다음] 명세 항목이 시나리오에 놓이는 자리</a:t>
             </a:r>
           </a:p>
         </p:txBody>
@@ -774,7 +864,42 @@
           <a:lstStyle/>
           <a:p>
             <a:r>
-              <a:t>그럼 명세의 항목 하나하나가 시나리오의 어디로 가는지 표로 맞춰 볼게요. 왼쪽 칸이 명세에 적은 것, 가운데가 시나리오에서 놓이는 자리, 오른쪽이 쿨러 사건의 예입니다. 첫 줄, 입력 계약은 Given과 When에 넣는 입력값이 됩니다. 쿨러 사건이라면 설비 HYD-01과 쿨러 성능 저하 경보가 입력이죠. 둘째 줄, 출력 계약은 Then으로 가요. 결과에 있어야 하는 항목들, 원인이나 추천이나 판단 번호 같은 다섯 항목이 다 있는지를 Then에서 확인합니다. 셋째 줄 금지 조건도 Then으로 갑니다. 다만 이번엔 일어나지 않아야 하는 일로 들어가요. 승인 전에는 설비 명령이 0건이다, 이렇게요. 그래서 이 줄을 강조해 뒀습니다. 마지막 줄 수용 기준은 조금 다릅니다. Then 한 줄이 아니라, 시나리오 한 편 한 편이 통과하는 걸로 확인돼요. 「거절하면 명령도 업무 처리도 없다」는 기준은 관련 시나리오의 결과로 확인합니다. 이렇게 놓고 보면 시나리오에 적는 내용은 새로 지어내는 게 아니에요. 명세에 이미 적은 약속을 전제, 행동, 기대 결과로 나누고, 기대 결과는 실행 결과로 가릴 수 있는 사실로 바꿔 옮겨 놓는 겁니다. 약속을 이렇게 적어 두면, 실행 결과를 보고 그 약속이 지켜졌는지를 가릴 수 있어요. 처음에 물었던, 약속을 어떻게 적어 둬야 확인할 수 있느냐의 답이 바로 이겁니다. 항목이 있다는 것뿐 아니라 값의 형식과 뜻도 계약에 맞아야 합니다. 한 수용 기준을 여러 상황에서 확인할 수도 있어요. 거절 한 번의 통과가 모든 입력과 예외를 대신하지는 않습니다.</a:t>
+              <a:t>[짚을 곳] 표 머리(명세에 적은 것 · 시나리오에서 놓이는 자리 · 쿨러 사건의 예) → 네 줄, 강조한 금지 조건</a:t>
+            </a:r>
+          </a:p>
+          <a:p>
+            <a:r>
+              <a:t>· 입력 계약 → Given · When의 입력값: HYD-01, 쿨러 성능 저하 경보</a:t>
+            </a:r>
+          </a:p>
+          <a:p>
+            <a:r>
+              <a:t>· 출력 계약 → Then: 원인 · 추천 · 판단 번호 등 다섯 항목이 있는지</a:t>
+            </a:r>
+          </a:p>
+          <a:p>
+            <a:r>
+              <a:t>· 금지 조건 → Then, 단 일어나지 않아야 하는 일로: 승인 전 설비 명령 0건</a:t>
+            </a:r>
+          </a:p>
+          <a:p>
+            <a:r>
+              <a:t>· 수용 기준은 다르다: Then 한 줄이 아니라 시나리오 한 편 한 편이 통과하는 것으로 확인(「거절하면 명령도 업무 처리도 없다」는 관련 시나리오의 결과로)</a:t>
+            </a:r>
+          </a:p>
+          <a:p>
+            <a:r>
+              <a:t>· 시나리오 내용은 새로 지어내는 게 아니다. 명세의 약속을 전제 · 행동 · 기대 결과로 나누고 기대 결과를 실행 결과로 가릴 사실로 옮긴다 → 단원 첫 물음(어떻게 적어야 확인할 수 있나)의 답</a:t>
+            </a:r>
+          </a:p>
+          <a:p>
+            <a:r>
+              <a:t>· 주의: 항목이 있다는 것만이 아니라 값의 형식 · 뜻도 계약에 맞아야. 한 수용 기준을 여러 상황에서 확인할 수 있고, 거절 한 번의 통과가 모든 입력과 예외를 대신하지 않는다</a:t>
+            </a:r>
+          </a:p>
+          <a:p>
+            <a:r>
+              <a:t>[다음] 단원 02, 실행 가능한 검증</a:t>
             </a:r>
           </a:p>
         </p:txBody>
@@ -844,7 +969,32 @@
           <a:lstStyle/>
           <a:p>
             <a:r>
-              <a:t>약속을 시나리오로 적는 방법까지 찾았으니, 두 번째 단원에서는 그 시나리오를 실행 가능한 검증으로 바꾸고, 시험을 네 종류로 나눠 봅니다. Given, When, Then으로 적은 시나리오도 아직은 글이에요. 글로만 두면 결국 사람이 읽고 손으로 확인해야 하죠. 바꿀 때마다 다시 눌러 봐야 하는 반복의 부담이 그대로 남는 겁니다. 그래서 물음이 두 개예요. 시나리오를 어떻게 바꿔야 실행으로 되풀이할 수 있을까요? 그리고 어떤 관점으로 경우를 골라야 중요한 상황을 덜 놓칠까요? 첫 번째 물음부터 풀어 보겠습니다.</a:t>
+              <a:t>[짚을 곳] 단원 번호 02 → 부제(정상 · 경계 · 예외 · 회귀)</a:t>
+            </a:r>
+          </a:p>
+          <a:p>
+            <a:r>
+              <a:t>· Given · When · Then으로 적은 시나리오도 아직 글. 글로만 두면 사람이 읽고 손으로 확인해야 하고, 바꿀 때마다 다시 눌러 보는 반복의 부담이 남는다</a:t>
+            </a:r>
+          </a:p>
+          <a:p>
+            <a:r>
+              <a:t>· 물음 1: 시나리오를 어떻게 바꿔야 실행으로 되풀이할 수 있나</a:t>
+            </a:r>
+          </a:p>
+          <a:p>
+            <a:r>
+              <a:t>· 물음 2: 어떤 관점으로 경우를 골라야 중요한 상황을 덜 놓치나 → 네 종류의 시험</a:t>
+            </a:r>
+          </a:p>
+          <a:p>
+            <a:r>
+              <a:t>· 순서: 물음 1(실행 연결 · 단언)부터</a:t>
+            </a:r>
+          </a:p>
+          <a:p>
+            <a:r>
+              <a:t>[다음] 시나리오에서 실행 가능한 검증으로</a:t>
             </a:r>
           </a:p>
         </p:txBody>
@@ -914,7 +1064,42 @@
           <a:lstStyle/>
           <a:p>
             <a:r>
-              <a:t>시나리오를 글로 적었으면 실제 시스템과 연결해야 합니다. 그림 왼쪽의 세 줄이 오른쪽에서 각각 무엇이 되는지 보세요. Given은 시험을 시작할 상태와 입력을 준비하는 코드가 됩니다. When은 그 상태에서 거절 같은 행동을 실행하는 코드가 되고, Then은 나온 결과가 기대 조건을 만족하는지 검사하는 코드가 됩니다. 문장을 적는 것만으로 시스템이 자동 실행되지는 않습니다. 사람이 확인할 수도 있고, 반복할 부분을 시험 코드나 실행 도구에 연결할 수도 있어요. Gherkin을 사용하는 도구에서는 문장에 대응하는 실행 코드를 연결합니다. 다음 장의 HYD 예는 같은 구조를 파이썬 시험으로 직접 작성한 것입니다. 반복해서 비교하려면 입력뿐 아니라 조회 자료와 규칙, 설정도 확인해야 합니다. 같은 경보를 넣어도 센서 값이 바뀌면 다른 결과가 올바를 수 있잖아요. 저장한 자료로 조건을 고정하면 코드 변경의 영향을 비교하기 쉬워집니다. 실시간 자료를 쓰는 검증이라면 그때 읽은 값과 시각을 함께 남겨야 하고요. HYD의 규칙 판단 경로는 같은 사실과 같은 규칙에서 같은 판정을 내도록 구성돼 있습니다. 그렇다고 자료를 고정하면 모든 AI의 설명까지 같아진다는 뜻은 아니에요. 오른쪽 대조에서는 그 상황에 맞는 값이나 허용 범위, 일어나지 않아야 할 행동을 검사합니다. 어긋나면 어떤 시나리오의 어느 조건이 실패했는지 남겨 다음 수정으로 이어 갑니다.</a:t>
+              <a:t>[짚을 곳] 그림 왼쪽 Given · When · Then 세 줄 → 오른쪽 준비할 입력 · 실행할 행동 · 견줄 기대값 → 실제 결과 → 대조 → 통과</a:t>
+            </a:r>
+          </a:p>
+          <a:p>
+            <a:r>
+              <a:t>강조한 실패(어긋난 시나리오의 이름)</a:t>
+            </a:r>
+          </a:p>
+          <a:p>
+            <a:r>
+              <a:t>· Given → 시험을 시작할 상태와 입력을 준비하는 코드, When → 그 상태에서 거절 같은 행동을 실행하는 코드, Then → 결과가 기대 조건을 만족하는지 검사하는 코드</a:t>
+            </a:r>
+          </a:p>
+          <a:p>
+            <a:r>
+              <a:t>· 문장만으로 자동 실행되진 않는다. 사람이 확인하거나, 반복할 부분을 시험 코드 · 실행 도구에 연결. Gherkin 도구는 문장마다 실행 코드를 잇고, HYD 예는 같은 구조를 파이썬 시험으로 직접 작성</a:t>
+            </a:r>
+          </a:p>
+          <a:p>
+            <a:r>
+              <a:t>· 반복 비교하려면 입력뿐 아니라 조회 자료 · 규칙 · 설정도 확인. 센서 값이 바뀌면 다른 결과가 맞을 수 있다 → 저장한 자료로 조건을 고정하면 코드 변경의 영향을 비교하기 쉽다. 실시간 자료라면 읽은 값과 시각을 함께 남긴다</a:t>
+            </a:r>
+          </a:p>
+          <a:p>
+            <a:r>
+              <a:t>· HYD 규칙 판단 경로는 같은 사실 · 같은 규칙에서 같은 판정. 그래도 자료를 고정한다고 AI 설명까지 같아지진 않는다 → 대조는 그 상황의 값 · 허용 범위 · 일어나지 않아야 할 행동을 검사</a:t>
+            </a:r>
+          </a:p>
+          <a:p>
+            <a:r>
+              <a:t>· 어긋나면 어느 시나리오의 어느 조건이 실패했는지 남겨 수정으로 잇는다</a:t>
+            </a:r>
+          </a:p>
+          <a:p>
+            <a:r>
+              <a:t>[다음] 단언</a:t>
             </a:r>
           </a:p>
         </p:txBody>
@@ -984,7 +1169,42 @@
           <a:lstStyle/>
           <a:p>
             <a:r>
-              <a:t>이건 HYD에서 승인 단계를 확인하는 실제 시험 코드 한 편입니다. 코드를 다 읽을 필요는 없어요. 위에서부터 세 군데만 짚을게요. 맨 위의 긴 이름, 이게 시험의 이름입니다. 풀어서 읽으면 「거절은 설비와 업무에 아무 일도 하지 않고, 처리 건을 거절로 닫는다」예요. 시험 이름이 그대로 시나리오 문장인 거죠. 가운데 거절을 부르는 줄이 When입니다. 사유로 「이번 주 생산 일정상 진행하지 않음」을 넣고 거절을 실행하고요. 아래쪽 assert 두 줄이 Then이에요. assert는 단언이라고 하는데, 뒤에 적은 식이 참인지 확인하는 한 줄입니다. 첫 줄은 명령 번호가 없고 업무 처리 목록이 비어 있는지를 보고요. 둘째 줄은 승인 값이 거절을 뜻하는 「반려」인지, 사유가 그대로 남았는지를 봅니다. 화면의 줄임표는 준비 부분하고 나머지 단언을 줄여 놓은 자리예요. 실제 시험엔 메일이 나가지 않았는지 같은 조건도 같이 들어 있습니다. 그리고 단언이 하나라도 참이 아니면, 이 시험은 실패로 기록돼요. 시나리오의 기대가 시험 코드의 검사 조건으로 연결된 겁니다. 이 시험은 준비한 상태와 실행 대역을 사용합니다. 실제 공장에 명령을 보내 본 결과와는 구별해야 해요. 또한 기대 결과 한 줄이 반드시 단언 한 줄과 일대일로 대응하는 것은 아닙니다. 필요한 조건을 빠뜨리지 않고 확인하는지가 중요합니다.</a:t>
+              <a:t>[짚을 곳] 왼쪽 코드 위에서 세 군데(시험 이름 → reject_card 줄 → assert 두 줄), 오른쪽 강조한 assert</a:t>
+            </a:r>
+          </a:p>
+          <a:p>
+            <a:r>
+              <a:t>· HYD에서 승인 단계를 확인하는 실제 시험 코드. 다 읽지 않고 세 곳만</a:t>
+            </a:r>
+          </a:p>
+          <a:p>
+            <a:r>
+              <a:t>· 시험 이름 = 시나리오 문장: 「거절은 설비와 업무에 아무 일도 하지 않고 처리 건을 거절로 닫는다」</a:t>
+            </a:r>
+          </a:p>
+          <a:p>
+            <a:r>
+              <a:t>· reject_card = When: 사유 「이번 주 생산 일정상 진행하지 않음」을 넣고 거절 실행</a:t>
+            </a:r>
+          </a:p>
+          <a:p>
+            <a:r>
+              <a:t>· assert(단언, Assertion) = Then: 뒤의 식이 참이 아니면 시험 실패. 첫째: 명령 번호 없음 · 업무 처리 목록 빔. 둘째: 승인 값이 「반려」, 사유가 그대로 남음</a:t>
+            </a:r>
+          </a:p>
+          <a:p>
+            <a:r>
+              <a:t>· 줄임표는 준비 부분과 나머지 단언(메일이 나가지 않았는지 등). 단언 하나라도 거짓이면 실패로 기록 → 시나리오의 기대가 검사 조건으로 연결됨</a:t>
+            </a:r>
+          </a:p>
+          <a:p>
+            <a:r>
+              <a:t>· 주의: 준비한 상태와 실행 대역으로 돈다 — 실제 공장에 명령을 보내 본 결과와 구별. 기대 결과 한 줄이 단언 한 줄과 꼭 일대일은 아니고, 필요한 조건을 빠뜨리지 않는지가 중요</a:t>
+            </a:r>
+          </a:p>
+          <a:p>
+            <a:r>
+              <a:t>[다음] 시험 이름으로 읽는 시나리오</a:t>
             </a:r>
           </a:p>
         </p:txBody>
@@ -1054,7 +1274,42 @@
           <a:lstStyle/>
           <a:p>
             <a:r>
-              <a:t>시험 이름을 보면 무엇을 확인하려는지 알 수 있습니다. 영어 이름을 그대로 읽을 필요는 없어요. 왼쪽 상황과 오른쪽 기대 결과를 연결해 보세요. 첫 줄은 권한 있는 승인을 받아 정해진 실행 조건에서 끝까지 처리하는 경우입니다. 둘째는 사유를 적고 거절했을 때 설비 명령과 업무 처리가 없고 거절로 끝나는 경우예요. 셋째는 사유 없는 거절을 받지 않는 경우, 넷째는 지연 알림 뒤에도 승인할 수 있는 경우입니다. 저장소의 승인과 거절 시험은 냉각 대응, 정기 정비, 예비품 구매라는 세 흐름에 같은 시험을 적용합니다. 세 업무가 같은 승인 단계를 공유하기 때문이에요. 그렇다고 모든 시험이 세 흐름에서 똑같이 실행된다는 뜻은 아닙니다. 각 업무의 실제 조치와 별도 조건도 확인해야 하죠. 실패한 시험 이름은 조사할 출발점을 알려 줍니다. 이름만으로 원인이 확정되는 것은 아니므로, 그 시험의 입력과 실패한 단언을 함께 읽어야 합니다.</a:t>
+              <a:t>[짚을 곳] 표 머리(전제와 행동 · 시험 이름 · 기대 결과) → 네 줄. 영어 이름은 읽지 않고 왼쪽 상황과 오른쪽 기대 결과를 잇게 한다</a:t>
+            </a:r>
+          </a:p>
+          <a:p>
+            <a:r>
+              <a:t>· 1 담당자가 승인: 권한 있는 승인으로 정해진 실행 조건에서 끝까지 처리</a:t>
+            </a:r>
+          </a:p>
+          <a:p>
+            <a:r>
+              <a:t>· 2 사유를 적고 거절: 설비 명령 · 업무 처리 0건, 거절로 종료</a:t>
+            </a:r>
+          </a:p>
+          <a:p>
+            <a:r>
+              <a:t>· 3 사유 없이 거절: 거절이 받아들여지지 않는다(사유와 승인할 수 있는 역할이 필요)</a:t>
+            </a:r>
+          </a:p>
+          <a:p>
+            <a:r>
+              <a:t>· 4 지연 알림 뒤 승인: 알림 뒤에도 승인이 정상 처리</a:t>
+            </a:r>
+          </a:p>
+          <a:p>
+            <a:r>
+              <a:t>· 저장소의 승인 · 거절 시험은 냉각 대응 · 정기 정비 · 예비품 구매 세 흐름에 같은 시험을 적용 — 같은 승인 단계를 공유해서. 그렇다고 모든 시험이 세 흐름에서 똑같이 도는 건 아니고 업무별 실제 조치 · 별도 조건도 확인</a:t>
+            </a:r>
+          </a:p>
+          <a:p>
+            <a:r>
+              <a:t>· 실패한 시험 이름은 조사의 출발점. 이름만으로 원인이 확정되진 않으니 그 시험의 입력과 실패한 단언을 함께 읽는다</a:t>
+            </a:r>
+          </a:p>
+          <a:p>
+            <a:r>
+              <a:t>[다음] 한 시나리오는 한 경우</a:t>
             </a:r>
           </a:p>
         </p:txBody>
@@ -1124,7 +1379,32 @@
           <a:lstStyle/>
           <a:p>
             <a:r>
-              <a:t>승인 한 경우가 통과했다고 승인 단계 전체가 확인된 것은 아닙니다. 그림은 같은 출발점에서 갈리는 네 가지 대표 상황이에요. 승인하면 현재 실행 조건도 확인한 뒤 해당 업무가 진행됩니다. 거절하면 설비 명령과 업무 조치 없이 처리 건을 거절로 닫습니다. 응답이 없으면 지연 알림 뒤에도 기다리고, 사유나 권한이 부족한 요청은 받아들이지 않습니다. 이 중 하나만 실행하면 나머지 갈래는 확인하지 못하죠. 그래서 각 행동의 입력과 기대를 준비합니다. 하나의 시험 틀에 여러 입력을 넣어 확인할 수도 있지만, 어떤 경우를 실제로 실행했는지는 구별해서 남겨야 합니다. 이 네 갈래가 가능한 상황을 전부 열거한 것은 아닙니다. 필요한 경우를 빠뜨리지 않으려면 기준값 근처와 자료 누락, 변경의 영향까지 다른 관점으로 살펴봐야 해요. 다음 표의 네 종류가 그 관점을 제공합니다.</a:t>
+              <a:t>[짚을 곳] 그림 왼쪽 승인 단계(추천안과 담당자) → 가운데 네 갈래(승인 · 거절 · 무응답 · 사유 없음 · 권한 없음) → 오른쪽 결과 네 칸</a:t>
+            </a:r>
+          </a:p>
+          <a:p>
+            <a:r>
+              <a:t>· 승인 한 경우가 통과했다고 승인 단계 전체가 확인된 것은 아니다</a:t>
+            </a:r>
+          </a:p>
+          <a:p>
+            <a:r>
+              <a:t>· 승인: 현재 실행 조건도 확인한 뒤 업무 진행(처리 건 정상 종료). 거절: 명령 · 업무 조치 없이 거절로 닫음. 무응답: 지연 알림 뒤에도 계속 대기. 사유 · 권한 부족: 요청 거부, 승인 단계는 진행 중</a:t>
+            </a:r>
+          </a:p>
+          <a:p>
+            <a:r>
+              <a:t>· 하나만 실행하면 나머지 갈래는 확인 못 한다 → 갈래마다 입력과 기대를 준비. 한 시험 틀에 여러 입력을 넣을 수도 있지만 어떤 경우를 실제로 실행했는지는 구별해 남긴다</a:t>
+            </a:r>
+          </a:p>
+          <a:p>
+            <a:r>
+              <a:t>· 네 갈래가 가능한 상황 전부는 아니다. 기준값 근처 · 자료 누락 · 변경의 영향까지 다른 관점으로 봐야 빠뜨리지 않는다</a:t>
+            </a:r>
+          </a:p>
+          <a:p>
+            <a:r>
+              <a:t>[다음] 그 관점, 네 종류의 시험</a:t>
             </a:r>
           </a:p>
         </p:txBody>
@@ -1194,7 +1474,42 @@
           <a:lstStyle/>
           <a:p>
             <a:r>
-              <a:t>중요한 갈래를 고르는 데 쓸 만한 구분이 있습니다. 시험을 확인하는 대상에 따라 정상, 경계, 예외, 회귀, 이렇게 네 종류로 나누는 거예요. 화면 표의 왼쪽 칸입니다. 첫 줄 정상 시험은 기본 경로가 끝까지 가는지를 봅니다. 오른쪽 칸의 예처럼, 승인과 실행 조건을 충족하면 처리 건이 끝까지 처리되는 거죠. 경계 시험은 기준값 바로 안팎에서 판정이 맞는지를 봐요. 쿨러 사건에서는 조치 뒤에 유온을 다시 읽어서 회복했는지를 판정하는데, 이 실습 설비에 정해 둔 회복 기준이 55 ℃ 미만입니다. 그러니 다시 읽은 유온이 딱 55.0 ℃라면 회복으로 보지 않아야 하죠. 이게 경계 시험의 예입니다. 예외 시험은 거절, 누락, 오류처럼 일이 정상 경로를 벗어났을 때 정한 대로 다루는지를 봅니다. 사유 없는 거절이 받아들여지지 않는 게 예외 시험이에요. 마지막 회귀 시험은 무언가를 바꾼 뒤에도 기존 행동이 그대로인지를 봅니다. 긴급 조건을 더한 뒤에도, 거절하면 명령이 0건이어야 하죠. 그런데 넷이 같은 결의 구분은 아니에요. 앞의 셋은 무엇을 확인하느냐에 따른 구분이고, 회귀는 언제 확인하느냐에 가깝습니다. 그래서 회귀 시험의 내용은 대개 이미 있던 정상, 경계, 예외 시험이에요. 정상 시험은 앞에서 본 승인 시나리오가 바로 그 예니까, 나머지 셋을 차례로 보겠습니다.</a:t>
+              <a:t>[짚을 곳] 표 왼쪽 종류 칸 네 줄 → 확인하는 것 → 쿨러 사건의 예, 강조한 회귀</a:t>
+            </a:r>
+          </a:p>
+          <a:p>
+            <a:r>
+              <a:t>· 확인하는 대상에 따라 넷으로 나누면 중요한 갈래를 고르기 쉽다</a:t>
+            </a:r>
+          </a:p>
+          <a:p>
+            <a:r>
+              <a:t>· 정상: 기본 경로가 끝까지 가는가. 승인 · 실행 조건 충족 시 처리 건이 끝까지 처리</a:t>
+            </a:r>
+          </a:p>
+          <a:p>
+            <a:r>
+              <a:t>· 경계: 기준값 바로 안팎에서 판정이 맞는가. 조치 뒤 유온을 다시 읽어 회복을 판정하는데 이 실습 설비의 회복 기준은 55 ℃ 미만 → 재관측 55.0 ℃는 회복으로 보지 않아야</a:t>
+            </a:r>
+          </a:p>
+          <a:p>
+            <a:r>
+              <a:t>· 예외: 거절 · 누락 · 오류처럼 정상 경로를 벗어났을 때 정한 대로 다루나. 사유 없는 거절은 받지 않음</a:t>
+            </a:r>
+          </a:p>
+          <a:p>
+            <a:r>
+              <a:t>· 회귀: 바꾼 뒤에도 기존 행동이 그대로인가. 긴급 조건을 더한 뒤에도 거절하면 명령 0건</a:t>
+            </a:r>
+          </a:p>
+          <a:p>
+            <a:r>
+              <a:t>· 넷은 같은 결이 아니다: 앞 셋은 「무엇을」 확인하나, 회귀는 「언제」 확인하나에 가깝다 → 회귀 시험의 내용은 대개 이미 있던 정상 · 경계 · 예외 시험. 정상은 앞의 승인 시나리오가 예이니 나머지 셋을 차례로</a:t>
+            </a:r>
+          </a:p>
+          <a:p>
+            <a:r>
+              <a:t>[다음] 경계값 분석</a:t>
             </a:r>
           </a:p>
         </p:txBody>
@@ -1264,7 +1579,42 @@
           <a:lstStyle/>
           <a:p>
             <a:r>
-              <a:t>경계 시험은 판정이 갈리는 지점을 집중해서 확인합니다. 그림의 회복 기준은 유온 55도 미만이에요. 55도보다 낮아야 충족하고, 정확히 55도이면 충족하지 않습니다. 왼쪽의 실제 사건 값은 약 52도였죠. 그 값은 회복 구간 안에 있습니다. 하지만 그 한 번으로 기준값 바로 옆에서도 판정이 맞는지는 알 수 없어요. 미만을 이하로 잘못 구현했어도, 구간 안쪽의 값에서는 같은 결과가 나오니까요. 그래서 여기서는 소수 첫째 자리까지 값을 넣는 예로, 54.9도와 정확히 55도, 55.1도를 비교합니다. 첫 값만 회복 기준을 충족해야 해요. 기준 바로 아래와 기준 자체를 비교하면 등호를 잘못 넣은 오류를 찾을 수 있고, 위쪽 값으로 반대 구간도 확인할 수 있습니다. 0.1도 간격이 모든 센서의 공통 기준은 아닙니다. 실제 자료의 정밀도와 시스템이 값을 다루는 단위에 맞춰 시험 값을 고릅니다. 예상과 다른 결과가 나오면 비교 연산뿐 아니라 단위 변환이나 반올림, 읽은 값이 맞는지도 살펴봐야 해요. 기준에서 먼 값 하나보다 경계를 나누어 보는 이유입니다.</a:t>
+              <a:t>[짚을 곳] 그림 수평선 왼쪽 회복 구간(55 ℃ 미만) → 기준값 → 오른쪽 충족하지 않는 구간</a:t>
+            </a:r>
+          </a:p>
+          <a:p>
+            <a:r>
+              <a:t>아래 네 점: 51.5(실제 사건) → 강조한 54.9 · 55.0 → 55.1</a:t>
+            </a:r>
+          </a:p>
+          <a:p>
+            <a:r>
+              <a:t>· 경계 시험은 판정이 갈리는 지점을 집중해 본다. 55 ℃보다 낮아야 충족, 정확히 55 ℃면 충족 안 함</a:t>
+            </a:r>
+          </a:p>
+          <a:p>
+            <a:r>
+              <a:t>· 실제 사건 값 약 52 ℃(51.5)는 회복 구간 안. 그 한 번으로는 기준 바로 옆의 판정을 모른다 — 「미만」을 「이하」로 잘못 구현해도 안쪽 값에선 같은 결과</a:t>
+            </a:r>
+          </a:p>
+          <a:p>
+            <a:r>
+              <a:t>· 그래서 소수 첫째 자리 예로 54.9 · 55.0 · 55.1을 비교. 54.9만 충족해야 한다. 바로 아래와 기준 자체를 견주면 등호 오류를, 위쪽 값으로 반대 구간을 확인</a:t>
+            </a:r>
+          </a:p>
+          <a:p>
+            <a:r>
+              <a:t>· 0.1 ℃ 간격은 모든 센서의 공통 기준이 아니다. 실제 자료의 정밀도와 시스템이 다루는 단위에 맞춰 시험 값을 고른다</a:t>
+            </a:r>
+          </a:p>
+          <a:p>
+            <a:r>
+              <a:t>· 예상과 다르면 비교 연산만이 아니라 단위 변환 · 반올림 · 읽은 값 자체도 의심. 기준에서 먼 값 하나보다 경계를 나눠 보는 이유</a:t>
+            </a:r>
+          </a:p>
+          <a:p>
+            <a:r>
+              <a:t>[다음] 시간의 경계</a:t>
             </a:r>
           </a:p>
         </p:txBody>
@@ -1334,7 +1684,32 @@
           <a:lstStyle/>
           <a:p>
             <a:r>
-              <a:t>이번 회차의 학습목표는 화면의 카드 네 장입니다. 첫 번째 카드는 시나리오예요. 명세에 적은 걸 시나리오로 옮기는데, 전제와 행동과 기대 결과로 나눠 적습니다. 이때 기대 결과는 실행 결과를 보고 맞다, 틀리다를 가릴 수 있는 사실이어야 하고요. 두 번째 카드는 그 시나리오를 실행 가능한 검증으로 잇는 일입니다. 시험을 네 종류로 나눠 보고, 실행할 때마다 출력이 조금씩 달라지는 에이전트에서 무엇을 실패로 셀지 가려 봅니다. 세 번째 카드가 실습이에요. 시나리오를 직접 적고, 되풀이해 실행하고, 실패를 고친 다음 전체를 다시 확인합니다. 여러 출처의 업무 데이터를 엮어서 교대 인수인계서도 만들어 보고요. 마지막 카드는 정리입니다. 에이전트를 만들고 믿기까지의 과정을 쿨러 사건 위에 놓고 한 번에 이어 봅니다. 그리고 여러 활용에서 목표와 입력, 결과를 가른 기준이 어떻게 달랐는지, 새 업무를 맡길 때 무엇을 정해야 하는지도 같이 보겠습니다.</a:t>
+              <a:t>[짚을 곳] 카드 네 장 왼쪽부터 → 넷째 카드(정리) 강조</a:t>
+            </a:r>
+          </a:p>
+          <a:p>
+            <a:r>
+              <a:t>· 1 행동 시나리오: 명세를 전제 · 행동 · 기대 결과(Given · When · Then)로 옮긴다. 기대 결과는 실행 결과를 보고 맞다 · 틀리다를 가릴 수 있는 사실</a:t>
+            </a:r>
+          </a:p>
+          <a:p>
+            <a:r>
+              <a:t>· 2 실행 가능한 검증: 시나리오를 단언으로 잇고 시험을 네 종류로 구분. 실행마다 출력이 조금씩 달라지는 에이전트에서 무엇을 실패로 셀지(표현 차이 vs 계약 위반)</a:t>
+            </a:r>
+          </a:p>
+          <a:p>
+            <a:r>
+              <a:t>· 3 실습: 시나리오 작성 → 되풀이 실행 → 실패 수정 → 전체 다시 확인. 여러 출처의 업무 데이터를 엮어 교대 인수인계서</a:t>
+            </a:r>
+          </a:p>
+          <a:p>
+            <a:r>
+              <a:t>· 4 정리: 에이전트 · 스킬 · MCP · HITL · SDD · BDD를 쿨러 사건 위에 놓아 잇고, 활용마다 다른 목표 · 입력 · 판정, 새 업무를 맡길 조건</a:t>
+            </a:r>
+          </a:p>
+          <a:p>
+            <a:r>
+              <a:t>[다음] 다섯 줄의 순서</a:t>
             </a:r>
           </a:p>
         </p:txBody>
@@ -1404,7 +1779,42 @@
           <a:lstStyle/>
           <a:p>
             <a:r>
-              <a:t>숫자의 경계는 시간에도 있습니다. HYD의 이 승인 흐름은 업무상 10분을 지연 알림 기준으로 씁니다. 화면은 그 직전, 기준을 지난 뒤, 알림 뒤의 대기, 뒤늦은 승인을 나눈 것입니다. 먼저 기한 직전에는 지연 알림이 없어야 합니다. 기한에 도달해 확인하는 시점에는 알림 대상이 되고요. 자동 시험에서는 시간을 진행시켜 기한 전후의 상태를 확인할 수 있습니다. 실제로 10분 동안 기다려야만 시험할 수 있는 것은 아니에요. 수업 환경의 20배속에서는 업무상 10분이 실제 30초에 해당합니다. 다음은 알림 이후입니다. HYD의 이 정책에서는 응답이 늦었다고 자동 거절하거나 승인하지 않습니다. 지연을 알리고 처리 건을 대기 상태로 유지해요. 저장소 시험에는 훨씬 뒤에도 처리 건이 계속 대기하는지 확인하는 경우가 있습니다. 마지막으로 뒤늦은 승인도 접수할 수 있어야 합니다. 다만 승인을 받았다는 것과 조치를 실행할 수 있다는 것은 다르죠. 현재 조건 재검사도 통과해야 실행으로 이어집니다. 다른 업무에서는 기한 뒤 자동 종료 정책을 둘 수도 있지만, 이 시험이 확인하는 기준은 HYD에 정해 둔 대기 정책입니다.</a:t>
+              <a:t>[짚을 곳] 흐름 네 칸: 10분 직전 → 강조한 10분 기준 도달 뒤 → 알림 뒤 → 뒤늦은 승인</a:t>
+            </a:r>
+          </a:p>
+          <a:p>
+            <a:r>
+              <a:t>· 숫자의 경계는 시간에도 있다. HYD 승인 흐름은 업무상 10분을 지연 알림 기준으로 쓴다</a:t>
+            </a:r>
+          </a:p>
+          <a:p>
+            <a:r>
+              <a:t>· 직전엔 알림 없음, 기한에 도달해 확인하는 시점엔 알림 대상</a:t>
+            </a:r>
+          </a:p>
+          <a:p>
+            <a:r>
+              <a:t>· 자동 시험은 시간을 진행시켜 기한 전후 상태를 확인 — 실제로 10분을 기다려야만 시험할 수 있는 건 아니다(화면 메시지 끝 문장은 수업 환경의 대기 시간 안내)</a:t>
+            </a:r>
+          </a:p>
+          <a:p>
+            <a:r>
+              <a:t>· 알림 뒤: HYD 정책은 늦었다고 자동 거절 · 자동 승인하지 않는다. 지연을 알리고 처리 건은 대기 유지. 저장소 시험엔 훨씬 뒤에도 계속 대기하는지 보는 경우가 있다</a:t>
+            </a:r>
+          </a:p>
+          <a:p>
+            <a:r>
+              <a:t>· 뒤늦은 승인도 접수돼야 한다. 단 승인을 받은 것과 실행할 수 있는 것은 다르다 — 현재 조건 재검사도 통과해야 실행</a:t>
+            </a:r>
+          </a:p>
+          <a:p>
+            <a:r>
+              <a:t>· 다른 업무는 기한 뒤 자동 종료 정책을 둘 수도 있다. 이 시험의 기준은 HYD에 정해 둔 대기 정책</a:t>
+            </a:r>
+          </a:p>
+          <a:p>
+            <a:r>
+              <a:t>[다음] 예외 시험</a:t>
             </a:r>
           </a:p>
         </p:txBody>
@@ -1474,7 +1884,42 @@
           <a:lstStyle/>
           <a:p>
             <a:r>
-              <a:t>예외 시험은 잘못된 입력이나 실패가 생겼을 때 정한 대로 대응하는지 봅니다. 화면의 네 카드는 HYD에서 살펴볼 대표 상황입니다. 도구 오류가 나면 오류를 기록하고, 읽지 못한 값을 만들어 넣지 않아야 합니다. 근거가 오래됐다면 현재 판단에 쓸 수 있는지 확인하고 부족하면 보류해야 해요. 여기의 60초는 HYD 사례의 신선도 기준입니다. 방금 조회했다는 이유만으로 오래된 관측값이 최신 값이 되지는 않습니다. 필수 정보가 없으면 무엇이 부족한지 구별합니다. 사람의 답으로 보완하는 흐름에서는 질문하고, 근거 부족으로 보류하는 흐름에서는 사유를 남깁니다. 질문을 했다고 승인 권한까지 생기는 것은 아니죠. 권한 없는 요청은 거부돼야 합니다. HYD는 실제 역할 구성원인지와 지정된 승인 역할 또는 더 높은 등급인지 함께 확인합니다. 역할 이름을 직접 적거나 같은 등급이라는 이유만으로 다른 역할의 권한을 얻지는 않습니다. 여기서 기대한 오류나 보류가 나왔다면 시험은 통과할 수 있어요. 업무가 정상 완료되지 않았다는 것과 시험이 실패했다는 것은 다릅니다. 시험은 그 상황에서 약속한 대응이 나왔는지를 확인하니까요.</a:t>
+              <a:t>[짚을 곳] 카드 네 장, 강조한 도구 오류 → 근거 부족 → 필수 정보 누락 → 권한 없음, 꼬리표(실패로 적는다 · 보류 · 묻는다 · 거부)</a:t>
+            </a:r>
+          </a:p>
+          <a:p>
+            <a:r>
+              <a:t>· 예외 시험: 잘못된 입력이나 실패에서 정한 대로 대응하나</a:t>
+            </a:r>
+          </a:p>
+          <a:p>
+            <a:r>
+              <a:t>· 도구 오류: 오류를 기록하고 읽지 못한 값을 만들어 넣지 않는다</a:t>
+            </a:r>
+          </a:p>
+          <a:p>
+            <a:r>
+              <a:t>· 근거 부족: 관측값이 신선도 기준 60초(HYD 사례 기준)를 넘으면 원인을 고르지 않고 보류. 방금 조회했다고 오래된 관측값이 최신 값이 되지 않는다</a:t>
+            </a:r>
+          </a:p>
+          <a:p>
+            <a:r>
+              <a:t>· 필수 정보 누락: 무엇이 부족한지 구별. 사람의 답으로 보완하는 흐름이면 질문, 근거 부족 보류 흐름이면 사유를 남김. 질문했다고 승인 권한이 생기지 않는다</a:t>
+            </a:r>
+          </a:p>
+          <a:p>
+            <a:r>
+              <a:t>· 권한 없음: 거부. HYD는 실제 역할 구성원인지와 지정 승인 역할 또는 더 높은 등급인지를 함께 확인. 역할 이름을 직접 적거나 같은 등급이라는 이유로 다른 역할 권한을 얻지 못한다</a:t>
+            </a:r>
+          </a:p>
+          <a:p>
+            <a:r>
+              <a:t>· 기대한 오류 · 보류가 나왔다면 시험은 통과. 업무가 정상 완료되지 않은 것과 시험 실패는 다르다 — 약속한 대응이 나왔는지를 본다</a:t>
+            </a:r>
+          </a:p>
+          <a:p>
+            <a:r>
+              <a:t>[다음] 회귀 시험</a:t>
             </a:r>
           </a:p>
         </p:txBody>
@@ -1544,7 +1989,32 @@
           <a:lstStyle/>
           <a:p>
             <a:r>
-              <a:t>마지막이 회귀 시험입니다. 무언가를 바꾼 뒤에 기존 시나리오를 다시 실행하는 시험이에요. 화면 왼쪽이 변경 전입니다. 앞에서 본 승인 단계의 네 갈래, 승인, 거절, 무응답, 사유 없는 요청의 시나리오 넷이 모두 통과한 상태죠. 가운데 화살표에서 요구가 바뀌어요. 명세에 긴급 조건이 하나 더해집니다. 오른쪽 변경 후를 보면, 맨 아래에 새 시나리오가 하나 늘었죠. 긴급 조건을 확인하는 시나리오입니다. 이때 새 시나리오만 돌려 보고 통과했다고 끝내면 어떨까요? 긴급 조건이 잘 동작하는 건 알지만, 거절이나 무응답의 행동이 그대로인지는 모릅니다. 그래서 파란 괄호처럼 기존 넷도 전부 다시 실행해요. 이게 회귀 시험입니다. 회귀라는 말은 되돌아간다는 뜻이에요. 변경으로 기존 행동에 의도하지 않은 영향이 생겼는지 찾는 시험입니다. 바꾼 곳만 확인해서는 이걸 잡을 수 없어요.</a:t>
+              <a:t>[짚을 곳] 그림 왼쪽 변경 전(기존 시나리오 넷) → 가운데 화살표 요구의 변경(긴급 조건) → 오른쪽 변경 후, 맨 아래 새 시나리오 → 파란 괄호 강조한 회귀 시험</a:t>
+            </a:r>
+          </a:p>
+          <a:p>
+            <a:r>
+              <a:t>· 회귀 시험 = 무언가를 바꾼 뒤 기존 시나리오를 다시 실행하는 시험</a:t>
+            </a:r>
+          </a:p>
+          <a:p>
+            <a:r>
+              <a:t>· 변경 전: 승인 · 거절 · 무응답 · 사유 없는 요청 시나리오 넷이 통과한 상태. 명세에 긴급 조건이 더해진다</a:t>
+            </a:r>
+          </a:p>
+          <a:p>
+            <a:r>
+              <a:t>· 변경 후 새 시나리오(긴급 조건)가 하나 는다. 새 것만 돌려 통과하면 긴급 조건이 동작하는 건 알지만 거절 · 무응답 행동이 그대로인지는 모른다</a:t>
+            </a:r>
+          </a:p>
+          <a:p>
+            <a:r>
+              <a:t>· 그래서 기존 넷도 전부 다시 실행. 「회귀」는 되돌아간다는 뜻 — 변경이 기존 행동에 의도하지 않은 영향을 냈는지 찾는다. 바꾼 곳만 확인해서는 못 잡는다</a:t>
+            </a:r>
+          </a:p>
+          <a:p>
+            <a:r>
+              <a:t>[다음] HYD의 회귀 시험 기록</a:t>
             </a:r>
           </a:p>
         </p:txBody>
@@ -1614,7 +2084,37 @@
           <a:lstStyle/>
           <a:p>
             <a:r>
-              <a:t>화면은 저장소에 남아 있는 서로 다른 시점의 검증 기록입니다. 이번 교재 수정에서 이 시험 전체를 새로 실행했다는 뜻은 아니에요. 기록을 읽는 방법을 보겠습니다. 왼쪽 전체 시험은 2,673개 통과, 16개 건너뜀, 실패 0건으로 적혀 있습니다. 건너뛴 항목은 통과한 항목과 구별해야 하죠. 가운데 쿨러 사건 기록은 경보가 처리 건을 열고, 권한 없는 승인이 거부되고, 승인 뒤 명령과 재관측, 후속 처리가 이어지는지 등 40항목을 확인했습니다. 오른쪽 펌프와 팬 사건은 별도 기록에서 43항목을 확인했습니다. 숫자는 그때 실행한 범위의 요약입니다. 통과 수가 줄었다고 곧바로 기능이 깨졌다는 뜻은 아니에요. 시험 목록과 환경이 달라졌거나 건너뛴 항목이 늘었을 수도 있습니다. 실행 시점과 버전, 실패하거나 건너뛴 이유를 함께 확인해야 합니다. 기존 시험을 남겨 두는 가치는 다음 변경에서 같은 기대를 다시 확인할 수 있다는 데 있습니다. 다만 지금의 요구와 환경에 맞는지도 관리해야 하고, 시험에 없던 상황까지 모두 확인했다고 말할 수는 없습니다.</a:t>
+              <a:t>[짚을 곳] 카드 세 장: 시험 전체 → 강조한 쿨러 사건의 검사 → 펌프와 팬 사건의 검사, 꼬리표</a:t>
+            </a:r>
+          </a:p>
+          <a:p>
+            <a:r>
+              <a:t>· 저장소에 남은 서로 다른 시점의 검증 기록. 이번 교재 수정에서 전체를 새로 실행했다는 뜻이 아니다 — 기록을 읽는 법을 본다</a:t>
+            </a:r>
+          </a:p>
+          <a:p>
+            <a:r>
+              <a:t>· 전체 시험: 2,673개 통과, 16개 건너뜀, 실패 0. 건너뜀은 통과와 구별</a:t>
+            </a:r>
+          </a:p>
+          <a:p>
+            <a:r>
+              <a:t>· 쿨러 사건: 경보가 처리 건 하나를 여는가, 권한 없는 승인이 거부되는가, 승인 뒤 명령 · 재관측 · 작업지시 · 종결 등 40항목. 펌프와 팬 사건: 별도 기록에서 43항목</a:t>
+            </a:r>
+          </a:p>
+          <a:p>
+            <a:r>
+              <a:t>· 숫자는 그때 실행한 범위의 요약. 통과 수가 줄어도 곧 기능이 깨진 건 아니다(시험 목록 · 환경 변화, 건너뜀 증가 가능) → 실행 시점 · 버전 · 실패나 건너뜀 사유를 함께 본다</a:t>
+            </a:r>
+          </a:p>
+          <a:p>
+            <a:r>
+              <a:t>· 기존 시험을 남기는 가치: 다음 변경에서 같은 기대를 다시 확인. 다만 지금의 요구 · 환경에 맞는지 관리해야 하고, 시험에 없던 상황까지 확인했다고는 말 못 한다</a:t>
+            </a:r>
+          </a:p>
+          <a:p>
+            <a:r>
+              <a:t>[다음] 단원 03, 에이전트 출력의 반복 검증</a:t>
             </a:r>
           </a:p>
         </p:txBody>
@@ -1684,7 +2184,32 @@
           <a:lstStyle/>
           <a:p>
             <a:r>
-              <a:t>세 번째 단원은 에이전트 출력의 반복 검증입니다. 앞에서는 거절하면 명령이 없는지처럼 정해진 조건을 확인했습니다. 에이전트에서도 같은 원칙을 쓰지만, 설명 문장이나 실행 과정은 매번 같지 않을 수 있어요. 그렇다면 무엇을 같은 것으로 비교하고, 어떤 차이를 실패로 세어야 할까요? 실제 기록을 먼저 보고 기준을 나눈 뒤, 여러 실행을 함께 해석하는 방법으로 이어가겠습니다.</a:t>
+              <a:t>[짚을 곳] 단원 번호 03 → 부제(실패로 셀 것을 가르고 되풀이해 확인)</a:t>
+            </a:r>
+          </a:p>
+          <a:p>
+            <a:r>
+              <a:t>· 앞에서는 「거절하면 명령이 없나」처럼 정해진 조건을 확인</a:t>
+            </a:r>
+          </a:p>
+          <a:p>
+            <a:r>
+              <a:t>· 에이전트에도 같은 원칙을 쓰지만 설명 문장이나 실행 과정은 매번 같지 않을 수 있다</a:t>
+            </a:r>
+          </a:p>
+          <a:p>
+            <a:r>
+              <a:t>· 물음: 무엇을 같은 것으로 비교하고 어떤 차이를 실패로 셀 것인가</a:t>
+            </a:r>
+          </a:p>
+          <a:p>
+            <a:r>
+              <a:t>· 순서: 실제 두 기록 비교 → 허용할 차이와 계약 위반 나누기 → 항목별 검증 · 채점 → 여러 실행을 함께 해석 → 실패에서 고칠 곳 가리기</a:t>
+            </a:r>
+          </a:p>
+          <a:p>
+            <a:r>
+              <a:t>[다음] 두 실행의 비교</a:t>
             </a:r>
           </a:p>
         </p:txBody>
@@ -1754,7 +2279,42 @@
           <a:lstStyle/>
           <a:p>
             <a:r>
-              <a:t>이번에는 같은 종류의 쿨러 경보를 처리한 두 기록을 비교해 보겠습니다. 왼쪽은 두 기록에서 같았던 내용이에요. 원인은 쿨러 핀 오염, 추천은 팬 최대 운전이었고, 조치 후보의 평가 점수도 같았습니다. 오른쪽은 달랐던 부분입니다. 진행을 설명한 문장과 도구 호출의 흐름, 걸린 시간이 달랐어요. 한 기록에는 업무 자료 조회와 조치 효과 예측이 나타납니다. 다만 두 경보는 서로 다른 처리 건이고, 한쪽 기록의 전체 도구 호출을 모두 대조한 것은 아닙니다. 모든 입력을 고정한 반복 실험이라고 읽으면 안 돼요. 여기서 구별할 것은 판단 도구의 계산과 에이전트가 일을 진행하는 과정입니다. HYD의 규칙 판단 도구는 같은 사실과 같은 규칙을 주면 같은 판정을 내는 결정론적 경로를 제공합니다. 에이전트는 자료를 찾아 설명하는 과정에서 다른 선택을 할 수 있고요. 실시간 값이 달라지면 규칙 도구의 입력도 달라집니다. 따라서 두 기록의 차이를 모두 모델의 무작위성 때문이라고 결론 내리지는 않습니다. 대신 이 비교를 출발점으로 삼아, 다음 장에서 무엇이 달라도 되는지와 무엇은 반드시 지켜야 하는지를 정해 보겠습니다.</a:t>
+              <a:t>[짚을 곳] 왼쪽 두 기록에서 같았던 것(판단의 일부) → 오른쪽 강조한 달랐던 것(표현과 과정)</a:t>
+            </a:r>
+          </a:p>
+          <a:p>
+            <a:r>
+              <a:t>· 같은 종류의 쿨러 경보를 처리한 두 기록</a:t>
+            </a:r>
+          </a:p>
+          <a:p>
+            <a:r>
+              <a:t>· 같았던 것: 원인 쿨러 핀 오염, 추천 팬 최대 운전, 조치 후보의 평가 점수. 규칙 판단은 같은 사실 · 규칙이면 같은 판정</a:t>
+            </a:r>
+          </a:p>
+          <a:p>
+            <a:r>
+              <a:t>· 달랐던 것: 진행 중 남긴 문장, 도구 호출 흐름, 걸린 시간. 한 기록엔 업무 자료 조회와 조치 효과 예측이 나타남</a:t>
+            </a:r>
+          </a:p>
+          <a:p>
+            <a:r>
+              <a:t>· 주의: 두 경보는 서로 다른 처리 건이고 한쪽의 전체 도구 호출을 모두 대조한 것은 아님 → 모든 입력을 고정한 반복 실험으로 읽지 않는다</a:t>
+            </a:r>
+          </a:p>
+          <a:p>
+            <a:r>
+              <a:t>· 구별: HYD 규칙 판단 도구는 같은 사실 · 규칙이면 같은 판정을 내는 결정론적 경로. 에이전트는 자료를 찾고 설명하며 다른 선택을 할 수 있다. 실시간 값이 바뀌면 규칙 도구의 입력도 바뀐다</a:t>
+            </a:r>
+          </a:p>
+          <a:p>
+            <a:r>
+              <a:t>· 그래서 차이를 모두 모델의 무작위성 탓으로 단정하지 않는다. 이 비교를 출발점으로 무엇이 달라도 되고 무엇은 지켜야 하는지 정한다</a:t>
+            </a:r>
+          </a:p>
+          <a:p>
+            <a:r>
+              <a:t>[다음] 표현 차이와 계약 위반</a:t>
             </a:r>
           </a:p>
         </p:txBody>
@@ -1824,7 +2384,37 @@
           <a:lstStyle/>
           <a:p>
             <a:r>
-              <a:t>시험을 만들기 전에 달라도 되는 것과 지켜야 하는 것을 가릅니다. 화면 왼쪽의 설명 문장은 같은 사실을 다른 낱말로 전달할 수 있어요. 글자가 다르다는 이유만으로 실패로 세면, 의미가 맞는 결과까지 탈락합니다. 대신 근거와 결론이 맞는지는 확인해야 하죠. 도구 순서와 걸린 시간은 조금 더 주의해서 봅니다. 서로 독립적인 조회의 순서는 바뀔 수 있지만, 승인 전에 실행하거나 오래된 값을 최신 값처럼 쓰면 안 됩니다. 처리 시간에 기준이 있다면 그 기준도 지켜야 하고요. 과정의 차이는 필요한 의존 관계와 권한, 시간 조건을 충족하는 범위에서 허용합니다. 오른쪽은 계약 위반입니다. 필수 결과 항목이 빠지거나, 승인 전에 설비 명령과 후속 업무 조치를 실행하거나, 요구한 근거가 없거나, 금지한 조치를 추천하는 경우예요. 이런 위반은 한 번이라도 발견되면 따로 실패로 남깁니다. 판단을 제출하거나 진행 기록을 남기는 모든 쓰기를 승인 위반으로 세는 것은 아닙니다. 금지한 행동의 범위를 정확히 적어야 해요. 너무 엄격하게 글자를 대조하면 의미 있는 차이를 놓치고, 너무 느슨하게 비슷해 보인다고 넘기면 계약 위반을 놓칩니다. 그래서 형식과 의미, 실제 행동의 조건을 나누어 검사합니다. 명세에서 빠진 중요한 조건을 발견했다면 그냥 자유롭게 둔 것이 아니라 기준을 보완할 문제로 다뤄야 합니다.</a:t>
+              <a:t>[짚을 곳] 왼쪽 허용할 수 있는 차이(조건 안에서 허용) → 오른쪽 강조한 계약 위반(별도 실패로 기록)</a:t>
+            </a:r>
+          </a:p>
+          <a:p>
+            <a:r>
+              <a:t>· 시험을 만들기 전에 달라도 되는 것과 지켜야 하는 것을 가른다</a:t>
+            </a:r>
+          </a:p>
+          <a:p>
+            <a:r>
+              <a:t>· 설명 문장: 같은 사실을 다른 낱말로 전할 수 있다. 글자가 다르다고 실패로 세면 의미가 맞는 결과까지 탈락. 대신 근거와 결론은 확인</a:t>
+            </a:r>
+          </a:p>
+          <a:p>
+            <a:r>
+              <a:t>· 조회 순서 · 소요 시간: 독립적인 조회의 순서는 바뀔 수 있지만 승인 전에 실행하거나 오래된 값을 최신처럼 쓰면 안 된다. 처리 시간 기준이 있으면 그것도 지킨다 → 의존 관계 · 권한 · 시간 조건 안에서만 허용</a:t>
+            </a:r>
+          </a:p>
+          <a:p>
+            <a:r>
+              <a:t>· 계약 위반: 필수 결과 항목 누락, 승인 전 설비 · 업무 조치 실행, 요구한 근거 누락, 금지 조치 추천 — 한 번이라도 나오면 따로 실패로 남김. 판단 제출이나 진행 기록 쓰기까지 승인 위반으로 세지는 않는다 → 금지한 행동의 범위를 정확히 적는다</a:t>
+            </a:r>
+          </a:p>
+          <a:p>
+            <a:r>
+              <a:t>· 너무 엄격(글자 대조)하면 의미 있는 차이를 놓치고, 너무 느슨하면 계약 위반을 놓친다 → 형식 · 의미 · 실제 행동 조건을 나눠 검사. 명세에서 빠진 중요한 조건을 발견하면 기준을 보완할 문제로</a:t>
+            </a:r>
+          </a:p>
+          <a:p>
+            <a:r>
+              <a:t>[다음] Then이 견주는 것</a:t>
             </a:r>
           </a:p>
         </p:txBody>
@@ -1894,7 +2484,37 @@
           <a:lstStyle/>
           <a:p>
             <a:r>
-              <a:t>이 구분을 실제 출력에 대어 보겠습니다. 화면의 긴 식별자는 철자를 외우기 위한 것이 아니에요. 어떤 항목을 어떤 방식으로 확인하는지 보시면 됩니다. 첫째는 다섯 필수 항목입니다. 원인과 고장 유형, 진단 가이드 카드, 판단, 판단 번호가 있어야 하고, 약속한 형식과 뜻도 맞아야 합니다. 이름만 있는 빈 값으로는 충분하지 않죠. 둘째는 원인과 추천 조치입니다. 예시에서는 쿨러 핀 오염과 팬 최대 운전을 가리킵니다. 정답표가 하나의 원인을 정했다면 그 값과 대조하고, 여러 조치를 허용했다면 추천이 허용 목록 안에 있는지 확인합니다. 실행마다 같은 글자를 요구할지, 허용한 범위를 검사할지는 기대 행동에 따라 정하는 겁니다. 셋째는 설명입니다. 문장을 통째로 복사했는지를 묻지는 않지만, 선택한 원인과 조치를 근거에 맞게 설명했는지는 봐야 합니다. 인용 번호가 있다고 그 설명까지 자동으로 옳아지는 것은 아니에요. 넷째는 판단 번호입니다. 제출마다 새로 생기므로 이전 번호와 같아야 하는 값은 아닙니다. 번호가 있고 형식이 맞는지에 더해, 실제로 저장된 해당 판단을 가리키는지도 확인할 수 있어야 합니다. HYD의 실행 중 출력 검사는 필수 항목과 형식을 확인하고, 잘못되면 정해진 횟수 안에서 수정을 요청합니다. 이 형식 검사와 지금 설명한 의미 검증은 범위가 다릅니다. 형식 통과를 판단의 정답으로 읽지 않기 위해 다음 장의 채점을 따로 보는 거예요.</a:t>
+              <a:t>[짚을 곳] 왼쪽 출력 코드(cause · failure_mode · guide_card · decision · decision_id) → 오른쪽 네 요소, 강조한 cause · recommended. 긴 식별자는 외우는 게 아니라 확인 방식을 보는 것</a:t>
+            </a:r>
+          </a:p>
+          <a:p>
+            <a:r>
+              <a:t>· 1 항목의 유무: 원인 · 고장 유형 · 진단 가이드 카드 · 판단 · 판단 번호 다섯 필수 항목이 있고 약속한 형식 · 뜻이 맞아야. 이름만 있는 빈 값은 불충분</a:t>
+            </a:r>
+          </a:p>
+          <a:p>
+            <a:r>
+              <a:t>· 2 원인과 추천(예: 쿨러 핀 오염, 팬 최대 운전 skill:sop-cool-11): 정답표가 원인 하나를 정했으면 그 값과 대조, 여러 조치를 허용했으면 허용 목록 안인지. 같은 글자를 요구할지 허용 범위를 검사할지는 기대 행동에 따라 정한다</a:t>
+            </a:r>
+          </a:p>
+          <a:p>
+            <a:r>
+              <a:t>· 3 explanation: 통째로 같은지가 아니라 선택한 원인 · 조치를 근거에 맞게 설명했는지. 인용 번호가 있다고 설명이 저절로 옳아지진 않는다</a:t>
+            </a:r>
+          </a:p>
+          <a:p>
+            <a:r>
+              <a:t>· 4 decision_id: 제출마다 새로 생기니 이전 번호와 같을 필요 없다. 있고 형식이 맞는지 + 실제 저장된 그 판단을 가리키는지</a:t>
+            </a:r>
+          </a:p>
+          <a:p>
+            <a:r>
+              <a:t>· HYD 실행 중 출력 검사는 필수 항목 · 형식을 확인하고 틀리면 정해진 횟수 안에서 수정 요청. 이 형식 검사와 의미 검증은 범위가 다르다 → 형식 통과를 정답으로 읽지 않으려고 채점을 따로 본다</a:t>
+            </a:r>
+          </a:p>
+          <a:p>
+            <a:r>
+              <a:t>[다음] 판단 채점</a:t>
             </a:r>
           </a:p>
         </p:txBody>
@@ -1964,7 +2584,47 @@
           <a:lstStyle/>
           <a:p>
             <a:r>
-              <a:t>형식이 맞아도 원인을 잘못 고를 수 있습니다. HYD의 판단 채점은 사람이 작성한 정답표와 결과를 대조해서 그 차이를 확인합니다. 조치 후보의 우선순위를 매기는 평가 점수와도 구별해 주세요. 여기서는 결과가 기대에 얼마나 맞았는지를 채점합니다. 표의 첫 줄은 원인과 고장 유형입니다. 두 값이 모두 기대와 맞아야 이 항목을 충족해요. 둘째 줄은 1순위 추천이 허용한 조치 중 하나인지 봅니다. 셋째 줄은 금지 조치를 확인하는데, 후보에서 제외해야 하는지, 1순위로 추천하지 않으면 되는지를 정답표에서 구별합니다. 두 조건은 범위가 다르죠. 넷째 줄은 요구한 근거 식별자가 결과에 얼마나 들어 있는지입니다. 이것은 근거 포함률이에요. 인용한 자료가 설명을 실제로 뒷받침하는지까지 자동 증명하는 점수는 아닙니다. 오른쪽의 30, 30, 20, 20은 HYD의 기본 가중치입니다. 원인과 고장 유형이 틀리면 첫 항목의 30점을 받지 못하고, 일부 금지 조건이나 근거만 충족하면 해당 항목에는 비율에 따른 점수가 붙습니다. 전체는 100점 만점이지만, 이 숫자가 정답일 확률을 뜻하지는 않아요. 정답표는 처음부터 모든 답이 들어 있는 자료가 아닙니다. 해당 상황의 기대 원인과 허용 조치, 금지 조건과 근거를 사람이 검토해 넣어야 합니다. 설명 문장의 품질은 이 네 항목 점수에 직접 들어가지 않으므로 별도로 검토합니다. 채점이 확인하는 범위를 알고 써야 점수가 높은데도 잘못된 설명을 놓치는 일을 줄일 수 있습니다.</a:t>
+              <a:t>[짚을 곳] 표 네 항목(원인 적중 · 1순위 허용 · 금지 조치 미추천 · 근거 포함률) → 오른쪽 비중 30 · 30 · 20 · 20 → 강조한 채점 점수(0~100)</a:t>
+            </a:r>
+          </a:p>
+          <a:p>
+            <a:r>
+              <a:t>· 형식이 맞아도 원인을 잘못 고를 수 있다. 판단 채점은 사람이 작성한 정답표와 결과를 대조. 조치 후보 순위를 매기는 평가 점수와 다른 것</a:t>
+            </a:r>
+          </a:p>
+          <a:p>
+            <a:r>
+              <a:t>· 원인 적중: 원인과 고장 유형 둘 다 맞아야 충족</a:t>
+            </a:r>
+          </a:p>
+          <a:p>
+            <a:r>
+              <a:t>· 1순위 허용: 1순위 추천이 허용한 조치 중 하나인가</a:t>
+            </a:r>
+          </a:p>
+          <a:p>
+            <a:r>
+              <a:t>· 금지 조치 미추천: 후보에서 아예 제외해야 하는지, 1순위로만 안 내면 되는지를 정답표에서 구별(범위가 다름)</a:t>
+            </a:r>
+          </a:p>
+          <a:p>
+            <a:r>
+              <a:t>· 근거 포함률: 요구한 근거 식별자가 얼마나 들었나. 인용 자료가 설명을 실제로 뒷받침하는지까지 증명하진 않는다</a:t>
+            </a:r>
+          </a:p>
+          <a:p>
+            <a:r>
+              <a:t>· 30 · 30 · 20 · 20은 HYD 기본 가중치. 원인이 틀리면 첫 30점을 못 받고, 금지 조건 · 근거를 일부만 채우면 비율대로. 100점 만점이지만 정답일 확률이 아니다</a:t>
+            </a:r>
+          </a:p>
+          <a:p>
+            <a:r>
+              <a:t>· 정답표는 사람이 상황별 기대 원인 · 허용 조치 · 금지 조건 · 근거를 검토해 넣는다. 설명 문장 품질은 점수에 안 들어가니 따로 검토 — 점수가 높은데 설명이 틀린 경우를 놓치지 않게</a:t>
+            </a:r>
+          </a:p>
+          <a:p>
+            <a:r>
+              <a:t>[다음] 반복 실행</a:t>
             </a:r>
           </a:p>
         </p:txBody>
@@ -2034,7 +2694,37 @@
           <a:lstStyle/>
           <a:p>
             <a:r>
-              <a:t>한 번 좋은 결과가 나와도 다른 실행에서도 같은 기준을 지키는지는 남아 있습니다. 같은 평가 항목을 여러 번 실행하고, 화면의 평균과 최저, 결과의 반복 비율을 함께 보겠습니다. 평균은 이번에 관찰한 실행들의 전반적인 점수입니다. 최저는 그중 가장 낮았던 점수예요. 평균이 높아도 한 번 크게 틀렸다면 최저에서 드러납니다. 다만 관찰한 최저가 앞으로 가능한 모든 경우의 최악을 뜻하지는 않습니다. 세 번째는 HYD 화면에서 흔들림이라고 부르는 값입니다. 코드에서는 원인과 추천 조치의 조합 중 가장 자주 나온 조합의 비율을 계산합니다. 값이 클수록 그 조합이 일관됐다는 뜻이에요. 100퍼센트여도 전체 설명과 모든 근거가 같다는 뜻은 아니고, 같은 오답을 반복했을 수도 있습니다. 일관성과 정답 여부를 함께 봐야 하는 이유죠. 필수 항목 누락이나 승인 전 조치 실행 같은 위반은 평균 점수에 섞어 넘기지 않습니다. 발생 여부와 횟수, 해당 실행의 기록을 따로 남깁니다. 다른 실행의 높은 점수가 그 위반을 없애 주지는 않으니까요. 이 도구는 반복 횟수를 최대 열 번으로 제한하지만, 열 번이면 충분하다는 일반 기준은 아닙니다. 규칙만으로 같은 조건을 계산하는 경로는 똑같은 입력의 단순 반복보다 경계값과 다른 상황을 확인하는 편이 유용합니다. 모델 경로를 비교할 때도 입력과 조회 자료, 설정을 기록해서 무엇이 바뀌었는지 구별해야 합니다.</a:t>
+              <a:t>[짚을 곳] 카드 세 장: 평균 → 강조한 최저 → 결과 반복 비율(HYD 화면의 「흔들림」)</a:t>
+            </a:r>
+          </a:p>
+          <a:p>
+            <a:r>
+              <a:t>· 한 번 좋은 결과가 나와도 다른 실행에서도 같은 기준을 지키는지는 남는다 → 같은 평가 항목을 여러 번 실행해 셋을 함께 본다</a:t>
+            </a:r>
+          </a:p>
+          <a:p>
+            <a:r>
+              <a:t>· 평균: 관찰한 실행들의 전반적 점수. 최저: 그중 가장 낮은 점수 — 평균이 높아도 한 번 크게 틀리면 여기서 드러난다. 단 관찰한 최저가 가능한 모든 경우의 최악은 아님</a:t>
+            </a:r>
+          </a:p>
+          <a:p>
+            <a:r>
+              <a:t>· 흔들림: 코드에선 원인 · 추천 조치 조합 중 최빈 조합의 비율. 클수록 일관. 100%여도 설명 · 근거 전체가 같다는 뜻은 아니고 같은 오답을 반복했을 수도 → 일관성과 정답 여부를 함께 본다</a:t>
+            </a:r>
+          </a:p>
+          <a:p>
+            <a:r>
+              <a:t>· 위반(필수 항목 누락, 승인 전 조치 실행)은 평균에 섞지 않고 발생 여부 · 횟수 · 그 실행 기록을 따로. 다른 실행의 높은 점수가 위반을 없애 주지 않는다</a:t>
+            </a:r>
+          </a:p>
+          <a:p>
+            <a:r>
+              <a:t>· 이 도구의 반복 상한은 최대 10번이지만 10번이 충분하다는 일반 기준은 아님. 규칙 경로는 같은 입력 단순 반복보다 경계값 · 다른 상황 확인이 유용. 모델 경로를 비교할 땐 입력 · 조회 자료 · 설정을 기록해 무엇이 바뀌었는지 구별</a:t>
+            </a:r>
+          </a:p>
+          <a:p>
+            <a:r>
+              <a:t>[다음] 실패한 시험에서 고칠 곳</a:t>
             </a:r>
           </a:p>
         </p:txBody>
@@ -2104,7 +2794,32 @@
           <a:lstStyle/>
           <a:p>
             <a:r>
-              <a:t>수업은 화면의 다섯 줄 순서로 갑니다. 위의 세 줄은 행동을 검증하는 방법이에요. 첫 단원에서는 기대하는 행동을 시나리오로 적습니다. 두 번째 단원에서는 그 시나리오를 실행 가능한 시험으로 바꾸고, 중요한 경우를 고르는 네 종류의 시험을 봅니다. 세 번째 단원은 실행할 때마다 출력이 달라지는 에이전트를 어떻게 판정하느냐예요. 넷째 줄이 실습 넷입니다. 앞에서 배운 방법을 직접 해 보는 자리고요. 마지막 단원에서는 에이전트를 만들고 믿기까지 지나온 과정을 쿨러 사건 위에서 하나로 묶고, 그동안 만든 여러 활용을 나란히 견줘 보겠습니다. 이번 시간에는 위의 세 줄, 기대한 행동을 실제로 검증하는 방법을 배우고, 끝에서 이어질 네 실습의 할 일을 모두 소개합니다.</a:t>
+              <a:t>[짚을 곳] 목차 다섯 줄, 위 세 줄(이론) → 넷째 줄(실습) → 다섯째 줄(이론)</a:t>
+            </a:r>
+          </a:p>
+          <a:p>
+            <a:r>
+              <a:t>· 위 세 줄은 행동을 검증하는 방법: ① 기대 행동을 시나리오로 ② 시나리오를 실행 가능한 시험으로, 중요한 경우를 고르는 네 종류의 시험 ③ 실행마다 출력이 달라지는 에이전트의 판정</a:t>
+            </a:r>
+          </a:p>
+          <a:p>
+            <a:r>
+              <a:t>· 넷째 줄: 실습 넷(행동 기준 작성 · 반복 검증 · 오류 수정과 회귀 · 교대 인수인계)</a:t>
+            </a:r>
+          </a:p>
+          <a:p>
+            <a:r>
+              <a:t>· 다섯째 줄: 에이전트를 만들고 믿기까지 지나온 과정을 쿨러 사건 위에서 묶고, 그동안 만든 여러 활용을 나란히 견준다</a:t>
+            </a:r>
+          </a:p>
+          <a:p>
+            <a:r>
+              <a:t>· 첫 묶음: 위 세 줄과 이어질 네 실습의 할 일 소개까지</a:t>
+            </a:r>
+          </a:p>
+          <a:p>
+            <a:r>
+              <a:t>[다음] 첫 단원, 기대 행동의 시나리오</a:t>
             </a:r>
           </a:p>
         </p:txBody>
@@ -2174,7 +2889,42 @@
           <a:lstStyle/>
           <a:p>
             <a:r>
-              <a:t>실패를 찾았다면 이제 원인을 좁혀야 합니다. 표의 가운데 칸은 정답처럼 고칠 곳을 지정하는 칸이 아니라, 먼저 대조할 자료입니다. 단계를 건너뛰었다면 지침과 호출 기록을 함께 봅니다. 지침이 모호했는지, 필요한 도구를 쓰지 않았는지, 호출했지만 실패했는지에 따라 조치가 달라져요. 기준값이 다르면 규칙과 그 버전, 실제 입력과 단위를 확인합니다. 결과 항목이 빠졌다면 먼저 명세에 그 항목이 요구돼 있는지 봅니다. 이미 요구돼 있다면 출력 구현이나 검사가 놓친 것일 수 있어요. 누락됐다는 이유만으로 명세에서 그 항목을 지우는 것은 해결이 아닙니다. 반대로 시험의 기대값을 옮겨 적다가 잘못 적었을 수도 있습니다. 그때는 원래 요구와 근거를 대조해서 시험을 바로잡고 이유를 남깁니다. 요구가 바뀌었다면 명세와 시나리오를 함께 갱신해야 하고요. 마지막 줄이 가리키는 것은 근거 없이 기대값을 낮추는 일입니다. 현재 나온 결과를 통과시키려고 기준을 바꾸면 같은 오류가 다음에도 통과합니다. 실패 기록에서 입력, 기대, 실제 결과를 확인한 다음 원인을 고치고, 해당 시험과 기존 시험을 다시 실행하겠습니다.</a:t>
+              <a:t>[짚을 곳] 표 머리(실패의 증상 · 먼저 대조할 것 · 다음 확인) → 다섯 줄, 강조한 마지막 줄. 가운데 칸은 고칠 곳의 정답이 아니라 먼저 대조할 자료</a:t>
+            </a:r>
+          </a:p>
+          <a:p>
+            <a:r>
+              <a:t>· 단계 건너뜀 · 설명 부실: 지침과 호출 기록을 함께. 지침이 모호했나, 도구를 안 썼나, 호출했지만 실패했나에 따라 조치가 다르다</a:t>
+            </a:r>
+          </a:p>
+          <a:p>
+            <a:r>
+              <a:t>· 기준값 불일치: 규칙과 그 버전, 실제 입력과 단위 · 값 처리</a:t>
+            </a:r>
+          </a:p>
+          <a:p>
+            <a:r>
+              <a:t>· 결과 항목 누락: 명세에 요구돼 있나 먼저. 요구돼 있으면 출력 구현이나 검사가 놓친 것. 빠졌다고 명세에서 항목을 지우는 건 해결이 아니다</a:t>
+            </a:r>
+          </a:p>
+          <a:p>
+            <a:r>
+              <a:t>· 기대값이 원래 요구와 다름: 시험에 옮겨 적다 틀렸을 수 있다 → 원래 요구 · 근거와 대조해 시험을 바로잡고 이유를 남김. 요구가 바뀌었다면 명세와 시나리오를 함께 갱신</a:t>
+            </a:r>
+          </a:p>
+          <a:p>
+            <a:r>
+              <a:t>· 통과시키려고 기대값을 낮추기: 근거 없이 현재 결과를 정답으로 옮기면 같은 오류가 다음에도 통과</a:t>
+            </a:r>
+          </a:p>
+          <a:p>
+            <a:r>
+              <a:t>· 절차: 실패 기록의 입력 · 기대 · 실제를 확인 → 원인을 고침 → 해당 시험과 기존 시험을 다시 실행</a:t>
+            </a:r>
+          </a:p>
+          <a:p>
+            <a:r>
+              <a:t>[다음] 실습 넷의 시작, 행동 기준 작성</a:t>
             </a:r>
           </a:p>
         </p:txBody>
@@ -2244,7 +2994,32 @@
           <a:lstStyle/>
           <a:p>
             <a:r>
-              <a:t>지금까지 세 단원에 걸쳐, 명세의 약속을 Given, When, Then으로 적고, 그 시나리오를 시험으로 바꾸고, 실행마다 달라지는 출력에서 무엇을 실패로 셀지까지 가려 봤죠. 이제 그걸 직접 해 볼 차례입니다. 실습은 넷이 이어지는데요, 첫 실습은 앞 회차부터 이어 온 점검 요청 프로젝트에서 시작합니다. 이전 단계 기능이 완성된 시작본과 spec.md를 열고, 다섯 경우의 행동 기준을 시나리오 문서로 적는 거예요. 화면 둘째 카드가 그 다섯 경우예요. 일반 요청, 긴급 요청, 필수 정보 누락, 승인 거절, 도구 오류. 경우마다 Given, When, Then을 나눠 적고, 입력값하고 기대 상태, 결과에 꼭 있어야 할 근거도 같이 적습니다. 이때 하나 조심할 게 있어요. 기대값을 지금 구현이 낸 답에서 그대로 베껴 오면 안 됩니다. 구현이 틀렸다면 틀린 답이 정답이 되어 버리니까요. 기대값은 요구와 원자료에서 끌어냅니다. 다 적었으면 마지막 카드의 성공 기준으로 점검하겠습니다. 기대값을 요구와 원자료에서 정했는지, 그리고 Then이 건수나 값처럼 실행 결과로 가릴 수 있는 사실인지요. 이 실습이 끝나면 다섯 경우의 시나리오 문서가 남습니다. 이어서 안내할 두 번째 실습에서는 이 문서를 실제 실행과 연결합니다.</a:t>
+              <a:t>[짚을 곳] 단원 번호 04, 구분 실습 → 제목(새 기능과 기존 기능의 행동 기준 작성)</a:t>
+            </a:r>
+          </a:p>
+          <a:p>
+            <a:r>
+              <a:t>· 이론 연결: 세 단원에서 명세의 약속을 Given · When · Then으로 적고, 시험으로 바꾸고, 실행마다 달라지는 출력에서 실패로 셀 것을 가렸다 → 이제 직접</a:t>
+            </a:r>
+          </a:p>
+          <a:p>
+            <a:r>
+              <a:t>· 실습은 넷이 이어진다. 첫 실습은 앞에서 이어 온 점검 요청 프로젝트: 이전 단계 기능이 완성된 시작본과 spec.md를 열고 다섯 경우의 행동 기준을 시나리오 문서로 적는다</a:t>
+            </a:r>
+          </a:p>
+          <a:p>
+            <a:r>
+              <a:t>· 목적: 새 기능(긴급)과 기존 기능(일반 · 누락 · 거절 · 오류)의 기대 행동을 실행 전에 글로 고정</a:t>
+            </a:r>
+          </a:p>
+          <a:p>
+            <a:r>
+              <a:t>· 이 문서가 다음 실습에서 실제 실행과 연결된다</a:t>
+            </a:r>
+          </a:p>
+          <a:p>
+            <a:r>
+              <a:t>[다음] 다섯 경우의 시나리오 문서</a:t>
             </a:r>
           </a:p>
         </p:txBody>
@@ -2314,7 +3089,42 @@
           <a:lstStyle/>
           <a:p>
             <a:r>
-              <a:t>31~32장 통합 발화는 31장 발표자 노트를 따른다.</a:t>
+              <a:t>[짚을 곳] 카드 네 장: 입력(출발점) → 다섯 경우(범위) → 시나리오 문서(산출물) → 강조한 성공 기준(판정)</a:t>
+            </a:r>
+          </a:p>
+          <a:p>
+            <a:r>
+              <a:t>· 목표: 다섯 경우마다 Given · When · Then과 입력값 · 기대 상태 · 필수 출력 근거를 요구와 원자료에서 정한다</a:t>
+            </a:r>
+          </a:p>
+          <a:p>
+            <a:r>
+              <a:t>· 입력: 이전 단계가 완성된 점검 요청 시작본, spec.md의 계약 · 금지 조건 · 수용 기준</a:t>
+            </a:r>
+          </a:p>
+          <a:p>
+            <a:r>
+              <a:t>· 다섯 경우: 일반 요청, 긴급 요청, 필수 정보 누락, 승인 거절, 도구 오류</a:t>
+            </a:r>
+          </a:p>
+          <a:p>
+            <a:r>
+              <a:t>· 결과물: 경우마다 Given · When · Then, 입력값, 기대 상태, 결과에 꼭 있어야 할 근거를 적은 시나리오 문서</a:t>
+            </a:r>
+          </a:p>
+          <a:p>
+            <a:r>
+              <a:t>· 성공 기준: 기대값을 요구와 원자료에서 정했고, Then이 건수 · 값처럼 실행 결과로 가려지는 사실</a:t>
+            </a:r>
+          </a:p>
+          <a:p>
+            <a:r>
+              <a:t>· 주의: 기대값을 현재 구현이 낸 답에서 베끼지 않는다 — 구현이 틀렸다면 틀린 답이 정답이 된다</a:t>
+            </a:r>
+          </a:p>
+          <a:p>
+            <a:r>
+              <a:t>[다음] 실습: 에이전트 동작의 반복 검증</a:t>
             </a:r>
           </a:p>
         </p:txBody>
@@ -2384,7 +3194,27 @@
           <a:lstStyle/>
           <a:p>
             <a:r>
-              <a:t>두 번째 실습에서는 첫 실습에서 작성할 다섯 경우의 시나리오로, 에이전트의 동작을 반복 검증하겠습니다. 적어 둔 시나리오는 아직 글이라, 에이전트가 정말 그렇게 움직이는지는 돌려 봐야 알죠. 화면 왼쪽 위 칸이 출발점이에요. 다섯 경우의 시나리오 문서, 그리고 제공된 테스트 골격과 실행 환경입니다. 가운데 칸에서는 내가 정한 입력과 기대 결과, 판정 코드를 그 골격에 잇습니다. 그리고 실제 에이전트의 결과를 되풀이해서 기대 결과와 견줘요. 오른쪽 칸처럼 필수 근거가 빠졌는지, 상태가 틀렸는지, 승인 조건을 어겼는지 찾아 위반 목록에 적고, 반복한 결과와 실패 원인도 기록하겠습니다. 이 실습의 성공 기준은 아래 칸이에요. 어긋남마다 모델의 표현 차이인지, 내용이 틀린 오류인지가 갈려 있어야 합니다. 그리고 미리 저장해 둔 결과를 다시 틀어 본 것인지, 실제로 도구와 모델을 불러 본 것인지도 구분해 적어야 해요. 둘은 확인한 범위가 다르니까요. 조회 자료와 설정도 함께 기록해 차이가 생긴 조건을 구별하겠습니다. 허용할 과정의 차이인지, 실제 조건을 어긴 것인지 근거를 붙이는 것이 핵심입니다.</a:t>
+              <a:t>[짚을 곳] 단원 번호 04, 구분 실습 → 제목(에이전트 동작의 반복 검증)</a:t>
+            </a:r>
+          </a:p>
+          <a:p>
+            <a:r>
+              <a:t>· 목적: 첫 실습의 다섯 경우 시나리오로 에이전트 동작을 되풀이해 검증. 적어 둔 시나리오는 아직 글이라 정말 그렇게 움직이는지는 돌려 봐야 안다</a:t>
+            </a:r>
+          </a:p>
+          <a:p>
+            <a:r>
+              <a:t>· 이론 연결: 시나리오 → 실행 가능한 검증(단언), 표현 차이와 계약 위반의 구분, 평균 · 최저 · 반복 비율과 위반의 별도 기록</a:t>
+            </a:r>
+          </a:p>
+          <a:p>
+            <a:r>
+              <a:t>· 핵심: 허용할 과정의 차이인지 실제 조건을 어긴 것인지 근거를 붙인다. 조회 자료와 설정도 기록해 차이가 생긴 조건을 구별</a:t>
+            </a:r>
+          </a:p>
+          <a:p>
+            <a:r>
+              <a:t>[다음] 실행 결과 로그와 위반 목록</a:t>
             </a:r>
           </a:p>
         </p:txBody>
@@ -2454,7 +3284,37 @@
           <a:lstStyle/>
           <a:p>
             <a:r>
-              <a:t>33~34장 통합 발화는 33장 발표자 노트를 따른다.</a:t>
+              <a:t>[짚을 곳] 흐름 네 칸: 입력 → 연결과 반복 → 로그와 위반 목록 → 강조한 성공 기준</a:t>
+            </a:r>
+          </a:p>
+          <a:p>
+            <a:r>
+              <a:t>· 목표: 내가 정한 입력 · 기대 결과 · 판정 코드를 제공 시험 골격에 잇고, 실제 에이전트 결과를 되풀이해 견준다</a:t>
+            </a:r>
+          </a:p>
+          <a:p>
+            <a:r>
+              <a:t>· 입력: 다섯 경우의 시나리오 문서, 제공된 테스트 골격과 실행 환경</a:t>
+            </a:r>
+          </a:p>
+          <a:p>
+            <a:r>
+              <a:t>· 결과물: 반복 실행 로그와 위반 목록(필수 근거 누락 · 상태 오류 · 승인 조건 위반), 반복 결과와 실패 원인</a:t>
+            </a:r>
+          </a:p>
+          <a:p>
+            <a:r>
+              <a:t>· 성공 기준: 어긋남마다 모델의 표현 차이인지 내용 오류인지 갈려 있다. 미리 저장해 둔 결과의 재생인지 실제 도구 · 모델 호출인지 구분해 적는다 — 확인한 범위가 다르다</a:t>
+            </a:r>
+          </a:p>
+          <a:p>
+            <a:r>
+              <a:t>· 주의: 조회 자료 · 설정을 함께 기록. 위반은 평균에 섞지 않고 따로</a:t>
+            </a:r>
+          </a:p>
+          <a:p>
+            <a:r>
+              <a:t>[다음] 실습: 오류 수정과 전체 회귀</a:t>
             </a:r>
           </a:p>
         </p:txBody>
@@ -2524,7 +3384,32 @@
           <a:lstStyle/>
           <a:p>
             <a:r>
-              <a:t>세 번째 실습에서는 반복 검증에서 남길 위반 목록을 출발점으로, 오류를 고치고 기존 기능이 그대로인지 확인하겠습니다. 위반 목록에서 실제로 실패한 시나리오만 골라 원인을 따라갑니다. 실패의 증상을 보고, 고칠 곳이 프롬프트인지, 명세인지, 코드인지부터 가려 보겠습니다. 이론에서 본 고칠 곳의 표처럼, 입력과 기대, 실제 기록을 먼저 대조하는 거예요. 가린 곳을 고친 다음 그 시나리오를 다시 돌리고요. 이때 기대값을 낮춰서 통과시키지는 않습니다. 마지막에는 전체 회귀를 돌립니다. 긴급 조건이 동작하면서, 기존의 일반 요청, 필수 정보가 빠진 요청을 확정하지 않는 보류, 그리고 거절 조건이 그대로 통과하면 성공이에요. 무엇을 왜 고쳤는지 적은 수정 기록과 전체 회귀 결과가 남습니다. 실패가 없다면 억지로 오류를 만들거나 고칠 필요는 없습니다. 확인한 범위와 남은 경우를 기록하겠습니다. 실패가 있다면 수정한 시험뿐 아니라 준비한 전체 시나리오를 다시 확인합니다.</a:t>
+              <a:t>[짚을 곳] 단원 번호 04, 구분 실습 → 제목(오류 수정과 전체 회귀 검증)</a:t>
+            </a:r>
+          </a:p>
+          <a:p>
+            <a:r>
+              <a:t>· 목적: 반복 검증에서 남긴 위반 목록을 출발점으로 오류를 고치고 기존 기능이 그대로인지 확인</a:t>
+            </a:r>
+          </a:p>
+          <a:p>
+            <a:r>
+              <a:t>· 이론 연결: 실패한 시험에서 고칠 곳 가리기 표(입력 · 기대 · 실제 기록을 먼저 대조), 회귀 시험(바꾼 뒤 기존 시나리오 전부 재실행)</a:t>
+            </a:r>
+          </a:p>
+          <a:p>
+            <a:r>
+              <a:t>· 위반 목록에서 실제로 실패한 시나리오만 골라 원인을 따라간다. 고칠 곳이 프롬프트 · 명세 · 코드 중 어디인지부터</a:t>
+            </a:r>
+          </a:p>
+          <a:p>
+            <a:r>
+              <a:t>· 기대값을 낮춰 통과시키지 않는다</a:t>
+            </a:r>
+          </a:p>
+          <a:p>
+            <a:r>
+              <a:t>[다음] 수정 기록과 전체 회귀 결과</a:t>
             </a:r>
           </a:p>
         </p:txBody>
@@ -2594,7 +3479,42 @@
           <a:lstStyle/>
           <a:p>
             <a:r>
-              <a:t>35~36장 통합 발화는 35장 발표자 노트를 따른다.</a:t>
+              <a:t>[짚을 곳] 흐름 네 칸: 입력 → 원인과 수정 → 수정 · 회귀 기록 → 강조한 성공 기준</a:t>
+            </a:r>
+          </a:p>
+          <a:p>
+            <a:r>
+              <a:t>· 목표: 실패한 시나리오만 원인을 따라가 고치고, 전체 회귀로 긴급 조건과 기존 조건이 함께 통과하는지 본다</a:t>
+            </a:r>
+          </a:p>
+          <a:p>
+            <a:r>
+              <a:t>· 입력: 위반 목록에서 실제로 실패한 시나리오</a:t>
+            </a:r>
+          </a:p>
+          <a:p>
+            <a:r>
+              <a:t>· 원인과 수정: 프롬프트 · 명세 · 코드 가운데 고칠 곳을 가려 고친 뒤 그 시나리오를 다시 돌린다. 기대값은 낮추지 않는다</a:t>
+            </a:r>
+          </a:p>
+          <a:p>
+            <a:r>
+              <a:t>· 결과물: 무엇을 왜 고쳤는지 적은 수정 기록 + 다시 실행한 시나리오 전체의 결과</a:t>
+            </a:r>
+          </a:p>
+          <a:p>
+            <a:r>
+              <a:t>· 성공 기준: 긴급 조건이 동작하면서 일반 요청, 필수 정보 누락 시 확정하지 않는 보류, 거절 조건이 그대로 통과</a:t>
+            </a:r>
+          </a:p>
+          <a:p>
+            <a:r>
+              <a:t>· 주의: 실패가 없으면 억지로 오류를 만들거나 고치지 않고 확인한 범위와 남은 경우를 기록. 실패가 있으면 수정한 시험뿐 아니라 준비한 전체 시나리오를 다시 확인</a:t>
+            </a:r>
+          </a:p>
+          <a:p>
+            <a:r>
+              <a:t>[다음] 실습: 교대 인수인계서</a:t>
             </a:r>
           </a:p>
         </p:txBody>
@@ -2664,7 +3584,37 @@
           <a:lstStyle/>
           <a:p>
             <a:r>
-              <a:t>네 번째 실습은 여러 출처를 연결해 교대 인수인계서를 만드는 활동입니다. 앞의 세 실습이 기대를 적고 실행해서 고치는 과정이라면, 여기서는 결과의 바탕이 되는 업무 자료를 어떻게 함께 읽을지 확인합니다. 다음 담당자가 알아야 할 완료 작업과 남은 작업, 주의 사항을 세 출처에서 정리할 거예요. 화면 왼쪽 위 칸이 입력입니다. 설비 이벤트, 정비 이력, 부품 자료예요. 이번에는 처음부터 새로 만들지 않고, 앞에서 만든 조회 도구와 출력 계약, 검증 방식을 그대로 가져와 씁니다. 단순히 세 자료를 이어 붙이는 것이 아니라, 같은 설비를 가리키는지, 같은 시점의 기록인지를 맞춰 봐야 합니다. 가운데 칸의 데이터 패브릭은 여러 곳의 데이터를 연결하고 관리해 활용하는 더 넓은 접근입니다. 데이터를 옮기지 않는 방식만을 뜻하지는 않아요. 이번 실습에서는 그중 원천의 자료를 연결해 읽고 출처를 추적하는 관점을 다룹니다. 새 데이터 플랫폼을 구축하는 활동은 아닙니다. 오른쪽 칸의 인수인계서에는 항목마다 어느 자료를 근거로 썼는지와 그 자료의 시각을 붙이겠습니다. 방금 조회한 과거 기록일 수도 있으므로, 조회 시각과 사건이 일어난 시각을 구별해야 합니다. 실제로 연결해 읽은 자료인지, 준비된 파일인지도 표시하고요. 성공 기준은 아래 칸입니다. 자료가 없는 것, 조회에 실패한 것, 출처끼리 기록이 서로 다른 것을 가려 적어야 해요. 한 출처를 읽지 못했다면 관련 작업이 없다고 단정하지 말고 확인하지 못한 범위를 적습니다. 그리고 저장한 결과에서 원자료를 다시 찾아갈 수 있어야 합니다. 포털에서 하는 실제 교대 실행은 마지막 회차에 따로 합니다. 네 실습의 목표를 모두 살펴봤습니다. 이제 시나리오 작성부터 반복 검증과 수정, 교대 인수인계 순서로 직접 진행하겠습니다.</a:t>
+              <a:t>[짚을 곳] 단원 번호 04, 구분 실습 → 제목(업무 데이터를 연결한 교대 인수인계서 작성)</a:t>
+            </a:r>
+          </a:p>
+          <a:p>
+            <a:r>
+              <a:t>· 목적: 여러 출처를 연결해 교대 인수인계서를 만든다. 앞의 세 실습이 기대를 적고 · 실행하고 · 고치는 과정이라면, 여기선 결과의 바탕이 되는 업무 자료를 어떻게 함께 읽을지 확인</a:t>
+            </a:r>
+          </a:p>
+          <a:p>
+            <a:r>
+              <a:t>· 다음 담당자가 알아야 할 완료 작업 · 남은 작업 · 주의 사항을 세 출처(설비 이벤트 · 정비 이력 · 부품 자료)에서 정리</a:t>
+            </a:r>
+          </a:p>
+          <a:p>
+            <a:r>
+              <a:t>· 처음부터 새로 만들지 않고 앞에서 만든 조회 도구 · 출력 계약 · 검증 방식을 그대로 가져온다</a:t>
+            </a:r>
+          </a:p>
+          <a:p>
+            <a:r>
+              <a:t>· 단순히 이어 붙이지 않는다: 같은 설비를 가리키는지, 같은 시점의 기록인지 맞춰 본다</a:t>
+            </a:r>
+          </a:p>
+          <a:p>
+            <a:r>
+              <a:t>· 진행 순서: 시나리오 작성 → 반복 검증 → 수정 · 회귀 → 교대 인수인계</a:t>
+            </a:r>
+          </a:p>
+          <a:p>
+            <a:r>
+              <a:t>[다음] 세 출처를 엮은 인수인계서</a:t>
             </a:r>
           </a:p>
         </p:txBody>
@@ -2734,7 +3684,42 @@
           <a:lstStyle/>
           <a:p>
             <a:r>
-              <a:t>37~38장 통합 발화는 37장 발표자 노트를 따른다.</a:t>
+              <a:t>[짚을 곳] 카드 네 장: 세 출처(입력) → 강조한 데이터 패브릭(범위) → 인수인계서(산출물) → 성공 기준(판정)</a:t>
+            </a:r>
+          </a:p>
+          <a:p>
+            <a:r>
+              <a:t>· 목표: 앞의 조회 · 출력 계약 · 검증 방식을 재사용해 세 자료를 잇고 항목마다 출처와 근거 시각을 남긴다</a:t>
+            </a:r>
+          </a:p>
+          <a:p>
+            <a:r>
+              <a:t>· 데이터 패브릭(Data Fabric): 여러 곳의 데이터를 연결 · 관리해 활용하는 넓은 접근. 데이터를 옮기지 않는 방식만 뜻하진 않는다. 이번엔 원천 자료를 연결해 읽고 출처를 추적하는 관점만, 새 데이터 플랫폼 구축은 아님</a:t>
+            </a:r>
+          </a:p>
+          <a:p>
+            <a:r>
+              <a:t>· 결과물: 완료 · 미완료 · 주의 사항, 항목마다 근거 자료와 그 시각, 실제로 연결해 읽은 자료인지 준비된 파일인지 표시</a:t>
+            </a:r>
+          </a:p>
+          <a:p>
+            <a:r>
+              <a:t>· 시각 주의: 방금 조회한 과거 기록일 수 있으니 조회 시각과 사건이 일어난 시각을 구별</a:t>
+            </a:r>
+          </a:p>
+          <a:p>
+            <a:r>
+              <a:t>· 성공 기준: 자료 없음 · 조회 실패 · 출처끼리 서로 다른 기록을 가려 적는다. 한 출처를 못 읽었다면 관련 작업이 없다고 단정하지 않고 확인 못 한 범위를 적는다. 저장한 결과에서 원자료를 다시 찾아갈 수 있어야</a:t>
+            </a:r>
+          </a:p>
+          <a:p>
+            <a:r>
+              <a:t>· 실제 포털에서의 교대 실행은 이 실습 범위가 아니다</a:t>
+            </a:r>
+          </a:p>
+          <a:p>
+            <a:r>
+              <a:t>[다음] 단원 05, 제작부터 검증까지</a:t>
             </a:r>
           </a:p>
         </p:txBody>
@@ -2804,7 +3789,32 @@
           <a:lstStyle/>
           <a:p>
             <a:r>
-              <a:t>이번 시간에는 네 실습에서 남긴 시나리오와 실행 기록, 수정 내역과 인수인계서를 바탕으로 전체 과정을 정리합니다. 실패가 발견됐다면 어떻게 고쳤는지, 아직 확인하지 못한 조건은 무엇인지도 함께 떠올려 보세요. 우리는 목표와 도구로 에이전트의 일을 구성하고, 스킬과 연결 규약으로 수행 방법을 정리했습니다. 사람의 개입과 명세를 통해 지킬 기준을 세웠고, 이번에는 그 기준을 구체적인 상황에서 검증했습니다. 이제 쿨러 사건 하나에 그 역할을 차례로 놓아 보겠습니다. 그다음에는 이 과정에서 만든 여러 활용을 나란히 놓고, 무엇을 옮겨 썼고 무엇을 새로 만들었는지, 새 업무를 맡길 때 무엇을 정해야 하는지까지 정리하겠습니다. 새 기능을 더 배우기보다, 어느 장치가 무엇을 확인하고 그 결과가 다음 일로 어떻게 이어지는지 정리하는 시간입니다.</a:t>
+              <a:t>[짚을 곳] 단원 번호 05, 구분 이론 → 부제(쿨러 사건의 장치를 되짚고, 활용마다 다른 판정과 새 업무를 맡길 조건)</a:t>
+            </a:r>
+          </a:p>
+          <a:p>
+            <a:r>
+              <a:t>· 네 실습에서 남긴 시나리오 · 실행 기록 · 수정 내역 · 인수인계서를 바탕으로 정리. 실패를 어떻게 고쳤는지, 아직 확인 못 한 조건은 무엇인지도 떠올리게 한다</a:t>
+            </a:r>
+          </a:p>
+          <a:p>
+            <a:r>
+              <a:t>· 지나온 길: 목표와 도구로 에이전트의 일을 구성 → 스킬과 연결 규약으로 수행 방법 정리 → 사람의 개입과 명세로 지킬 기준 → 그 기준을 구체적 상황에서 검증</a:t>
+            </a:r>
+          </a:p>
+          <a:p>
+            <a:r>
+              <a:t>· 순서: 쿨러 사건 하나에 역할을 차례로 놓기 → 여러 활용을 나란히(무엇을 옮겨 썼고 무엇을 새로 만들었나) → 새 업무를 맡길 때 정할 것</a:t>
+            </a:r>
+          </a:p>
+          <a:p>
+            <a:r>
+              <a:t>· 새 기능을 더 배우는 시간이 아니라, 어느 장치가 무엇을 확인하고 그 결과가 다음 일로 어떻게 이어지는지 정리하는 시간</a:t>
+            </a:r>
+          </a:p>
+          <a:p>
+            <a:r>
+              <a:t>[다음] 여섯 개념이 푼 문제</a:t>
             </a:r>
           </a:p>
         </p:txBody>
@@ -2874,7 +3884,32 @@
           <a:lstStyle/>
           <a:p>
             <a:r>
-              <a:t>첫 단원은 명세에 적어 둔 약속에서 출발합니다. 승인 전에는 설비 명령을 내지 않는다, 결과는 정해진 항목으로 낸다, 명세에는 이런 약속들이 적혀 있죠. 그런데 이 약속을 어떻게 적어 둬야, 에이전트가 실제로 지켰는지를 실행 결과로 확인할 수 있을까요? 쿨러 사건의 승인 단계에서, 담당자가 추천안을 거절하는 장면 하나를 붙잡고 그 방법을 찾아보겠습니다.</a:t>
+              <a:t>[짚을 곳] 단원 번호 01 → 부제</a:t>
+            </a:r>
+          </a:p>
+          <a:p>
+            <a:r>
+              <a:t>· 출발점은 명세에 적어 둔 약속: 승인 전에는 설비 명령을 내지 않는다, 결과는 정해진 항목으로 낸다</a:t>
+            </a:r>
+          </a:p>
+          <a:p>
+            <a:r>
+              <a:t>· 물음: 이 약속을 어떻게 적어 둬야 에이전트가 실제로 지켰는지 실행 결과로 확인할 수 있나</a:t>
+            </a:r>
+          </a:p>
+          <a:p>
+            <a:r>
+              <a:t>· 붙잡을 장면 하나: 쿨러 사건의 승인 단계에서 담당자가 추천안을 거절하는 장면</a:t>
+            </a:r>
+          </a:p>
+          <a:p>
+            <a:r>
+              <a:t>· 목표: 통과와 실패를 실행 결과로 가를 수 있는 시나리오로 옮기기</a:t>
+            </a:r>
+          </a:p>
+          <a:p>
+            <a:r>
+              <a:t>[다음] 명세와 실제의 차이</a:t>
             </a:r>
           </a:p>
         </p:txBody>
@@ -2944,7 +3979,42 @@
           <a:lstStyle/>
           <a:p>
             <a:r>
-              <a:t>여섯 개념을 각각 어떤 문제에 답했는지로 묶어 보겠습니다. 그림의 왼쪽은 일을 수행하는 구조, 오른쪽은 기대와 권한을 확인하는 구조입니다. 이 과정에서 우리가 함께 사용한 개념들이에요. 에이전트는 목표에 맞춰 도구를 선택하고 결과를 보며 다음 행동을 이어 갑니다. 스킬은 반복해서 쓸 절차와 판단 지침을 묶어 제공합니다. 지침을 적었다고 실행 순서가 항상 강제되는 것은 아니므로 실제 호출 기록도 확인해야 하죠. MCP는 도구와 자료를 연결하는 공통 규약이고, HYD는 이를 이용해 업무 시스템을 연결했습니다. HITL은 필요한 정보나 결정을 사람에게 받는 자리를 둡니다. SDD는 명세를 구현과 변경의 기준으로 유지하고, BDD는 구체적인 행동 사례로 기대를 맞추고 검증에 연결합니다. 실습에서 만든 결과로 이어 볼게요. 스킬은 회의록에서 후속 작업을 뽑는 방법을 다른 회의에도 같은 기준으로 쓰게 했습니다. MCP는 직접 만든 조회 도구와 자기 노트를 에이전트가 읽게 했고요. HITL은 빠진 정보만 묻고 같은 요청으로 돌아와 다시 처리하게 했고, SDD는 긴급 표시를 더하면서 지킬 것을 spec.md에 남겼죠. BDD는 그 약속을 시나리오와 회귀 결과로 확인했습니다. 이 여섯 이름을 모든 에이전트가 반드시 같은 순서로 갖춰야 하는 목록으로 외우지는 마세요. 업무에 따라 도구를 연결하는 방식과 검토 절차는 달라질 수 있습니다. 중요한 것은 일을 수행할 수 있는가에 더해, 무엇을 지켜야 하고 누가 결정하며 어떻게 확인할 것인가를 함께 설계하는 일입니다.</a:t>
+              <a:t>[짚을 곳] 파이프라인 왼쪽 영역(일을 해내게 한다: 에이전트 · 스킬 · MCP) → 오른쪽 영역(믿고 맡기게 한다: HITL · SDD · 강조한 BDD)</a:t>
+            </a:r>
+          </a:p>
+          <a:p>
+            <a:r>
+              <a:t>· 에이전트: 목표에 맞춰 도구를 고르고 결과를 보며 다음 행동을 잇는다</a:t>
+            </a:r>
+          </a:p>
+          <a:p>
+            <a:r>
+              <a:t>· 스킬: 반복할 절차와 판단 지침을 묶는다. 적었다고 실행 순서가 강제되진 않으니 실제 호출 기록도 확인</a:t>
+            </a:r>
+          </a:p>
+          <a:p>
+            <a:r>
+              <a:t>· MCP: 도구와 자료를 연결하는 공통 규약, HYD는 이것으로 업무 시스템을 연결</a:t>
+            </a:r>
+          </a:p>
+          <a:p>
+            <a:r>
+              <a:t>· HITL: 필요한 정보나 결정을 사람에게 받는 자리. SDD: 명세를 구현과 변경의 기준으로 유지. BDD: 구체적 행동 사례로 기대를 맞추고 검증에 연결</a:t>
+            </a:r>
+          </a:p>
+          <a:p>
+            <a:r>
+              <a:t>· 실습 결과로 잇기: 스킬 = 회의록에서 후속 작업을 뽑는 방법을 다른 회의에도 같은 기준으로, MCP = 직접 만든 조회 도구와 자기 노트를 에이전트가 읽게, HITL = 빠진 정보만 묻고 같은 요청으로 돌아와 다시 처리, SDD = 긴급 표시를 더하며 지킬 것을 spec.md에, BDD = 그 약속을 시나리오와 회귀 결과로 확인</a:t>
+            </a:r>
+          </a:p>
+          <a:p>
+            <a:r>
+              <a:t>· 여섯 이름을 모든 에이전트가 같은 순서로 갖춰야 하는 목록으로 외우지 않는다. 핵심은 수행 가능성에 더해 무엇을 지키고 · 누가 결정하고 · 어떻게 확인할지를 함께 설계</a:t>
+            </a:r>
+          </a:p>
+          <a:p>
+            <a:r>
+              <a:t>[다음] 쿨러 사건 위에 놓인 장치</a:t>
             </a:r>
           </a:p>
         </p:txBody>
@@ -3014,7 +4084,42 @@
           <a:lstStyle/>
           <a:p>
             <a:r>
-              <a:t>같은 개념을 쿨러 사건의 흐름에 놓아 보겠습니다. 왼쪽에서 경보가 열리고, 에이전트가 스킬을 읽어 도구를 호출하고, 추천안을 제출합니다. 오른쪽에서는 검사와 담당자의 승인, 현재 조건 확인을 거쳐 설비 명령으로 이어집니다. 기록의 경보 시각은 11시 13분 8초, 승인 시각은 11시 14분 56초였습니다. 이 두 시점 사이는 약 2분이에요. 전체 복구 시간이나 에이전트 혼자 일한 시간을 뜻하는 것은 아닙니다. 도구 호출 과정에서는 대안 평가 응답이 커서, 필요한 항목으로 좁혀 보겠다는 계획도 남겼습니다. 앞에서 확인한 기록만으로 실제 재조회가 성공해 모든 항목을 읽었다고까지 결론 내리지는 않았죠. 계획과 수행 기록을 나눠 읽어야 근거가 끊긴 곳을 찾을 수 있습니다. 추천안의 자동 검사는 정해진 조건을 확인하고, 담당자의 승인은 실행에 대한 결정을 남깁니다. 두 자리를 통과해도 승인 시점의 설비 조건을 다시 확인해야 합니다. 이 그림은 각 역할을 묶은 것이고, 실제 처리에는 그 사이의 검사들이 함께 있습니다. 아래 시나리오와 회귀 시험은 이 흐름을 정한 입력과 조건에서 다시 확인합니다. 사건 한 건의 성공 기록은 그 사례의 근거이고, 여러 조건을 시험하는 일은 별도의 검증입니다. 둘을 함께 봐야 같은 방식으로 맡길 수 있는 범위를 판단할 수 있어요.</a:t>
+              <a:t>[짚을 곳] 그림 위 흐름 왼쪽부터(경보 11:13:08 → 스킬 → 도구 호출 → 추천안 → 검사 → 승인 11:14:56 → 설비 명령 팬 100 %) → 아래 묶음 이름표(스킬 · MCP 도구</a:t>
+            </a:r>
+          </a:p>
+          <a:p>
+            <a:r>
+              <a:t>가드레일 · 사람의 승인) → 강조한 시나리오와 회귀 시험</a:t>
+            </a:r>
+          </a:p>
+          <a:p>
+            <a:r>
+              <a:t>· 왼쪽: 경보가 열리고 에이전트가 스킬을 읽어 도구를 호출하고 추천안을 제출. 오른쪽: 검사 · 담당자 승인 · 현재 조건 확인을 거쳐 설비 명령</a:t>
+            </a:r>
+          </a:p>
+          <a:p>
+            <a:r>
+              <a:t>· 경보 11:13:08, 승인 11:14:56 — 두 시점 사이 약 2분. 전체 복구 시간이나 에이전트 혼자 일한 시간이 아니다</a:t>
+            </a:r>
+          </a:p>
+          <a:p>
+            <a:r>
+              <a:t>· 도구 호출 중 대안 평가 응답이 커서 필요한 항목으로 좁혀 보겠다는 계획을 남겼다. 그 기록만으로 재조회가 성공해 모든 항목을 읽었다고 결론 내리지 않는다 → 계획과 수행 기록을 나눠 읽어야 근거가 끊긴 곳을 찾는다</a:t>
+            </a:r>
+          </a:p>
+          <a:p>
+            <a:r>
+              <a:t>· 자동 검사는 정해진 조건을, 승인은 실행 결정을 남긴다. 둘을 통과해도 승인 시점의 설비 조건을 다시 확인. 그림은 역할을 묶은 것이고 실제로는 그 사이 검사들이 더 있다</a:t>
+            </a:r>
+          </a:p>
+          <a:p>
+            <a:r>
+              <a:t>· 사건 한 건의 성공 기록은 그 사례의 근거, 여러 조건을 시험하는 건 별도 검증 → 둘을 함께 봐야 같은 방식으로 맡길 범위를 판단</a:t>
+            </a:r>
+          </a:p>
+          <a:p>
+            <a:r>
+              <a:t>[다음] 목표 · 도구 · 멈춤 조건</a:t>
             </a:r>
           </a:p>
         </p:txBody>
@@ -3084,7 +4189,37 @@
           <a:lstStyle/>
           <a:p>
             <a:r>
-              <a:t>이번에는 목표와 도구, 멈춤 조건이 각각 어떤 빈칸을 메우는지 보겠습니다. 없으면 반드시 어떤 오답이 나온다는 예언이 아니라, 설계할 때 확인할 질문입니다. 목표에는 무엇을 내면 일이 끝나는지가 들어갑니다. 쿨러 사건이라면 단순히 설명을 잘하는 것을 넘어, 근거 있는 추천안을 약속한 형태로 제출하는 것이죠. 끝의 기준이 모호하면 불필요한 조회를 이어 가거나 필요한 일을 덜 한 상태에서 끝날 수 있습니다. 도구는 현재 자료를 확인할 통로입니다. 입력으로 받은 자료만으로 충분한 업무도 있지만, 지금의 유온이나 납기 상황이 필요한 업무라면 그 자료를 얻을 경로가 있어야 해요. 도구가 있어도 필요한 값을 실제로 읽었는지 확인해야 합니다. 멈춤 조건은 근거 부족과 도구 실패를 어떻게 다룰지 정합니다. 확인하지 못한 값을 추정해 결과를 완성하지 않고, 질문하거나 보류하고 사유를 남기는 조건이에요. 중단 기록을 보면 업무를 못 했다는 사실뿐 아니라 무엇이 부족했는지도 알 수 있습니다. 목표는 끝을, 도구는 근거의 통로를, 멈춤 조건은 확인하지 못했을 때의 행동을 정합니다. 이 세 가지가 이어져야 성공한 결과와 보류한 결과 모두를 해석할 수 있습니다.</a:t>
+              <a:t>[짚을 곳] 카드 세 장: 목표가 모호하다(완료 기준) → 근거 통로가 없다(자료의 통로) → 강조한 멈춤 조건이 없다(확인하지 못한 범위)</a:t>
+            </a:r>
+          </a:p>
+          <a:p>
+            <a:r>
+              <a:t>· 「없으면 반드시 오답」이라는 예언이 아니라 설계할 때 확인할 질문</a:t>
+            </a:r>
+          </a:p>
+          <a:p>
+            <a:r>
+              <a:t>· 목표: 무엇을 내면 끝인지. 쿨러 사건은 설명을 잘하는 것을 넘어 근거 있는 추천안을 약속한 형태로 제출하는 것. 모호하면 불필요한 조회를 잇거나 덜 한 채 끝난다</a:t>
+            </a:r>
+          </a:p>
+          <a:p>
+            <a:r>
+              <a:t>· 도구: 현재 자료를 확인할 통로. 입력만으로 충분한 업무도 있지만 지금의 유온이나 납기 상황이 필요하면 경로가 있어야. 도구가 있어도 필요한 값을 실제로 읽었는지 확인</a:t>
+            </a:r>
+          </a:p>
+          <a:p>
+            <a:r>
+              <a:t>· 멈춤 조건: 근거 부족 · 도구 실패 때 확인 못 한 값을 추정해 완성하지 않고 질문하거나 보류하고 사유를 남긴다. 중단 기록으로 무엇이 부족했는지까지 안다</a:t>
+            </a:r>
+          </a:p>
+          <a:p>
+            <a:r>
+              <a:t>· 정리: 목표는 끝을, 도구는 근거의 통로를, 멈춤 조건은 확인 못 했을 때의 행동을 정한다 → 셋이 이어져야 성공한 결과와 보류한 결과를 모두 해석</a:t>
+            </a:r>
+          </a:p>
+          <a:p>
+            <a:r>
+              <a:t>[다음] 근거가 놓인 자리</a:t>
             </a:r>
           </a:p>
         </p:txBody>
@@ -3154,7 +4289,37 @@
           <a:lstStyle/>
           <a:p>
             <a:r>
-              <a:t>에이전트가 추천안을 낼 때 쓴 근거는 어디서 왔을까요? 화면에 두 갈래로 나눠 놨습니다. 위쪽 회색 구획이 지식이에요. 원인 후보 셋에서 고장 유형을 거쳐 조치 방법으로 가는 관계죠. 쿨러 핀 오염, 팬 구동 불량, 주변 온도 상승이 쿨러 냉각 성능 상실을 일으키고, 그 고장 유형에 대한 완화 후보 중 하나가 팬 최대 운전입니다. 원인과 현재 조건에 따라 그 후보를 적용할 수 있는지는 따로 가립니다. 이건 지식 그래프에 미리 정해 둔 관계입니다. 아래쪽 하늘색 구획은 현재값이에요. 냉각 효율이 절반 아래로 떨어졌다는 값은 시계열 DB에서, 납기가 걸린 생산 오더는 업무 DB에서 읽었습니다. 도구를 통해 판단에 사용한 자료예요. 조회한 시각과 값이 관측된 시각도 함께 확인해야 합니다. 그런데 이 두 갈래는 서로가 필요해요. 지식에는 원인마다 어느 센서 값을 어떤 조건으로 확인할지가 적혀 있습니다. 쿨러 핀 오염이라면 냉각 효율이 낮아졌는지를 보라는 식이죠. 하지만 그 값이 지금 몇인지는 지식에 없어요. 판단하는 순간 시계열 DB에서 읽어 와야, 이 원인이 지금 사건에 맞는지 가릴 수 있습니다. 그래서 두 갈래가 가운데 도구 호출에서 모여서, 오른쪽 추천안이 되는 거예요. 지식의 규칙과 관계도 개정될 수 있고, 관측값은 시간에 따라 달라집니다. 적용한 지식 버전과 관측 시점을 함께 남겨야 해요. 둘을 섞지 않는 것이 근거를 다루는 기준이었던 까닭이 여기 있습니다. 추천안에는 근거마다 어디서 읽었는지가 남아 있어요. 덕분에 나중에 결과가 이상하면, 어느 갈래에서 틀렸는지 거슬러 갈 수 있습니다.</a:t>
+              <a:t>[짚을 곳] 그림 위 회색 구획 지식(원인 후보 셋 → 고장 유형 → 조치 후보 SOP-COOL-11) → 아래 하늘색 구획 현재값(시계열 DB 냉각 효율 46.2 %, 업무 DB 납기 오더 MO-0930-0412) → 가운데 도구 호출 → 오른쪽 강조한 추천안</a:t>
+            </a:r>
+          </a:p>
+          <a:p>
+            <a:r>
+              <a:t>· 물음: 추천안의 근거는 어디서 왔나 — 두 갈래</a:t>
+            </a:r>
+          </a:p>
+          <a:p>
+            <a:r>
+              <a:t>· 지식: 쿨러 핀 오염 · 팬 구동 불량 · 주변 온도 상승이 쿨러 냉각 성능 상실을 일으키고, 그 고장 유형의 완화 후보 중 하나가 팬 최대 운전. 지식 그래프에 미리 정해 둔 관계. 원인 · 현재 조건에 따라 적용 가능한지는 따로 가린다</a:t>
+            </a:r>
+          </a:p>
+          <a:p>
+            <a:r>
+              <a:t>· 현재값: 냉각 효율이 절반 아래(46.2 %)라는 값은 시계열 DB에서, 납기가 걸린 생산 오더는 업무 DB에서 도구로 읽었다. 조회 시각과 관측 시각도 확인</a:t>
+            </a:r>
+          </a:p>
+          <a:p>
+            <a:r>
+              <a:t>· 서로가 필요하다: 지식엔 원인마다 어느 센서 값을 어떤 조건으로 볼지(핀 오염이면 냉각 효율 저하)가 있지만 그 값이 지금 몇인지는 없다 → 판단 순간 읽어 와야 이 사건에 맞는지 가린다. 그래서 도구 호출에서 모여 추천안이 된다</a:t>
+            </a:r>
+          </a:p>
+          <a:p>
+            <a:r>
+              <a:t>· 지식의 규칙 · 관계도 개정되고 관측값은 시간에 따라 변한다 → 적용한 지식 버전과 관측 시점을 함께 남긴다. 추천안에 근거마다 출처가 남아 결과가 이상하면 어느 갈래가 틀렸는지 거슬러 간다</a:t>
+            </a:r>
+          </a:p>
+          <a:p>
+            <a:r>
+              <a:t>[다음] 스킬과 MCP, 고칠 곳</a:t>
             </a:r>
           </a:p>
         </p:txBody>
@@ -3224,7 +4389,37 @@
           <a:lstStyle/>
           <a:p>
             <a:r>
-              <a:t>일하는 방법을 바꾸는 것과 연결할 수 있는 범위를 바꾸는 것은 고칠 자리가 다릅니다. 왼쪽 스킬은 어떤 근거부터 확인하고 부족할 때 어떻게 대응할지 같은 지침을 담습니다. 오른쪽 도구 연결은 어느 시스템의 어떤 기능을 사용할 수 있는지와 관련돼요. 예를 들어 같은 자료를 읽되 확인 순서를 개선하려면 스킬을 검토할 수 있습니다. 새 업무 시스템의 자료가 필요하다면 도구 제공과 연결, 접근 권한을 확인해야 하죠. 호출은 됐는데 권한 오류가 났다면 지침 문장을 길게 쓰는 것으로 해결되지는 않습니다. 출력 항목을 바꾸는 경우에는 스킬만 고쳐서도 안 됩니다. 명세의 계약과 결과를 읽는 프로그램, 출력 검사를 함께 확인해야 합니다. 스킬이 약속을 설명하는 자리라면 실제 검사는 구현이 맡기 때문이에요. MCP는 연결 규약입니다. 그 이름 자체가 모든 권한을 통제하거나 실행 환경 전체를 격리한다는 뜻은 아닙니다. 실제 허용 범위는 호스트와 서버의 설정, 계정 권한과 도구 구현이 결정합니다. 그래서 원하는 일을 못 했을 때도 지침과 연결, 실제 응답을 구별해서 살펴보는 겁니다.</a:t>
+              <a:t>[짚을 곳] 왼쪽 스킬을 고치는 경우(수행 방법) → 오른쪽 강조한 연결을 고치는 경우(실행 도구)</a:t>
+            </a:r>
+          </a:p>
+          <a:p>
+            <a:r>
+              <a:t>· 일하는 방법을 바꾸는 것과 연결 범위를 바꾸는 것은 고칠 자리가 다르다</a:t>
+            </a:r>
+          </a:p>
+          <a:p>
+            <a:r>
+              <a:t>· 스킬: 어떤 근거부터 확인하고 부족하면 어떻게 대응할지의 지침. 같은 자료를 읽되 확인 순서를 개선하려면 스킬을 검토</a:t>
+            </a:r>
+          </a:p>
+          <a:p>
+            <a:r>
+              <a:t>· 연결: 어느 시스템의 어떤 기능을 쓸 수 있나. 새 업무 시스템 자료가 필요하면 도구 제공 · 연결 · 접근 권한을 확인. 호출은 됐는데 권한 오류라면 지침 문장을 길게 써서는 해결되지 않는다</a:t>
+            </a:r>
+          </a:p>
+          <a:p>
+            <a:r>
+              <a:t>· 출력 항목을 바꿀 땐 스킬만 고치면 안 된다: 명세의 계약, 결과를 읽는 프로그램, 출력 검사를 함께. 스킬은 약속을 설명하는 자리, 실제 검사는 구현이 맡는다</a:t>
+            </a:r>
+          </a:p>
+          <a:p>
+            <a:r>
+              <a:t>· MCP는 연결 규약. 그 이름이 모든 권한 통제나 실행 환경 격리를 뜻하진 않는다. 실제 허용 범위는 호스트 · 서버 설정, 계정 권한, 도구 구현이 결정 → 원하는 일을 못 했을 때 지침 · 연결 · 실제 응답을 구별해 본다</a:t>
+            </a:r>
+          </a:p>
+          <a:p>
+            <a:r>
+              <a:t>[다음] 검사 통과와 승인</a:t>
             </a:r>
           </a:p>
         </p:txBody>
@@ -3294,7 +4489,47 @@
           <a:lstStyle/>
           <a:p>
             <a:r>
-              <a:t>자동 검사를 통과한 것과 사람이 승인한 것을 구별해 보겠습니다. 가운데의 자동 검사는 HYD 추천안의 형식과 규칙 인용, 승인 역할 같은 조건을 확인합니다. 통과는 정해진 검사에서 위반이 발견되지 않았다는 뜻이에요. 오른쪽 담당자의 승인은 그 안을 실행하도록 허락한 결정입니다. 승인 권한을 확인한 경로에서 사람과 역할, 선택한 안과 시각을 기록합니다. 에이전트가 승인자 이름을 결과에 써 넣었다고 이 기록이 만들어지는 것은 아닙니다. 앞 실습의 다른 AI가 초안을 검토한 것도 떠올려 보세요. 그 검토는 참고할 의견입니다. 자동 검사 통과나 사람의 승인을 대신하지 않아요. 여러 AI가 같은 답을 했더라도 근거와 권한을 따로 확인해야 합니다. 그림 왼쪽 아래의 질문과 작업 닫기는 또 다른 사람의 개입입니다. 부족한 정보를 답하는 것과 실행을 허락하는 것은 역할이 다르죠. 승인 뒤에도 현재 조건을 다시 검사하고, 명령을 보낸 뒤에는 실행 결과를 확인해야 합니다. 그림의 실행 허락을 실제 조치의 성공과 같은 뜻으로 읽지 않는 것이 중요합니다.</a:t>
+              <a:t>[짚을 곳] 그림 위 흐름(에이전트 → 추천안 → 자동 검사 → 승인 대기 → 강조한 담당자의 승인 → 설비 명령), 아래 이름표(올려도 된다</a:t>
+            </a:r>
+          </a:p>
+          <a:p>
+            <a:r>
+              <a:t>강조한 실행 허락</a:t>
+            </a:r>
+          </a:p>
+          <a:p>
+            <a:r>
+              <a:t>결정 기록) → 왼쪽 아래 에이전트의 질문 · 멈춘 작업 닫기</a:t>
+            </a:r>
+          </a:p>
+          <a:p>
+            <a:r>
+              <a:t>· 자동 검사: HYD 추천안의 형식 · 규칙 인용 · 승인 역할 같은 조건을 확인. 통과 = 정해진 검사에서 위반이 발견되지 않음(올려도 된다)</a:t>
+            </a:r>
+          </a:p>
+          <a:p>
+            <a:r>
+              <a:t>· 담당자의 승인: 그 안의 실행을 허락한 결정. 승인 권한을 확인한 경로에서 사람 · 역할 · 선택한 안 · 시각을 기록. 에이전트가 승인자 이름을 결과에 써 넣는다고 이 기록이 생기지 않는다</a:t>
+            </a:r>
+          </a:p>
+          <a:p>
+            <a:r>
+              <a:t>· 앞 실습의 다른 AI 초안 검토는 참고 의견 — 자동 검사 통과나 사람의 승인을 대신하지 않는다. 여러 AI가 같은 답을 해도 근거와 권한은 따로 확인</a:t>
+            </a:r>
+          </a:p>
+          <a:p>
+            <a:r>
+              <a:t>· 왼쪽 아래 질문 · 작업 닫기도 사람의 개입이지만, 부족한 정보를 답하는 것과 실행을 허락하는 것은 역할이 다르다</a:t>
+            </a:r>
+          </a:p>
+          <a:p>
+            <a:r>
+              <a:t>· 승인 뒤에도 현재 조건 재검사, 명령 뒤에는 실행 결과 확인. 「실행 허락」을 조치의 성공과 같은 뜻으로 읽지 않는다</a:t>
+            </a:r>
+          </a:p>
+          <a:p>
+            <a:r>
+              <a:t>[다음] 네 장치가 걸리는 자리</a:t>
             </a:r>
           </a:p>
         </p:txBody>
@@ -3364,7 +4599,37 @@
           <a:lstStyle/>
           <a:p>
             <a:r>
-              <a:t>명세와 시나리오, 가드레일과 승인은 각각 어디에 걸릴까요? 한 그림에 이어 봤습니다. 왼쪽 위 명세에서 출발할게요. 명세에서 화살표가 두 개 나가죠. 하나는 가운데 에이전트로 가서, 에이전트가 지킬 기준이 됩니다. 다른 하나는 아래 시나리오로 가서 기대값이 되고요. 같은 명세가 만드는 쪽에는 기준이, 확인하는 쪽에는 기대값이 되는 겁니다. 출력 계약으로 예를 들어 볼게요. 원인부터 판단 번호까지 다섯 항목을 낸다는 약속은, 에이전트 쪽에서는 작업에 붙은 결과 형식이 되고, 시나리오 쪽에서는 「다섯 항목이 있고 원인과 추천이 이 식별자다」라는 Then이 됩니다. 왼쪽 아래 시나리오에서는 에이전트로 화살표가 가요. 에이전트의 행동과 그 결과를 이어 받는 업무 흐름을 확인하는 거죠. 에이전트는 가운데 추천안을 냅니다. 그 추천안에 오른쪽 위의 가드레일이 검사를 걸고, 오른쪽 아래의 담당자가 승인을 걸어요. 여기서 화살표가 닿는 곳을 보세요. 시나리오는 에이전트와 연결된 업무 흐름을 검증하고, 가드레일과 승인은 그 에이전트가 낸 결과 하나하나에 닿습니다.</a:t>
+              <a:t>[짚을 곳] 관계도 왼쪽 위 명세에서 출발 → 두 화살표(에이전트 · 시나리오) → 시나리오에서 에이전트로 → 가운데 강조한 추천안 → 오른쪽 위 가드레일 · 오른쪽 아래 담당자</a:t>
+            </a:r>
+          </a:p>
+          <a:p>
+            <a:r>
+              <a:t>· 명세 → 에이전트: 지킬 기준. 명세 → 시나리오: 기대값. 같은 명세가 만드는 쪽엔 기준, 확인하는 쪽엔 기대값</a:t>
+            </a:r>
+          </a:p>
+          <a:p>
+            <a:r>
+              <a:t>· 예(출력 계약): 원인부터 판단 번호까지 다섯 항목 약속 → 에이전트 쪽에선 작업에 붙은 결과 형식, 시나리오 쪽에선 「다섯 항목이 있고 원인과 추천이 이 식별자다」라는 Then</a:t>
+            </a:r>
+          </a:p>
+          <a:p>
+            <a:r>
+              <a:t>· 시나리오 → 에이전트: 에이전트의 행동과 그 결과를 이어 받는 업무 흐름을 확인</a:t>
+            </a:r>
+          </a:p>
+          <a:p>
+            <a:r>
+              <a:t>· 에이전트 → 추천안: 낸다. 가드레일 → 추천안: 검사, 담당자 → 추천안: 승인</a:t>
+            </a:r>
+          </a:p>
+          <a:p>
+            <a:r>
+              <a:t>· 화살표가 닿는 곳의 차이: 시나리오는 에이전트와 연결된 업무 흐름을 검증하고, 가드레일과 승인은 에이전트가 낸 결과 하나하나에 닿는다</a:t>
+            </a:r>
+          </a:p>
+          <a:p>
+            <a:r>
+              <a:t>[다음] 요구가 바뀔 때의 순서</a:t>
             </a:r>
           </a:p>
         </p:txBody>
@@ -3434,7 +4699,42 @@
           <a:lstStyle/>
           <a:p>
             <a:r>
-              <a:t>명세와 시나리오와 회귀는 변경 한 번 안에서 어떤 순서로 쓰일까요? 화면에 네 단계로 이어 놨습니다. 단계마다 아래 줄은 앞의 실습에서 다룬 긴급 조건의 예예요. 요구가 바뀌면 코드부터 고치지 않습니다. 첫 단계는 명세예요. 새 조건의 계약과 금지 조건, 수용 기준을 적습니다. 긴급 조건을 더하더라도, 「승인 없이 확정하지 않는다」는 그대로 남겨 두고요. 왜 이걸 굳이 다시 적을까요? 긴급이라는 조건은 빨리 처리하자는 쪽으로 기울기 쉽죠. 모호하게 덧붙인 기능이 기존 출력이나 승인 규칙을 흔들 수 있다는 건 명세를 배울 때 봤습니다. 지킬 것을 명세에 그대로 남겨 둬야, 나중에 전체를 다시 돌릴 때 그 약속이 아직 지켜지는지를 확인할 기준이 생깁니다. 둘째 단계에서 그 조건의 시나리오를 더합니다. 긴급 요청이 들어왔을 때의 Given, When, Then과 기대값이요. 셋째 단계에 가서야 구현해요. 스킬의 절차나 해당 기능의 코드를 명세에 맞춰 고치죠. 마지막 단계는 전체를 다시 실행하는 겁니다. 새 시나리오만이 아니라, 일반 요청, 필수 정보가 빠진 요청을 확정하지 않는 보류, 거절의 기존 시나리오까지 전부요. 순서가 왜 이렇게 중요할까요? 구현 결과만 보고 기대값을 정하면, 잘못된 행동도 정답으로 옮겨 적을 위험이 있습니다. 구현 뒤에 시험을 보완하더라도 원래 요구와 근거에서 기대를 정해야 해요. 기대값을 먼저 적어 둬야, 구현이 그걸 맞혔는지 확인할 수 있어요.</a:t>
+              <a:t>[짚을 곳] 단계 네 칸 위에서부터, 각 칸 아래 줄은 실습의 긴급 조건 예 → 강조한 넷째 단계</a:t>
+            </a:r>
+          </a:p>
+          <a:p>
+            <a:r>
+              <a:t>· 요구가 바뀌면 코드부터 고치지 않는다</a:t>
+            </a:r>
+          </a:p>
+          <a:p>
+            <a:r>
+              <a:t>· 1 명세를 고친다: 새 조건의 계약 · 금지 조건 · 수용 기준. 긴급 조건을 더해도 「승인 없이 확정 금지」는 그대로. 다시 적는 까닭: 긴급은 「빨리」로 기울기 쉽고, 모호하게 덧붙인 기능이 기존 출력 · 승인 규칙을 흔들 수 있다 → 지킬 것을 남겨 둬야 전체 재실행 때 확인할 기준이 생긴다</a:t>
+            </a:r>
+          </a:p>
+          <a:p>
+            <a:r>
+              <a:t>· 2 시나리오를 더한다: 긴급 요청의 Given · When · Then과 기대값</a:t>
+            </a:r>
+          </a:p>
+          <a:p>
+            <a:r>
+              <a:t>· 3 구현한다: 스킬의 절차나 해당 기능의 코드를 명세에 맞춰</a:t>
+            </a:r>
+          </a:p>
+          <a:p>
+            <a:r>
+              <a:t>· 4 전체를 다시 실행: 새 시나리오만이 아니라 일반 요청, 필수 정보 누락 시 확정하지 않는 보류, 거절의 기존 시나리오까지</a:t>
+            </a:r>
+          </a:p>
+          <a:p>
+            <a:r>
+              <a:t>· 순서가 중요한 까닭: 구현 결과를 보고 기대값을 정하면 잘못된 행동도 정답으로 옮겨 적는다. 구현 뒤 시험을 보완하더라도 원래 요구와 근거에서 기대를 정한다</a:t>
+            </a:r>
+          </a:p>
+          <a:p>
+            <a:r>
+              <a:t>[다음] 실행 때마다와 바꿀 때마다</a:t>
             </a:r>
           </a:p>
         </p:txBody>
@@ -3504,7 +4804,37 @@
           <a:lstStyle/>
           <a:p>
             <a:r>
-              <a:t>지금까지 본 장치들은 작동하는 때가 둘로 나뉩니다. 실행할 때마다 작동하는 것, 그리고 바꿀 때마다 하는 것이에요. 화면 왼쪽이 실행할 때마다 작동하는 장치입니다. 출력 계약의 검사, 가드레일, 사람의 승인이죠. 에이전트가 추천안을 낼 때마다 그 한 건을 검사하고 걸러요. 정해 둔 조건을 어긴 결과를 막는 역할입니다. 가능한 모든 잘못을 잡는 것은 아니에요. 오른쪽은 바꿀 때마다 하는 검증이에요. 시나리오의 실행, 판단 채점, 전체 회귀. 스킬과 명세, 코드뿐 아니라 모델이나 지식, 중요한 설정을 바꿨을 때도 관련 검증을 돌립니다. 찾는 건 변경 때문에 달라진 행동이고요. 오른쪽 둘째 줄의 판단 채점은 이때 바꾸기 전과 후의 실행을 나란히 놓고 볼 수 있어요. 항목마다 점수가 어떻게 달라졌는지, 그리고 그 사이에 지식 그래프에서 끊기거나 새로 생긴 관계가 무엇인지까지 보여 줍니다. 그래서 점수가 떨어졌을 때, 원인 후보가 될 변경을 좁힐 수 있습니다. 동시에 조회 자료도 달라졌다면 지식 변경 때문이라고 단정할 수 없으므로, 비교 조건을 맞춰 다시 확인해야 해요. 여기서 기억해 둘 게 있어요. 한쪽이 있다고 다른 쪽을 빼면 안 됩니다. 승인 단계가 있으니까 회귀 시험은 필요 없다고 해 볼까요? 그러면 변경 때문에 추천의 질이 떨어져도, 그걸 사람이 매번 떠안게 돼요. 반대로 회귀 시험을 다 통과했으니 승인은 필요 없다고 하면요? 시험이 다루지 않은 상황에서, 잘못된 한 건이 그대로 실행됩니다.</a:t>
+              <a:t>[짚을 곳] 왼쪽 실행할 때마다(실행 중의 방어) → 오른쪽 강조한 바꿀 때마다(변경 영향 확인)</a:t>
+            </a:r>
+          </a:p>
+          <a:p>
+            <a:r>
+              <a:t>· 장치가 작동하는 때가 둘</a:t>
+            </a:r>
+          </a:p>
+          <a:p>
+            <a:r>
+              <a:t>· 실행할 때마다: 출력 계약 검사 · 가드레일 · 사람의 승인. 추천안을 낼 때마다 그 한 건을 검사하고 걸러 정해 둔 조건을 어긴 결과를 막는다. 모든 잘못을 잡는 건 아님</a:t>
+            </a:r>
+          </a:p>
+          <a:p>
+            <a:r>
+              <a:t>· 바꿀 때마다: 시나리오 실행 · 판단 채점 · 전체 회귀. 스킬 · 명세 · 코드뿐 아니라 모델 · 지식 · 중요한 설정을 바꿨을 때도. 찾는 것은 변경으로 달라진 행동</a:t>
+            </a:r>
+          </a:p>
+          <a:p>
+            <a:r>
+              <a:t>· 판단 채점은 바꾸기 전후 실행을 나란히: 항목별 점수 변화와 그 사이 지식 그래프에서 끊기거나 새로 생긴 관계까지 → 점수가 떨어지면 원인 후보 변경을 좁힌다. 조회 자료도 함께 달라졌다면 지식 변경 탓으로 단정 말고 비교 조건을 맞춰 재확인</a:t>
+            </a:r>
+          </a:p>
+          <a:p>
+            <a:r>
+              <a:t>· 한쪽이 있다고 다른 쪽을 빼지 않는다: 승인이 있으니 회귀 불필요 → 변경으로 떨어진 추천의 질을 사람이 매번 떠안음. 회귀를 다 통과했으니 승인 불필요 → 시험이 안 다룬 상황에서 잘못된 한 건이 그대로 실행</a:t>
+            </a:r>
+          </a:p>
+          <a:p>
+            <a:r>
+              <a:t>[다음] 세 에이전트의 산출물</a:t>
             </a:r>
           </a:p>
         </p:txBody>
@@ -3574,7 +4904,47 @@
           <a:lstStyle/>
           <a:p>
             <a:r>
-              <a:t>앞에서 승인과 거절의 시험을 세 흐름에 적용한다고 했죠. 그 세 흐름을 맡은 에이전트가 화면의 세 줄입니다. 같은 방식으로 만든 에이전트라도, 맡은 일이 다르면 내는 산출물이 달라져요. 먼저 가운데 하늘색 구획을 보세요. 셋에 공통인 틀이에요. 목표가 있고, 스킬과 도구가 있고, 출력 계약이 있죠. 틀은 같습니다. 다른 건 그 틀에 넣은 거예요. 맨 위 줄은 쿨러 성능 저하 경보를 맡은 냉각 긴급 대응입니다. 오른쪽 끝을 보면, 팬 최대 운전과 대안 셋을 담은 추천안을 내죠. 가운데 줄은 정기 정비 도래를 맡은 정기 정비 계획이에요. 언제 정비할지를 정한 정비 시간을 냅니다. 맨 아래 줄은 예비품 재고가 기준을 벗어났을 때의 예비품 구매고요. 공급사와 수량과 금액을 담은 발주안을 냅니다. 넣은 게 다르다는 건 스킬만 얘기하는 게 아니에요. 붙은 도구도 다릅니다. 냉각 긴급 대응은 원인을 진단하고 조치 후보를 평가하는 판단 도구를 써요. 정기 정비 계획은 정비 기한과 허용 한계까지 남은 시간, 예정된 야간이나 주말 정비 시간을 읽는 도구를 쓰고요. 예비품 구매는 재고와 공급사 견적을 읽는 도구를 씁니다. 업무가 다르니 읽을 값과 지킬 규칙이 다르고, 그래서 산출물의 항목도 달라지는 겁니다. 그러니까 산출물이 달라지는 건 틀이 달라서가 아니라, 그 자리에 넣은 게 달라서예요. 이 과정에서 직접 만든 활용들도 같은 눈으로 견줘 보겠습니다.</a:t>
+              <a:t>[짚을 곳] 그림 가운데 하늘색 구획 같은 틀(목표 · 스킬과 도구 · 출력 계약) → 왼쪽 세 사건 → 가운데 세 에이전트 → 오른쪽 강조한 세 산출물</a:t>
+            </a:r>
+          </a:p>
+          <a:p>
+            <a:r>
+              <a:t>· 앞에서 승인 · 거절 시험을 적용한다던 세 흐름을 맡은 에이전트</a:t>
+            </a:r>
+          </a:p>
+          <a:p>
+            <a:r>
+              <a:t>· 틀은 같다: 목표, 스킬과 도구, 출력 계약</a:t>
+            </a:r>
+          </a:p>
+          <a:p>
+            <a:r>
+              <a:t>· 쿨러 성능 저하 경보 → 냉각 긴급 대응(cooling-emergency-response) → 추천안(팬 최대 운전과 대안 셋)</a:t>
+            </a:r>
+          </a:p>
+          <a:p>
+            <a:r>
+              <a:t>· 정기 정비 도래 → 정기 정비 계획(pm-schedule-planning) → 정비 시간(언제 정비할지)</a:t>
+            </a:r>
+          </a:p>
+          <a:p>
+            <a:r>
+              <a:t>· 예비품 재고 기준 이탈 → 예비품 구매(spare-purchase-planning) → 발주안(공급사 · 수량 · 금액)</a:t>
+            </a:r>
+          </a:p>
+          <a:p>
+            <a:r>
+              <a:t>· 다른 건 스킬만이 아니라 도구도: 냉각은 원인 진단 · 조치 후보 평가 판단 도구, 정비는 정비 기한 · 허용 한계까지 남은 시간 · 예정된 야간 · 주말 정비 시간을 읽는 도구, 구매는 재고와 공급사 견적을 읽는 도구 → 읽을 값과 지킬 규칙이 달라 산출물 항목도 달라진다</a:t>
+            </a:r>
+          </a:p>
+          <a:p>
+            <a:r>
+              <a:t>· 산출물이 다른 건 틀이 달라서가 아니라 그 자리에 넣은 게 달라서. 직접 만든 활용들도 같은 눈으로</a:t>
+            </a:r>
+          </a:p>
+          <a:p>
+            <a:r>
+              <a:t>[다음] 일곱 활용의 비교</a:t>
             </a:r>
           </a:p>
         </p:txBody>
@@ -3644,7 +5014,32 @@
           <a:lstStyle/>
           <a:p>
             <a:r>
-              <a:t>화면의 그림부터 볼게요. 왼쪽 문서가 명세입니다. 요구사항하고 같이 입력 계약, 출력 계약, 금지 조건, 수용 기준이 한 칸씩 적혀 있죠. 무엇을 받고, 무엇을 내고, 무엇을 하면 안 되고, 언제 다 됐다고 볼지, 이걸 정해 둔 문서예요. 가운데 에이전트가 실제로 실행되면 오른쪽에 결과가 나옵니다. 쿨러 사건이라면 추천안이죠. 그런데 여기서 걸리는 게 하나 있어요. 명세는 문서고, 추천안은 실행해 봐야 나온다는 겁니다. 그러니까 명세를 아무리 잘 적어도, 에이전트가 그대로 움직였는지는 결과를 보기 전엔 알 수 없어요. 명세가 「무엇을 지킬 것인가」에 답했다면, 남은 물음은 「정말 지켰는가」입니다. 그 답이 나오는 곳이 아래쪽 파란 선이에요. 돋보기가 가리키는 자리, 명세와 실제 결과를 대어 보는 자리죠. 이번 회차에 배울 시나리오와 시험은 모두 이 자리에서 쓰입니다.</a:t>
+              <a:t>[짚을 곳] 왼쪽 명세 문서의 네 칸(입력 계약 · 출력 계약 · 금지 조건 · 수용 기준) → 가운데 에이전트의 실행 → 오른쪽 실제 결과(추천안) → 아래 파란 선 · 돋보기(명세와 실제 결과의 대조)</a:t>
+            </a:r>
+          </a:p>
+          <a:p>
+            <a:r>
+              <a:t>· 명세 = 무엇을 받고 · 내고 · 하면 안 되고 · 언제 다 됐다고 볼지 정한 문서</a:t>
+            </a:r>
+          </a:p>
+          <a:p>
+            <a:r>
+              <a:t>· 실행하면 쿨러 사건에선 추천안이 나온다. 걸리는 점: 명세는 문서, 추천안은 실행해 봐야 나온다 → 아무리 잘 적어도 그대로 움직였는지는 결과를 보기 전엔 모른다</a:t>
+            </a:r>
+          </a:p>
+          <a:p>
+            <a:r>
+              <a:t>· 명세가 「무엇을 지킬 것인가」에 답했다면 남은 물음은 「정말 지켰는가」</a:t>
+            </a:r>
+          </a:p>
+          <a:p>
+            <a:r>
+              <a:t>· 그 답이 나오는 곳이 아래 대조 자리. 이번 회차의 시나리오와 시험은 모두 이 자리에서 쓰인다</a:t>
+            </a:r>
+          </a:p>
+          <a:p>
+            <a:r>
+              <a:t>[다음] 손으로 한 번 확인하는 방식의 한계</a:t>
             </a:r>
           </a:p>
         </p:txBody>
@@ -3714,7 +5109,42 @@
           <a:lstStyle/>
           <a:p>
             <a:r>
-              <a:t>앞 장의 세 에이전트는 HYD 안의 업무였죠. 이번에는 이 과정에서 직접 만들어 본 활용 일곱 가지를 표 한 장에 모았습니다. 왼쪽 칸이 활용이고, 가운데 칸의 윗줄이 목표, 아랫줄이 입력과 도구예요. 오른쪽 칸은 결과가 맞았는지를 무엇으로 가렸는지입니다. 첫 줄 원인 점검은 설비 그래프와 센서 입력을 읽어서 원인 후보와 다음 점검 순서를 냈죠. 값이 오래됐거나 표본이 모자라면 확인이 필요하다고 따로 표시했습니다. 둘째 줄 품질 접수는 불량 접수 메시지와 분류 기준으로 품질 대응 카드를 만들었고, 원인이나 담당자를 지어내지 않았는지 봤어요. 셋째 줄 분석 시각화는 센서 시계열로 도표를 그렸습니다. 시간과 단위, 빠진 값을 제대로 다뤘는지, 함께 움직였다는 것만으로 원인을 단정하지 않았는지가 판정 기준이었죠. 넷째 줄 회의 스킬은 회의록에서 후속 작업 목록을 뽑는 지침이었습니다. 담당자나 기한이 없으면 미정으로 두고, 항목마다 원문과 대조했고요. 다섯째 줄 자기 자료 퀴즈는 자기 Notion 노트를 읽어 문제를 내고 채점했어요. 답하기 전에는 정답을 숨기고, 근거가 모자라면 채점을 보류했습니다. 여섯째 줄 협업 검토는 점검 초안을 작성 역할과 검토 역할이 나눠 맡았고, 두 AI가 동의한 것을 승인으로 읽지 않았죠. 마지막 줄 자료 통합은 이벤트와 정비, 부품 자료를 엮어 교대 인수인계를 만들었습니다. 자료가 없는 것과 조회에 실패한 것을 가르고, 원자료를 다시 찾을 수 있는지 확인했어요. 오른쪽 칸을 위에서 아래로 이어 읽어 보세요. 판정 기준은 줄마다 다르지만 공통점이 하나 있습니다. 모르는 건 확정하지 않고, 아는 것에는 출처를 붙인다는 거예요. 산출물을 받는 쪽은 사람이든 시스템이든 적힌 대로 믿고 다음 일을 시작하거든요. 확정하지 않은 걸 확정처럼 적으면 그 잘못이 다음 일로 그대로 넘어갑니다. 반대로 확인하지 못했다고 적혀 있으면, 받는 쪽이 거기서 멈추고 확인할 수 있죠.</a:t>
+              <a:t>[짚을 곳] 표 머리(활용 · 목표 · 입력과 도구 · 결과 판정) → 일곱 줄 위에서부터, 강조한 자료 통합 → 마지막에 오른쪽 판정 칸을 위에서 아래로</a:t>
+            </a:r>
+          </a:p>
+          <a:p>
+            <a:r>
+              <a:t>· 앞 장의 세 에이전트는 HYD 안의 업무, 이번엔 과정에서 직접 만든 활용 일곱</a:t>
+            </a:r>
+          </a:p>
+          <a:p>
+            <a:r>
+              <a:t>· 원인 점검: 설비 그래프 · 센서 입력 → 원인 후보와 다음 점검 순서. 값이 오래됐거나 표본이 모자라면 「확인 필요」로 구분</a:t>
+            </a:r>
+          </a:p>
+          <a:p>
+            <a:r>
+              <a:t>· 품질 접수: 불량 접수 메시지 · 분류 기준 → 품질 대응 카드. 원인 · 담당자를 지어내지 않았나. 분석 시각화: 센서 시계열 → 도표 · 이상 구간 요약. 시간 · 단위 · 결측 처리, 함께 움직였다는 것만으로 원인 단정 안 함</a:t>
+            </a:r>
+          </a:p>
+          <a:p>
+            <a:r>
+              <a:t>· 회의 스킬: 회의록 · SKILL.md → 후속 작업 목록. 담당 · 기한이 없으면 미정, 항목마다 원문과 대조. 자기 자료 퀴즈: 자기 Notion 노트를 MCP로 읽어 출제 · 채점 · 재도전. 답하기 전 정답 숨김, 근거가 모자라면 채점 보류</a:t>
+            </a:r>
+          </a:p>
+          <a:p>
+            <a:r>
+              <a:t>· 협업 검토: 작성 · 검토 두 역할로 점검 초안 검토 · 수정, 두 AI의 동의를 승인으로 읽지 않음. 자료 통합: 이벤트 · 정비 · 부품 자료로 교대 인수인계, 자료 없음과 조회 실패 구분, 원자료를 다시 찾음</a:t>
+            </a:r>
+          </a:p>
+          <a:p>
+            <a:r>
+              <a:t>· 판정 기준은 줄마다 다르지만 공통점: 모르는 건 확정하지 않고 아는 것엔 출처를 붙인다. 받는 쪽(사람이든 시스템이든)은 적힌 대로 믿고 다음 일을 시작 → 미확정을 확정처럼 적으면 잘못이 그대로 넘어가고, 「확인 못 함」이 적혀 있으면 거기서 멈추고 확인할 수 있다</a:t>
+            </a:r>
+          </a:p>
+          <a:p>
+            <a:r>
+              <a:t>[다음] 옮겨 쓴 것과 새로 만든 것</a:t>
             </a:r>
           </a:p>
         </p:txBody>
@@ -3784,7 +5214,32 @@
           <a:lstStyle/>
           <a:p>
             <a:r>
-              <a:t>이 일곱 활용을 매번 처음부터 만든 건 아닙니다. 화면 왼쪽이 옮겨 쓴 것, 오른쪽이 새로 구현한 것이에요. 왼쪽부터 볼게요. 요청을 해석하고, 도구를 부르고, 결과를 보고, 끝낼지 정하는 실행 고리는 처음 원인 점검에서 만든 그대로입니다. 품질 접수는 그 구조에 입력과 판정 기준을 바꿔 얹었죠. 질문과 재처리, 작성과 검토, 긴급 표시의 명세, 행동 검증은 모두 같은 점검 요청 프로젝트를 이어 가며 한 기능씩 더했고요. 인수인계를 만들 때도 앞에서 만든 조회 도구와 출력 계약, 검증 방식을 다시 썼습니다. 오른쪽은 그 업무에 없던 능력이라 새로 구현한 것들이에요. 도표를 그리려면 시간 축과 단위, 빠진 값을 다루는 기능이 따로 필요했습니다. 회의 후속 업무에는 다른 회의에도 같은 기준으로 쓸 작업 지침이 필요했고요. 점검 자료를 읽는 조회 도구는 직접 만들어 MCP로 내놓았고, 자기 노트를 읽으려면 그 자료에 닿는 연결이 필요했죠. 질문하고 같은 요청으로 돌아오는 상태, 작성과 검토의 역할 분리, 퀴즈의 채점 상태도 새로 만든 능력입니다. 이렇게 가르는 데는 까닭이 있어요. 새 업무가 왔을 때 무엇을 옮겨 쓸 수 있고 무엇을 새로 만들어야 하는지 알아야, 이름과 자료만 바꾼 반복으로 끝나지 않으니까요. 옮겨 쓴 부분도 그대로 믿지 않고, 새 입력과 판정 기준으로 다시 확인했다는 점도 기억해 두세요.</a:t>
+              <a:t>[짚을 곳] 왼쪽 옮겨 쓴 실행 구조(재사용) → 오른쪽 강조한 새로 구현한 능력(새 구현)</a:t>
+            </a:r>
+          </a:p>
+          <a:p>
+            <a:r>
+              <a:t>· 일곱 활용을 매번 처음부터 만든 게 아니다</a:t>
+            </a:r>
+          </a:p>
+          <a:p>
+            <a:r>
+              <a:t>· 옮겨 쓴 것: 요청 해석 · 도구 호출 · 결과 관찰 · 종료 판단의 실행 고리는 처음 원인 점검에서 만든 그대로. 품질 접수는 그 구조에 입력과 판정 기준만 바꿔 얹음. 질문과 재처리 · 작성과 검토 · 긴급 표시의 명세 · 행동 검증은 같은 점검 요청 프로젝트에 한 기능씩 더함. 인수인계도 앞의 조회 도구 · 출력 계약 · 검증 방식을 다시 씀</a:t>
+            </a:r>
+          </a:p>
+          <a:p>
+            <a:r>
+              <a:t>· 새로 구현한 것: 시간 축 · 단위 · 결측을 다루는 도표 생성, 다른 회의에도 같은 기준으로 쓰는 작업 지침(SKILL.md), 직접 만든 조회 도구를 MCP로 내놓기와 자기 노트 연결, 질문하고 같은 요청으로 돌아오는 상태, 작성 · 검토 역할 분리, 퀴즈의 채점 상태</a:t>
+            </a:r>
+          </a:p>
+          <a:p>
+            <a:r>
+              <a:t>· 가르는 까닭: 새 업무가 왔을 때 무엇을 옮기고 무엇을 새로 만들지 알아야 이름과 자료만 바꾼 반복으로 끝나지 않는다. 옮겨 쓴 부분도 그대로 믿지 않고 새 입력과 판정 기준으로 다시 확인했다</a:t>
+            </a:r>
+          </a:p>
+          <a:p>
+            <a:r>
+              <a:t>[다음] 새 업무를 맡기기 전에 정할 넷</a:t>
             </a:r>
           </a:p>
         </p:txBody>
@@ -3854,7 +5309,37 @@
           <a:lstStyle/>
           <a:p>
             <a:r>
-              <a:t>그러면 새 업무를 에이전트에 맡기려 할 때는 무엇부터 정해야 할까요? 화면의 네 카드입니다. 첫 카드는 자료예요. 무엇을 근거로 읽을지, 그 자료가 어디서 왔고 언제 관측된 것인지 정합니다. 원인 점검의 센서 입력처럼 시각이 중요한 자료도 있고, 회의록처럼 원문의 위치가 중요한 자료도 있죠. 둘째 카드는 도구입니다. 어느 시스템을 어떤 권한으로 부를지 정하고, 조회에 실패한 것과 자료가 없는 것을 어떻게 가를지도 정해 둡니다. 인수인계에서 한 출처를 읽지 못했을 때 없다고 적지 않았던 것처럼요. 셋째 카드는 완료 조건이에요. 무엇을 내면 끝인지를 출력 계약과 수용 기준, 시나리오로 적어 둡니다. 품질 대응 카드라면 품질 유형과 확인 항목, 담당 부서, 대응 초안이 갖춰져야 끝이죠. 넷째 카드가 사람 확인입니다. 누가 어디서 결정하는지 정해요. 조치는 승인 역할의 담당자가 승인하고, 빠진 정보는 사람이 답하고, 검토를 거친 초안도 마지막 확인은 사람이 합니다. AI끼리 동의한 것으로 이 자리를 대신하지 않고요. 네 가지가 정해지지 않으면 에이전트가 아무리 그럴듯하게 답해도 맡길 수 있는 범위를 말할 수 없습니다. 활용할 수 있는 곳이 넓다고 모든 일이 저절로 성공하는 건 아니에요. 정한 자료와 도구, 완료 조건과 사람 확인 안에서 맡기고, 그 범위를 검증으로 넓혀 가는 겁니다.</a:t>
+              <a:t>[짚을 곳] 카드 네 장: 자료(입력) → 도구(연결) → 완료 조건(판정) → 강조한 사람 확인(책임)</a:t>
+            </a:r>
+          </a:p>
+          <a:p>
+            <a:r>
+              <a:t>· 자료: 무엇을 근거로 읽나, 출처와 관측 시각. 센서 입력처럼 시각이 중요한 자료도, 회의록처럼 원문 위치가 중요한 자료도 있다</a:t>
+            </a:r>
+          </a:p>
+          <a:p>
+            <a:r>
+              <a:t>· 도구: 어느 시스템을 어떤 권한으로 부르나, 조회 실패와 자료 없음을 어떻게 가르나(인수인계에서 못 읽은 출처를 「없음」으로 적지 않은 것처럼)</a:t>
+            </a:r>
+          </a:p>
+          <a:p>
+            <a:r>
+              <a:t>· 완료 조건: 무엇을 내면 끝인가를 출력 계약 · 수용 기준 · 시나리오로. 예: 품질 대응 카드라면 품질 유형 · 확인 항목 · 담당 부서 · 대응 초안이 갖춰져야 끝</a:t>
+            </a:r>
+          </a:p>
+          <a:p>
+            <a:r>
+              <a:t>· 사람 확인: 누가 어디서 결정하나. 조치는 승인 역할 담당자가 승인, 빠진 정보는 사람이 답, 검토를 거친 초안도 마지막 확인은 사람. AI끼리의 동의로 이 자리를 대신하지 않는다</a:t>
+            </a:r>
+          </a:p>
+          <a:p>
+            <a:r>
+              <a:t>· 넷이 정해지지 않으면 아무리 그럴듯하게 답해도 맡길 범위를 말할 수 없다. 정한 범위 안에서 맡기고, 그 범위를 검증으로 넓혀 간다</a:t>
+            </a:r>
+          </a:p>
+          <a:p>
+            <a:r>
+              <a:t>[다음] 산출물의 형식</a:t>
             </a:r>
           </a:p>
         </p:txBody>
@@ -3924,7 +5409,37 @@
           <a:lstStyle/>
           <a:p>
             <a:r>
-              <a:t>완료 조건에는 산출물의 형식도 들어갑니다. 산출물의 형식은 누가 읽고 그 뒤에 어떤 일을 하는지에 맞춰 정합니다. 인수인계서는 다음 담당자가 읽고, 추천안은 승인 화면을 만드는 시스템과 승인할 사람이 함께 읽습니다. 사람에게는 맥락과 근거, 미확인 부분이 잘 보이는 문서와 도표가 도움이 됩니다. 시스템과 주고받을 때는 항목의 이름과 형식, 값의 뜻을 약속해야 해요. HYD는 그 전달에 JSON을 사용하지만, 모든 시스템이 같은 형식을 쓰는 것은 아닙니다. 값에도 조건이 있습니다. 예를 들어 안을 구별하는 번호가 중복되면 사람이 고른 안과 시스템이 처리할 안을 명확히 연결할 수 없죠. HYD의 출력 계약은 안마다 다른 구분 값을 요구합니다. 사람만 읽는 문서라도 이런 모호함을 그대로 넘겨서는 안 됩니다. 추천안은 승인과 실행 검토로, 품질 대응 카드는 조사로, 인수인계서는 다음 교대 작업으로 이어집니다. 그래서 형식 검사에 더해 내용과 근거도 확인해야 합니다. 읽는 쪽이 필요한 결정을 정확히 이어 갈 수 있게 만드는 것이 출력 계약의 목적입니다.</a:t>
+              <a:t>[짚을 곳] 카드 세 장: 읽는 쪽(사람과 시스템) → 강조한 형식(문서와 구조) → 이어지는 일(다음 행동)</a:t>
+            </a:r>
+          </a:p>
+          <a:p>
+            <a:r>
+              <a:t>· 완료 조건에는 산출물의 형식도 들어간다. 형식은 누가 읽고 그 뒤 어떤 일을 하는지에 맞춰 정한다</a:t>
+            </a:r>
+          </a:p>
+          <a:p>
+            <a:r>
+              <a:t>· 읽는 쪽: 인수인계서는 다음 교대 담당자, 추천안은 승인 화면을 만드는 시스템과 승인할 사람이 함께</a:t>
+            </a:r>
+          </a:p>
+          <a:p>
+            <a:r>
+              <a:t>· 형식: 사람에겐 맥락 · 근거 · 미확인 부분이 잘 보이는 문서와 도표. 시스템과는 항목의 이름 · 형식 · 값의 뜻을 약속. HYD는 JSON으로 전달하지만 모든 시스템이 같은 형식은 아님</a:t>
+            </a:r>
+          </a:p>
+          <a:p>
+            <a:r>
+              <a:t>· 값에도 조건: 안을 구별하는 번호가 중복되면 사람이 고른 안과 시스템이 처리할 안을 연결 못 한다 → HYD 출력 계약은 안마다 다른 구분 값을 요구. 사람만 읽는 문서라도 이런 모호함을 넘기지 않는다</a:t>
+            </a:r>
+          </a:p>
+          <a:p>
+            <a:r>
+              <a:t>· 이어지는 일: 추천안 → 승인과 실행 검토, 품질 대응 카드 → 조사, 인수인계서 → 다음 교대 작업. 그래서 형식 검사에 더해 내용과 근거도 확인. 출력 계약의 목적은 읽는 쪽이 필요한 결정을 정확히 이어 가게 하는 것</a:t>
+            </a:r>
+          </a:p>
+          <a:p>
+            <a:r>
+              <a:t>[다음] 검증 실습의 산출물이 쓰이는 곳</a:t>
             </a:r>
           </a:p>
         </p:txBody>
@@ -3994,7 +5509,42 @@
           <a:lstStyle/>
           <a:p>
             <a:r>
-              <a:t>실습의 산출물은 그 실습에서 끝나지 않고 다음 일로 이어집니다. 화면 왼쪽 회색 구획이 사람의 결정과 명세를 다룬 실습의 산출물이고, 가운데 하늘색 구획이 시나리오와 회귀를 다룬 실습, 그러니까 이번 회차에 해 본 실습의 산출물이에요. 왼쪽 맨 위의 확인 질문과 전후 기록은 필수 정보가 빠진 경우의 시나리오가 됐습니다. 그 아래 spec.md와 기대 결과는 시나리오의 재료가 됐고요. 명세 실습에서 저장해 둔 입력과 기대값이 바로 시나리오의 Given과 Then이 된 거예요. 가운데 시나리오는 실행돼서 회귀 기록으로 남습니다. 그리고 오른쪽 화살표처럼, 그 기록이 다음에 요구가 바뀔 때 다시 실행할 기준이 되죠. 왼쪽 맨 아래의 초안, 검토 의견, 수정본은 에이전트끼리의 검토와 사람의 승인을 서로 다른 항목에 남기는 연습이었어요. AI의 검토 의견을 자동 검사나 사람의 승인 기록과 혼동하지 않게 구별한 겁니다. 가운데 아래 인수인계서는 근거 시각과 함께 다음 교대의 담당자에게 넘어가고요. 값마다 어디서 언제 읽었는지를 붙이는 건, 근거가 놓인 자리에서 본 현재값의 원칙 그대로입니다.</a:t>
+              <a:t>[짚을 곳] 그림 왼쪽 회색 구획(HITL · SDD 실습: 확인 질문과 전후 기록 → 강조한 spec.md와 기대 결과 → 초안 · 검토 의견 · 수정본) → 가운데 하늘색 구획(BDD · 회귀 실습: 시나리오 → 회귀 기록, 인수인계서) → 오른쪽 강조한 다음 변경의 기준 · 다음 교대의 담당자</a:t>
+            </a:r>
+          </a:p>
+          <a:p>
+            <a:r>
+              <a:t>· 실습 산출물은 그 실습에서 끝나지 않고 다음 일로 이어진다</a:t>
+            </a:r>
+          </a:p>
+          <a:p>
+            <a:r>
+              <a:t>· 확인 질문과 전후 기록 → 필수 정보가 빠진 경우의 시나리오</a:t>
+            </a:r>
+          </a:p>
+          <a:p>
+            <a:r>
+              <a:t>· spec.md와 기대 결과 → 시나리오의 재료. 명세 실습에서 저장한 입력과 기대값이 그대로 시나리오의 Given과 Then</a:t>
+            </a:r>
+          </a:p>
+          <a:p>
+            <a:r>
+              <a:t>· 시나리오는 실행돼 회귀 기록으로 남고, 그 기록이 다음에 요구가 바뀔 때 다시 실행할 기준</a:t>
+            </a:r>
+          </a:p>
+          <a:p>
+            <a:r>
+              <a:t>· 초안 · 검토 의견 · 수정본: 에이전트끼리의 검토와 사람의 승인을 다른 항목에 남기는 연습 — AI 검토 의견을 자동 검사나 승인 기록과 혼동하지 않게</a:t>
+            </a:r>
+          </a:p>
+          <a:p>
+            <a:r>
+              <a:t>· 인수인계서는 근거 시각과 함께 다음 교대 담당자에게. 값마다 어디서 언제 읽었는지 붙이는 건 근거가 놓인 자리에서 본 현재값의 원칙 그대로</a:t>
+            </a:r>
+          </a:p>
+          <a:p>
+            <a:r>
+              <a:t>[다음] 운영 중 결과가 기대와 다를 때</a:t>
             </a:r>
           </a:p>
         </p:txBody>
@@ -4064,7 +5614,42 @@
           <a:lstStyle/>
           <a:p>
             <a:r>
-              <a:t>이번엔 에이전트를 운영하다가 결과가 기대와 다를 때를 생각해 볼게요. 증상이 가리키는 장치부터 살펴보면, 고치지 않아도 될 곳을 건드리지 않습니다. 표의 왼쪽 칸이 증상, 가운데가 먼저 살펴볼 곳이에요. 첫 줄, 값이 실제와 다르면 도구와 실행 기록을 봅니다. 호출 기록에서 무엇을 물었고 무엇을 받았는지, 값이 얼마나 묵었는지를 확인해요. 호출 기록부터 보는 데는 까닭이 있습니다. 도구를 부를 때마다 입력과 응답, 시각과 걸린 시간이 한 줄씩 남거든요. 그래서 값이 이상할 때, 도구가 애초에 그 값을 돌려줬는지, 아니면 받은 값과 다르게 옮겨 적었는지가 여기서 갈립니다. 어느 쪽이냐에 따라 고칠 곳이 달라지니까, 짐작으로 고치기 전에 기록부터 보는 거죠. 둘째 줄, 필요한 값을 받지 못했다면 도구를 호출했는지부터 보고, 서버 연결과 권한, 오류 응답을 차례로 살펴봅니다. 셋째 줄, 묻지 않고 확정했다면 금지 조건과 사람의 개입 지점, 그러니까 명세와 HITL 쪽이에요. 마지막 줄, 고친 뒤에 기존 요청의 결과가 달라졌다면 회귀 시험에서 실패한 시나리오를 봅니다. 검증 단원에서 본 「실패한 시험에서 고칠 곳」 표는 시험이 실패한 데서 출발했죠. 이 표는 운영 중에 본 결과에서 출발합니다. 출발점은 달라도 생각하는 방식은 같아요. 증상을 출발점으로 기록을 대조하고, 확인한 원인에 맞춰 고치는 겁니다.</a:t>
+              <a:t>[짚을 곳] 표 머리(증상 · 먼저 살펴볼 곳 · 그 장치) → 네 줄, 강조한 마지막 줄</a:t>
+            </a:r>
+          </a:p>
+          <a:p>
+            <a:r>
+              <a:t>· 증상이 가리키는 장치부터 보면 고치지 않아도 될 곳을 건드리지 않는다</a:t>
+            </a:r>
+          </a:p>
+          <a:p>
+            <a:r>
+              <a:t>· 값이 실제와 다르다 → 도구와 실행 기록: 호출 기록의 입력 · 응답, 값의 신선도. 호출마다 입력 · 응답 · 시각 · 걸린 시간이 한 줄씩 남으므로, 도구가 애초에 그 값을 돌려줬는지 · 받은 값과 다르게 옮겨 적었는지가 여기서 갈린다 → 짐작으로 고치기 전에 기록부터</a:t>
+            </a:r>
+          </a:p>
+          <a:p>
+            <a:r>
+              <a:t>· 필요한 값을 못 받았다 → MCP: 호출했는지부터, 서버 연결과 허용 목록 · 권한, 오류 응답 순서로</a:t>
+            </a:r>
+          </a:p>
+          <a:p>
+            <a:r>
+              <a:t>· 묻지 않고 확정했다 → 명세와 HITL: 금지 조건과 사람의 개입 지점</a:t>
+            </a:r>
+          </a:p>
+          <a:p>
+            <a:r>
+              <a:t>· 고친 뒤 기존 요청의 결과가 달라졌다 → 시나리오와 회귀 시험: 실패한 시나리오</a:t>
+            </a:r>
+          </a:p>
+          <a:p>
+            <a:r>
+              <a:t>· 앞의 「실패한 시험에서 고칠 곳」 표는 시험 실패에서, 이 표는 운영 중 결과에서 출발. 생각하는 방식은 같다: 증상에서 출발해 기록을 대조하고 확인한 원인에 맞춰 고친다</a:t>
+            </a:r>
+          </a:p>
+          <a:p>
+            <a:r>
+              <a:t>[다음] 사람이 정하는 기준과 에이전트가 정하는 과정</a:t>
             </a:r>
           </a:p>
         </p:txBody>
@@ -4134,7 +5719,37 @@
           <a:lstStyle/>
           <a:p>
             <a:r>
-              <a:t>마지막으로 사람이 정하는 기준과 에이전트가 실행 중 선택하는 과정을 나누어 보겠습니다. 왼쪽은 목표와 지침, 도구 권한, 계약과 금지 조건, 시나리오의 기대값입니다. 업무를 맡기기 전에 합의하고 관리할 기준이에요. 오른쪽은 그 기준 안에서 어떤 도구를 어떤 입력으로 부를지, 받은 결과에 따라 무엇을 더 확인할지, 어떻게 설명할지입니다. 서로 독립적인 조회의 순서나 설명의 문장은 달라질 수 있습니다. 하지만 필요한 확인을 건너뛰거나 권한을 넘어서는 선택까지 허용되는 것은 아니죠. 왼쪽 기준도 영원히 바뀌지 않는 것은 아닙니다. 요구가 바뀌면 근거를 검토하고 명세와 검사를 함께 바꾸며, 어느 버전에 어떤 기준을 적용했는지 남깁니다. 실행 결과에 맞춰 아무 설명 없이 기준을 바꾸는 일과는 다릅니다. 앞의 쿨러 기록에서 재조회를 하겠다는 말과 실제로 확인된 호출을 구별한 것도 같은 이유입니다. 계획만으로 수행을 인정하지 않고, 기록이 보여 주는 범위에서 판단하는 거예요. 맡길 수 있는 범위는 멋진 답변 한 번으로 정해지지 않습니다. 기대와 권한을 정하고, 실제 결과와 남은 불확실성을 확인하고, 바꾼 뒤 다시 검사하는 과정을 통해 근거를 쌓아 갑니다. 이제 그 흐름을 한 가지 금지 조건에 대어 복습해 보겠습니다.</a:t>
+              <a:t>[짚을 곳] 왼쪽 사람이 정한다(기준과 한계) → 오른쪽 강조한 에이전트가 정한다(실행 중의 과정)</a:t>
+            </a:r>
+          </a:p>
+          <a:p>
+            <a:r>
+              <a:t>· 사람: 목표와 스킬의 절차, 연결할 도구와 권한 범위, 계약과 금지 조건, 시나리오의 기대값 — 맡기기 전에 합의하고 관리할 기준</a:t>
+            </a:r>
+          </a:p>
+          <a:p>
+            <a:r>
+              <a:t>· 에이전트: 그 기준 안에서 이번에 부를 도구와 입력, 결과를 보고 고르는 다음 행동, 다시 시도할지 보류할지, 설명 문장. 독립 조회의 순서나 문장은 달라질 수 있지만 필요한 확인을 건너뛰거나 권한을 넘는 선택까지 허용되진 않는다</a:t>
+            </a:r>
+          </a:p>
+          <a:p>
+            <a:r>
+              <a:t>· 왼쪽 기준도 영원하지 않다: 요구가 바뀌면 근거를 검토해 명세와 검사를 함께 바꾸고, 어느 버전에 어떤 기준을 적용했는지 남긴다. 실행 결과에 맞춰 설명 없이 기준을 바꾸는 것과는 다르다</a:t>
+            </a:r>
+          </a:p>
+          <a:p>
+            <a:r>
+              <a:t>· 쿨러 기록에서 「재조회하겠다」는 말과 실제 확인된 호출을 구별한 것도 같은 이유: 계획만으로 수행을 인정하지 않고 기록이 보여 주는 범위에서 판단</a:t>
+            </a:r>
+          </a:p>
+          <a:p>
+            <a:r>
+              <a:t>· 맡길 범위는 멋진 답변 한 번으로 정해지지 않는다. 기대와 권한을 정하고 → 실제 결과와 남은 불확실성을 확인하고 → 바꾼 뒤 다시 검사하며 근거를 쌓는다</a:t>
+            </a:r>
+          </a:p>
+          <a:p>
+            <a:r>
+              <a:t>[다음] 금지 조건 한 줄에 대어 보는 복습</a:t>
             </a:r>
           </a:p>
         </p:txBody>
@@ -4204,7 +5819,47 @@
           <a:lstStyle/>
           <a:p>
             <a:r>
-              <a:t>그 겹겹의 장치가 실제로 어떻게 맞물리는지, 복습하면서 확인해 보겠습니다. 이번 회차에 배운 흐름을 「거절하면 설비 명령이 없다」는 금지 조건 한 줄에 대어 볼 거예요. 위의 네 칸을 왼쪽부터 읽으면 이 한 줄이 명세에서 시나리오, 시험과 회귀로 이어집니다. 아래 띠는 추천안이 나올 때마다 작동하는 실행 중 장치입니다. 회귀와 실행 중 장치가 각각 언제 작동하는지 가려 보세요. 위의 첫 세 칸부터 볼게요. 명세에서는 금지 조건과 수용 기준의 문장입니다. 구현하기 전에 정하죠. 시나리오로 오면 Then이 됩니다. 설비 명령 0건, 업무 처리 0건, 거절로 닫힌다. 실행 결과로 가릴 수 있는 사실로 바뀌었죠. 시험에서는 단언이 돼요. 명령 번호가 없고 업무 처리 목록이 비어 있는지를, 시험을 돌릴 때마다 확인합니다. 오른쪽 끝의 회귀는 바꿀 때마다 작동합니다. 긴급 조건을 더한 뒤에 거절 시나리오를 다시 돌려서, 변경 때문에 거절의 행동이 달라지지 않았는지 찾죠. 아래 띠는 실행 중 장치예요. 가드레일 검사, 그리고 담당자의 승인과 거절은 추천안이 나올 때마다 작동합니다. 지금 이 한 건이 잘못 실행되는 걸 막는 거예요. 고른 답이 이렇게 갈렸다면 맞게 가린 겁니다. 같은 한 줄을 서로 다른 때에 지키는 두 장치인 거죠.</a:t>
+              <a:t>[짚을 곳] 위 네 칸(명세 → 시나리오 → 시험 → 회귀) 왼쪽부터 → 아래 띠(실행 중), 각 칸 꼬리표의 「언제」. 회귀와 실행 중 장치가 각각 언제 작동하는지 고르게 하고 20초 기다린다</a:t>
+            </a:r>
+          </a:p>
+          <a:p>
+            <a:r>
+              <a:t>· 복습: 이번 회차의 흐름을 「거절하면 설비 명령이 없다」는 금지 조건 한 줄에 대어 본다</a:t>
+            </a:r>
+          </a:p>
+          <a:p>
+            <a:r>
+              <a:t>· 명세: 금지 조건 · 수용 기준의 문장, 구현 전에 정한다</a:t>
+            </a:r>
+          </a:p>
+          <a:p>
+            <a:r>
+              <a:t>· 시나리오: Then — 설비 명령 0건, 업무 처리 0건, 거절로 닫힌다. 실행 결과로 가릴 사실</a:t>
+            </a:r>
+          </a:p>
+          <a:p>
+            <a:r>
+              <a:t>· 시험: 단언 — 명령 번호 없음, 업무 처리 목록 비어 있음. 시험을 돌릴 때마다</a:t>
+            </a:r>
+          </a:p>
+          <a:p>
+            <a:r>
+              <a:t>· 회귀: 바꿀 때마다. 긴급 조건을 더한 뒤 기존 거절 시나리오를 다시 돌려 거절 행동이 달라지지 않았는지 찾는다</a:t>
+            </a:r>
+          </a:p>
+          <a:p>
+            <a:r>
+              <a:t>· 실행 중: 가드레일 검사와 담당자의 승인 · 거절, 추천안이 나올 때마다. 지금 이 한 건이 잘못 실행되는 걸 막는다</a:t>
+            </a:r>
+          </a:p>
+          <a:p>
+            <a:r>
+              <a:t>· 정답의 갈림: 회귀 = 바꿀 때마다 변경의 영향을, 실행 중 장치 = 추천안마다 그 한 건을. 같은 한 줄을 서로 다른 때에 지키는 두 장치</a:t>
+            </a:r>
+          </a:p>
+          <a:p>
+            <a:r>
+              <a:t>[다음] 용어 정리</a:t>
             </a:r>
           </a:p>
         </p:txBody>
@@ -4274,7 +5929,42 @@
           <a:lstStyle/>
           <a:p>
             <a:r>
-              <a:t>이번 회차의 용어를 연결해 보겠습니다. BDD는 구체적인 행동 사례로 기대를 함께 정하고 실행 가능한 검증에 연결하는 개발 방식입니다. 시나리오는 그 상황과 기대를 적은 예이고, Given, When, Then은 전제와 행동, 기대 결과를 나누는 구조입니다. Gherkin은 이런 시나리오를 적는 언어예요. 단언은 실행 결과가 기대 조건을 만족하는지 확인하는 코드입니다. 단순한 값의 일치뿐 아니라 범위나 항목의 유무를 검사할 수도 있어요. 경계값 분석은 판정이 갈리는 기준 주변을 확인하고, 회귀 시험은 변경 뒤 의도하지 않은 영향이 생겼는지 기존 검증으로 다시 확인합니다. 결정론적이라는 말은 같은 입력과 조건에서 같은 결과가 나온다는 뜻입니다. 데이터 패브릭은 여러 출처의 데이터를 연결하고 관리해 활용하는 접근이고, 이번 실습은 그중 출처와 시각을 유지하며 함께 읽는 부분을 다뤘습니다. 각각의 이름보다 어떤 문제를 해결하려고 쓰는지 이어서 기억해 주세요.</a:t>
+              <a:t>[짚을 곳] 표 아홉 줄 위에서부터. 영문 정식 명칭은 화면에 두고 뜻과 쓰임을 잇는다</a:t>
+            </a:r>
+          </a:p>
+          <a:p>
+            <a:r>
+              <a:t>· BDD: 행동 사례로 기대를 함께 정하고 실행 가능한 검증에 연결하는 개발 방식</a:t>
+            </a:r>
+          </a:p>
+          <a:p>
+            <a:r>
+              <a:t>· 시나리오: 한 상황에서 기대하는 행동 하나를 적은 글. Given · When · Then: 전제 · 행동 · 기대 결과로 나눈 구조. Gherkin: 그 시나리오를 적는 서식</a:t>
+            </a:r>
+          </a:p>
+          <a:p>
+            <a:r>
+              <a:t>· 단언(Assertion): 실행 결과가 기대 조건을 만족하는지 확인하는 코드. 값 일치뿐 아니라 범위 · 항목 유무도 검사</a:t>
+            </a:r>
+          </a:p>
+          <a:p>
+            <a:r>
+              <a:t>· 경계값 분석: 판정이 갈리는 기준값 바로 안팎을 입력으로 고르는 방법. 회귀 시험: 바꾼 뒤 기존 시나리오를 다시 실행해 의도하지 않은 영향을 찾는 시험</a:t>
+            </a:r>
+          </a:p>
+          <a:p>
+            <a:r>
+              <a:t>· 결정론적: 같은 입력 · 조건에서 같은 결과. 데이터 패브릭: 여러 출처의 데이터를 연결 · 관리해 활용하는 접근, 이번 실습은 출처와 시각을 유지하며 함께 읽는 부분만</a:t>
+            </a:r>
+          </a:p>
+          <a:p>
+            <a:r>
+              <a:t>· 이름보다 어떤 문제를 해결하려고 쓰는지로 기억하게 한다</a:t>
+            </a:r>
+          </a:p>
+          <a:p>
+            <a:r>
+              <a:t>[다음] 퀴즈</a:t>
             </a:r>
           </a:p>
         </p:txBody>
@@ -4344,7 +6034,32 @@
           <a:lstStyle/>
           <a:p>
             <a:r>
-              <a:t>뜻을 알았으면, 그 개념으로 직접 판단할 수 있는지도 봐야겠죠. 퀴즈 세 문제로 확인해 보겠습니다. 문제마다 보기를 읽고 나서 잠깐 멈출 테니, 그때 답을 골라 보세요. 정답과 까닭은 세 문제를 다 본 뒤에 같이 확인하겠습니다.</a:t>
+              <a:t>[짚을 곳] 간지 제목 Review Quiz → 부제</a:t>
+            </a:r>
+          </a:p>
+          <a:p>
+            <a:r>
+              <a:t>· 뜻을 알았으면 그 개념으로 직접 판단할 수 있는지 확인 — 퀴즈 세 문제</a:t>
+            </a:r>
+          </a:p>
+          <a:p>
+            <a:r>
+              <a:t>· 문제마다 보기를 읽고 잠깐 멈출 때 답을 고르게 한다</a:t>
+            </a:r>
+          </a:p>
+          <a:p>
+            <a:r>
+              <a:t>· 정답과 까닭은 세 문제를 다 본 뒤 함께</a:t>
+            </a:r>
+          </a:p>
+          <a:p>
+            <a:r>
+              <a:t>· 볼 관점: 통과가 알려 주는 범위, 허용할 차이와 계약 위반, 기대값을 정하는 쪽</a:t>
+            </a:r>
+          </a:p>
+          <a:p>
+            <a:r>
+              <a:t>[다음] Quiz 1</a:t>
             </a:r>
           </a:p>
         </p:txBody>
@@ -4414,7 +6129,42 @@
           <a:lstStyle/>
           <a:p>
             <a:r>
-              <a:t>화면에서 직접 눌러 확인하면 사용자가 겪는 흐름을 볼 수 있습니다. 다만 한 번 잘 됐다는 기억만으로 변경을 판단하기는 어렵습니다. 승인 단계에도 승인과 거절, 무응답, 권한 없는 요청처럼 여러 경우가 있으니까요. 첫 카드처럼 한 번의 실행은 그중 한 경우를 보여 줍니다. 둘째 카드처럼 기능을 바꾸면 기존 경우도 다시 확인해야 하죠. 그때 무엇을 넣었고 어떤 결과가 맞는지 남기지 않았다면, 셋째 카드처럼 확인하는 사람마다 판단이 달라질 수 있습니다. 손으로 시험해도 입력과 기대 결과를 기록할 수 있습니다. 새로운 문제를 탐색하거나 화면을 이해하기 쉬운지 보는 데도 사람의 확인이 필요해요. 여기서는 반복할 조건을 명확히 남기고 자동으로 다시 확인할 수 있게 만드는 데 초점을 두겠습니다. 사람의 기억에만 기대던 확인을 다음 변경에도 쓸 수 있는 기준으로 바꾸는 겁니다.</a:t>
+              <a:t>[짚을 곳] 카드 세 장 왼쪽부터, 강조한 셋째 카드 → 각 꼬리표(빠지는 경우 · 반복의 부담 · 기준의 부재)</a:t>
+            </a:r>
+          </a:p>
+          <a:p>
+            <a:r>
+              <a:t>· 화면에서 직접 눌러 보면 사용자가 겪는 흐름을 볼 수 있다. 다만 「한 번 잘 됐다」는 기억만으로 변경을 판단하기는 어렵다</a:t>
+            </a:r>
+          </a:p>
+          <a:p>
+            <a:r>
+              <a:t>· 1 경우가 여럿: 승인 단계 하나에도 승인 · 거절 · 무응답 · 권한 없는 요청. 한 번의 실행은 그중 한 경우</a:t>
+            </a:r>
+          </a:p>
+          <a:p>
+            <a:r>
+              <a:t>· 2 바뀔 때마다 되풀이: 조건 하나를 더해도 기존 경우를 모두 다시 확인</a:t>
+            </a:r>
+          </a:p>
+          <a:p>
+            <a:r>
+              <a:t>· 3 기록이 없으면 달라진다: 무엇을 넣었고 어떤 결과가 맞는지 남기지 않으면 확인하는 사람마다 판단이 갈린다</a:t>
+            </a:r>
+          </a:p>
+          <a:p>
+            <a:r>
+              <a:t>· 손 시험도 입력 · 기대 결과를 기록할 수 있고, 새 문제 탐색이나 화면이 이해하기 쉬운지 보는 데는 사람의 확인이 필요</a:t>
+            </a:r>
+          </a:p>
+          <a:p>
+            <a:r>
+              <a:t>· 초점: 반복할 조건을 명확히 남기고 자동으로 다시 확인 → 기억에만 기대던 확인을 다음 변경에도 쓸 기준으로</a:t>
+            </a:r>
+          </a:p>
+          <a:p>
+            <a:r>
+              <a:t>[다음] BDD</a:t>
             </a:r>
           </a:p>
         </p:txBody>
@@ -4484,7 +6234,32 @@
           <a:lstStyle/>
           <a:p>
             <a:r>
-              <a:t>첫 번째 문제입니다. 긴급 조건을 더했어요. 긴급 시나리오는 통과했고, 일반 요청과 거절의 시나리오는 아직 다시 돌리지 않았습니다. 지금 내릴 수 있는 판단으로 가장 알맞은 건 무엇일까요? 1번, 새 기능이 통과했으니 변경을 내보낸다. 2번, 긴급 시나리오를 열 번 더 실행해 평균을 본다. 3번, 기존 시나리오를 모두 다시 실행한 뒤에 판단한다. 4번, 일반 요청의 기대값을 긴급 조건에 맞추어 고친다.</a:t>
+              <a:t>[짚을 곳] 메시지의 상황(긴급 시나리오만 통과, 일반 요청 · 거절 시나리오는 아직 재실행 안 함) → 질문 → 보기 넷. 20초 기다린다</a:t>
+            </a:r>
+          </a:p>
+          <a:p>
+            <a:r>
+              <a:t>· 묻는 것: 지금 내릴 수 있는 판단으로 가장 알맞은 것</a:t>
+            </a:r>
+          </a:p>
+          <a:p>
+            <a:r>
+              <a:t>· 생각할 점: 통과한 시나리오가 알려 주는 범위는 어디까지인가</a:t>
+            </a:r>
+          </a:p>
+          <a:p>
+            <a:r>
+              <a:t>· 1 새 기능이 통과했으니 내보낸다, 2 긴급 시나리오를 열 번 더 실행해 평균, 3 기존 시나리오를 모두 다시 실행한 뒤 판단, 4 일반 요청 기대값을 긴급 조건에 맞춰 고친다</a:t>
+            </a:r>
+          </a:p>
+          <a:p>
+            <a:r>
+              <a:t>· 앞의 회귀 시험 그림(변경 뒤 기존 넷도 전부 다시)을 떠올리게 한다</a:t>
+            </a:r>
+          </a:p>
+          <a:p>
+            <a:r>
+              <a:t>[다음] Quiz 2</a:t>
             </a:r>
           </a:p>
         </p:txBody>
@@ -4554,7 +6329,32 @@
           <a:lstStyle/>
           <a:p>
             <a:r>
-              <a:t>두 번째 문제입니다. 같은 종류의 경보 두 건을 처리했어요. 둘째 실행은 설명 문장과 도구를 부른 순서가 첫째와 달랐고, 결과에 판단 번호 항목이 없었습니다. 설명의 의미와 근거는 맞고, 도구 순서는 필요한 권한과 의존 관계를 지켰습니다. 이 조건에서 시험이 실패로 세어야 하는 건 무엇일까요? 1번, 판단 번호 항목이 빠진 것. 2번, 설명 문장이 첫 실행과 다른 것. 3번, 도구를 부른 순서가 다른 것. 4번, 세 가지 모두.</a:t>
+              <a:t>[짚을 곳] 메시지의 상황(같은 종류 경보 두 건, 둘째 실행은 설명 문장 · 도구 순서가 다르고 decision_id가 없음. 의미 · 근거는 맞고 순서는 권한 · 의존 관계를 지킴) → 질문 → 보기 넷. 20초 기다린다</a:t>
+            </a:r>
+          </a:p>
+          <a:p>
+            <a:r>
+              <a:t>· 묻는 것: 이 조건에서 시험이 실패로 세어야 하는 것</a:t>
+            </a:r>
+          </a:p>
+          <a:p>
+            <a:r>
+              <a:t>· 생각할 점: 세 차이 가운데 출력 계약이 정한 것은 무엇인가</a:t>
+            </a:r>
+          </a:p>
+          <a:p>
+            <a:r>
+              <a:t>· 1 decision_id 누락, 2 설명 문장이 다름, 3 도구 순서가 다름, 4 셋 모두</a:t>
+            </a:r>
+          </a:p>
+          <a:p>
+            <a:r>
+              <a:t>· 앞의 「표현 차이와 계약 위반」 비교와 출력 다섯 항목을 떠올리게 한다</a:t>
+            </a:r>
+          </a:p>
+          <a:p>
+            <a:r>
+              <a:t>[다음] Quiz 3</a:t>
             </a:r>
           </a:p>
         </p:txBody>
@@ -4624,7 +6424,32 @@
           <a:lstStyle/>
           <a:p>
             <a:r>
-              <a:t>마지막 문제입니다. 명세에는 「무응답이면 지연 알림만 보내고 기다린다」고 적혀 있어요. 그런데 기능을 고친 뒤에 돌려 보니, 10분 뒤에 처리 건이 거절로 닫혔습니다. 무응답 시나리오가 실패한 거죠. 맞는 조치는 무엇일까요? 1번, 시나리오의 기대값을 거절로 닫힌다로 고친다. 2번, 무응답 시나리오를 시험 목록에서 뺀다. 3번, 지연 시간을 30분으로 늘려 다시 실행한다. 4번, 기대값은 그대로 두고 고친 기능에서 원인을 찾는다.</a:t>
+              <a:t>[짚을 곳] 메시지의 상황(명세 「무응답이면 지연 알림만 보내고 기다린다」, 고친 뒤엔 10분 뒤 거절로 닫힘) → 질문 → 보기 넷. 20초 기다린다</a:t>
+            </a:r>
+          </a:p>
+          <a:p>
+            <a:r>
+              <a:t>· 묻는 것: 무응답 시나리오가 실패했을 때 맞는 조치</a:t>
+            </a:r>
+          </a:p>
+          <a:p>
+            <a:r>
+              <a:t>· 생각할 점: 기대값을 정하는 쪽(명세)과 고칠 쪽(구현)을 가른다</a:t>
+            </a:r>
+          </a:p>
+          <a:p>
+            <a:r>
+              <a:t>· 1 기대값을 「거절로 닫힌다」로, 2 무응답 시나리오를 목록에서 뺀다, 3 지연 시간을 30분으로 늘려 재실행, 4 기대값은 두고 고친 기능에서 원인을 찾는다</a:t>
+            </a:r>
+          </a:p>
+          <a:p>
+            <a:r>
+              <a:t>· 앞의 「실패한 시험에서 고칠 곳」 표 마지막 줄(통과시키려고 기대값을 낮추기)을 떠올리게 한다</a:t>
+            </a:r>
+          </a:p>
+          <a:p>
+            <a:r>
+              <a:t>[다음] 정답과 판단 기준</a:t>
             </a:r>
           </a:p>
         </p:txBody>
@@ -4694,7 +6519,32 @@
           <a:lstStyle/>
           <a:p>
             <a:r>
-              <a:t>세 문제 모두 답을 골라 두셨으면, 정답을 확인해 볼게요. 고른 답과 그 근거를 같이 대어 보세요. 첫 번째 문제의 정답은 3번입니다. 긴급 시나리오가 통과했다는 건 긴급 조건이 동작한다는 것만 알려 줘요. 일반 요청과 거절이 그대로인지는 그 시나리오들을 다시 돌려 봐야 압니다. 변경 뒤에 기존 시나리오를 모두 다시 실행하는 것, 바로 회귀 시험이죠. 1번은 새 행동만 보고 기존 행동은 확인하지 않았습니다. 2번은 같은 긴급 시나리오만 되풀이하니까, 몇 번을 돌려도 기존 행동에 대해서는 아무것도 알려 주지 않아요. 4번은 통과시키려고 기존 기대값을 바꾼 거고요. 두 번째 문제는 1번입니다. 판단 번호는 출력 계약이 정한 항목이라, 빠지면 계약 위반이에요. 문제에서는 설명의 의미와 근거가 맞고, 바뀐 호출 순서도 필요한 조건을 지켰다고 했습니다. 그래서 그 차이 자체는 실패가 아닙니다. 순서가 권한이나 선행 조건을 어겼다면 판단은 달라져요. 세 번째 문제는 4번이에요. 기대값은 명세에서 옵니다. 명세는 그대로 「기다린다」인데 기능이 거절로 닫았으니, 고칠 건 기대값이 아니라 고친 기능이죠. 1번과 2번은 시험을 통과시키려고 기준을 바꾸거나 없앤 거고, 3번은 명세에 없는 값으로 조건을 바꾼 겁니다. 그렇게 하면 시험은 통과해도, 명세와 행동은 어긋난 채로 남아요. 여기까지가 이번 회차입니다. 다음 회차에서는 에이전트 하나의 일을 넘어서, 사람과 에이전트와 시스템의 작업들을 하나의 업무 프로세스로 묶어 봅니다. 누가 어떤 순서로 무엇을 맡는지를 공통된 그림으로 그리고, 그 그림을 실제로 실행해 보는 방법을 다룰 거예요. 수고 많으셨습니다. 감사합니다.</a:t>
+              <a:t>[짚을 곳] 표 세 줄, 문항 → 판단 기준 → 정답 열. 고른 답과 근거를 같이 대조하게 한다</a:t>
+            </a:r>
+          </a:p>
+          <a:p>
+            <a:r>
+              <a:t>· Q1 정답 3번. 긴급 시나리오 통과는 긴급 조건이 동작한다는 것만 알려 준다. 일반 요청 · 거절이 그대로인지는 그 시나리오를 다시 돌려야 안다 = 회귀 시험. 1번은 기존 행동 미확인, 2번은 같은 긴급 시나리오만 반복해 몇 번을 돌려도 기존 행동은 모름, 4번은 통과시키려고 기존 기대값을 바꿈</a:t>
+            </a:r>
+          </a:p>
+          <a:p>
+            <a:r>
+              <a:t>· Q2 정답 1번. 판단 번호는 출력 계약이 정한 항목이라 빠지면 계약 위반. 설명의 의미 · 근거가 맞고 순서도 필요한 조건을 지켰으니 그 차이는 실패가 아니다. 순서가 권한이나 선행 조건을 어겼다면 판단이 달라진다</a:t>
+            </a:r>
+          </a:p>
+          <a:p>
+            <a:r>
+              <a:t>· Q3 정답 4번. 기대값은 명세에서 온다. 명세는 그대로 「기다린다」인데 기능이 거절로 닫았으니 고칠 것은 기능. 1 · 2번은 통과시키려고 기준을 바꾸거나 없앰, 3번은 명세에 없는 값으로 조건을 바꿈 → 시험은 통과해도 명세와 행동은 어긋난 채 남는다</a:t>
+            </a:r>
+          </a:p>
+          <a:p>
+            <a:r>
+              <a:t>· 마무리 한 줄: 기대는 명세에서 정하고, 시나리오와 회귀로 실행해 확인하며, 실행 중 장치와 바꿀 때의 검증을 함께 유지한다</a:t>
+            </a:r>
+          </a:p>
+          <a:p>
+            <a:r>
+              <a:t>[다음] 맺음</a:t>
             </a:r>
           </a:p>
         </p:txBody>
@@ -4764,7 +6614,37 @@
           <a:lstStyle/>
           <a:p>
             <a:r>
-              <a:t>이 문제를 다루는 방식이 BDD, 행동 주도 개발입니다. 업무를 아는 사람과 개발하고 검증하는 사람이 구체적인 사례를 놓고, 어떤 행동이 필요한지 함께 정하는 방식이에요. 먼저 기대를 맞추고, 사례를 시나리오로 적고, 실행 가능한 검증에 연결합니다. 예를 들어 거절한다는 말만 같아도, 한 사람은 승인 화면만 닫힌다고 생각하고 다른 사람은 처리 건까지 종료된다고 생각할 수 있죠. 거절하면 명령은 몇 건이고 처리 상태는 무엇인지 구체적으로 물으면 이 차이가 드러납니다. 코드를 만든 뒤에야 서로 다른 기대를 발견하는 일을 줄이는 거예요. 화면의 행동은 시스템 밖에서 확인할 수 있는 결과를 뜻합니다. 내부에서 어떤 함수를 썼느냐보다, 담당자가 거절했을 때 설비 명령이 생기지 않고 사유가 남는지를 보는 겁니다. 시나리오는 이런 상황과 기대를 구체적인 예로 적은 글이에요. 이번 시간에는 이미 정리한 명세를 바탕으로 시나리오를 만들고 검증에 연결하는 부분을 살펴보겠습니다. 실제 개발에서는 시나리오를 논의하다가 빠진 요구를 찾아 명세를 보완할 수도 있어요.</a:t>
+              <a:t>[짚을 곳] 강조한 첫 줄 BDD(Behavior-Driven Development) → 행동 → 시나리오, 오른쪽 영문 꼬리표</a:t>
+            </a:r>
+          </a:p>
+          <a:p>
+            <a:r>
+              <a:t>· BDD(행동 주도 개발): 업무를 아는 사람과 개발 · 검증하는 사람이 구체적 사례를 놓고 필요한 행동을 함께 정한다. 기대를 맞추고 → 사례를 시나리오로 → 실행 가능한 검증에 연결</a:t>
+            </a:r>
+          </a:p>
+          <a:p>
+            <a:r>
+              <a:t>· 예: 「거절한다」는 말만 같아도 한 사람은 승인 화면만 닫힌다고, 다른 사람은 처리 건까지 종료된다고 생각할 수 있다. 「명령은 몇 건, 처리 상태는 무엇」으로 물으면 차이가 드러난다 → 코드를 만든 뒤에야 다른 기대를 발견하는 일을 줄인다</a:t>
+            </a:r>
+          </a:p>
+          <a:p>
+            <a:r>
+              <a:t>· 행동: 시스템 밖에서 관찰할 수 있는 결과. 어떤 함수를 썼느냐보다 거절했을 때 설비 명령이 안 생기고 사유가 남는지</a:t>
+            </a:r>
+          </a:p>
+          <a:p>
+            <a:r>
+              <a:t>· 시나리오: 한 상황에서 기대하는 행동 하나를 전제 · 행동 · 기대 결과로 적은 글</a:t>
+            </a:r>
+          </a:p>
+          <a:p>
+            <a:r>
+              <a:t>· 이 회차는 이미 정리한 명세에서 시나리오를 만든다. 실제 개발에선 시나리오를 논의하다 빠진 요구를 찾아 명세를 보완하기도 한다</a:t>
+            </a:r>
+          </a:p>
+          <a:p>
+            <a:r>
+              <a:t>[다음] Given · When · Then 세 부분</a:t>
             </a:r>
           </a:p>
         </p:txBody>
@@ -4834,7 +6714,37 @@
           <a:lstStyle/>
           <a:p>
             <a:r>
-              <a:t>시나리오를 세 부분으로 나누면 무엇을 준비하고 무엇을 확인할지가 보입니다. Given은 행동 전의 전제입니다. 화면에서는 추천안이 올라와 승인 단계가 열려 있는 상태죠. When은 확인할 행동이고, 여기서는 권한 있는 담당자가 사유를 적어 거절하는 일입니다. Then은 그 뒤에 기대하는 결과입니다. 거절 뒤에는 설비 명령과 후속 업무 처리가 없어야 하고, 처리 건은 거절 상태로 닫혀야 합니다. 하나의 거절 행동에도 확인할 결과는 여럿일 수 있어요. 시나리오마다 한 가지 업무 행동에 초점을 맞추면 실패했을 때 원인을 찾기 쉽습니다. 여러 단계가 들어가는 시나리오를 쓸 수 없다는 뜻은 아니에요. 준비 단계와 확인하려는 행동을 섞지 않고, 이 사례에서 무엇을 판단하려는지 드러내는 것이 중요합니다.</a:t>
+              <a:t>[짚을 곳] 그림 위 세 칸(Given · 강조한 When · Then) → 아래 세 칸 거절 사례</a:t>
+            </a:r>
+          </a:p>
+          <a:p>
+            <a:r>
+              <a:t>· 세 부분으로 나누면 무엇을 준비하고 무엇을 확인할지 보인다</a:t>
+            </a:r>
+          </a:p>
+          <a:p>
+            <a:r>
+              <a:t>· Given(전제): 추천안이 올라와 승인 단계가 열려 있다</a:t>
+            </a:r>
+          </a:p>
+          <a:p>
+            <a:r>
+              <a:t>· When(행동): 승인 권한이 있는 담당자가 사유를 적어 거절</a:t>
+            </a:r>
+          </a:p>
+          <a:p>
+            <a:r>
+              <a:t>· Then(기대 결과): 설비 명령과 후속 업무 처리가 없고, 처리 건은 거절로 닫힌다. 하나의 거절 행동에도 확인할 결과는 여럿</a:t>
+            </a:r>
+          </a:p>
+          <a:p>
+            <a:r>
+              <a:t>· 시나리오마다 한 가지 업무 행동에 초점을 맞추면 실패 때 원인을 찾기 쉽다. 여러 단계 시나리오가 금지는 아니고, 준비 단계와 확인할 행동을 섞지 않고 무엇을 판단하려는지 드러내는 게 핵심</a:t>
+            </a:r>
+          </a:p>
+          <a:p>
+            <a:r>
+              <a:t>[다음] 시나리오 한 편</a:t>
             </a:r>
           </a:p>
         </p:txBody>
@@ -4904,7 +6814,37 @@
           <a:lstStyle/>
           <a:p>
             <a:r>
-              <a:t>앞의 거절을 구조가 보이는 글로 적은 예입니다. 맨 위는 기능 이름, 그 아래는 시나리오 이름이에요. 이어서 전제와 행동, 기대 결과를 적습니다. 이 구조로 시나리오를 쓰는 언어를 Gherkin이라고 합니다. Then 아래의 And는 앞부분에 같은 종류의 조건을 이어 붙이는 말입니다. 여기서는 설비 명령이 없다는 조건에 업무 처리도 없고 거절로 닫힌다는 결과를 더했어요. 하지 않아야 할 일도 기대 결과로 적는다는 점을 보세요. Gherkin은 BDD에서 널리 쓰이는 표현 방법입니다. 이 서식을 썼다고 바로 자동 시험이 완성되는 것은 아닙니다. 실행과 대조를 맡을 코드에 연결해야 해요. 여기서는 문장의 구조를 읽고, 이어지는 HYD의 파이썬 시험에서 같은 전제와 행동, 결과가 어떻게 연결되는지 보겠습니다.</a:t>
+              <a:t>[짚을 곳] 왼쪽 코드 Feature → Scenario → Given · When · Then · And, 오른쪽 요소 → 강조한 Then · And</a:t>
+            </a:r>
+          </a:p>
+          <a:p>
+            <a:r>
+              <a:t>· 앞의 거절을 구조가 보이는 글로 적은 예: 맨 위 기능 이름, 그 아래 시나리오 이름, 이어서 전제 · 행동 · 기대 결과</a:t>
+            </a:r>
+          </a:p>
+          <a:p>
+            <a:r>
+              <a:t>· 이 서식의 이름이 Gherkin. Given은 승인 단계가 열린 상태까지, When은 거절 하나뿐</a:t>
+            </a:r>
+          </a:p>
+          <a:p>
+            <a:r>
+              <a:t>· And: 앞줄과 같은 부분을 잇는다. 명령이 없다 + 업무 처리도 없다 + 거절로 닫힌다</a:t>
+            </a:r>
+          </a:p>
+          <a:p>
+            <a:r>
+              <a:t>· 볼 점: 하지 않아야 할 일도 기대 결과로 적는다 → 금지 조건이 지켜지는지 확인</a:t>
+            </a:r>
+          </a:p>
+          <a:p>
+            <a:r>
+              <a:t>· Gherkin은 BDD에서 널리 쓰는 표현 방법. 서식을 썼다고 자동 시험이 완성되진 않고 실행 · 대조를 맡을 코드에 연결해야 한다. 이어서 HYD의 파이썬 시험에서 같은 구조가 어떻게 이어지는지 본다</a:t>
+            </a:r>
+          </a:p>
+          <a:p>
+            <a:r>
+              <a:t>[다음] Then을 적는 조건</a:t>
             </a:r>
           </a:p>
         </p:txBody>

--- a/산출물/통합반/이론/08회차/통합반_08일차.pptx
+++ b/산출물/통합반/이론/08회차/통합반_08일차.pptx
@@ -1794,7 +1794,7 @@
           </a:p>
           <a:p>
             <a:r>
-              <a:t>· 자동 시험은 시간을 진행시켜 기한 전후 상태를 확인 — 실제로 10분을 기다려야만 시험할 수 있는 건 아니다(화면 메시지 끝 문장은 수업 환경의 대기 시간 안내)</a:t>
+              <a:t>· 자동 시험은 시간을 진행시켜 기한 전후 상태를 확인 — 실제로 10분을 기다려야만 시험할 수 있는 건 아니다</a:t>
             </a:r>
           </a:p>
           <a:p>
@@ -2994,7 +2994,7 @@
           <a:lstStyle/>
           <a:p>
             <a:r>
-              <a:t>[짚을 곳] 단원 번호 04, 구분 실습 → 제목(새 기능과 기존 기능의 행동 기준 작성)</a:t>
+              <a:t>[짚을 곳] 단원 번호 04, 구분 실습 → 제목(새 기능과 기존 기능의 행동 기준 작성) → 부제</a:t>
             </a:r>
           </a:p>
           <a:p>
@@ -3194,7 +3194,7 @@
           <a:lstStyle/>
           <a:p>
             <a:r>
-              <a:t>[짚을 곳] 단원 번호 04, 구분 실습 → 제목(에이전트 동작의 반복 검증)</a:t>
+              <a:t>[짚을 곳] 단원 번호 04, 구분 실습 → 제목(에이전트 동작의 반복 검증) → 부제</a:t>
             </a:r>
           </a:p>
           <a:p>
@@ -3384,7 +3384,7 @@
           <a:lstStyle/>
           <a:p>
             <a:r>
-              <a:t>[짚을 곳] 단원 번호 04, 구분 실습 → 제목(오류 수정과 전체 회귀 검증)</a:t>
+              <a:t>[짚을 곳] 단원 번호 04, 구분 실습 → 제목(오류 수정과 전체 회귀 검증) → 부제</a:t>
             </a:r>
           </a:p>
           <a:p>
@@ -3584,7 +3584,7 @@
           <a:lstStyle/>
           <a:p>
             <a:r>
-              <a:t>[짚을 곳] 단원 번호 04, 구분 실습 → 제목(업무 데이터를 연결한 교대 인수인계서 작성)</a:t>
+              <a:t>[짚을 곳] 단원 번호 04, 구분 실습 → 제목(업무 데이터를 연결한 교대 인수인계서 작성) → 부제</a:t>
             </a:r>
           </a:p>
           <a:p>
@@ -13351,7 +13351,7 @@
       </p:sp>
       <p:pic>
         <p:nvPicPr>
-          <p:cNvPr id="6" name="삽화:시나리오연결.svg" descr="illust_3166520526875324463_1793113376.png"/>
+          <p:cNvPr id="6" name="삽화:시나리오연결.svg" descr="illust_930509734456675833_1793113376.png"/>
           <p:cNvPicPr>
             <a:picLocks noChangeAspect="1"/>
           </p:cNvPicPr>
@@ -16162,7 +16162,7 @@
       </p:sp>
       <p:pic>
         <p:nvPicPr>
-          <p:cNvPr id="6" name="삽화:갈래.svg" descr="illust_8280691871097436079_1793113376.png"/>
+          <p:cNvPr id="6" name="삽화:갈래.svg" descr="illust_2366990273342053224_1793113376.png"/>
           <p:cNvPicPr>
             <a:picLocks noChangeAspect="1"/>
           </p:cNvPicPr>
@@ -17825,7 +17825,7 @@
       </p:sp>
       <p:pic>
         <p:nvPicPr>
-          <p:cNvPr id="6" name="삽화:경계값.svg" descr="illust_5888867749406362966_1793113376.png"/>
+          <p:cNvPr id="6" name="삽화:경계값.svg" descr="illust_1602673992048310118_1793113376.png"/>
           <p:cNvPicPr>
             <a:picLocks noChangeAspect="1"/>
           </p:cNvPicPr>
@@ -19519,7 +19519,7 @@
                 <a:ea typeface="맑은 고딕"/>
                 <a:cs typeface="맑은 고딕"/>
               </a:rPr>
-              <a:t>HYD의 지연 알림 기준은 업무상 10분이며, 수업의 20배속에서는 실제 30초에 해당한다.</a:t>
+              <a:t>시간에도 경계가 있어, 업무상 10분인 지연 알림 기준의 직전 · 직후와 알림 뒤의 대기를 따로 시험해야 한다.</a:t>
             </a:r>
           </a:p>
         </p:txBody>
@@ -21659,7 +21659,7 @@
       </p:sp>
       <p:pic>
         <p:nvPicPr>
-          <p:cNvPr id="6" name="삽화:회귀.svg" descr="illust_6546300746592140877_1793113376.png"/>
+          <p:cNvPr id="6" name="삽화:회귀.svg" descr="illust_7897974097427496520_1793113376.png"/>
           <p:cNvPicPr>
             <a:picLocks noChangeAspect="1"/>
           </p:cNvPicPr>
@@ -29876,6 +29876,45 @@
           </a:p>
         </p:txBody>
       </p:sp>
+      <p:sp>
+        <p:nvSpPr>
+          <p:cNvPr id="8" name="TextBox 7"/>
+          <p:cNvSpPr txBox="1"/>
+          <p:nvPr/>
+        </p:nvSpPr>
+        <p:spPr>
+          <a:xfrm>
+            <a:off x="3017520" y="4617720"/>
+            <a:ext cx="8625535" cy="457200"/>
+          </a:xfrm>
+          <a:prstGeom prst="rect">
+            <a:avLst/>
+          </a:prstGeom>
+          <a:noFill/>
+        </p:spPr>
+        <p:txBody>
+          <a:bodyPr wrap="square" anchor="t"/>
+          <a:lstStyle/>
+          <a:p>
+            <a:pPr algn="l" eaLnBrk="0">
+              <a:lnSpc>
+                <a:spcPct val="110000"/>
+              </a:lnSpc>
+            </a:pPr>
+            <a:r>
+              <a:rPr sz="1700" b="0">
+                <a:solidFill>
+                  <a:srgbClr val="556175"/>
+                </a:solidFill>
+                <a:latin typeface="맑은 고딕"/>
+                <a:ea typeface="맑은 고딕"/>
+                <a:cs typeface="맑은 고딕"/>
+              </a:rPr>
+              <a:t>다섯 경우의 Given · When · Then을 요구와 원자료에서 정한다</a:t>
+            </a:r>
+          </a:p>
+        </p:txBody>
+      </p:sp>
     </p:spTree>
   </p:cSld>
   <p:clrMapOvr>
@@ -31313,6 +31352,45 @@
           </a:p>
         </p:txBody>
       </p:sp>
+      <p:sp>
+        <p:nvSpPr>
+          <p:cNvPr id="8" name="TextBox 7"/>
+          <p:cNvSpPr txBox="1"/>
+          <p:nvPr/>
+        </p:nvSpPr>
+        <p:spPr>
+          <a:xfrm>
+            <a:off x="3017520" y="4617720"/>
+            <a:ext cx="8625535" cy="457200"/>
+          </a:xfrm>
+          <a:prstGeom prst="rect">
+            <a:avLst/>
+          </a:prstGeom>
+          <a:noFill/>
+        </p:spPr>
+        <p:txBody>
+          <a:bodyPr wrap="square" anchor="t"/>
+          <a:lstStyle/>
+          <a:p>
+            <a:pPr algn="l" eaLnBrk="0">
+              <a:lnSpc>
+                <a:spcPct val="110000"/>
+              </a:lnSpc>
+            </a:pPr>
+            <a:r>
+              <a:rPr sz="1700" b="0">
+                <a:solidFill>
+                  <a:srgbClr val="556175"/>
+                </a:solidFill>
+                <a:latin typeface="맑은 고딕"/>
+                <a:ea typeface="맑은 고딕"/>
+                <a:cs typeface="맑은 고딕"/>
+              </a:rPr>
+              <a:t>실제 에이전트 결과를 되풀이해 견주고 위반을 기록한다</a:t>
+            </a:r>
+          </a:p>
+        </p:txBody>
+      </p:sp>
     </p:spTree>
   </p:cSld>
   <p:clrMapOvr>
@@ -32472,6 +32550,45 @@
           </a:p>
         </p:txBody>
       </p:sp>
+      <p:sp>
+        <p:nvSpPr>
+          <p:cNvPr id="8" name="TextBox 7"/>
+          <p:cNvSpPr txBox="1"/>
+          <p:nvPr/>
+        </p:nvSpPr>
+        <p:spPr>
+          <a:xfrm>
+            <a:off x="3017520" y="4617720"/>
+            <a:ext cx="8625535" cy="457200"/>
+          </a:xfrm>
+          <a:prstGeom prst="rect">
+            <a:avLst/>
+          </a:prstGeom>
+          <a:noFill/>
+        </p:spPr>
+        <p:txBody>
+          <a:bodyPr wrap="square" anchor="t"/>
+          <a:lstStyle/>
+          <a:p>
+            <a:pPr algn="l" eaLnBrk="0">
+              <a:lnSpc>
+                <a:spcPct val="110000"/>
+              </a:lnSpc>
+            </a:pPr>
+            <a:r>
+              <a:rPr sz="1700" b="0">
+                <a:solidFill>
+                  <a:srgbClr val="556175"/>
+                </a:solidFill>
+                <a:latin typeface="맑은 고딕"/>
+                <a:ea typeface="맑은 고딕"/>
+                <a:cs typeface="맑은 고딕"/>
+              </a:rPr>
+              <a:t>실패한 시나리오만 고치고 기존 조건까지 회귀 검증한다</a:t>
+            </a:r>
+          </a:p>
+        </p:txBody>
+      </p:sp>
     </p:spTree>
   </p:cSld>
   <p:clrMapOvr>
@@ -33613,6 +33730,45 @@
           </a:p>
         </p:txBody>
       </p:sp>
+      <p:sp>
+        <p:nvSpPr>
+          <p:cNvPr id="8" name="TextBox 7"/>
+          <p:cNvSpPr txBox="1"/>
+          <p:nvPr/>
+        </p:nvSpPr>
+        <p:spPr>
+          <a:xfrm>
+            <a:off x="3017520" y="4617720"/>
+            <a:ext cx="8625535" cy="457200"/>
+          </a:xfrm>
+          <a:prstGeom prst="rect">
+            <a:avLst/>
+          </a:prstGeom>
+          <a:noFill/>
+        </p:spPr>
+        <p:txBody>
+          <a:bodyPr wrap="square" anchor="t"/>
+          <a:lstStyle/>
+          <a:p>
+            <a:pPr algn="l" eaLnBrk="0">
+              <a:lnSpc>
+                <a:spcPct val="110000"/>
+              </a:lnSpc>
+            </a:pPr>
+            <a:r>
+              <a:rPr sz="1700" b="0">
+                <a:solidFill>
+                  <a:srgbClr val="556175"/>
+                </a:solidFill>
+                <a:latin typeface="맑은 고딕"/>
+                <a:ea typeface="맑은 고딕"/>
+                <a:cs typeface="맑은 고딕"/>
+              </a:rPr>
+              <a:t>세 출처를 같은 대상 · 시점으로 대조해 인수인계서를 낸다</a:t>
+            </a:r>
+          </a:p>
+        </p:txBody>
+      </p:sp>
     </p:spTree>
   </p:cSld>
   <p:clrMapOvr>
@@ -36640,7 +36796,7 @@
       </p:sp>
       <p:pic>
         <p:nvPicPr>
-          <p:cNvPr id="6" name="삽화:사건위장치.svg" descr="illust_1358209386896042516_1793113376.png"/>
+          <p:cNvPr id="6" name="삽화:사건위장치.svg" descr="illust_6183330986193627598_1793113376.png"/>
           <p:cNvPicPr>
             <a:picLocks noChangeAspect="1"/>
           </p:cNvPicPr>
@@ -38232,7 +38388,7 @@
       </p:sp>
       <p:pic>
         <p:nvPicPr>
-          <p:cNvPr id="6" name="삽화:근거자리.svg" descr="illust_8830922397314423194_1793113376.png"/>
+          <p:cNvPr id="6" name="삽화:근거자리.svg" descr="illust_1357890473451302903_1793113376.png"/>
           <p:cNvPicPr>
             <a:picLocks noChangeAspect="1"/>
           </p:cNvPicPr>
@@ -39707,7 +39863,7 @@
       </p:sp>
       <p:pic>
         <p:nvPicPr>
-          <p:cNvPr id="6" name="삽화:두문.svg" descr="illust_2832650537086258079_1793113376.png"/>
+          <p:cNvPr id="6" name="삽화:두문.svg" descr="illust_2834853867183528910_1793113376.png"/>
           <p:cNvPicPr>
             <a:picLocks noChangeAspect="1"/>
           </p:cNvPicPr>
@@ -43468,7 +43624,7 @@
       </p:sp>
       <p:pic>
         <p:nvPicPr>
-          <p:cNvPr id="6" name="삽화:세산출물.svg" descr="illust_6449894816996819032_1793113376.png"/>
+          <p:cNvPr id="6" name="삽화:세산출물.svg" descr="illust_3835363393298710634_1793113376.png"/>
           <p:cNvPicPr>
             <a:picLocks noChangeAspect="1"/>
           </p:cNvPicPr>
@@ -44231,7 +44387,7 @@
       </p:sp>
       <p:pic>
         <p:nvPicPr>
-          <p:cNvPr id="6" name="삽화:명세와실행.svg" descr="illust_1105644394016681065_1793113376.png"/>
+          <p:cNvPr id="6" name="삽화:명세와실행.svg" descr="illust_8075150433459263900_1793113376.png"/>
           <p:cNvPicPr>
             <a:picLocks noChangeAspect="1"/>
           </p:cNvPicPr>
@@ -49254,7 +49410,7 @@
       </p:sp>
       <p:pic>
         <p:nvPicPr>
-          <p:cNvPr id="6" name="삽화:산출물이음.svg" descr="illust_994474236560528383_1793113376.png"/>
+          <p:cNvPr id="6" name="삽화:산출물이음.svg" descr="illust_2462568011720208562_1793113376.png"/>
           <p:cNvPicPr>
             <a:picLocks noChangeAspect="1"/>
           </p:cNvPicPr>
@@ -59103,7 +59259,7 @@
       </p:sp>
       <p:pic>
         <p:nvPicPr>
-          <p:cNvPr id="6" name="삽화:세부분.svg" descr="illust_9103391190726707078_1793113376.png"/>
+          <p:cNvPr id="6" name="삽화:세부분.svg" descr="illust_3334540143169698939_1793113376.png"/>
           <p:cNvPicPr>
             <a:picLocks noChangeAspect="1"/>
           </p:cNvPicPr>

--- a/산출물/통합반/이론/08회차/통합반_08일차.pptx
+++ b/산출물/통합반/이론/08회차/통합반_08일차.pptx
@@ -1064,12 +1064,7 @@
           <a:lstStyle/>
           <a:p>
             <a:r>
-              <a:t>[짚을 곳] 그림 왼쪽 Given · When · Then 세 줄 → 오른쪽 준비할 입력 · 실행할 행동 · 견줄 기대값 → 실제 결과 → 대조 → 통과</a:t>
-            </a:r>
-          </a:p>
-          <a:p>
-            <a:r>
-              <a:t>강조한 실패(어긋난 시나리오의 이름)</a:t>
+              <a:t>[짚을 곳] 그림 왼쪽 Given · When · Then 세 줄 → 오른쪽 준비할 입력 · 실행할 행동 · 견줄 기대값 → 실제 결과 → 대조 → 통과/강조한 실패(어긋난 시나리오의 이름)</a:t>
             </a:r>
           </a:p>
           <a:p>
@@ -1579,12 +1574,7 @@
           <a:lstStyle/>
           <a:p>
             <a:r>
-              <a:t>[짚을 곳] 그림 수평선 왼쪽 회복 구간(55 ℃ 미만) → 기준값 → 오른쪽 충족하지 않는 구간</a:t>
-            </a:r>
-          </a:p>
-          <a:p>
-            <a:r>
-              <a:t>아래 네 점: 51.5(실제 사건) → 강조한 54.9 · 55.0 → 55.1</a:t>
+              <a:t>[짚을 곳] 그림 수평선 왼쪽 회복 구간(55 ℃ 미만) → 기준값 → 오른쪽 충족하지 않는 구간/아래 네 점: 51.5(실제 사건) → 강조한 54.9 · 55.0 → 55.1</a:t>
             </a:r>
           </a:p>
           <a:p>
@@ -4084,12 +4074,7 @@
           <a:lstStyle/>
           <a:p>
             <a:r>
-              <a:t>[짚을 곳] 그림 위 흐름 왼쪽부터(경보 11:13:08 → 스킬 → 도구 호출 → 추천안 → 검사 → 승인 11:14:56 → 설비 명령 팬 100 %) → 아래 묶음 이름표(스킬 · MCP 도구</a:t>
-            </a:r>
-          </a:p>
-          <a:p>
-            <a:r>
-              <a:t>가드레일 · 사람의 승인) → 강조한 시나리오와 회귀 시험</a:t>
+              <a:t>[짚을 곳] 그림 위 흐름 왼쪽부터(경보 11:13:08 → 스킬 → 도구 호출 → 추천안 → 검사 → 승인 11:14:56 → 설비 명령 팬 100 %) → 아래 묶음 이름표(스킬 · MCP 도구/가드레일 · 사람의 승인) → 강조한 시나리오와 회귀 시험</a:t>
             </a:r>
           </a:p>
           <a:p>
@@ -4489,17 +4474,7 @@
           <a:lstStyle/>
           <a:p>
             <a:r>
-              <a:t>[짚을 곳] 그림 위 흐름(에이전트 → 추천안 → 자동 검사 → 승인 대기 → 강조한 담당자의 승인 → 설비 명령), 아래 이름표(올려도 된다</a:t>
-            </a:r>
-          </a:p>
-          <a:p>
-            <a:r>
-              <a:t>강조한 실행 허락</a:t>
-            </a:r>
-          </a:p>
-          <a:p>
-            <a:r>
-              <a:t>결정 기록) → 왼쪽 아래 에이전트의 질문 · 멈춘 작업 닫기</a:t>
+              <a:t>[짚을 곳] 그림 위 흐름(에이전트 → 추천안 → 자동 검사 → 승인 대기 → 강조한 담당자의 승인 → 설비 명령), 아래 이름표(올려도 된다/강조한 실행 허락/결정 기록) → 왼쪽 아래 에이전트의 질문 · 멈춘 작업 닫기</a:t>
             </a:r>
           </a:p>
           <a:p>

--- a/산출물/통합반/이론/08회차/통합반_08일차.pptx
+++ b/산출물/통합반/이론/08회차/통합반_08일차.pptx
@@ -1184,7 +1184,7 @@
           </a:p>
           <a:p>
             <a:r>
-              <a:t>· assert(단언, Assertion) = Then: 뒤의 식이 참이 아니면 시험 실패. 첫째: 명령 번호 없음 · 업무 처리 목록 빔. 둘째: 승인 값이 「반려」, 사유가 그대로 남음</a:t>
+              <a:t>· assert(단언, Assertion) = Then: 뒤의 식이 참이 아니면 시험 실패. 첫째: 명령 번호 없음 · 업무 처리 목록 빔. 둘째: 승인 값이 거절의 기록 값 「반려」, 사유가 그대로 남음</a:t>
             </a:r>
           </a:p>
           <a:p>
@@ -2475,6 +2475,11 @@
           <a:p>
             <a:r>
               <a:t>[짚을 곳] 왼쪽 출력 코드(cause · failure_mode · guide_card · decision · decision_id) → 오른쪽 네 요소, 강조한 cause · recommended. 긴 식별자는 외우는 게 아니라 확인 방식을 보는 것</a:t>
+            </a:r>
+          </a:p>
+          <a:p>
+            <a:r>
+              <a:t>· 앞 장 두 기록 가운데 둘째 경보(…0025-b8ed)를 처리한 실행의 출력 파일. 쿨러 사건(…0014-e0a1)의 판단 번호와 다르다</a:t>
             </a:r>
           </a:p>
           <a:p>
@@ -13326,7 +13331,7 @@
       </p:sp>
       <p:pic>
         <p:nvPicPr>
-          <p:cNvPr id="6" name="삽화:시나리오연결.svg" descr="illust_930509734456675833_1793113376.png"/>
+          <p:cNvPr id="6" name="삽화:시나리오연결.svg" descr="illust_1320399797593153851_1793113376.png"/>
           <p:cNvPicPr>
             <a:picLocks noChangeAspect="1"/>
           </p:cNvPicPr>
@@ -14074,8 +14079,8 @@
         </p:nvSpPr>
         <p:spPr>
           <a:xfrm>
-            <a:off x="548640" y="1882394"/>
-            <a:ext cx="6766560" cy="4217924"/>
+            <a:off x="548640" y="1773936"/>
+            <a:ext cx="6766560" cy="4434840"/>
           </a:xfrm>
           <a:prstGeom prst="roundRect">
             <a:avLst>
@@ -14105,8 +14110,8 @@
         </p:nvSpPr>
         <p:spPr>
           <a:xfrm>
-            <a:off x="731520" y="2019554"/>
-            <a:ext cx="6400800" cy="3943604"/>
+            <a:off x="731520" y="1911096"/>
+            <a:ext cx="6400800" cy="4160520"/>
           </a:xfrm>
           <a:prstGeom prst="rect">
             <a:avLst/>
@@ -14699,8 +14704,8 @@
         </p:nvSpPr>
         <p:spPr>
           <a:xfrm>
-            <a:off x="7635240" y="1882394"/>
-            <a:ext cx="4007815" cy="1054481"/>
+            <a:off x="7635240" y="1773936"/>
+            <a:ext cx="4007815" cy="1108710"/>
           </a:xfrm>
           <a:prstGeom prst="rect">
             <a:avLst/>
@@ -14762,8 +14767,8 @@
         </p:nvSpPr>
         <p:spPr>
           <a:xfrm>
-            <a:off x="7635240" y="2936875"/>
-            <a:ext cx="4007815" cy="1054481"/>
+            <a:off x="7635240" y="2882646"/>
+            <a:ext cx="4007815" cy="1108710"/>
           </a:xfrm>
           <a:prstGeom prst="rect">
             <a:avLst/>
@@ -14826,7 +14831,7 @@
         <p:spPr>
           <a:xfrm>
             <a:off x="7635240" y="3991356"/>
-            <a:ext cx="4007815" cy="1054481"/>
+            <a:ext cx="4007815" cy="1108710"/>
           </a:xfrm>
           <a:prstGeom prst="rect">
             <a:avLst/>
@@ -14888,8 +14893,8 @@
         </p:nvSpPr>
         <p:spPr>
           <a:xfrm>
-            <a:off x="7635240" y="5045837"/>
-            <a:ext cx="4007815" cy="1054481"/>
+            <a:off x="7635240" y="5100066"/>
+            <a:ext cx="4007815" cy="1108710"/>
           </a:xfrm>
           <a:prstGeom prst="rect">
             <a:avLst/>
@@ -14930,7 +14935,7 @@
               </a:spcAft>
             </a:pPr>
             <a:r>
-              <a:rPr sz="1400" b="0">
+              <a:rPr sz="1300" b="0">
                 <a:solidFill>
                   <a:srgbClr val="1F2A3A"/>
                 </a:solidFill>
@@ -14938,7 +14943,7 @@
                 <a:ea typeface="맑은 고딕"/>
                 <a:cs typeface="맑은 고딕"/>
               </a:rPr>
-              <a:t>명령 번호가 없고 업무 처리 목록이 비어 있다. 승인 값은 「반려」이고 사유가 남는다.</a:t>
+              <a:t>명령 번호가 없고 업무 처리 목록이 비어 있다. 승인 값은 거절의 기록 값 「반려」이고 사유가 남는다.</a:t>
             </a:r>
           </a:p>
         </p:txBody>
@@ -16137,7 +16142,7 @@
       </p:sp>
       <p:pic>
         <p:nvPicPr>
-          <p:cNvPr id="6" name="삽화:갈래.svg" descr="illust_2366990273342053224_1793113376.png"/>
+          <p:cNvPr id="6" name="삽화:갈래.svg" descr="illust_1496911750293101211_1793113376.png"/>
           <p:cNvPicPr>
             <a:picLocks noChangeAspect="1"/>
           </p:cNvPicPr>
@@ -17800,7 +17805,7 @@
       </p:sp>
       <p:pic>
         <p:nvPicPr>
-          <p:cNvPr id="6" name="삽화:경계값.svg" descr="illust_1602673992048310118_1793113376.png"/>
+          <p:cNvPr id="6" name="삽화:경계값.svg" descr="illust_1730527596032208505_1793113376.png"/>
           <p:cNvPicPr>
             <a:picLocks noChangeAspect="1"/>
           </p:cNvPicPr>
@@ -21634,7 +21639,7 @@
       </p:sp>
       <p:pic>
         <p:nvPicPr>
-          <p:cNvPr id="6" name="삽화:회귀.svg" descr="illust_7897974097427496520_1793113376.png"/>
+          <p:cNvPr id="6" name="삽화:회귀.svg" descr="illust_8762949151859385117_1793113376.png"/>
           <p:cNvPicPr>
             <a:picLocks noChangeAspect="1"/>
           </p:cNvPicPr>
@@ -24895,7 +24900,7 @@
                 <a:ea typeface="맑은 고딕"/>
                 <a:cs typeface="맑은 고딕"/>
               </a:rPr>
-              <a:t>항목의 형식과 의미를 확인하고, 새 번호와 설명 문장은 성격에 맞는 기준으로 검증한다.</a:t>
+              <a:t>둘째 경보를 처리한 출력에서 항목의 형식과 의미를 확인하고, 새 번호와 설명 문장은 성격에 맞는 기준으로 검증한다.</a:t>
             </a:r>
           </a:p>
         </p:txBody>
@@ -36771,7 +36776,7 @@
       </p:sp>
       <p:pic>
         <p:nvPicPr>
-          <p:cNvPr id="6" name="삽화:사건위장치.svg" descr="illust_6183330986193627598_1793113376.png"/>
+          <p:cNvPr id="6" name="삽화:사건위장치.svg" descr="illust_5227130151170917001_1793113376.png"/>
           <p:cNvPicPr>
             <a:picLocks noChangeAspect="1"/>
           </p:cNvPicPr>
@@ -38363,7 +38368,7 @@
       </p:sp>
       <p:pic>
         <p:nvPicPr>
-          <p:cNvPr id="6" name="삽화:근거자리.svg" descr="illust_1357890473451302903_1793113376.png"/>
+          <p:cNvPr id="6" name="삽화:근거자리.svg" descr="illust_923833674652502484_1793113376.png"/>
           <p:cNvPicPr>
             <a:picLocks noChangeAspect="1"/>
           </p:cNvPicPr>
@@ -39838,7 +39843,7 @@
       </p:sp>
       <p:pic>
         <p:nvPicPr>
-          <p:cNvPr id="6" name="삽화:두문.svg" descr="illust_2834853867183528910_1793113376.png"/>
+          <p:cNvPr id="6" name="삽화:두문.svg" descr="illust_6895563474895310135_1793113376.png"/>
           <p:cNvPicPr>
             <a:picLocks noChangeAspect="1"/>
           </p:cNvPicPr>
@@ -43599,7 +43604,7 @@
       </p:sp>
       <p:pic>
         <p:nvPicPr>
-          <p:cNvPr id="6" name="삽화:세산출물.svg" descr="illust_3835363393298710634_1793113376.png"/>
+          <p:cNvPr id="6" name="삽화:세산출물.svg" descr="illust_6989814144778752675_1793113376.png"/>
           <p:cNvPicPr>
             <a:picLocks noChangeAspect="1"/>
           </p:cNvPicPr>
@@ -44362,7 +44367,7 @@
       </p:sp>
       <p:pic>
         <p:nvPicPr>
-          <p:cNvPr id="6" name="삽화:명세와실행.svg" descr="illust_8075150433459263900_1793113376.png"/>
+          <p:cNvPr id="6" name="삽화:명세와실행.svg" descr="illust_2630174078217842332_1793113376.png"/>
           <p:cNvPicPr>
             <a:picLocks noChangeAspect="1"/>
           </p:cNvPicPr>
@@ -49385,7 +49390,7 @@
       </p:sp>
       <p:pic>
         <p:nvPicPr>
-          <p:cNvPr id="6" name="삽화:산출물이음.svg" descr="illust_2462568011720208562_1793113376.png"/>
+          <p:cNvPr id="6" name="삽화:산출물이음.svg" descr="illust_4580873868341567147_1793113376.png"/>
           <p:cNvPicPr>
             <a:picLocks noChangeAspect="1"/>
           </p:cNvPicPr>
@@ -59234,7 +59239,7 @@
       </p:sp>
       <p:pic>
         <p:nvPicPr>
-          <p:cNvPr id="6" name="삽화:세부분.svg" descr="illust_3334540143169698939_1793113376.png"/>
+          <p:cNvPr id="6" name="삽화:세부분.svg" descr="illust_6711714487072271794_1793113376.png"/>
           <p:cNvPicPr>
             <a:picLocks noChangeAspect="1"/>
           </p:cNvPicPr>
